--- a/paper/ERW_public_private_returns_walkthrough.pptx
+++ b/paper/ERW_public_private_returns_walkthrough.pptx
@@ -4,6 +4,9 @@
   <p:sldMasterIdLst>
     <p:sldMasterId id="2147483648" r:id="rId1"/>
   </p:sldMasterIdLst>
+  <p:notesMasterIdLst>
+    <p:notesMasterId r:id="rId25"/>
+  </p:notesMasterIdLst>
   <p:sldIdLst>
     <p:sldId id="256" r:id="rId2"/>
     <p:sldId id="257" r:id="rId3"/>
@@ -29,9 +32,6 @@
     <p:sldId id="277" r:id="rId23"/>
     <p:sldId id="278" r:id="rId24"/>
   </p:sldIdLst>
-  <p:notesMasterIdLst>
-    <p:notesMasterId r:id="rId25"/>
-  </p:notesMasterIdLst>
   <p:sldSz cx="12192000" cy="6858000"/>
   <p:notesSz cx="6858000" cy="12192000"/>
   <p:defaultTextStyle>
@@ -126,6 +126,11 @@
       </a:defRPr>
     </a:lvl9pPr>
   </p:defaultTextStyle>
+  <p:extLst>
+    <p:ext uri="{EFAFB233-063F-42B5-8137-9DF3F51BA10A}">
+      <p15:sldGuideLst xmlns:p15="http://schemas.microsoft.com/office/powerpoint/2012/main"/>
+    </p:ext>
+  </p:extLst>
 </p:presentation>
 </file>
 
@@ -151,234 +156,10 @@
           <a:chExt cx="0" cy="0"/>
         </a:xfrm>
       </p:grpSpPr>
-      <p:sp>
-        <p:nvSpPr>
-          <p:cNvPr id="2" name="Header Placeholder 1"/>
-          <p:cNvSpPr>
-            <a:spLocks noGrp="1"/>
-          </p:cNvSpPr>
-          <p:nvPr>
-            <p:ph type="hdr" sz="quarter"/>
-          </p:nvPr>
-        </p:nvSpPr>
-        <p:spPr>
-          <a:xfrm>
-            <a:off x="0" y="0"/>
-            <a:ext cx="2971800" cy="458788"/>
-          </a:xfrm>
-          <a:prstGeom prst="rect">
-            <a:avLst/>
-          </a:prstGeom>
-        </p:spPr>
-        <p:txBody>
-          <a:bodyPr vert="horz" lIns="91440" tIns="45720" rIns="91440" bIns="45720" rtlCol="0"/>
-          <a:lstStyle>
-            <a:lvl1pPr algn="l">
-              <a:defRPr sz="1200"/>
-            </a:lvl1pPr>
-          </a:lstStyle>
-          <a:p>
-            <a:endParaRPr lang="en-US"/>
-          </a:p>
-        </p:txBody>
-      </p:sp>
-      <p:sp>
-        <p:nvSpPr>
-          <p:cNvPr id="3" name="Date Placeholder 2"/>
-          <p:cNvSpPr>
-            <a:spLocks noGrp="1"/>
-          </p:cNvSpPr>
-          <p:nvPr>
-            <p:ph type="dt" idx="1"/>
-          </p:nvPr>
-        </p:nvSpPr>
-        <p:spPr>
-          <a:xfrm>
-            <a:off x="3884613" y="0"/>
-            <a:ext cx="2971800" cy="458788"/>
-          </a:xfrm>
-          <a:prstGeom prst="rect">
-            <a:avLst/>
-          </a:prstGeom>
-        </p:spPr>
-        <p:txBody>
-          <a:bodyPr vert="horz" lIns="91440" tIns="45720" rIns="91440" bIns="45720" rtlCol="0"/>
-          <a:lstStyle>
-            <a:lvl1pPr algn="r">
-              <a:defRPr sz="1200"/>
-            </a:lvl1pPr>
-          </a:lstStyle>
-          <a:p>
-            <a:fld id="{5282F153-3F37-0F45-9E97-73ACFA13230C}" type="datetimeFigureOut">
-              <a:rPr lang="en-US"/>
-              <a:t>7/23/19</a:t>
-            </a:fld>
-            <a:endParaRPr lang="en-US"/>
-          </a:p>
-        </p:txBody>
-      </p:sp>
-      <p:sp>
-        <p:nvSpPr>
-          <p:cNvPr id="4" name="Slide Image Placeholder 3"/>
-          <p:cNvSpPr>
-            <a:spLocks noGrp="1" noRot="1" noChangeAspect="1"/>
-          </p:cNvSpPr>
-          <p:nvPr>
-            <p:ph type="sldImg" idx="2"/>
-          </p:nvPr>
-        </p:nvSpPr>
-        <p:spPr>
-          <a:xfrm>
-            <a:off x="685800" y="1143000"/>
-            <a:ext cx="5486400" cy="3086100"/>
-          </a:xfrm>
-          <a:prstGeom prst="rect">
-            <a:avLst/>
-          </a:prstGeom>
-          <a:noFill/>
-          <a:ln w="12700">
-            <a:solidFill>
-              <a:prstClr val="black"/>
-            </a:solidFill>
-          </a:ln>
-        </p:spPr>
-        <p:txBody>
-          <a:bodyPr vert="horz" lIns="91440" tIns="45720" rIns="91440" bIns="45720" rtlCol="0" anchor="ctr"/>
-          <a:lstStyle/>
-          <a:p>
-            <a:endParaRPr lang="en-US"/>
-          </a:p>
-        </p:txBody>
-      </p:sp>
-      <p:sp>
-        <p:nvSpPr>
-          <p:cNvPr id="5" name="Notes Placeholder 4"/>
-          <p:cNvSpPr>
-            <a:spLocks noGrp="1"/>
-          </p:cNvSpPr>
-          <p:nvPr>
-            <p:ph type="body" sz="quarter" idx="3"/>
-          </p:nvPr>
-        </p:nvSpPr>
-        <p:spPr>
-          <a:xfrm>
-            <a:off x="685800" y="4400550"/>
-            <a:ext cx="5486400" cy="3600450"/>
-          </a:xfrm>
-          <a:prstGeom prst="rect">
-            <a:avLst/>
-          </a:prstGeom>
-        </p:spPr>
-        <p:txBody>
-          <a:bodyPr vert="horz" lIns="91440" tIns="45720" rIns="91440" bIns="45720" rtlCol="0"/>
-          <a:lstStyle/>
-          <a:p>
-            <a:pPr lvl="0"/>
-            <a:r>
-              <a:rPr lang="en-US"/>
-              <a:t>Click to edit Master text styles</a:t>
-            </a:r>
-          </a:p>
-          <a:p>
-            <a:pPr lvl="1"/>
-            <a:r>
-              <a:rPr lang="en-US"/>
-              <a:t>Second level</a:t>
-            </a:r>
-          </a:p>
-          <a:p>
-            <a:pPr lvl="2"/>
-            <a:r>
-              <a:rPr lang="en-US"/>
-              <a:t>Third level</a:t>
-            </a:r>
-          </a:p>
-          <a:p>
-            <a:pPr lvl="3"/>
-            <a:r>
-              <a:rPr lang="en-US"/>
-              <a:t>Fourth level</a:t>
-            </a:r>
-          </a:p>
-          <a:p>
-            <a:pPr lvl="4"/>
-            <a:r>
-              <a:rPr lang="en-US"/>
-              <a:t>Fifth level</a:t>
-            </a:r>
-          </a:p>
-        </p:txBody>
-      </p:sp>
-      <p:sp>
-        <p:nvSpPr>
-          <p:cNvPr id="6" name="Footer Placeholder 5"/>
-          <p:cNvSpPr>
-            <a:spLocks noGrp="1"/>
-          </p:cNvSpPr>
-          <p:nvPr>
-            <p:ph type="ftr" sz="quarter" idx="4"/>
-          </p:nvPr>
-        </p:nvSpPr>
-        <p:spPr>
-          <a:xfrm>
-            <a:off x="0" y="8685213"/>
-            <a:ext cx="2971800" cy="458787"/>
-          </a:xfrm>
-          <a:prstGeom prst="rect">
-            <a:avLst/>
-          </a:prstGeom>
-        </p:spPr>
-        <p:txBody>
-          <a:bodyPr vert="horz" lIns="91440" tIns="45720" rIns="91440" bIns="45720" rtlCol="0" anchor="b"/>
-          <a:lstStyle>
-            <a:lvl1pPr algn="l">
-              <a:defRPr sz="1200"/>
-            </a:lvl1pPr>
-          </a:lstStyle>
-          <a:p>
-            <a:endParaRPr lang="en-US"/>
-          </a:p>
-        </p:txBody>
-      </p:sp>
-      <p:sp>
-        <p:nvSpPr>
-          <p:cNvPr id="7" name="Slide Number Placeholder 6"/>
-          <p:cNvSpPr>
-            <a:spLocks noGrp="1"/>
-          </p:cNvSpPr>
-          <p:nvPr>
-            <p:ph type="sldNum" sz="quarter" idx="5"/>
-          </p:nvPr>
-        </p:nvSpPr>
-        <p:spPr>
-          <a:xfrm>
-            <a:off x="3884613" y="8685213"/>
-            <a:ext cx="2971800" cy="458787"/>
-          </a:xfrm>
-          <a:prstGeom prst="rect">
-            <a:avLst/>
-          </a:prstGeom>
-        </p:spPr>
-        <p:txBody>
-          <a:bodyPr vert="horz" lIns="91440" tIns="45720" rIns="91440" bIns="45720" rtlCol="0" anchor="b"/>
-          <a:lstStyle>
-            <a:lvl1pPr algn="r">
-              <a:defRPr sz="1200"/>
-            </a:lvl1pPr>
-          </a:lstStyle>
-          <a:p>
-            <a:fld id="{CE5E9CC1-C706-0F49-92D6-E571CC5EEA8F}" type="slidenum">
-              <a:rPr lang="en-US"/>
-              <a:t>‹#›</a:t>
-            </a:fld>
-            <a:endParaRPr lang="en-US"/>
-          </a:p>
-        </p:txBody>
-      </p:sp>
     </p:spTree>
     <p:extLst>
       <p:ext uri="{BB962C8B-B14F-4D97-AF65-F5344CB8AC3E}">
-        <p14:creationId xmlns:p14="http://schemas.microsoft.com/office/powerpoint/2010/main" val="1024086991"/>
+        <p14:creationId xmlns:p14="http://schemas.microsoft.com/office/powerpoint/2010/main" val="763208841"/>
       </p:ext>
     </p:extLst>
   </p:cSld>
@@ -522,10 +303,6 @@
           <a:bodyPr/>
           <a:lstStyle/>
           <a:p>
-            <a:r>
-              <a:rPr lang="en-US" dirty="0"/>
-              <a:t/>
-            </a:r>
             <a:endParaRPr lang="en-US" dirty="0"/>
           </a:p>
         </p:txBody>
@@ -610,10 +387,6 @@
           <a:bodyPr/>
           <a:lstStyle/>
           <a:p>
-            <a:r>
-              <a:rPr lang="en-US" dirty="0"/>
-              <a:t/>
-            </a:r>
             <a:endParaRPr lang="en-US" dirty="0"/>
           </a:p>
         </p:txBody>
@@ -698,10 +471,6 @@
           <a:bodyPr/>
           <a:lstStyle/>
           <a:p>
-            <a:r>
-              <a:rPr lang="en-US" dirty="0"/>
-              <a:t/>
-            </a:r>
             <a:endParaRPr lang="en-US" dirty="0"/>
           </a:p>
         </p:txBody>
@@ -786,10 +555,6 @@
           <a:bodyPr/>
           <a:lstStyle/>
           <a:p>
-            <a:r>
-              <a:rPr lang="en-US" dirty="0"/>
-              <a:t/>
-            </a:r>
             <a:endParaRPr lang="en-US" dirty="0"/>
           </a:p>
         </p:txBody>
@@ -874,10 +639,6 @@
           <a:bodyPr/>
           <a:lstStyle/>
           <a:p>
-            <a:r>
-              <a:rPr lang="en-US" dirty="0"/>
-              <a:t/>
-            </a:r>
             <a:endParaRPr lang="en-US" dirty="0"/>
           </a:p>
         </p:txBody>
@@ -962,10 +723,6 @@
           <a:bodyPr/>
           <a:lstStyle/>
           <a:p>
-            <a:r>
-              <a:rPr lang="en-US" dirty="0"/>
-              <a:t/>
-            </a:r>
             <a:endParaRPr lang="en-US" dirty="0"/>
           </a:p>
         </p:txBody>
@@ -1050,10 +807,6 @@
           <a:bodyPr/>
           <a:lstStyle/>
           <a:p>
-            <a:r>
-              <a:rPr lang="en-US" dirty="0"/>
-              <a:t/>
-            </a:r>
             <a:endParaRPr lang="en-US" dirty="0"/>
           </a:p>
         </p:txBody>
@@ -1138,10 +891,6 @@
           <a:bodyPr/>
           <a:lstStyle/>
           <a:p>
-            <a:r>
-              <a:rPr lang="en-US" dirty="0"/>
-              <a:t/>
-            </a:r>
             <a:endParaRPr lang="en-US" dirty="0"/>
           </a:p>
         </p:txBody>
@@ -1226,10 +975,6 @@
           <a:bodyPr/>
           <a:lstStyle/>
           <a:p>
-            <a:r>
-              <a:rPr lang="en-US" dirty="0"/>
-              <a:t/>
-            </a:r>
             <a:endParaRPr lang="en-US" dirty="0"/>
           </a:p>
         </p:txBody>
@@ -1314,10 +1059,6 @@
           <a:bodyPr/>
           <a:lstStyle/>
           <a:p>
-            <a:r>
-              <a:rPr lang="en-US" dirty="0"/>
-              <a:t/>
-            </a:r>
             <a:endParaRPr lang="en-US" dirty="0"/>
           </a:p>
         </p:txBody>
@@ -1402,10 +1143,6 @@
           <a:bodyPr/>
           <a:lstStyle/>
           <a:p>
-            <a:r>
-              <a:rPr lang="en-US" dirty="0"/>
-              <a:t/>
-            </a:r>
             <a:endParaRPr lang="en-US" dirty="0"/>
           </a:p>
         </p:txBody>
@@ -1490,10 +1227,6 @@
           <a:bodyPr/>
           <a:lstStyle/>
           <a:p>
-            <a:r>
-              <a:rPr lang="en-US" dirty="0"/>
-              <a:t/>
-            </a:r>
             <a:endParaRPr lang="en-US" dirty="0"/>
           </a:p>
         </p:txBody>
@@ -1578,10 +1311,6 @@
           <a:bodyPr/>
           <a:lstStyle/>
           <a:p>
-            <a:r>
-              <a:rPr lang="en-US" dirty="0"/>
-              <a:t/>
-            </a:r>
             <a:endParaRPr lang="en-US" dirty="0"/>
           </a:p>
         </p:txBody>
@@ -1666,10 +1395,6 @@
           <a:bodyPr/>
           <a:lstStyle/>
           <a:p>
-            <a:r>
-              <a:rPr lang="en-US" dirty="0"/>
-              <a:t/>
-            </a:r>
             <a:endParaRPr lang="en-US" dirty="0"/>
           </a:p>
         </p:txBody>
@@ -1754,10 +1479,6 @@
           <a:bodyPr/>
           <a:lstStyle/>
           <a:p>
-            <a:r>
-              <a:rPr lang="en-US" dirty="0"/>
-              <a:t/>
-            </a:r>
             <a:endParaRPr lang="en-US" dirty="0"/>
           </a:p>
         </p:txBody>
@@ -1842,10 +1563,6 @@
           <a:bodyPr/>
           <a:lstStyle/>
           <a:p>
-            <a:r>
-              <a:rPr lang="en-US" dirty="0"/>
-              <a:t/>
-            </a:r>
             <a:endParaRPr lang="en-US" dirty="0"/>
           </a:p>
         </p:txBody>
@@ -1930,10 +1647,6 @@
           <a:bodyPr/>
           <a:lstStyle/>
           <a:p>
-            <a:r>
-              <a:rPr lang="en-US" dirty="0"/>
-              <a:t/>
-            </a:r>
             <a:endParaRPr lang="en-US" dirty="0"/>
           </a:p>
         </p:txBody>
@@ -2018,10 +1731,6 @@
           <a:bodyPr/>
           <a:lstStyle/>
           <a:p>
-            <a:r>
-              <a:rPr lang="en-US" dirty="0"/>
-              <a:t/>
-            </a:r>
             <a:endParaRPr lang="en-US" dirty="0"/>
           </a:p>
         </p:txBody>
@@ -2106,10 +1815,6 @@
           <a:bodyPr/>
           <a:lstStyle/>
           <a:p>
-            <a:r>
-              <a:rPr lang="en-US" dirty="0"/>
-              <a:t/>
-            </a:r>
             <a:endParaRPr lang="en-US" dirty="0"/>
           </a:p>
         </p:txBody>
@@ -2194,10 +1899,6 @@
           <a:bodyPr/>
           <a:lstStyle/>
           <a:p>
-            <a:r>
-              <a:rPr lang="en-US" dirty="0"/>
-              <a:t/>
-            </a:r>
             <a:endParaRPr lang="en-US" dirty="0"/>
           </a:p>
         </p:txBody>
@@ -2282,10 +1983,6 @@
           <a:bodyPr/>
           <a:lstStyle/>
           <a:p>
-            <a:r>
-              <a:rPr lang="en-US" dirty="0"/>
-              <a:t/>
-            </a:r>
             <a:endParaRPr lang="en-US" dirty="0"/>
           </a:p>
         </p:txBody>
@@ -2370,10 +2067,6 @@
           <a:bodyPr/>
           <a:lstStyle/>
           <a:p>
-            <a:r>
-              <a:rPr lang="en-US" dirty="0"/>
-              <a:t/>
-            </a:r>
             <a:endParaRPr lang="en-US" dirty="0"/>
           </a:p>
         </p:txBody>
@@ -2458,10 +2151,6 @@
           <a:bodyPr/>
           <a:lstStyle/>
           <a:p>
-            <a:r>
-              <a:rPr lang="en-US" dirty="0"/>
-              <a:t/>
-            </a:r>
             <a:endParaRPr lang="en-US" dirty="0"/>
           </a:p>
         </p:txBody>
@@ -2535,6 +2224,11 @@
 <file path=ppt/slideMasters/slideMaster1.xml><?xml version="1.0" encoding="utf-8"?>
 <p:sldMaster xmlns:a="http://schemas.openxmlformats.org/drawingml/2006/main" xmlns:r="http://schemas.openxmlformats.org/officeDocument/2006/relationships" xmlns:p="http://schemas.openxmlformats.org/presentationml/2006/main">
   <p:cSld>
+    <p:bg>
+      <p:bgRef idx="1001">
+        <a:schemeClr val="bg1"/>
+      </p:bgRef>
+    </p:bg>
     <p:spTree>
       <p:nvGrpSpPr>
         <p:cNvPr id="1" name=""/>
@@ -2817,6 +2511,7 @@
         <a:solidFill>
           <a:srgbClr val="14232B"/>
         </a:solidFill>
+        <a:effectLst/>
       </p:bgPr>
     </p:bg>
     <p:spTree>
@@ -2852,6 +2547,13 @@
           </a:solidFill>
           <a:ln/>
         </p:spPr>
+        <p:txBody>
+          <a:bodyPr/>
+          <a:lstStyle/>
+          <a:p>
+            <a:endParaRPr lang="en-US"/>
+          </a:p>
+        </p:txBody>
       </p:sp>
       <p:sp>
         <p:nvSpPr>
@@ -2874,11 +2576,11 @@
           <a:bodyPr wrap="square" lIns="0" tIns="0" rIns="0" bIns="0" rtlCol="0" anchor="ctr"/>
           <a:lstStyle/>
           <a:p>
-            <a:pPr indent="0" marL="0">
-              <a:buNone/>
-            </a:pPr>
-            <a:r>
-              <a:rPr lang="en-US" sz="1300" b="1" spc="300" kern="0" dirty="0">
+            <a:pPr marL="0" indent="0">
+              <a:buNone/>
+            </a:pPr>
+            <a:r>
+              <a:rPr lang="en-US" sz="1300" b="1" kern="0" spc="300" dirty="0">
                 <a:solidFill>
                   <a:srgbClr val="E8843C"/>
                 </a:solidFill>
@@ -2913,7 +2615,7 @@
           <a:bodyPr wrap="square" lIns="0" tIns="0" rIns="0" bIns="0" rtlCol="0" anchor="ctr"/>
           <a:lstStyle/>
           <a:p>
-            <a:pPr indent="0" marL="0">
+            <a:pPr marL="0" indent="0">
               <a:lnSpc>
                 <a:spcPct val="105000"/>
               </a:lnSpc>
@@ -2933,7 +2635,7 @@
             <a:endParaRPr lang="en-US" sz="3700" dirty="0"/>
           </a:p>
           <a:p>
-            <a:pPr indent="0" marL="0">
+            <a:pPr marL="0" indent="0">
               <a:lnSpc>
                 <a:spcPct val="105000"/>
               </a:lnSpc>
@@ -2975,7 +2677,7 @@
           <a:bodyPr wrap="square" lIns="0" tIns="0" rIns="0" bIns="0" rtlCol="0" anchor="ctr"/>
           <a:lstStyle/>
           <a:p>
-            <a:pPr indent="0" marL="0">
+            <a:pPr marL="0" indent="0">
               <a:buNone/>
             </a:pPr>
             <a:r>
@@ -2989,9 +2691,6 @@
               </a:rPr>
               <a:t>Bisrat Haile Gebrekidan</a:t>
             </a:r>
-            <a:pPr indent="0" marL="0">
-              <a:buNone/>
-            </a:pPr>
             <a:r>
               <a:rPr lang="en-US" sz="1500" dirty="0">
                 <a:solidFill>
@@ -3003,9 +2702,6 @@
               </a:rPr>
               <a:t>  (CIMMYT-Ethiopia)   ·   </a:t>
             </a:r>
-            <a:pPr indent="0" marL="0">
-              <a:buNone/>
-            </a:pPr>
             <a:r>
               <a:rPr lang="en-US" sz="1500" b="1" dirty="0">
                 <a:solidFill>
@@ -3017,9 +2713,6 @@
               </a:rPr>
               <a:t>Jordan Chamberlin</a:t>
             </a:r>
-            <a:pPr indent="0" marL="0">
-              <a:buNone/>
-            </a:pPr>
             <a:r>
               <a:rPr lang="en-US" sz="1500" dirty="0">
                 <a:solidFill>
@@ -3056,7 +2749,7 @@
           <a:bodyPr wrap="square" lIns="0" tIns="0" rIns="0" bIns="0" rtlCol="0" anchor="ctr"/>
           <a:lstStyle/>
           <a:p>
-            <a:pPr indent="0" marL="0">
+            <a:pPr marL="0" indent="0">
               <a:buNone/>
             </a:pPr>
             <a:r>
@@ -3095,7 +2788,7 @@
           <a:bodyPr wrap="square" lIns="0" tIns="0" rIns="0" bIns="0" rtlCol="0" anchor="ctr"/>
           <a:lstStyle/>
           <a:p>
-            <a:pPr indent="0" marL="0">
+            <a:pPr marL="0" indent="0">
               <a:buNone/>
             </a:pPr>
             <a:r>
@@ -3129,6 +2822,7 @@
         <a:solidFill>
           <a:srgbClr val="FFFFFF"/>
         </a:solidFill>
+        <a:effectLst/>
       </p:bgPr>
     </p:bg>
     <p:spTree>
@@ -3166,11 +2860,11 @@
           <a:bodyPr wrap="square" lIns="0" tIns="0" rIns="0" bIns="0" rtlCol="0" anchor="ctr"/>
           <a:lstStyle/>
           <a:p>
-            <a:pPr indent="0" marL="0">
-              <a:buNone/>
-            </a:pPr>
-            <a:r>
-              <a:rPr lang="en-US" sz="1200" b="1" spc="200" kern="0" dirty="0">
+            <a:pPr marL="0" indent="0">
+              <a:buNone/>
+            </a:pPr>
+            <a:r>
+              <a:rPr lang="en-US" sz="1200" b="1" kern="0" spc="200" dirty="0">
                 <a:solidFill>
                   <a:srgbClr val="E8843C"/>
                 </a:solidFill>
@@ -3205,7 +2899,7 @@
           <a:bodyPr wrap="square" lIns="0" tIns="0" rIns="0" bIns="0" rtlCol="0" anchor="ctr"/>
           <a:lstStyle/>
           <a:p>
-            <a:pPr indent="0" marL="0">
+            <a:pPr marL="0" indent="0">
               <a:buNone/>
             </a:pPr>
             <a:r>
@@ -3225,15 +2919,15 @@
       </p:sp>
       <p:pic>
         <p:nvPicPr>
-          <p:cNvPr id="4" name="Image 0" descr="img/overliming_sensitivity.png">    </p:cNvPr>
+          <p:cNvPr id="4" name="Image 0" descr="img/overliming_sensitivity.png"/>
           <p:cNvPicPr>
             <a:picLocks noChangeAspect="1"/>
           </p:cNvPicPr>
           <p:nvPr/>
         </p:nvPicPr>
         <p:blipFill>
-          <a:blip r:embed="rId1"/>
-          <a:srcRect l="0" r="0" t="0" b="0"/>
+          <a:blip r:embed="rId3"/>
+          <a:srcRect/>
           <a:stretch/>
         </p:blipFill>
         <p:spPr>
@@ -3272,13 +2966,20 @@
             <a:prstDash val="solid"/>
           </a:ln>
           <a:effectLst>
-            <a:outerShdw sx="100000" sy="100000" kx="0" ky="0" algn="bl" rotWithShape="0" blurRad="88900" dist="38100" dir="5400000">
+            <a:outerShdw blurRad="88900" dist="38100" dir="5400000" algn="bl" rotWithShape="0">
               <a:srgbClr val="000000">
                 <a:alpha val="13000"/>
               </a:srgbClr>
             </a:outerShdw>
           </a:effectLst>
         </p:spPr>
+        <p:txBody>
+          <a:bodyPr/>
+          <a:lstStyle/>
+          <a:p>
+            <a:endParaRPr lang="en-US"/>
+          </a:p>
+        </p:txBody>
       </p:sp>
       <p:sp>
         <p:nvSpPr>
@@ -3301,7 +3002,7 @@
           <a:bodyPr wrap="square" lIns="0" tIns="0" rIns="0" bIns="0" rtlCol="0" anchor="t"/>
           <a:lstStyle/>
           <a:p>
-            <a:pPr indent="0" marL="0">
+            <a:pPr marL="0" indent="0">
               <a:lnSpc>
                 <a:spcPct val="100000"/>
               </a:lnSpc>
@@ -3319,12 +3020,6 @@
               <a:t>Mechanism
 </a:t>
             </a:r>
-            <a:pPr indent="0" marL="0">
-              <a:lnSpc>
-                <a:spcPct val="100000"/>
-              </a:lnSpc>
-              <a:buNone/>
-            </a:pPr>
             <a:r>
               <a:rPr lang="en-US" sz="1200" dirty="0">
                 <a:solidFill>
@@ -3366,13 +3061,20 @@
             <a:prstDash val="solid"/>
           </a:ln>
           <a:effectLst>
-            <a:outerShdw sx="100000" sy="100000" kx="0" ky="0" algn="bl" rotWithShape="0" blurRad="88900" dist="38100" dir="5400000">
+            <a:outerShdw blurRad="88900" dist="38100" dir="5400000" algn="bl" rotWithShape="0">
               <a:srgbClr val="000000">
                 <a:alpha val="13000"/>
               </a:srgbClr>
             </a:outerShdw>
           </a:effectLst>
         </p:spPr>
+        <p:txBody>
+          <a:bodyPr/>
+          <a:lstStyle/>
+          <a:p>
+            <a:endParaRPr lang="en-US"/>
+          </a:p>
+        </p:txBody>
       </p:sp>
       <p:sp>
         <p:nvSpPr>
@@ -3395,7 +3097,7 @@
           <a:bodyPr wrap="square" lIns="0" tIns="0" rIns="0" bIns="0" rtlCol="0" anchor="t"/>
           <a:lstStyle/>
           <a:p>
-            <a:pPr indent="0" marL="0">
+            <a:pPr marL="0" indent="0">
               <a:lnSpc>
                 <a:spcPct val="100000"/>
               </a:lnSpc>
@@ -3413,12 +3115,6 @@
               <a:t>Buffered shift
 </a:t>
             </a:r>
-            <a:pPr indent="0" marL="0">
-              <a:lnSpc>
-                <a:spcPct val="100000"/>
-              </a:lnSpc>
-              <a:buNone/>
-            </a:pPr>
             <a:r>
               <a:rPr lang="en-US" sz="1200" dirty="0">
                 <a:solidFill>
@@ -3460,13 +3156,20 @@
             <a:prstDash val="solid"/>
           </a:ln>
           <a:effectLst>
-            <a:outerShdw sx="100000" sy="100000" kx="0" ky="0" algn="bl" rotWithShape="0" blurRad="88900" dist="38100" dir="5400000">
+            <a:outerShdw blurRad="88900" dist="38100" dir="5400000" algn="bl" rotWithShape="0">
               <a:srgbClr val="000000">
                 <a:alpha val="13000"/>
               </a:srgbClr>
             </a:outerShdw>
           </a:effectLst>
         </p:spPr>
+        <p:txBody>
+          <a:bodyPr/>
+          <a:lstStyle/>
+          <a:p>
+            <a:endParaRPr lang="en-US"/>
+          </a:p>
+        </p:txBody>
       </p:sp>
       <p:sp>
         <p:nvSpPr>
@@ -3489,7 +3192,7 @@
           <a:bodyPr wrap="square" lIns="0" tIns="0" rIns="0" bIns="0" rtlCol="0" anchor="t"/>
           <a:lstStyle/>
           <a:p>
-            <a:pPr indent="0" marL="0">
+            <a:pPr marL="0" indent="0">
               <a:lnSpc>
                 <a:spcPct val="100000"/>
               </a:lnSpc>
@@ -3507,12 +3210,6 @@
               <a:t>Effect
 </a:t>
             </a:r>
-            <a:pPr indent="0" marL="0">
-              <a:lnSpc>
-                <a:spcPct val="100000"/>
-              </a:lnSpc>
-              <a:buNone/>
-            </a:pPr>
             <a:r>
               <a:rPr lang="en-US" sz="1200" dirty="0">
                 <a:solidFill>
@@ -3554,13 +3251,20 @@
             <a:prstDash val="solid"/>
           </a:ln>
           <a:effectLst>
-            <a:outerShdw sx="100000" sy="100000" kx="0" ky="0" algn="bl" rotWithShape="0" blurRad="88900" dist="38100" dir="5400000">
+            <a:outerShdw blurRad="88900" dist="38100" dir="5400000" algn="bl" rotWithShape="0">
               <a:srgbClr val="000000">
                 <a:alpha val="13000"/>
               </a:srgbClr>
             </a:outerShdw>
           </a:effectLst>
         </p:spPr>
+        <p:txBody>
+          <a:bodyPr/>
+          <a:lstStyle/>
+          <a:p>
+            <a:endParaRPr lang="en-US"/>
+          </a:p>
+        </p:txBody>
       </p:sp>
       <p:sp>
         <p:nvSpPr>
@@ -3583,7 +3287,7 @@
           <a:bodyPr wrap="square" lIns="0" tIns="0" rIns="0" bIns="0" rtlCol="0" anchor="t"/>
           <a:lstStyle/>
           <a:p>
-            <a:pPr indent="0" marL="0">
+            <a:pPr marL="0" indent="0">
               <a:lnSpc>
                 <a:spcPct val="100000"/>
               </a:lnSpc>
@@ -3601,12 +3305,6 @@
               <a:t>Sensitivity
 </a:t>
             </a:r>
-            <a:pPr indent="0" marL="0">
-              <a:lnSpc>
-                <a:spcPct val="100000"/>
-              </a:lnSpc>
-              <a:buNone/>
-            </a:pPr>
             <a:r>
               <a:rPr lang="en-US" sz="1200" dirty="0">
                 <a:solidFill>
@@ -3643,7 +3341,7 @@
           <a:bodyPr wrap="square" lIns="0" tIns="0" rIns="0" bIns="0" rtlCol="0" anchor="ctr"/>
           <a:lstStyle/>
           <a:p>
-            <a:pPr algn="l" indent="0" marL="0">
+            <a:pPr marL="0" indent="0" algn="l">
               <a:buNone/>
             </a:pPr>
             <a:r>
@@ -3655,21 +3353,7 @@
                 <a:ea typeface="Calibri" pitchFamily="34" charset="-122"/>
                 <a:cs typeface="Calibri" pitchFamily="34" charset="-120"/>
               </a:rPr>
-              <a:t>Enhanced Rock Weathering — public &amp; private returns in SSA</a:t>
-            </a:r>
-            <a:pPr algn="l" indent="0" marL="0">
-              <a:buNone/>
-            </a:pPr>
-            <a:r>
-              <a:rPr lang="en-US" sz="900" dirty="0">
-                <a:solidFill>
-                  <a:srgbClr val="5B6B73"/>
-                </a:solidFill>
-                <a:latin typeface="Calibri" pitchFamily="34" charset="0"/>
-                <a:ea typeface="Calibri" pitchFamily="34" charset="-122"/>
-                <a:cs typeface="Calibri" pitchFamily="34" charset="-120"/>
-              </a:rPr>
-              <a:t>   ·   Gebrekidan &amp; Chamberlin (2026)</a:t>
+              <a:t>Enhanced Rock Weathering — public &amp; private returns in SSA   ·   Gebrekidan &amp; Chamberlin (2026)</a:t>
             </a:r>
             <a:endParaRPr lang="en-US" sz="900" dirty="0"/>
           </a:p>
@@ -3696,7 +3380,7 @@
           <a:bodyPr wrap="square" lIns="0" tIns="0" rIns="0" bIns="0" rtlCol="0" anchor="ctr"/>
           <a:lstStyle/>
           <a:p>
-            <a:pPr algn="r" indent="0" marL="0">
+            <a:pPr marL="0" indent="0" algn="r">
               <a:buNone/>
             </a:pPr>
             <a:r>
@@ -3730,6 +3414,7 @@
         <a:solidFill>
           <a:srgbClr val="FFFFFF"/>
         </a:solidFill>
+        <a:effectLst/>
       </p:bgPr>
     </p:bg>
     <p:spTree>
@@ -3767,11 +3452,11 @@
           <a:bodyPr wrap="square" lIns="0" tIns="0" rIns="0" bIns="0" rtlCol="0" anchor="ctr"/>
           <a:lstStyle/>
           <a:p>
-            <a:pPr indent="0" marL="0">
-              <a:buNone/>
-            </a:pPr>
-            <a:r>
-              <a:rPr lang="en-US" sz="1200" b="1" spc="200" kern="0" dirty="0">
+            <a:pPr marL="0" indent="0">
+              <a:buNone/>
+            </a:pPr>
+            <a:r>
+              <a:rPr lang="en-US" sz="1200" b="1" kern="0" spc="200" dirty="0">
                 <a:solidFill>
                   <a:srgbClr val="E8843C"/>
                 </a:solidFill>
@@ -3806,7 +3491,7 @@
           <a:bodyPr wrap="square" lIns="0" tIns="0" rIns="0" bIns="0" rtlCol="0" anchor="ctr"/>
           <a:lstStyle/>
           <a:p>
-            <a:pPr indent="0" marL="0">
+            <a:pPr marL="0" indent="0">
               <a:buNone/>
             </a:pPr>
             <a:r>
@@ -3826,15 +3511,15 @@
       </p:sp>
       <p:pic>
         <p:nvPicPr>
-          <p:cNvPr id="4" name="Image 0" descr="img/kinetic_saturation.png">    </p:cNvPr>
+          <p:cNvPr id="4" name="Image 0" descr="img/kinetic_saturation.png"/>
           <p:cNvPicPr>
             <a:picLocks noChangeAspect="1"/>
           </p:cNvPicPr>
           <p:nvPr/>
         </p:nvPicPr>
         <p:blipFill>
-          <a:blip r:embed="rId1"/>
-          <a:srcRect l="0" r="0" t="0" b="0"/>
+          <a:blip r:embed="rId3"/>
+          <a:srcRect/>
           <a:stretch/>
         </p:blipFill>
         <p:spPr>
@@ -3873,13 +3558,20 @@
             <a:prstDash val="solid"/>
           </a:ln>
           <a:effectLst>
-            <a:outerShdw sx="100000" sy="100000" kx="0" ky="0" algn="bl" rotWithShape="0" blurRad="88900" dist="38100" dir="5400000">
+            <a:outerShdw blurRad="88900" dist="38100" dir="5400000" algn="bl" rotWithShape="0">
               <a:srgbClr val="000000">
                 <a:alpha val="13000"/>
               </a:srgbClr>
             </a:outerShdw>
           </a:effectLst>
         </p:spPr>
+        <p:txBody>
+          <a:bodyPr/>
+          <a:lstStyle/>
+          <a:p>
+            <a:endParaRPr lang="en-US"/>
+          </a:p>
+        </p:txBody>
       </p:sp>
       <p:sp>
         <p:nvSpPr>
@@ -3902,7 +3594,7 @@
           <a:bodyPr wrap="square" lIns="0" tIns="0" rIns="0" bIns="0" rtlCol="0" anchor="ctr"/>
           <a:lstStyle/>
           <a:p>
-            <a:pPr indent="0" marL="0">
+            <a:pPr marL="0" indent="0">
               <a:buNone/>
             </a:pPr>
             <a:r>
@@ -3916,9 +3608,6 @@
               </a:rPr>
               <a:t>sat(D)  =  ( K</a:t>
             </a:r>
-            <a:pPr indent="0" marL="0">
-              <a:buNone/>
-            </a:pPr>
             <a:r>
               <a:rPr lang="en-US" sz="1100" dirty="0">
                 <a:solidFill>
@@ -3930,9 +3619,6 @@
               </a:rPr>
               <a:t>d</a:t>
             </a:r>
-            <a:pPr indent="0" marL="0">
-              <a:buNone/>
-            </a:pPr>
             <a:r>
               <a:rPr lang="en-US" sz="1700" b="1" dirty="0">
                 <a:solidFill>
@@ -3944,9 +3630,6 @@
               </a:rPr>
               <a:t> + 50 ) / ( K</a:t>
             </a:r>
-            <a:pPr indent="0" marL="0">
-              <a:buNone/>
-            </a:pPr>
             <a:r>
               <a:rPr lang="en-US" sz="1100" dirty="0">
                 <a:solidFill>
@@ -3958,9 +3641,6 @@
               </a:rPr>
               <a:t>d</a:t>
             </a:r>
-            <a:pPr indent="0" marL="0">
-              <a:buNone/>
-            </a:pPr>
             <a:r>
               <a:rPr lang="en-US" sz="1700" b="1" dirty="0">
                 <a:solidFill>
@@ -3997,7 +3677,7 @@
           <a:bodyPr wrap="square" lIns="0" tIns="0" rIns="0" bIns="0" rtlCol="0" anchor="t"/>
           <a:lstStyle/>
           <a:p>
-            <a:pPr indent="0" marL="0">
+            <a:pPr marL="0" indent="0">
               <a:lnSpc>
                 <a:spcPct val="103000"/>
               </a:lnSpc>
@@ -4044,13 +3724,20 @@
             <a:prstDash val="solid"/>
           </a:ln>
           <a:effectLst>
-            <a:outerShdw sx="100000" sy="100000" kx="0" ky="0" algn="bl" rotWithShape="0" blurRad="88900" dist="38100" dir="5400000">
+            <a:outerShdw blurRad="88900" dist="38100" dir="5400000" algn="bl" rotWithShape="0">
               <a:srgbClr val="000000">
                 <a:alpha val="13000"/>
               </a:srgbClr>
             </a:outerShdw>
           </a:effectLst>
         </p:spPr>
+        <p:txBody>
+          <a:bodyPr/>
+          <a:lstStyle/>
+          <a:p>
+            <a:endParaRPr lang="en-US"/>
+          </a:p>
+        </p:txBody>
       </p:sp>
       <p:sp>
         <p:nvSpPr>
@@ -4073,7 +3760,7 @@
           <a:bodyPr wrap="square" lIns="0" tIns="0" rIns="0" bIns="0" rtlCol="0" anchor="ctr"/>
           <a:lstStyle/>
           <a:p>
-            <a:pPr indent="0" marL="0">
+            <a:pPr marL="0" indent="0">
               <a:buNone/>
             </a:pPr>
             <a:r>
@@ -4112,7 +3799,7 @@
           <a:bodyPr wrap="square" lIns="0" tIns="0" rIns="0" bIns="0" rtlCol="0" anchor="t"/>
           <a:lstStyle/>
           <a:p>
-            <a:pPr indent="0" marL="0">
+            <a:pPr marL="0" indent="0">
               <a:lnSpc>
                 <a:spcPct val="103000"/>
               </a:lnSpc>
@@ -4154,7 +3841,7 @@
           <a:bodyPr wrap="square" lIns="0" tIns="0" rIns="0" bIns="0" rtlCol="0" anchor="ctr"/>
           <a:lstStyle/>
           <a:p>
-            <a:pPr algn="l" indent="0" marL="0">
+            <a:pPr marL="0" indent="0" algn="l">
               <a:buNone/>
             </a:pPr>
             <a:r>
@@ -4166,21 +3853,7 @@
                 <a:ea typeface="Calibri" pitchFamily="34" charset="-122"/>
                 <a:cs typeface="Calibri" pitchFamily="34" charset="-120"/>
               </a:rPr>
-              <a:t>Enhanced Rock Weathering — public &amp; private returns in SSA</a:t>
-            </a:r>
-            <a:pPr algn="l" indent="0" marL="0">
-              <a:buNone/>
-            </a:pPr>
-            <a:r>
-              <a:rPr lang="en-US" sz="900" dirty="0">
-                <a:solidFill>
-                  <a:srgbClr val="5B6B73"/>
-                </a:solidFill>
-                <a:latin typeface="Calibri" pitchFamily="34" charset="0"/>
-                <a:ea typeface="Calibri" pitchFamily="34" charset="-122"/>
-                <a:cs typeface="Calibri" pitchFamily="34" charset="-120"/>
-              </a:rPr>
-              <a:t>   ·   Gebrekidan &amp; Chamberlin (2026)</a:t>
+              <a:t>Enhanced Rock Weathering — public &amp; private returns in SSA   ·   Gebrekidan &amp; Chamberlin (2026)</a:t>
             </a:r>
             <a:endParaRPr lang="en-US" sz="900" dirty="0"/>
           </a:p>
@@ -4207,7 +3880,7 @@
           <a:bodyPr wrap="square" lIns="0" tIns="0" rIns="0" bIns="0" rtlCol="0" anchor="ctr"/>
           <a:lstStyle/>
           <a:p>
-            <a:pPr algn="r" indent="0" marL="0">
+            <a:pPr marL="0" indent="0" algn="r">
               <a:buNone/>
             </a:pPr>
             <a:r>
@@ -4241,6 +3914,7 @@
         <a:solidFill>
           <a:srgbClr val="FFFFFF"/>
         </a:solidFill>
+        <a:effectLst/>
       </p:bgPr>
     </p:bg>
     <p:spTree>
@@ -4278,11 +3952,11 @@
           <a:bodyPr wrap="square" lIns="0" tIns="0" rIns="0" bIns="0" rtlCol="0" anchor="ctr"/>
           <a:lstStyle/>
           <a:p>
-            <a:pPr indent="0" marL="0">
-              <a:buNone/>
-            </a:pPr>
-            <a:r>
-              <a:rPr lang="en-US" sz="1200" b="1" spc="200" kern="0" dirty="0">
+            <a:pPr marL="0" indent="0">
+              <a:buNone/>
+            </a:pPr>
+            <a:r>
+              <a:rPr lang="en-US" sz="1200" b="1" kern="0" spc="200" dirty="0">
                 <a:solidFill>
                   <a:srgbClr val="0F6E63"/>
                 </a:solidFill>
@@ -4317,7 +3991,7 @@
           <a:bodyPr wrap="square" lIns="0" tIns="0" rIns="0" bIns="0" rtlCol="0" anchor="ctr"/>
           <a:lstStyle/>
           <a:p>
-            <a:pPr indent="0" marL="0">
+            <a:pPr marL="0" indent="0">
               <a:buNone/>
             </a:pPr>
             <a:r>
@@ -4356,7 +4030,7 @@
           <a:bodyPr wrap="square" lIns="0" tIns="0" rIns="0" bIns="0" rtlCol="0" anchor="ctr"/>
           <a:lstStyle/>
           <a:p>
-            <a:pPr indent="0" marL="0">
+            <a:pPr marL="0" indent="0">
               <a:buNone/>
             </a:pPr>
             <a:r>
@@ -4395,11 +4069,11 @@
           <a:bodyPr wrap="square" lIns="0" tIns="0" rIns="0" bIns="0" rtlCol="0" anchor="ctr"/>
           <a:lstStyle/>
           <a:p>
-            <a:pPr indent="0" marL="0">
-              <a:buNone/>
-            </a:pPr>
-            <a:r>
-              <a:rPr lang="en-US" sz="1200" b="1" spc="100" kern="0" dirty="0">
+            <a:pPr marL="0" indent="0">
+              <a:buNone/>
+            </a:pPr>
+            <a:r>
+              <a:rPr lang="en-US" sz="1200" b="1" kern="0" spc="100" dirty="0">
                 <a:solidFill>
                   <a:srgbClr val="0F6E63"/>
                 </a:solidFill>
@@ -4439,13 +4113,20 @@
             <a:prstDash val="solid"/>
           </a:ln>
           <a:effectLst>
-            <a:outerShdw sx="100000" sy="100000" kx="0" ky="0" algn="bl" rotWithShape="0" blurRad="88900" dist="38100" dir="5400000">
+            <a:outerShdw blurRad="88900" dist="38100" dir="5400000" algn="bl" rotWithShape="0">
               <a:srgbClr val="000000">
                 <a:alpha val="13000"/>
               </a:srgbClr>
             </a:outerShdw>
           </a:effectLst>
         </p:spPr>
+        <p:txBody>
+          <a:bodyPr/>
+          <a:lstStyle/>
+          <a:p>
+            <a:endParaRPr lang="en-US"/>
+          </a:p>
+        </p:txBody>
       </p:sp>
       <p:sp>
         <p:nvSpPr>
@@ -4468,7 +4149,7 @@
           <a:bodyPr wrap="square" lIns="0" tIns="0" rIns="0" bIns="0" rtlCol="0" anchor="t"/>
           <a:lstStyle/>
           <a:p>
-            <a:pPr indent="0" marL="0">
+            <a:pPr marL="0" indent="0">
               <a:lnSpc>
                 <a:spcPct val="100000"/>
               </a:lnSpc>
@@ -4486,12 +4167,6 @@
               <a:t>Year-1
 </a:t>
             </a:r>
-            <a:pPr indent="0" marL="0">
-              <a:lnSpc>
-                <a:spcPct val="100000"/>
-              </a:lnSpc>
-              <a:buNone/>
-            </a:pPr>
             <a:r>
               <a:rPr lang="en-US" sz="1250" dirty="0">
                 <a:solidFill>
@@ -4533,13 +4208,20 @@
             <a:prstDash val="solid"/>
           </a:ln>
           <a:effectLst>
-            <a:outerShdw sx="100000" sy="100000" kx="0" ky="0" algn="bl" rotWithShape="0" blurRad="88900" dist="38100" dir="5400000">
+            <a:outerShdw blurRad="88900" dist="38100" dir="5400000" algn="bl" rotWithShape="0">
               <a:srgbClr val="000000">
                 <a:alpha val="13000"/>
               </a:srgbClr>
             </a:outerShdw>
           </a:effectLst>
         </p:spPr>
+        <p:txBody>
+          <a:bodyPr/>
+          <a:lstStyle/>
+          <a:p>
+            <a:endParaRPr lang="en-US"/>
+          </a:p>
+        </p:txBody>
       </p:sp>
       <p:sp>
         <p:nvSpPr>
@@ -4562,7 +4244,7 @@
           <a:bodyPr wrap="square" lIns="0" tIns="0" rIns="0" bIns="0" rtlCol="0" anchor="t"/>
           <a:lstStyle/>
           <a:p>
-            <a:pPr indent="0" marL="0">
+            <a:pPr marL="0" indent="0">
               <a:lnSpc>
                 <a:spcPct val="100000"/>
               </a:lnSpc>
@@ -4580,12 +4262,6 @@
               <a:t>NPV @ 10%
 </a:t>
             </a:r>
-            <a:pPr indent="0" marL="0">
-              <a:lnSpc>
-                <a:spcPct val="100000"/>
-              </a:lnSpc>
-              <a:buNone/>
-            </a:pPr>
             <a:r>
               <a:rPr lang="en-US" sz="1250" dirty="0">
                 <a:solidFill>
@@ -4627,13 +4303,20 @@
             <a:prstDash val="solid"/>
           </a:ln>
           <a:effectLst>
-            <a:outerShdw sx="100000" sy="100000" kx="0" ky="0" algn="bl" rotWithShape="0" blurRad="88900" dist="38100" dir="5400000">
+            <a:outerShdw blurRad="88900" dist="38100" dir="5400000" algn="bl" rotWithShape="0">
               <a:srgbClr val="000000">
                 <a:alpha val="13000"/>
               </a:srgbClr>
             </a:outerShdw>
           </a:effectLst>
         </p:spPr>
+        <p:txBody>
+          <a:bodyPr/>
+          <a:lstStyle/>
+          <a:p>
+            <a:endParaRPr lang="en-US"/>
+          </a:p>
+        </p:txBody>
       </p:sp>
       <p:sp>
         <p:nvSpPr>
@@ -4656,7 +4339,7 @@
           <a:bodyPr wrap="square" lIns="0" tIns="0" rIns="0" bIns="0" rtlCol="0" anchor="t"/>
           <a:lstStyle/>
           <a:p>
-            <a:pPr indent="0" marL="0">
+            <a:pPr marL="0" indent="0">
               <a:lnSpc>
                 <a:spcPct val="100000"/>
               </a:lnSpc>
@@ -4674,12 +4357,6 @@
               <a:t>Equilibrium
 </a:t>
             </a:r>
-            <a:pPr indent="0" marL="0">
-              <a:lnSpc>
-                <a:spcPct val="100000"/>
-              </a:lnSpc>
-              <a:buNone/>
-            </a:pPr>
             <a:r>
               <a:rPr lang="en-US" sz="1250" dirty="0">
                 <a:solidFill>
@@ -4716,11 +4393,11 @@
           <a:bodyPr wrap="square" lIns="0" tIns="0" rIns="0" bIns="0" rtlCol="0" anchor="ctr"/>
           <a:lstStyle/>
           <a:p>
-            <a:pPr indent="0" marL="0">
-              <a:buNone/>
-            </a:pPr>
-            <a:r>
-              <a:rPr lang="en-US" sz="1200" b="1" spc="100" kern="0" dirty="0">
+            <a:pPr marL="0" indent="0">
+              <a:buNone/>
+            </a:pPr>
+            <a:r>
+              <a:rPr lang="en-US" sz="1200" b="1" kern="0" spc="100" dirty="0">
                 <a:solidFill>
                   <a:srgbClr val="0F6E63"/>
                 </a:solidFill>
@@ -4760,13 +4437,20 @@
             <a:prstDash val="solid"/>
           </a:ln>
           <a:effectLst>
-            <a:outerShdw sx="100000" sy="100000" kx="0" ky="0" algn="bl" rotWithShape="0" blurRad="88900" dist="38100" dir="5400000">
+            <a:outerShdw blurRad="88900" dist="38100" dir="5400000" algn="bl" rotWithShape="0">
               <a:srgbClr val="000000">
                 <a:alpha val="13000"/>
               </a:srgbClr>
             </a:outerShdw>
           </a:effectLst>
         </p:spPr>
+        <p:txBody>
+          <a:bodyPr/>
+          <a:lstStyle/>
+          <a:p>
+            <a:endParaRPr lang="en-US"/>
+          </a:p>
+        </p:txBody>
       </p:sp>
       <p:sp>
         <p:nvSpPr>
@@ -4789,7 +4473,7 @@
           <a:bodyPr wrap="square" lIns="0" tIns="0" rIns="0" bIns="0" rtlCol="0" anchor="t"/>
           <a:lstStyle/>
           <a:p>
-            <a:pPr indent="0" marL="0">
+            <a:pPr marL="0" indent="0">
               <a:lnSpc>
                 <a:spcPct val="103000"/>
               </a:lnSpc>
@@ -4807,12 +4491,6 @@
               <a:t>Targeted
 </a:t>
             </a:r>
-            <a:pPr indent="0" marL="0">
-              <a:lnSpc>
-                <a:spcPct val="103000"/>
-              </a:lnSpc>
-              <a:buNone/>
-            </a:pPr>
             <a:r>
               <a:rPr lang="en-US" sz="1250" dirty="0">
                 <a:solidFill>
@@ -4822,7 +4500,7 @@
                 <a:ea typeface="Calibri" pitchFamily="34" charset="-122"/>
                 <a:cs typeface="Calibri" pitchFamily="34" charset="-120"/>
               </a:rPr>
-              <a:t>LiTAS lime-equivalent dose — agronomically matched. Headline.</a:t>
+              <a:t>LiTAS lime-equivalent dose — agronomically matched.</a:t>
             </a:r>
             <a:endParaRPr lang="en-US" sz="1400" dirty="0"/>
           </a:p>
@@ -4854,13 +4532,20 @@
             <a:prstDash val="solid"/>
           </a:ln>
           <a:effectLst>
-            <a:outerShdw sx="100000" sy="100000" kx="0" ky="0" algn="bl" rotWithShape="0" blurRad="88900" dist="38100" dir="5400000">
+            <a:outerShdw blurRad="88900" dist="38100" dir="5400000" algn="bl" rotWithShape="0">
               <a:srgbClr val="000000">
                 <a:alpha val="13000"/>
               </a:srgbClr>
             </a:outerShdw>
           </a:effectLst>
         </p:spPr>
+        <p:txBody>
+          <a:bodyPr/>
+          <a:lstStyle/>
+          <a:p>
+            <a:endParaRPr lang="en-US"/>
+          </a:p>
+        </p:txBody>
       </p:sp>
       <p:sp>
         <p:nvSpPr>
@@ -4883,7 +4568,7 @@
           <a:bodyPr wrap="square" lIns="0" tIns="0" rIns="0" bIns="0" rtlCol="0" anchor="t"/>
           <a:lstStyle/>
           <a:p>
-            <a:pPr indent="0" marL="0">
+            <a:pPr marL="0" indent="0">
               <a:lnSpc>
                 <a:spcPct val="103000"/>
               </a:lnSpc>
@@ -4901,12 +4586,6 @@
               <a:t>Uniform 10 / 20 / 50 t/ha
 </a:t>
             </a:r>
-            <a:pPr indent="0" marL="0">
-              <a:lnSpc>
-                <a:spcPct val="103000"/>
-              </a:lnSpc>
-              <a:buNone/>
-            </a:pPr>
             <a:r>
               <a:rPr lang="en-US" sz="1250" dirty="0">
                 <a:solidFill>
@@ -4943,7 +4622,7 @@
           <a:bodyPr wrap="square" lIns="0" tIns="0" rIns="0" bIns="0" rtlCol="0" anchor="ctr"/>
           <a:lstStyle/>
           <a:p>
-            <a:pPr algn="l" indent="0" marL="0">
+            <a:pPr marL="0" indent="0" algn="l">
               <a:buNone/>
             </a:pPr>
             <a:r>
@@ -4955,21 +4634,7 @@
                 <a:ea typeface="Calibri" pitchFamily="34" charset="-122"/>
                 <a:cs typeface="Calibri" pitchFamily="34" charset="-120"/>
               </a:rPr>
-              <a:t>Enhanced Rock Weathering — public &amp; private returns in SSA</a:t>
-            </a:r>
-            <a:pPr algn="l" indent="0" marL="0">
-              <a:buNone/>
-            </a:pPr>
-            <a:r>
-              <a:rPr lang="en-US" sz="900" dirty="0">
-                <a:solidFill>
-                  <a:srgbClr val="5B6B73"/>
-                </a:solidFill>
-                <a:latin typeface="Calibri" pitchFamily="34" charset="0"/>
-                <a:ea typeface="Calibri" pitchFamily="34" charset="-122"/>
-                <a:cs typeface="Calibri" pitchFamily="34" charset="-120"/>
-              </a:rPr>
-              <a:t>   ·   Gebrekidan &amp; Chamberlin (2026)</a:t>
+              <a:t>Enhanced Rock Weathering — public &amp; private returns in SSA   ·   Gebrekidan &amp; Chamberlin (2026)</a:t>
             </a:r>
             <a:endParaRPr lang="en-US" sz="900" dirty="0"/>
           </a:p>
@@ -4996,7 +4661,7 @@
           <a:bodyPr wrap="square" lIns="0" tIns="0" rIns="0" bIns="0" rtlCol="0" anchor="ctr"/>
           <a:lstStyle/>
           <a:p>
-            <a:pPr algn="r" indent="0" marL="0">
+            <a:pPr marL="0" indent="0" algn="r">
               <a:buNone/>
             </a:pPr>
             <a:r>
@@ -5030,6 +4695,7 @@
         <a:solidFill>
           <a:srgbClr val="14232B"/>
         </a:solidFill>
+        <a:effectLst/>
       </p:bgPr>
     </p:bg>
     <p:spTree>
@@ -5067,11 +4733,11 @@
           <a:bodyPr wrap="square" lIns="0" tIns="0" rIns="0" bIns="0" rtlCol="0" anchor="ctr"/>
           <a:lstStyle/>
           <a:p>
-            <a:pPr indent="0" marL="0">
-              <a:buNone/>
-            </a:pPr>
-            <a:r>
-              <a:rPr lang="en-US" sz="1400" b="1" spc="300" kern="0" dirty="0">
+            <a:pPr marL="0" indent="0">
+              <a:buNone/>
+            </a:pPr>
+            <a:r>
+              <a:rPr lang="en-US" sz="1400" b="1" kern="0" spc="300" dirty="0">
                 <a:solidFill>
                   <a:srgbClr val="E8843C"/>
                 </a:solidFill>
@@ -5106,7 +4772,7 @@
           <a:bodyPr wrap="square" lIns="0" tIns="0" rIns="0" bIns="0" rtlCol="0" anchor="ctr"/>
           <a:lstStyle/>
           <a:p>
-            <a:pPr indent="0" marL="0">
+            <a:pPr marL="0" indent="0">
               <a:buNone/>
             </a:pPr>
             <a:r>
@@ -5145,7 +4811,7 @@
           <a:bodyPr wrap="square" lIns="0" tIns="0" rIns="0" bIns="0" rtlCol="0" anchor="ctr"/>
           <a:lstStyle/>
           <a:p>
-            <a:pPr indent="0" marL="0">
+            <a:pPr marL="0" indent="0">
               <a:lnSpc>
                 <a:spcPct val="110000"/>
               </a:lnSpc>
@@ -5182,6 +4848,7 @@
         <a:solidFill>
           <a:srgbClr val="FFFFFF"/>
         </a:solidFill>
+        <a:effectLst/>
       </p:bgPr>
     </p:bg>
     <p:spTree>
@@ -5219,11 +4886,11 @@
           <a:bodyPr wrap="square" lIns="0" tIns="0" rIns="0" bIns="0" rtlCol="0" anchor="ctr"/>
           <a:lstStyle/>
           <a:p>
-            <a:pPr indent="0" marL="0">
-              <a:buNone/>
-            </a:pPr>
-            <a:r>
-              <a:rPr lang="en-US" sz="1200" b="1" spc="200" kern="0" dirty="0">
+            <a:pPr marL="0" indent="0">
+              <a:buNone/>
+            </a:pPr>
+            <a:r>
+              <a:rPr lang="en-US" sz="1200" b="1" kern="0" spc="200" dirty="0">
                 <a:solidFill>
                   <a:srgbClr val="0F6E63"/>
                 </a:solidFill>
@@ -5258,7 +4925,7 @@
           <a:bodyPr wrap="square" lIns="0" tIns="0" rIns="0" bIns="0" rtlCol="0" anchor="ctr"/>
           <a:lstStyle/>
           <a:p>
-            <a:pPr indent="0" marL="0">
+            <a:pPr marL="0" indent="0">
               <a:buNone/>
             </a:pPr>
             <a:r>
@@ -5278,15 +4945,15 @@
       </p:sp>
       <p:pic>
         <p:nvPicPr>
-          <p:cNvPr id="4" name="Image 0" descr="img/env_typology_targeted_eqnx.png">    </p:cNvPr>
+          <p:cNvPr id="4" name="Image 0" descr="img/env_typology_targeted_eqnx.png"/>
           <p:cNvPicPr>
             <a:picLocks noChangeAspect="1"/>
           </p:cNvPicPr>
           <p:nvPr/>
         </p:nvPicPr>
         <p:blipFill>
-          <a:blip r:embed="rId1"/>
-          <a:srcRect l="0" r="0" t="0" b="0"/>
+          <a:blip r:embed="rId3"/>
+          <a:srcRect/>
           <a:stretch/>
         </p:blipFill>
         <p:spPr>
@@ -5325,13 +4992,20 @@
             <a:prstDash val="solid"/>
           </a:ln>
           <a:effectLst>
-            <a:outerShdw sx="100000" sy="100000" kx="0" ky="0" algn="bl" rotWithShape="0" blurRad="88900" dist="38100" dir="5400000">
+            <a:outerShdw blurRad="88900" dist="38100" dir="5400000" algn="bl" rotWithShape="0">
               <a:srgbClr val="000000">
                 <a:alpha val="13000"/>
               </a:srgbClr>
             </a:outerShdw>
           </a:effectLst>
         </p:spPr>
+        <p:txBody>
+          <a:bodyPr/>
+          <a:lstStyle/>
+          <a:p>
+            <a:endParaRPr lang="en-US"/>
+          </a:p>
+        </p:txBody>
       </p:sp>
       <p:sp>
         <p:nvSpPr>
@@ -5352,6 +5026,13 @@
           </a:solidFill>
           <a:ln/>
         </p:spPr>
+        <p:txBody>
+          <a:bodyPr/>
+          <a:lstStyle/>
+          <a:p>
+            <a:endParaRPr lang="en-US"/>
+          </a:p>
+        </p:txBody>
       </p:sp>
       <p:sp>
         <p:nvSpPr>
@@ -5374,7 +5055,7 @@
           <a:bodyPr wrap="square" lIns="0" tIns="0" rIns="0" bIns="0" rtlCol="0" anchor="ctr"/>
           <a:lstStyle/>
           <a:p>
-            <a:pPr indent="0" marL="0">
+            <a:pPr marL="0" indent="0">
               <a:buNone/>
             </a:pPr>
             <a:r>
@@ -5388,9 +5069,6 @@
               </a:rPr>
               <a:t>Private-sufficient   </a:t>
             </a:r>
-            <a:pPr indent="0" marL="0">
-              <a:buNone/>
-            </a:pPr>
             <a:r>
               <a:rPr lang="en-US" sz="1250" i="1" dirty="0">
                 <a:solidFill>
@@ -5432,13 +5110,20 @@
             <a:prstDash val="solid"/>
           </a:ln>
           <a:effectLst>
-            <a:outerShdw sx="100000" sy="100000" kx="0" ky="0" algn="bl" rotWithShape="0" blurRad="88900" dist="38100" dir="5400000">
+            <a:outerShdw blurRad="88900" dist="38100" dir="5400000" algn="bl" rotWithShape="0">
               <a:srgbClr val="000000">
                 <a:alpha val="13000"/>
               </a:srgbClr>
             </a:outerShdw>
           </a:effectLst>
         </p:spPr>
+        <p:txBody>
+          <a:bodyPr/>
+          <a:lstStyle/>
+          <a:p>
+            <a:endParaRPr lang="en-US"/>
+          </a:p>
+        </p:txBody>
       </p:sp>
       <p:sp>
         <p:nvSpPr>
@@ -5459,6 +5144,13 @@
           </a:solidFill>
           <a:ln/>
         </p:spPr>
+        <p:txBody>
+          <a:bodyPr/>
+          <a:lstStyle/>
+          <a:p>
+            <a:endParaRPr lang="en-US"/>
+          </a:p>
+        </p:txBody>
       </p:sp>
       <p:sp>
         <p:nvSpPr>
@@ -5481,7 +5173,7 @@
           <a:bodyPr wrap="square" lIns="0" tIns="0" rIns="0" bIns="0" rtlCol="0" anchor="ctr"/>
           <a:lstStyle/>
           <a:p>
-            <a:pPr indent="0" marL="0">
+            <a:pPr marL="0" indent="0">
               <a:buNone/>
             </a:pPr>
             <a:r>
@@ -5495,9 +5187,6 @@
               </a:rPr>
               <a:t>Public-sufficient   </a:t>
             </a:r>
-            <a:pPr indent="0" marL="0">
-              <a:buNone/>
-            </a:pPr>
             <a:r>
               <a:rPr lang="en-US" sz="1250" i="1" dirty="0">
                 <a:solidFill>
@@ -5539,13 +5228,20 @@
             <a:prstDash val="solid"/>
           </a:ln>
           <a:effectLst>
-            <a:outerShdw sx="100000" sy="100000" kx="0" ky="0" algn="bl" rotWithShape="0" blurRad="88900" dist="38100" dir="5400000">
+            <a:outerShdw blurRad="88900" dist="38100" dir="5400000" algn="bl" rotWithShape="0">
               <a:srgbClr val="000000">
                 <a:alpha val="13000"/>
               </a:srgbClr>
             </a:outerShdw>
           </a:effectLst>
         </p:spPr>
+        <p:txBody>
+          <a:bodyPr/>
+          <a:lstStyle/>
+          <a:p>
+            <a:endParaRPr lang="en-US"/>
+          </a:p>
+        </p:txBody>
       </p:sp>
       <p:sp>
         <p:nvSpPr>
@@ -5566,6 +5262,13 @@
           </a:solidFill>
           <a:ln/>
         </p:spPr>
+        <p:txBody>
+          <a:bodyPr/>
+          <a:lstStyle/>
+          <a:p>
+            <a:endParaRPr lang="en-US"/>
+          </a:p>
+        </p:txBody>
       </p:sp>
       <p:sp>
         <p:nvSpPr>
@@ -5588,7 +5291,7 @@
           <a:bodyPr wrap="square" lIns="0" tIns="0" rIns="0" bIns="0" rtlCol="0" anchor="ctr"/>
           <a:lstStyle/>
           <a:p>
-            <a:pPr indent="0" marL="0">
+            <a:pPr marL="0" indent="0">
               <a:buNone/>
             </a:pPr>
             <a:r>
@@ -5602,9 +5305,6 @@
               </a:rPr>
               <a:t>Intersection   </a:t>
             </a:r>
-            <a:pPr indent="0" marL="0">
-              <a:buNone/>
-            </a:pPr>
             <a:r>
               <a:rPr lang="en-US" sz="1250" i="1" dirty="0">
                 <a:solidFill>
@@ -5646,13 +5346,20 @@
             <a:prstDash val="solid"/>
           </a:ln>
           <a:effectLst>
-            <a:outerShdw sx="100000" sy="100000" kx="0" ky="0" algn="bl" rotWithShape="0" blurRad="88900" dist="38100" dir="5400000">
+            <a:outerShdw blurRad="88900" dist="38100" dir="5400000" algn="bl" rotWithShape="0">
               <a:srgbClr val="000000">
                 <a:alpha val="13000"/>
               </a:srgbClr>
             </a:outerShdw>
           </a:effectLst>
         </p:spPr>
+        <p:txBody>
+          <a:bodyPr/>
+          <a:lstStyle/>
+          <a:p>
+            <a:endParaRPr lang="en-US"/>
+          </a:p>
+        </p:txBody>
       </p:sp>
       <p:sp>
         <p:nvSpPr>
@@ -5673,6 +5380,13 @@
           </a:solidFill>
           <a:ln/>
         </p:spPr>
+        <p:txBody>
+          <a:bodyPr/>
+          <a:lstStyle/>
+          <a:p>
+            <a:endParaRPr lang="en-US"/>
+          </a:p>
+        </p:txBody>
       </p:sp>
       <p:sp>
         <p:nvSpPr>
@@ -5695,7 +5409,7 @@
           <a:bodyPr wrap="square" lIns="0" tIns="0" rIns="0" bIns="0" rtlCol="0" anchor="ctr"/>
           <a:lstStyle/>
           <a:p>
-            <a:pPr indent="0" marL="0">
+            <a:pPr marL="0" indent="0">
               <a:buNone/>
             </a:pPr>
             <a:r>
@@ -5709,9 +5423,6 @@
               </a:rPr>
               <a:t>Combined-only   </a:t>
             </a:r>
-            <a:pPr indent="0" marL="0">
-              <a:buNone/>
-            </a:pPr>
             <a:r>
               <a:rPr lang="en-US" sz="1250" i="1" dirty="0">
                 <a:solidFill>
@@ -5753,13 +5464,20 @@
             <a:prstDash val="solid"/>
           </a:ln>
           <a:effectLst>
-            <a:outerShdw sx="100000" sy="100000" kx="0" ky="0" algn="bl" rotWithShape="0" blurRad="88900" dist="38100" dir="5400000">
+            <a:outerShdw blurRad="88900" dist="38100" dir="5400000" algn="bl" rotWithShape="0">
               <a:srgbClr val="000000">
                 <a:alpha val="13000"/>
               </a:srgbClr>
             </a:outerShdw>
           </a:effectLst>
         </p:spPr>
+        <p:txBody>
+          <a:bodyPr/>
+          <a:lstStyle/>
+          <a:p>
+            <a:endParaRPr lang="en-US"/>
+          </a:p>
+        </p:txBody>
       </p:sp>
       <p:sp>
         <p:nvSpPr>
@@ -5780,6 +5498,13 @@
           </a:solidFill>
           <a:ln/>
         </p:spPr>
+        <p:txBody>
+          <a:bodyPr/>
+          <a:lstStyle/>
+          <a:p>
+            <a:endParaRPr lang="en-US"/>
+          </a:p>
+        </p:txBody>
       </p:sp>
       <p:sp>
         <p:nvSpPr>
@@ -5802,7 +5527,7 @@
           <a:bodyPr wrap="square" lIns="0" tIns="0" rIns="0" bIns="0" rtlCol="0" anchor="ctr"/>
           <a:lstStyle/>
           <a:p>
-            <a:pPr indent="0" marL="0">
+            <a:pPr marL="0" indent="0">
               <a:buNone/>
             </a:pPr>
             <a:r>
@@ -5816,9 +5541,6 @@
               </a:rPr>
               <a:t>Neither   </a:t>
             </a:r>
-            <a:pPr indent="0" marL="0">
-              <a:buNone/>
-            </a:pPr>
             <a:r>
               <a:rPr lang="en-US" sz="1250" i="1" dirty="0">
                 <a:solidFill>
@@ -5855,7 +5577,7 @@
           <a:bodyPr wrap="square" lIns="0" tIns="0" rIns="0" bIns="0" rtlCol="0" anchor="ctr"/>
           <a:lstStyle/>
           <a:p>
-            <a:pPr algn="l" indent="0" marL="0">
+            <a:pPr marL="0" indent="0" algn="l">
               <a:buNone/>
             </a:pPr>
             <a:r>
@@ -5867,21 +5589,7 @@
                 <a:ea typeface="Calibri" pitchFamily="34" charset="-122"/>
                 <a:cs typeface="Calibri" pitchFamily="34" charset="-120"/>
               </a:rPr>
-              <a:t>Enhanced Rock Weathering — public &amp; private returns in SSA</a:t>
-            </a:r>
-            <a:pPr algn="l" indent="0" marL="0">
-              <a:buNone/>
-            </a:pPr>
-            <a:r>
-              <a:rPr lang="en-US" sz="900" dirty="0">
-                <a:solidFill>
-                  <a:srgbClr val="5B6B73"/>
-                </a:solidFill>
-                <a:latin typeface="Calibri" pitchFamily="34" charset="0"/>
-                <a:ea typeface="Calibri" pitchFamily="34" charset="-122"/>
-                <a:cs typeface="Calibri" pitchFamily="34" charset="-120"/>
-              </a:rPr>
-              <a:t>   ·   Gebrekidan &amp; Chamberlin (2026)</a:t>
+              <a:t>Enhanced Rock Weathering — public &amp; private returns in SSA   ·   Gebrekidan &amp; Chamberlin (2026)</a:t>
             </a:r>
             <a:endParaRPr lang="en-US" sz="900" dirty="0"/>
           </a:p>
@@ -5908,7 +5616,7 @@
           <a:bodyPr wrap="square" lIns="0" tIns="0" rIns="0" bIns="0" rtlCol="0" anchor="ctr"/>
           <a:lstStyle/>
           <a:p>
-            <a:pPr algn="r" indent="0" marL="0">
+            <a:pPr marL="0" indent="0" algn="r">
               <a:buNone/>
             </a:pPr>
             <a:r>
@@ -5942,6 +5650,7 @@
         <a:solidFill>
           <a:srgbClr val="FFFFFF"/>
         </a:solidFill>
+        <a:effectLst/>
       </p:bgPr>
     </p:bg>
     <p:spTree>
@@ -5979,11 +5688,11 @@
           <a:bodyPr wrap="square" lIns="0" tIns="0" rIns="0" bIns="0" rtlCol="0" anchor="ctr"/>
           <a:lstStyle/>
           <a:p>
-            <a:pPr indent="0" marL="0">
-              <a:buNone/>
-            </a:pPr>
-            <a:r>
-              <a:rPr lang="en-US" sz="1200" b="1" spc="200" kern="0" dirty="0">
+            <a:pPr marL="0" indent="0">
+              <a:buNone/>
+            </a:pPr>
+            <a:r>
+              <a:rPr lang="en-US" sz="1200" b="1" kern="0" spc="200" dirty="0">
                 <a:solidFill>
                   <a:srgbClr val="2E7D32"/>
                 </a:solidFill>
@@ -6018,7 +5727,7 @@
           <a:bodyPr wrap="square" lIns="0" tIns="0" rIns="0" bIns="0" rtlCol="0" anchor="ctr"/>
           <a:lstStyle/>
           <a:p>
-            <a:pPr indent="0" marL="0">
+            <a:pPr marL="0" indent="0">
               <a:buNone/>
             </a:pPr>
             <a:r>
@@ -6038,15 +5747,15 @@
       </p:sp>
       <p:pic>
         <p:nvPicPr>
-          <p:cNvPr id="4" name="Image 0" descr="img/env_private_targeted_eqnx.png">    </p:cNvPr>
+          <p:cNvPr id="4" name="Image 0" descr="img/env_private_targeted_eqnx.png"/>
           <p:cNvPicPr>
             <a:picLocks noChangeAspect="1"/>
           </p:cNvPicPr>
           <p:nvPr/>
         </p:nvPicPr>
         <p:blipFill>
-          <a:blip r:embed="rId1"/>
-          <a:srcRect l="0" r="0" t="0" b="0"/>
+          <a:blip r:embed="rId3"/>
+          <a:srcRect/>
           <a:stretch/>
         </p:blipFill>
         <p:spPr>
@@ -6080,7 +5789,7 @@
           <a:bodyPr wrap="square" lIns="0" tIns="0" rIns="0" bIns="0" rtlCol="0" anchor="ctr"/>
           <a:lstStyle/>
           <a:p>
-            <a:pPr indent="0" marL="0">
+            <a:pPr marL="0" indent="0">
               <a:buNone/>
             </a:pPr>
             <a:r>
@@ -6124,13 +5833,20 @@
             <a:prstDash val="solid"/>
           </a:ln>
           <a:effectLst>
-            <a:outerShdw sx="100000" sy="100000" kx="0" ky="0" algn="bl" rotWithShape="0" blurRad="88900" dist="38100" dir="5400000">
+            <a:outerShdw blurRad="88900" dist="38100" dir="5400000" algn="bl" rotWithShape="0">
               <a:srgbClr val="000000">
                 <a:alpha val="13000"/>
               </a:srgbClr>
             </a:outerShdw>
           </a:effectLst>
         </p:spPr>
+        <p:txBody>
+          <a:bodyPr/>
+          <a:lstStyle/>
+          <a:p>
+            <a:endParaRPr lang="en-US"/>
+          </a:p>
+        </p:txBody>
       </p:sp>
       <p:sp>
         <p:nvSpPr>
@@ -6153,7 +5869,7 @@
           <a:bodyPr wrap="square" lIns="0" tIns="0" rIns="0" bIns="0" rtlCol="0" anchor="ctr"/>
           <a:lstStyle/>
           <a:p>
-            <a:pPr algn="ctr" indent="0" marL="0">
+            <a:pPr marL="0" indent="0" algn="ctr">
               <a:buNone/>
             </a:pPr>
             <a:r>
@@ -6192,7 +5908,7 @@
           <a:bodyPr wrap="square" lIns="0" tIns="0" rIns="0" bIns="0" rtlCol="0" anchor="ctr"/>
           <a:lstStyle/>
           <a:p>
-            <a:pPr algn="ctr" indent="0" marL="0">
+            <a:pPr marL="0" indent="0" algn="ctr">
               <a:buNone/>
             </a:pPr>
             <a:r>
@@ -6236,13 +5952,20 @@
             <a:prstDash val="solid"/>
           </a:ln>
           <a:effectLst>
-            <a:outerShdw sx="100000" sy="100000" kx="0" ky="0" algn="bl" rotWithShape="0" blurRad="88900" dist="38100" dir="5400000">
+            <a:outerShdw blurRad="88900" dist="38100" dir="5400000" algn="bl" rotWithShape="0">
               <a:srgbClr val="000000">
                 <a:alpha val="13000"/>
               </a:srgbClr>
             </a:outerShdw>
           </a:effectLst>
         </p:spPr>
+        <p:txBody>
+          <a:bodyPr/>
+          <a:lstStyle/>
+          <a:p>
+            <a:endParaRPr lang="en-US"/>
+          </a:p>
+        </p:txBody>
       </p:sp>
       <p:sp>
         <p:nvSpPr>
@@ -6265,7 +5988,7 @@
           <a:bodyPr wrap="square" lIns="0" tIns="0" rIns="0" bIns="0" rtlCol="0" anchor="ctr"/>
           <a:lstStyle/>
           <a:p>
-            <a:pPr algn="ctr" indent="0" marL="0">
+            <a:pPr marL="0" indent="0" algn="ctr">
               <a:buNone/>
             </a:pPr>
             <a:r>
@@ -6304,7 +6027,7 @@
           <a:bodyPr wrap="square" lIns="0" tIns="0" rIns="0" bIns="0" rtlCol="0" anchor="ctr"/>
           <a:lstStyle/>
           <a:p>
-            <a:pPr algn="ctr" indent="0" marL="0">
+            <a:pPr marL="0" indent="0" algn="ctr">
               <a:buNone/>
             </a:pPr>
             <a:r>
@@ -6343,7 +6066,7 @@
           <a:bodyPr wrap="square" lIns="0" tIns="0" rIns="0" bIns="0" rtlCol="0" anchor="t"/>
           <a:lstStyle/>
           <a:p>
-            <a:pPr indent="0" marL="0">
+            <a:pPr marL="0" indent="0">
               <a:lnSpc>
                 <a:spcPct val="105000"/>
               </a:lnSpc>
@@ -6360,12 +6083,6 @@
               </a:rPr>
               <a:t>The largest single envelope under the targeted dose.  </a:t>
             </a:r>
-            <a:pPr indent="0" marL="0">
-              <a:lnSpc>
-                <a:spcPct val="105000"/>
-              </a:lnSpc>
-              <a:buNone/>
-            </a:pPr>
             <a:r>
               <a:rPr lang="en-US" sz="1400" b="1" dirty="0">
                 <a:solidFill>
@@ -6402,7 +6119,7 @@
           <a:bodyPr wrap="square" lIns="0" tIns="0" rIns="0" bIns="0" rtlCol="0" anchor="ctr"/>
           <a:lstStyle/>
           <a:p>
-            <a:pPr algn="l" indent="0" marL="0">
+            <a:pPr marL="0" indent="0" algn="l">
               <a:buNone/>
             </a:pPr>
             <a:r>
@@ -6414,21 +6131,7 @@
                 <a:ea typeface="Calibri" pitchFamily="34" charset="-122"/>
                 <a:cs typeface="Calibri" pitchFamily="34" charset="-120"/>
               </a:rPr>
-              <a:t>Enhanced Rock Weathering — public &amp; private returns in SSA</a:t>
-            </a:r>
-            <a:pPr algn="l" indent="0" marL="0">
-              <a:buNone/>
-            </a:pPr>
-            <a:r>
-              <a:rPr lang="en-US" sz="900" dirty="0">
-                <a:solidFill>
-                  <a:srgbClr val="5B6B73"/>
-                </a:solidFill>
-                <a:latin typeface="Calibri" pitchFamily="34" charset="0"/>
-                <a:ea typeface="Calibri" pitchFamily="34" charset="-122"/>
-                <a:cs typeface="Calibri" pitchFamily="34" charset="-120"/>
-              </a:rPr>
-              <a:t>   ·   Gebrekidan &amp; Chamberlin (2026)</a:t>
+              <a:t>Enhanced Rock Weathering — public &amp; private returns in SSA   ·   Gebrekidan &amp; Chamberlin (2026)</a:t>
             </a:r>
             <a:endParaRPr lang="en-US" sz="900" dirty="0"/>
           </a:p>
@@ -6455,7 +6158,7 @@
           <a:bodyPr wrap="square" lIns="0" tIns="0" rIns="0" bIns="0" rtlCol="0" anchor="ctr"/>
           <a:lstStyle/>
           <a:p>
-            <a:pPr algn="r" indent="0" marL="0">
+            <a:pPr marL="0" indent="0" algn="r">
               <a:buNone/>
             </a:pPr>
             <a:r>
@@ -6489,6 +6192,7 @@
         <a:solidFill>
           <a:srgbClr val="FFFFFF"/>
         </a:solidFill>
+        <a:effectLst/>
       </p:bgPr>
     </p:bg>
     <p:spTree>
@@ -6526,11 +6230,11 @@
           <a:bodyPr wrap="square" lIns="0" tIns="0" rIns="0" bIns="0" rtlCol="0" anchor="ctr"/>
           <a:lstStyle/>
           <a:p>
-            <a:pPr indent="0" marL="0">
-              <a:buNone/>
-            </a:pPr>
-            <a:r>
-              <a:rPr lang="en-US" sz="1200" b="1" spc="200" kern="0" dirty="0">
+            <a:pPr marL="0" indent="0">
+              <a:buNone/>
+            </a:pPr>
+            <a:r>
+              <a:rPr lang="en-US" sz="1200" b="1" kern="0" spc="200" dirty="0">
                 <a:solidFill>
                   <a:srgbClr val="1C6BA0"/>
                 </a:solidFill>
@@ -6565,7 +6269,7 @@
           <a:bodyPr wrap="square" lIns="0" tIns="0" rIns="0" bIns="0" rtlCol="0" anchor="ctr"/>
           <a:lstStyle/>
           <a:p>
-            <a:pPr indent="0" marL="0">
+            <a:pPr marL="0" indent="0">
               <a:buNone/>
             </a:pPr>
             <a:r>
@@ -6585,15 +6289,15 @@
       </p:sp>
       <p:pic>
         <p:nvPicPr>
-          <p:cNvPr id="4" name="Image 0" descr="img/env_public_targeted_eqnx.png">    </p:cNvPr>
+          <p:cNvPr id="4" name="Image 0" descr="img/env_public_targeted_eqnx.png"/>
           <p:cNvPicPr>
             <a:picLocks noChangeAspect="1"/>
           </p:cNvPicPr>
           <p:nvPr/>
         </p:nvPicPr>
         <p:blipFill>
-          <a:blip r:embed="rId1"/>
-          <a:srcRect l="0" r="0" t="0" b="0"/>
+          <a:blip r:embed="rId3"/>
+          <a:srcRect/>
           <a:stretch/>
         </p:blipFill>
         <p:spPr>
@@ -6627,7 +6331,7 @@
           <a:bodyPr wrap="square" lIns="0" tIns="0" rIns="0" bIns="0" rtlCol="0" anchor="ctr"/>
           <a:lstStyle/>
           <a:p>
-            <a:pPr indent="0" marL="0">
+            <a:pPr marL="0" indent="0">
               <a:buNone/>
             </a:pPr>
             <a:r>
@@ -6671,13 +6375,20 @@
             <a:prstDash val="solid"/>
           </a:ln>
           <a:effectLst>
-            <a:outerShdw sx="100000" sy="100000" kx="0" ky="0" algn="bl" rotWithShape="0" blurRad="88900" dist="38100" dir="5400000">
+            <a:outerShdw blurRad="88900" dist="38100" dir="5400000" algn="bl" rotWithShape="0">
               <a:srgbClr val="000000">
                 <a:alpha val="13000"/>
               </a:srgbClr>
             </a:outerShdw>
           </a:effectLst>
         </p:spPr>
+        <p:txBody>
+          <a:bodyPr/>
+          <a:lstStyle/>
+          <a:p>
+            <a:endParaRPr lang="en-US"/>
+          </a:p>
+        </p:txBody>
       </p:sp>
       <p:sp>
         <p:nvSpPr>
@@ -6700,7 +6411,7 @@
           <a:bodyPr wrap="square" lIns="0" tIns="0" rIns="0" bIns="0" rtlCol="0" anchor="ctr"/>
           <a:lstStyle/>
           <a:p>
-            <a:pPr algn="ctr" indent="0" marL="0">
+            <a:pPr marL="0" indent="0" algn="ctr">
               <a:buNone/>
             </a:pPr>
             <a:r>
@@ -6739,7 +6450,7 @@
           <a:bodyPr wrap="square" lIns="0" tIns="0" rIns="0" bIns="0" rtlCol="0" anchor="ctr"/>
           <a:lstStyle/>
           <a:p>
-            <a:pPr algn="ctr" indent="0" marL="0">
+            <a:pPr marL="0" indent="0" algn="ctr">
               <a:buNone/>
             </a:pPr>
             <a:r>
@@ -6783,13 +6494,20 @@
             <a:prstDash val="solid"/>
           </a:ln>
           <a:effectLst>
-            <a:outerShdw sx="100000" sy="100000" kx="0" ky="0" algn="bl" rotWithShape="0" blurRad="88900" dist="38100" dir="5400000">
+            <a:outerShdw blurRad="88900" dist="38100" dir="5400000" algn="bl" rotWithShape="0">
               <a:srgbClr val="000000">
                 <a:alpha val="13000"/>
               </a:srgbClr>
             </a:outerShdw>
           </a:effectLst>
         </p:spPr>
+        <p:txBody>
+          <a:bodyPr/>
+          <a:lstStyle/>
+          <a:p>
+            <a:endParaRPr lang="en-US"/>
+          </a:p>
+        </p:txBody>
       </p:sp>
       <p:sp>
         <p:nvSpPr>
@@ -6812,7 +6530,7 @@
           <a:bodyPr wrap="square" lIns="0" tIns="0" rIns="0" bIns="0" rtlCol="0" anchor="ctr"/>
           <a:lstStyle/>
           <a:p>
-            <a:pPr algn="ctr" indent="0" marL="0">
+            <a:pPr marL="0" indent="0" algn="ctr">
               <a:buNone/>
             </a:pPr>
             <a:r>
@@ -6851,7 +6569,7 @@
           <a:bodyPr wrap="square" lIns="0" tIns="0" rIns="0" bIns="0" rtlCol="0" anchor="ctr"/>
           <a:lstStyle/>
           <a:p>
-            <a:pPr algn="ctr" indent="0" marL="0">
+            <a:pPr marL="0" indent="0" algn="ctr">
               <a:buNone/>
             </a:pPr>
             <a:r>
@@ -6890,7 +6608,7 @@
           <a:bodyPr wrap="square" lIns="0" tIns="0" rIns="0" bIns="0" rtlCol="0" anchor="t"/>
           <a:lstStyle/>
           <a:p>
-            <a:pPr indent="0" marL="0">
+            <a:pPr marL="0" indent="0">
               <a:lnSpc>
                 <a:spcPct val="105000"/>
               </a:lnSpc>
@@ -6907,12 +6625,6 @@
               </a:rPr>
               <a:t>Smaller than the private envelope, and price-conditional.  </a:t>
             </a:r>
-            <a:pPr indent="0" marL="0">
-              <a:lnSpc>
-                <a:spcPct val="105000"/>
-              </a:lnSpc>
-              <a:buNone/>
-            </a:pPr>
             <a:r>
               <a:rPr lang="en-US" sz="1400" b="1" dirty="0">
                 <a:solidFill>
@@ -6949,7 +6661,7 @@
           <a:bodyPr wrap="square" lIns="0" tIns="0" rIns="0" bIns="0" rtlCol="0" anchor="ctr"/>
           <a:lstStyle/>
           <a:p>
-            <a:pPr algn="l" indent="0" marL="0">
+            <a:pPr marL="0" indent="0" algn="l">
               <a:buNone/>
             </a:pPr>
             <a:r>
@@ -6961,21 +6673,7 @@
                 <a:ea typeface="Calibri" pitchFamily="34" charset="-122"/>
                 <a:cs typeface="Calibri" pitchFamily="34" charset="-120"/>
               </a:rPr>
-              <a:t>Enhanced Rock Weathering — public &amp; private returns in SSA</a:t>
-            </a:r>
-            <a:pPr algn="l" indent="0" marL="0">
-              <a:buNone/>
-            </a:pPr>
-            <a:r>
-              <a:rPr lang="en-US" sz="900" dirty="0">
-                <a:solidFill>
-                  <a:srgbClr val="5B6B73"/>
-                </a:solidFill>
-                <a:latin typeface="Calibri" pitchFamily="34" charset="0"/>
-                <a:ea typeface="Calibri" pitchFamily="34" charset="-122"/>
-                <a:cs typeface="Calibri" pitchFamily="34" charset="-120"/>
-              </a:rPr>
-              <a:t>   ·   Gebrekidan &amp; Chamberlin (2026)</a:t>
+              <a:t>Enhanced Rock Weathering — public &amp; private returns in SSA   ·   Gebrekidan &amp; Chamberlin (2026)</a:t>
             </a:r>
             <a:endParaRPr lang="en-US" sz="900" dirty="0"/>
           </a:p>
@@ -7002,7 +6700,7 @@
           <a:bodyPr wrap="square" lIns="0" tIns="0" rIns="0" bIns="0" rtlCol="0" anchor="ctr"/>
           <a:lstStyle/>
           <a:p>
-            <a:pPr algn="r" indent="0" marL="0">
+            <a:pPr marL="0" indent="0" algn="r">
               <a:buNone/>
             </a:pPr>
             <a:r>
@@ -7036,6 +6734,7 @@
         <a:solidFill>
           <a:srgbClr val="FFFFFF"/>
         </a:solidFill>
+        <a:effectLst/>
       </p:bgPr>
     </p:bg>
     <p:spTree>
@@ -7073,11 +6772,11 @@
           <a:bodyPr wrap="square" lIns="0" tIns="0" rIns="0" bIns="0" rtlCol="0" anchor="ctr"/>
           <a:lstStyle/>
           <a:p>
-            <a:pPr indent="0" marL="0">
-              <a:buNone/>
-            </a:pPr>
-            <a:r>
-              <a:rPr lang="en-US" sz="1200" b="1" spc="200" kern="0" dirty="0">
+            <a:pPr marL="0" indent="0">
+              <a:buNone/>
+            </a:pPr>
+            <a:r>
+              <a:rPr lang="en-US" sz="1200" b="1" kern="0" spc="200" dirty="0">
                 <a:solidFill>
                   <a:srgbClr val="E8843C"/>
                 </a:solidFill>
@@ -7112,7 +6811,7 @@
           <a:bodyPr wrap="square" lIns="0" tIns="0" rIns="0" bIns="0" rtlCol="0" anchor="ctr"/>
           <a:lstStyle/>
           <a:p>
-            <a:pPr indent="0" marL="0">
+            <a:pPr marL="0" indent="0">
               <a:buNone/>
             </a:pPr>
             <a:r>
@@ -7132,15 +6831,15 @@
       </p:sp>
       <p:pic>
         <p:nvPicPr>
-          <p:cNvPr id="4" name="Image 0" descr="img/env_intersection_targeted_eqnx.png">    </p:cNvPr>
+          <p:cNvPr id="4" name="Image 0" descr="img/env_intersection_targeted_eqnx.png"/>
           <p:cNvPicPr>
             <a:picLocks noChangeAspect="1"/>
           </p:cNvPicPr>
           <p:nvPr/>
         </p:nvPicPr>
         <p:blipFill>
-          <a:blip r:embed="rId1"/>
-          <a:srcRect l="0" r="0" t="0" b="0"/>
+          <a:blip r:embed="rId3"/>
+          <a:srcRect/>
           <a:stretch/>
         </p:blipFill>
         <p:spPr>
@@ -7179,13 +6878,20 @@
             <a:prstDash val="solid"/>
           </a:ln>
           <a:effectLst>
-            <a:outerShdw sx="100000" sy="100000" kx="0" ky="0" algn="bl" rotWithShape="0" blurRad="88900" dist="38100" dir="5400000">
+            <a:outerShdw blurRad="88900" dist="38100" dir="5400000" algn="bl" rotWithShape="0">
               <a:srgbClr val="000000">
                 <a:alpha val="13000"/>
               </a:srgbClr>
             </a:outerShdw>
           </a:effectLst>
         </p:spPr>
+        <p:txBody>
+          <a:bodyPr/>
+          <a:lstStyle/>
+          <a:p>
+            <a:endParaRPr lang="en-US"/>
+          </a:p>
+        </p:txBody>
       </p:sp>
       <p:sp>
         <p:nvSpPr>
@@ -7208,7 +6914,7 @@
           <a:bodyPr wrap="square" lIns="0" tIns="0" rIns="0" bIns="0" rtlCol="0" anchor="ctr"/>
           <a:lstStyle/>
           <a:p>
-            <a:pPr indent="0" marL="0">
+            <a:pPr marL="0" indent="0">
               <a:buNone/>
             </a:pPr>
             <a:r>
@@ -7222,9 +6928,6 @@
               </a:rPr>
               <a:t>2.1 Mha</a:t>
             </a:r>
-            <a:pPr indent="0" marL="0">
-              <a:buNone/>
-            </a:pPr>
             <a:r>
               <a:rPr lang="en-US" sz="2000" b="1" dirty="0">
                 <a:solidFill>
@@ -7261,7 +6964,7 @@
           <a:bodyPr wrap="square" lIns="0" tIns="0" rIns="0" bIns="0" rtlCol="0" anchor="ctr"/>
           <a:lstStyle/>
           <a:p>
-            <a:pPr indent="0" marL="0">
+            <a:pPr marL="0" indent="0">
               <a:buNone/>
             </a:pPr>
             <a:r>
@@ -7305,13 +7008,20 @@
             <a:prstDash val="solid"/>
           </a:ln>
           <a:effectLst>
-            <a:outerShdw sx="100000" sy="100000" kx="0" ky="0" algn="bl" rotWithShape="0" blurRad="88900" dist="38100" dir="5400000">
+            <a:outerShdw blurRad="88900" dist="38100" dir="5400000" algn="bl" rotWithShape="0">
               <a:srgbClr val="000000">
                 <a:alpha val="13000"/>
               </a:srgbClr>
             </a:outerShdw>
           </a:effectLst>
         </p:spPr>
+        <p:txBody>
+          <a:bodyPr/>
+          <a:lstStyle/>
+          <a:p>
+            <a:endParaRPr lang="en-US"/>
+          </a:p>
+        </p:txBody>
       </p:sp>
       <p:sp>
         <p:nvSpPr>
@@ -7334,7 +7044,7 @@
           <a:bodyPr wrap="square" lIns="0" tIns="0" rIns="0" bIns="0" rtlCol="0" anchor="ctr"/>
           <a:lstStyle/>
           <a:p>
-            <a:pPr algn="ctr" indent="0" marL="0">
+            <a:pPr marL="0" indent="0" algn="ctr">
               <a:buNone/>
             </a:pPr>
             <a:r>
@@ -7373,7 +7083,7 @@
           <a:bodyPr wrap="square" lIns="0" tIns="0" rIns="0" bIns="0" rtlCol="0" anchor="ctr"/>
           <a:lstStyle/>
           <a:p>
-            <a:pPr algn="ctr" indent="0" marL="0">
+            <a:pPr marL="0" indent="0" algn="ctr">
               <a:buNone/>
             </a:pPr>
             <a:r>
@@ -7417,13 +7127,20 @@
             <a:prstDash val="solid"/>
           </a:ln>
           <a:effectLst>
-            <a:outerShdw sx="100000" sy="100000" kx="0" ky="0" algn="bl" rotWithShape="0" blurRad="88900" dist="38100" dir="5400000">
+            <a:outerShdw blurRad="88900" dist="38100" dir="5400000" algn="bl" rotWithShape="0">
               <a:srgbClr val="000000">
                 <a:alpha val="13000"/>
               </a:srgbClr>
             </a:outerShdw>
           </a:effectLst>
         </p:spPr>
+        <p:txBody>
+          <a:bodyPr/>
+          <a:lstStyle/>
+          <a:p>
+            <a:endParaRPr lang="en-US"/>
+          </a:p>
+        </p:txBody>
       </p:sp>
       <p:sp>
         <p:nvSpPr>
@@ -7446,7 +7163,7 @@
           <a:bodyPr wrap="square" lIns="0" tIns="0" rIns="0" bIns="0" rtlCol="0" anchor="ctr"/>
           <a:lstStyle/>
           <a:p>
-            <a:pPr algn="ctr" indent="0" marL="0">
+            <a:pPr marL="0" indent="0" algn="ctr">
               <a:buNone/>
             </a:pPr>
             <a:r>
@@ -7485,7 +7202,7 @@
           <a:bodyPr wrap="square" lIns="0" tIns="0" rIns="0" bIns="0" rtlCol="0" anchor="ctr"/>
           <a:lstStyle/>
           <a:p>
-            <a:pPr algn="ctr" indent="0" marL="0">
+            <a:pPr marL="0" indent="0" algn="ctr">
               <a:buNone/>
             </a:pPr>
             <a:r>
@@ -7529,13 +7246,20 @@
             <a:prstDash val="solid"/>
           </a:ln>
           <a:effectLst>
-            <a:outerShdw sx="100000" sy="100000" kx="0" ky="0" algn="bl" rotWithShape="0" blurRad="88900" dist="38100" dir="5400000">
+            <a:outerShdw blurRad="88900" dist="38100" dir="5400000" algn="bl" rotWithShape="0">
               <a:srgbClr val="000000">
                 <a:alpha val="13000"/>
               </a:srgbClr>
             </a:outerShdw>
           </a:effectLst>
         </p:spPr>
+        <p:txBody>
+          <a:bodyPr/>
+          <a:lstStyle/>
+          <a:p>
+            <a:endParaRPr lang="en-US"/>
+          </a:p>
+        </p:txBody>
       </p:sp>
       <p:sp>
         <p:nvSpPr>
@@ -7558,7 +7282,7 @@
           <a:bodyPr wrap="square" lIns="0" tIns="0" rIns="0" bIns="0" rtlCol="0" anchor="ctr"/>
           <a:lstStyle/>
           <a:p>
-            <a:pPr algn="ctr" indent="0" marL="0">
+            <a:pPr marL="0" indent="0" algn="ctr">
               <a:buNone/>
             </a:pPr>
             <a:r>
@@ -7597,7 +7321,7 @@
           <a:bodyPr wrap="square" lIns="0" tIns="0" rIns="0" bIns="0" rtlCol="0" anchor="ctr"/>
           <a:lstStyle/>
           <a:p>
-            <a:pPr algn="ctr" indent="0" marL="0">
+            <a:pPr marL="0" indent="0" algn="ctr">
               <a:buNone/>
             </a:pPr>
             <a:r>
@@ -7636,7 +7360,7 @@
           <a:bodyPr wrap="square" lIns="0" tIns="0" rIns="0" bIns="0" rtlCol="0" anchor="t"/>
           <a:lstStyle/>
           <a:p>
-            <a:pPr indent="0" marL="0">
+            <a:pPr marL="0" indent="0">
               <a:lnSpc>
                 <a:spcPct val="106000"/>
               </a:lnSpc>
@@ -7653,12 +7377,6 @@
               </a:rPr>
               <a:t>The economic point:  </a:t>
             </a:r>
-            <a:pPr indent="0" marL="0">
-              <a:lnSpc>
-                <a:spcPct val="106000"/>
-              </a:lnSpc>
-              <a:buNone/>
-            </a:pPr>
             <a:r>
               <a:rPr lang="en-US" sz="1400" dirty="0">
                 <a:solidFill>
@@ -7695,7 +7413,7 @@
           <a:bodyPr wrap="square" lIns="0" tIns="0" rIns="0" bIns="0" rtlCol="0" anchor="ctr"/>
           <a:lstStyle/>
           <a:p>
-            <a:pPr algn="l" indent="0" marL="0">
+            <a:pPr marL="0" indent="0" algn="l">
               <a:buNone/>
             </a:pPr>
             <a:r>
@@ -7707,21 +7425,7 @@
                 <a:ea typeface="Calibri" pitchFamily="34" charset="-122"/>
                 <a:cs typeface="Calibri" pitchFamily="34" charset="-120"/>
               </a:rPr>
-              <a:t>Enhanced Rock Weathering — public &amp; private returns in SSA</a:t>
-            </a:r>
-            <a:pPr algn="l" indent="0" marL="0">
-              <a:buNone/>
-            </a:pPr>
-            <a:r>
-              <a:rPr lang="en-US" sz="900" dirty="0">
-                <a:solidFill>
-                  <a:srgbClr val="5B6B73"/>
-                </a:solidFill>
-                <a:latin typeface="Calibri" pitchFamily="34" charset="0"/>
-                <a:ea typeface="Calibri" pitchFamily="34" charset="-122"/>
-                <a:cs typeface="Calibri" pitchFamily="34" charset="-120"/>
-              </a:rPr>
-              <a:t>   ·   Gebrekidan &amp; Chamberlin (2026)</a:t>
+              <a:t>Enhanced Rock Weathering — public &amp; private returns in SSA   ·   Gebrekidan &amp; Chamberlin (2026)</a:t>
             </a:r>
             <a:endParaRPr lang="en-US" sz="900" dirty="0"/>
           </a:p>
@@ -7748,7 +7452,7 @@
           <a:bodyPr wrap="square" lIns="0" tIns="0" rIns="0" bIns="0" rtlCol="0" anchor="ctr"/>
           <a:lstStyle/>
           <a:p>
-            <a:pPr algn="r" indent="0" marL="0">
+            <a:pPr marL="0" indent="0" algn="r">
               <a:buNone/>
             </a:pPr>
             <a:r>
@@ -7782,6 +7486,7 @@
         <a:solidFill>
           <a:srgbClr val="FFFFFF"/>
         </a:solidFill>
+        <a:effectLst/>
       </p:bgPr>
     </p:bg>
     <p:spTree>
@@ -7819,11 +7524,11 @@
           <a:bodyPr wrap="square" lIns="0" tIns="0" rIns="0" bIns="0" rtlCol="0" anchor="ctr"/>
           <a:lstStyle/>
           <a:p>
-            <a:pPr indent="0" marL="0">
-              <a:buNone/>
-            </a:pPr>
-            <a:r>
-              <a:rPr lang="en-US" sz="1200" b="1" spc="200" kern="0" dirty="0">
+            <a:pPr marL="0" indent="0">
+              <a:buNone/>
+            </a:pPr>
+            <a:r>
+              <a:rPr lang="en-US" sz="1200" b="1" kern="0" spc="200" dirty="0">
                 <a:solidFill>
                   <a:srgbClr val="1C6BA0"/>
                 </a:solidFill>
@@ -7858,7 +7563,7 @@
           <a:bodyPr wrap="square" lIns="0" tIns="0" rIns="0" bIns="0" rtlCol="0" anchor="ctr"/>
           <a:lstStyle/>
           <a:p>
-            <a:pPr indent="0" marL="0">
+            <a:pPr marL="0" indent="0">
               <a:buNone/>
             </a:pPr>
             <a:r>
@@ -7878,15 +7583,15 @@
       </p:sp>
       <p:pic>
         <p:nvPicPr>
-          <p:cNvPr id="4" name="Image 0" descr="img/mac_targeted_eqnx.png">    </p:cNvPr>
+          <p:cNvPr id="4" name="Image 0" descr="img/mac_targeted_eqnx.png"/>
           <p:cNvPicPr>
             <a:picLocks noChangeAspect="1"/>
           </p:cNvPicPr>
           <p:nvPr/>
         </p:nvPicPr>
         <p:blipFill>
-          <a:blip r:embed="rId1"/>
-          <a:srcRect l="0" r="0" t="0" b="0"/>
+          <a:blip r:embed="rId3"/>
+          <a:srcRect/>
           <a:stretch/>
         </p:blipFill>
         <p:spPr>
@@ -7925,13 +7630,20 @@
             <a:prstDash val="solid"/>
           </a:ln>
           <a:effectLst>
-            <a:outerShdw sx="100000" sy="100000" kx="0" ky="0" algn="bl" rotWithShape="0" blurRad="88900" dist="38100" dir="5400000">
+            <a:outerShdw blurRad="88900" dist="38100" dir="5400000" algn="bl" rotWithShape="0">
               <a:srgbClr val="000000">
                 <a:alpha val="13000"/>
               </a:srgbClr>
             </a:outerShdw>
           </a:effectLst>
         </p:spPr>
+        <p:txBody>
+          <a:bodyPr/>
+          <a:lstStyle/>
+          <a:p>
+            <a:endParaRPr lang="en-US"/>
+          </a:p>
+        </p:txBody>
       </p:sp>
       <p:sp>
         <p:nvSpPr>
@@ -7954,7 +7666,7 @@
           <a:bodyPr wrap="square" lIns="0" tIns="0" rIns="0" bIns="0" rtlCol="0" anchor="ctr"/>
           <a:lstStyle/>
           <a:p>
-            <a:pPr indent="0" marL="0">
+            <a:pPr marL="0" indent="0">
               <a:buNone/>
             </a:pPr>
             <a:r>
@@ -7968,9 +7680,6 @@
               </a:rPr>
               <a:t>$446</a:t>
             </a:r>
-            <a:pPr indent="0" marL="0">
-              <a:buNone/>
-            </a:pPr>
             <a:r>
               <a:rPr lang="en-US" sz="2000" dirty="0">
                 <a:solidFill>
@@ -8007,7 +7716,7 @@
           <a:bodyPr wrap="square" lIns="0" tIns="0" rIns="0" bIns="0" rtlCol="0" anchor="ctr"/>
           <a:lstStyle/>
           <a:p>
-            <a:pPr indent="0" marL="0">
+            <a:pPr marL="0" indent="0">
               <a:buNone/>
             </a:pPr>
             <a:r>
@@ -8046,7 +7755,7 @@
           <a:bodyPr wrap="square" lIns="0" tIns="0" rIns="0" bIns="0" rtlCol="0" anchor="t"/>
           <a:lstStyle/>
           <a:p>
-            <a:pPr indent="0" marL="0">
+            <a:pPr marL="0" indent="0">
               <a:lnSpc>
                 <a:spcPct val="103000"/>
               </a:lnSpc>
@@ -8088,7 +7797,7 @@
           <a:bodyPr wrap="square" lIns="0" tIns="0" rIns="0" bIns="0" rtlCol="0" anchor="t"/>
           <a:lstStyle/>
           <a:p>
-            <a:pPr indent="0" marL="0">
+            <a:pPr marL="0" indent="0">
               <a:lnSpc>
                 <a:spcPct val="105000"/>
               </a:lnSpc>
@@ -8105,12 +7814,6 @@
               </a:rPr>
               <a:t>So the carbon case is limited by </a:t>
             </a:r>
-            <a:pPr indent="0" marL="0">
-              <a:lnSpc>
-                <a:spcPct val="105000"/>
-              </a:lnSpc>
-              <a:buNone/>
-            </a:pPr>
             <a:r>
               <a:rPr lang="en-US" sz="1350" b="1" dirty="0">
                 <a:solidFill>
@@ -8122,12 +7825,6 @@
               </a:rPr>
               <a:t>how much CO₂ a tonne of rock verifiably removes</a:t>
             </a:r>
-            <a:pPr indent="0" marL="0">
-              <a:lnSpc>
-                <a:spcPct val="105000"/>
-              </a:lnSpc>
-              <a:buNone/>
-            </a:pPr>
             <a:r>
               <a:rPr lang="en-US" sz="1350" dirty="0">
                 <a:solidFill>
@@ -8164,7 +7861,7 @@
           <a:bodyPr wrap="square" lIns="0" tIns="0" rIns="0" bIns="0" rtlCol="0" anchor="ctr"/>
           <a:lstStyle/>
           <a:p>
-            <a:pPr algn="l" indent="0" marL="0">
+            <a:pPr marL="0" indent="0" algn="l">
               <a:buNone/>
             </a:pPr>
             <a:r>
@@ -8176,21 +7873,7 @@
                 <a:ea typeface="Calibri" pitchFamily="34" charset="-122"/>
                 <a:cs typeface="Calibri" pitchFamily="34" charset="-120"/>
               </a:rPr>
-              <a:t>Enhanced Rock Weathering — public &amp; private returns in SSA</a:t>
-            </a:r>
-            <a:pPr algn="l" indent="0" marL="0">
-              <a:buNone/>
-            </a:pPr>
-            <a:r>
-              <a:rPr lang="en-US" sz="900" dirty="0">
-                <a:solidFill>
-                  <a:srgbClr val="5B6B73"/>
-                </a:solidFill>
-                <a:latin typeface="Calibri" pitchFamily="34" charset="0"/>
-                <a:ea typeface="Calibri" pitchFamily="34" charset="-122"/>
-                <a:cs typeface="Calibri" pitchFamily="34" charset="-120"/>
-              </a:rPr>
-              <a:t>   ·   Gebrekidan &amp; Chamberlin (2026)</a:t>
+              <a:t>Enhanced Rock Weathering — public &amp; private returns in SSA   ·   Gebrekidan &amp; Chamberlin (2026)</a:t>
             </a:r>
             <a:endParaRPr lang="en-US" sz="900" dirty="0"/>
           </a:p>
@@ -8217,7 +7900,7 @@
           <a:bodyPr wrap="square" lIns="0" tIns="0" rIns="0" bIns="0" rtlCol="0" anchor="ctr"/>
           <a:lstStyle/>
           <a:p>
-            <a:pPr algn="r" indent="0" marL="0">
+            <a:pPr marL="0" indent="0" algn="r">
               <a:buNone/>
             </a:pPr>
             <a:r>
@@ -8251,6 +7934,7 @@
         <a:solidFill>
           <a:srgbClr val="FFFFFF"/>
         </a:solidFill>
+        <a:effectLst/>
       </p:bgPr>
     </p:bg>
     <p:spTree>
@@ -8288,11 +7972,11 @@
           <a:bodyPr wrap="square" lIns="0" tIns="0" rIns="0" bIns="0" rtlCol="0" anchor="ctr"/>
           <a:lstStyle/>
           <a:p>
-            <a:pPr indent="0" marL="0">
-              <a:buNone/>
-            </a:pPr>
-            <a:r>
-              <a:rPr lang="en-US" sz="1200" b="1" spc="200" kern="0" dirty="0">
+            <a:pPr marL="0" indent="0">
+              <a:buNone/>
+            </a:pPr>
+            <a:r>
+              <a:rPr lang="en-US" sz="1200" b="1" kern="0" spc="200" dirty="0">
                 <a:solidFill>
                   <a:srgbClr val="1C6BA0"/>
                 </a:solidFill>
@@ -8327,7 +8011,7 @@
           <a:bodyPr wrap="square" lIns="0" tIns="0" rIns="0" bIns="0" rtlCol="0" anchor="ctr"/>
           <a:lstStyle/>
           <a:p>
-            <a:pPr indent="0" marL="0">
+            <a:pPr marL="0" indent="0">
               <a:buNone/>
             </a:pPr>
             <a:r>
@@ -8347,15 +8031,15 @@
       </p:sp>
       <p:pic>
         <p:nvPicPr>
-          <p:cNvPr id="4" name="Image 0" descr="img/public_area_vs_price.png">    </p:cNvPr>
+          <p:cNvPr id="4" name="Image 0" descr="img/public_area_vs_price.png"/>
           <p:cNvPicPr>
             <a:picLocks noChangeAspect="1"/>
           </p:cNvPicPr>
           <p:nvPr/>
         </p:nvPicPr>
         <p:blipFill>
-          <a:blip r:embed="rId1"/>
-          <a:srcRect l="0" r="0" t="0" b="0"/>
+          <a:blip r:embed="rId3"/>
+          <a:srcRect/>
           <a:stretch/>
         </p:blipFill>
         <p:spPr>
@@ -8394,13 +8078,20 @@
             <a:prstDash val="solid"/>
           </a:ln>
           <a:effectLst>
-            <a:outerShdw sx="100000" sy="100000" kx="0" ky="0" algn="bl" rotWithShape="0" blurRad="88900" dist="38100" dir="5400000">
+            <a:outerShdw blurRad="88900" dist="38100" dir="5400000" algn="bl" rotWithShape="0">
               <a:srgbClr val="000000">
                 <a:alpha val="13000"/>
               </a:srgbClr>
             </a:outerShdw>
           </a:effectLst>
         </p:spPr>
+        <p:txBody>
+          <a:bodyPr/>
+          <a:lstStyle/>
+          <a:p>
+            <a:endParaRPr lang="en-US"/>
+          </a:p>
+        </p:txBody>
       </p:sp>
       <p:sp>
         <p:nvSpPr>
@@ -8421,6 +8112,13 @@
           </a:solidFill>
           <a:ln/>
         </p:spPr>
+        <p:txBody>
+          <a:bodyPr/>
+          <a:lstStyle/>
+          <a:p>
+            <a:endParaRPr lang="en-US"/>
+          </a:p>
+        </p:txBody>
       </p:sp>
       <p:sp>
         <p:nvSpPr>
@@ -8443,7 +8141,7 @@
           <a:bodyPr wrap="square" lIns="0" tIns="0" rIns="0" bIns="0" rtlCol="0" anchor="ctr"/>
           <a:lstStyle/>
           <a:p>
-            <a:pPr algn="ctr" indent="0" marL="0">
+            <a:pPr marL="0" indent="0" algn="ctr">
               <a:buNone/>
             </a:pPr>
             <a:r>
@@ -8482,7 +8180,7 @@
           <a:bodyPr wrap="square" lIns="0" tIns="0" rIns="0" bIns="0" rtlCol="0" anchor="t"/>
           <a:lstStyle/>
           <a:p>
-            <a:pPr indent="0" marL="0">
+            <a:pPr marL="0" indent="0">
               <a:lnSpc>
                 <a:spcPct val="102000"/>
               </a:lnSpc>
@@ -8500,12 +8198,6 @@
               <a:t>Higher VCM price (p)
 </a:t>
             </a:r>
-            <a:pPr indent="0" marL="0">
-              <a:lnSpc>
-                <a:spcPct val="102000"/>
-              </a:lnSpc>
-              <a:buNone/>
-            </a:pPr>
             <a:r>
               <a:rPr lang="en-US" sz="1250" dirty="0">
                 <a:solidFill>
@@ -8547,13 +8239,20 @@
             <a:prstDash val="solid"/>
           </a:ln>
           <a:effectLst>
-            <a:outerShdw sx="100000" sy="100000" kx="0" ky="0" algn="bl" rotWithShape="0" blurRad="88900" dist="38100" dir="5400000">
+            <a:outerShdw blurRad="88900" dist="38100" dir="5400000" algn="bl" rotWithShape="0">
               <a:srgbClr val="000000">
                 <a:alpha val="13000"/>
               </a:srgbClr>
             </a:outerShdw>
           </a:effectLst>
         </p:spPr>
+        <p:txBody>
+          <a:bodyPr/>
+          <a:lstStyle/>
+          <a:p>
+            <a:endParaRPr lang="en-US"/>
+          </a:p>
+        </p:txBody>
       </p:sp>
       <p:sp>
         <p:nvSpPr>
@@ -8574,6 +8273,13 @@
           </a:solidFill>
           <a:ln/>
         </p:spPr>
+        <p:txBody>
+          <a:bodyPr/>
+          <a:lstStyle/>
+          <a:p>
+            <a:endParaRPr lang="en-US"/>
+          </a:p>
+        </p:txBody>
       </p:sp>
       <p:sp>
         <p:nvSpPr>
@@ -8596,7 +8302,7 @@
           <a:bodyPr wrap="square" lIns="0" tIns="0" rIns="0" bIns="0" rtlCol="0" anchor="ctr"/>
           <a:lstStyle/>
           <a:p>
-            <a:pPr algn="ctr" indent="0" marL="0">
+            <a:pPr marL="0" indent="0" algn="ctr">
               <a:buNone/>
             </a:pPr>
             <a:r>
@@ -8635,7 +8341,7 @@
           <a:bodyPr wrap="square" lIns="0" tIns="0" rIns="0" bIns="0" rtlCol="0" anchor="t"/>
           <a:lstStyle/>
           <a:p>
-            <a:pPr indent="0" marL="0">
+            <a:pPr marL="0" indent="0">
               <a:lnSpc>
                 <a:spcPct val="102000"/>
               </a:lnSpc>
@@ -8653,12 +8359,6 @@
               <a:t>Lower delivered cost (C)
 </a:t>
             </a:r>
-            <a:pPr indent="0" marL="0">
-              <a:lnSpc>
-                <a:spcPct val="102000"/>
-              </a:lnSpc>
-              <a:buNone/>
-            </a:pPr>
             <a:r>
               <a:rPr lang="en-US" sz="1250" dirty="0">
                 <a:solidFill>
@@ -8700,13 +8400,20 @@
             <a:prstDash val="solid"/>
           </a:ln>
           <a:effectLst>
-            <a:outerShdw sx="100000" sy="100000" kx="0" ky="0" algn="bl" rotWithShape="0" blurRad="88900" dist="38100" dir="5400000">
+            <a:outerShdw blurRad="88900" dist="38100" dir="5400000" algn="bl" rotWithShape="0">
               <a:srgbClr val="000000">
                 <a:alpha val="13000"/>
               </a:srgbClr>
             </a:outerShdw>
           </a:effectLst>
         </p:spPr>
+        <p:txBody>
+          <a:bodyPr/>
+          <a:lstStyle/>
+          <a:p>
+            <a:endParaRPr lang="en-US"/>
+          </a:p>
+        </p:txBody>
       </p:sp>
       <p:sp>
         <p:nvSpPr>
@@ -8727,6 +8434,13 @@
           </a:solidFill>
           <a:ln/>
         </p:spPr>
+        <p:txBody>
+          <a:bodyPr/>
+          <a:lstStyle/>
+          <a:p>
+            <a:endParaRPr lang="en-US"/>
+          </a:p>
+        </p:txBody>
       </p:sp>
       <p:sp>
         <p:nvSpPr>
@@ -8749,7 +8463,7 @@
           <a:bodyPr wrap="square" lIns="0" tIns="0" rIns="0" bIns="0" rtlCol="0" anchor="ctr"/>
           <a:lstStyle/>
           <a:p>
-            <a:pPr algn="ctr" indent="0" marL="0">
+            <a:pPr marL="0" indent="0" algn="ctr">
               <a:buNone/>
             </a:pPr>
             <a:r>
@@ -8788,7 +8502,7 @@
           <a:bodyPr wrap="square" lIns="0" tIns="0" rIns="0" bIns="0" rtlCol="0" anchor="t"/>
           <a:lstStyle/>
           <a:p>
-            <a:pPr indent="0" marL="0">
+            <a:pPr marL="0" indent="0">
               <a:lnSpc>
                 <a:spcPct val="102000"/>
               </a:lnSpc>
@@ -8806,12 +8520,6 @@
               <a:t>More durable CDR per tonne
 </a:t>
             </a:r>
-            <a:pPr indent="0" marL="0">
-              <a:lnSpc>
-                <a:spcPct val="102000"/>
-              </a:lnSpc>
-              <a:buNone/>
-            </a:pPr>
             <a:r>
               <a:rPr lang="en-US" sz="1250" dirty="0">
                 <a:solidFill>
@@ -8848,7 +8556,7 @@
           <a:bodyPr wrap="square" lIns="0" tIns="0" rIns="0" bIns="0" rtlCol="0" anchor="ctr"/>
           <a:lstStyle/>
           <a:p>
-            <a:pPr algn="l" indent="0" marL="0">
+            <a:pPr marL="0" indent="0" algn="l">
               <a:buNone/>
             </a:pPr>
             <a:r>
@@ -8860,21 +8568,7 @@
                 <a:ea typeface="Calibri" pitchFamily="34" charset="-122"/>
                 <a:cs typeface="Calibri" pitchFamily="34" charset="-120"/>
               </a:rPr>
-              <a:t>Enhanced Rock Weathering — public &amp; private returns in SSA</a:t>
-            </a:r>
-            <a:pPr algn="l" indent="0" marL="0">
-              <a:buNone/>
-            </a:pPr>
-            <a:r>
-              <a:rPr lang="en-US" sz="900" dirty="0">
-                <a:solidFill>
-                  <a:srgbClr val="5B6B73"/>
-                </a:solidFill>
-                <a:latin typeface="Calibri" pitchFamily="34" charset="0"/>
-                <a:ea typeface="Calibri" pitchFamily="34" charset="-122"/>
-                <a:cs typeface="Calibri" pitchFamily="34" charset="-120"/>
-              </a:rPr>
-              <a:t>   ·   Gebrekidan &amp; Chamberlin (2026)</a:t>
+              <a:t>Enhanced Rock Weathering — public &amp; private returns in SSA   ·   Gebrekidan &amp; Chamberlin (2026)</a:t>
             </a:r>
             <a:endParaRPr lang="en-US" sz="900" dirty="0"/>
           </a:p>
@@ -8901,7 +8595,7 @@
           <a:bodyPr wrap="square" lIns="0" tIns="0" rIns="0" bIns="0" rtlCol="0" anchor="ctr"/>
           <a:lstStyle/>
           <a:p>
-            <a:pPr algn="r" indent="0" marL="0">
+            <a:pPr marL="0" indent="0" algn="r">
               <a:buNone/>
             </a:pPr>
             <a:r>
@@ -8935,6 +8629,7 @@
         <a:solidFill>
           <a:srgbClr val="FFFFFF"/>
         </a:solidFill>
+        <a:effectLst/>
       </p:bgPr>
     </p:bg>
     <p:spTree>
@@ -8972,11 +8667,11 @@
           <a:bodyPr wrap="square" lIns="0" tIns="0" rIns="0" bIns="0" rtlCol="0" anchor="ctr"/>
           <a:lstStyle/>
           <a:p>
-            <a:pPr indent="0" marL="0">
-              <a:buNone/>
-            </a:pPr>
-            <a:r>
-              <a:rPr lang="en-US" sz="1200" b="1" spc="200" kern="0" dirty="0">
+            <a:pPr marL="0" indent="0">
+              <a:buNone/>
+            </a:pPr>
+            <a:r>
+              <a:rPr lang="en-US" sz="1200" b="1" kern="0" spc="200" dirty="0">
                 <a:solidFill>
                   <a:srgbClr val="0F6E63"/>
                 </a:solidFill>
@@ -9011,7 +8706,7 @@
           <a:bodyPr wrap="square" lIns="0" tIns="0" rIns="0" bIns="0" rtlCol="0" anchor="ctr"/>
           <a:lstStyle/>
           <a:p>
-            <a:pPr indent="0" marL="0">
+            <a:pPr marL="0" indent="0">
               <a:buNone/>
             </a:pPr>
             <a:r>
@@ -9031,15 +8726,15 @@
       </p:sp>
       <p:pic>
         <p:nvPicPr>
-          <p:cNvPr id="4" name="Image 0" descr="img/revised_schematic_returns.png">    </p:cNvPr>
+          <p:cNvPr id="4" name="Image 0" descr="img/revised_schematic_returns.png"/>
           <p:cNvPicPr>
             <a:picLocks noChangeAspect="1"/>
           </p:cNvPicPr>
           <p:nvPr/>
         </p:nvPicPr>
         <p:blipFill>
-          <a:blip r:embed="rId1"/>
-          <a:srcRect l="0" r="0" t="0" b="0"/>
+          <a:blip r:embed="rId3"/>
+          <a:srcRect/>
           <a:stretch/>
         </p:blipFill>
         <p:spPr>
@@ -9073,7 +8768,7 @@
           <a:bodyPr wrap="square" lIns="0" tIns="0" rIns="0" bIns="0" rtlCol="0" anchor="ctr"/>
           <a:lstStyle/>
           <a:p>
-            <a:pPr indent="0" marL="0">
+            <a:pPr marL="0" indent="0">
               <a:buNone/>
             </a:pPr>
             <a:r>
@@ -9117,13 +8812,20 @@
             <a:prstDash val="solid"/>
           </a:ln>
           <a:effectLst>
-            <a:outerShdw sx="100000" sy="100000" kx="0" ky="0" algn="bl" rotWithShape="0" blurRad="88900" dist="38100" dir="5400000">
+            <a:outerShdw blurRad="88900" dist="38100" dir="5400000" algn="bl" rotWithShape="0">
               <a:srgbClr val="000000">
                 <a:alpha val="13000"/>
               </a:srgbClr>
             </a:outerShdw>
           </a:effectLst>
         </p:spPr>
+        <p:txBody>
+          <a:bodyPr/>
+          <a:lstStyle/>
+          <a:p>
+            <a:endParaRPr lang="en-US"/>
+          </a:p>
+        </p:txBody>
       </p:sp>
       <p:sp>
         <p:nvSpPr>
@@ -9146,7 +8848,7 @@
           <a:bodyPr wrap="square" lIns="0" tIns="0" rIns="0" bIns="0" rtlCol="0" anchor="t"/>
           <a:lstStyle/>
           <a:p>
-            <a:pPr indent="0" marL="0">
+            <a:pPr marL="0" indent="0">
               <a:lnSpc>
                 <a:spcPct val="102000"/>
               </a:lnSpc>
@@ -9164,12 +8866,6 @@
               <a:t>PRIVATE  —  agronomic
 </a:t>
             </a:r>
-            <a:pPr indent="0" marL="0">
-              <a:lnSpc>
-                <a:spcPct val="102000"/>
-              </a:lnSpc>
-              <a:buNone/>
-            </a:pPr>
             <a:r>
               <a:rPr lang="en-US" sz="1300" dirty="0">
                 <a:solidFill>
@@ -9211,13 +8907,20 @@
             <a:prstDash val="solid"/>
           </a:ln>
           <a:effectLst>
-            <a:outerShdw sx="100000" sy="100000" kx="0" ky="0" algn="bl" rotWithShape="0" blurRad="88900" dist="38100" dir="5400000">
+            <a:outerShdw blurRad="88900" dist="38100" dir="5400000" algn="bl" rotWithShape="0">
               <a:srgbClr val="000000">
                 <a:alpha val="13000"/>
               </a:srgbClr>
             </a:outerShdw>
           </a:effectLst>
         </p:spPr>
+        <p:txBody>
+          <a:bodyPr/>
+          <a:lstStyle/>
+          <a:p>
+            <a:endParaRPr lang="en-US"/>
+          </a:p>
+        </p:txBody>
       </p:sp>
       <p:sp>
         <p:nvSpPr>
@@ -9240,7 +8943,7 @@
           <a:bodyPr wrap="square" lIns="0" tIns="0" rIns="0" bIns="0" rtlCol="0" anchor="t"/>
           <a:lstStyle/>
           <a:p>
-            <a:pPr indent="0" marL="0">
+            <a:pPr marL="0" indent="0">
               <a:lnSpc>
                 <a:spcPct val="102000"/>
               </a:lnSpc>
@@ -9258,12 +8961,6 @@
               <a:t>PUBLIC  —  carbon (CDR)
 </a:t>
             </a:r>
-            <a:pPr indent="0" marL="0">
-              <a:lnSpc>
-                <a:spcPct val="102000"/>
-              </a:lnSpc>
-              <a:buNone/>
-            </a:pPr>
             <a:r>
               <a:rPr lang="en-US" sz="1300" dirty="0">
                 <a:solidFill>
@@ -9300,7 +8997,7 @@
           <a:bodyPr wrap="square" lIns="0" tIns="0" rIns="0" bIns="0" rtlCol="0" anchor="ctr"/>
           <a:lstStyle/>
           <a:p>
-            <a:pPr indent="0" marL="0">
+            <a:pPr marL="0" indent="0">
               <a:buNone/>
             </a:pPr>
             <a:r>
@@ -9339,7 +9036,7 @@
           <a:bodyPr wrap="square" lIns="0" tIns="0" rIns="0" bIns="0" rtlCol="0" anchor="ctr"/>
           <a:lstStyle/>
           <a:p>
-            <a:pPr algn="l" indent="0" marL="0">
+            <a:pPr marL="0" indent="0" algn="l">
               <a:buNone/>
             </a:pPr>
             <a:r>
@@ -9351,21 +9048,7 @@
                 <a:ea typeface="Calibri" pitchFamily="34" charset="-122"/>
                 <a:cs typeface="Calibri" pitchFamily="34" charset="-120"/>
               </a:rPr>
-              <a:t>Enhanced Rock Weathering — public &amp; private returns in SSA</a:t>
-            </a:r>
-            <a:pPr algn="l" indent="0" marL="0">
-              <a:buNone/>
-            </a:pPr>
-            <a:r>
-              <a:rPr lang="en-US" sz="900" dirty="0">
-                <a:solidFill>
-                  <a:srgbClr val="5B6B73"/>
-                </a:solidFill>
-                <a:latin typeface="Calibri" pitchFamily="34" charset="0"/>
-                <a:ea typeface="Calibri" pitchFamily="34" charset="-122"/>
-                <a:cs typeface="Calibri" pitchFamily="34" charset="-120"/>
-              </a:rPr>
-              <a:t>   ·   Gebrekidan &amp; Chamberlin (2026)</a:t>
+              <a:t>Enhanced Rock Weathering — public &amp; private returns in SSA   ·   Gebrekidan &amp; Chamberlin (2026)</a:t>
             </a:r>
             <a:endParaRPr lang="en-US" sz="900" dirty="0"/>
           </a:p>
@@ -9392,7 +9075,7 @@
           <a:bodyPr wrap="square" lIns="0" tIns="0" rIns="0" bIns="0" rtlCol="0" anchor="ctr"/>
           <a:lstStyle/>
           <a:p>
-            <a:pPr algn="r" indent="0" marL="0">
+            <a:pPr marL="0" indent="0" algn="r">
               <a:buNone/>
             </a:pPr>
             <a:r>
@@ -9426,6 +9109,7 @@
         <a:solidFill>
           <a:srgbClr val="FFFFFF"/>
         </a:solidFill>
+        <a:effectLst/>
       </p:bgPr>
     </p:bg>
     <p:spTree>
@@ -9463,11 +9147,11 @@
           <a:bodyPr wrap="square" lIns="0" tIns="0" rIns="0" bIns="0" rtlCol="0" anchor="ctr"/>
           <a:lstStyle/>
           <a:p>
-            <a:pPr indent="0" marL="0">
-              <a:buNone/>
-            </a:pPr>
-            <a:r>
-              <a:rPr lang="en-US" sz="1200" b="1" spc="200" kern="0" dirty="0">
+            <a:pPr marL="0" indent="0">
+              <a:buNone/>
+            </a:pPr>
+            <a:r>
+              <a:rPr lang="en-US" sz="1200" b="1" kern="0" spc="200" dirty="0">
                 <a:solidFill>
                   <a:srgbClr val="0F6E63"/>
                 </a:solidFill>
@@ -9502,7 +9186,7 @@
           <a:bodyPr wrap="square" lIns="0" tIns="0" rIns="0" bIns="0" rtlCol="0" anchor="ctr"/>
           <a:lstStyle/>
           <a:p>
-            <a:pPr indent="0" marL="0">
+            <a:pPr marL="0" indent="0">
               <a:buNone/>
             </a:pPr>
             <a:r>
@@ -9522,15 +9206,15 @@
       </p:sp>
       <p:pic>
         <p:nvPicPr>
-          <p:cNvPr id="4" name="Image 0" descr="img/optrate_panel.png">    </p:cNvPr>
+          <p:cNvPr id="4" name="Image 0" descr="img/optrate_panel.png"/>
           <p:cNvPicPr>
             <a:picLocks noChangeAspect="1"/>
           </p:cNvPicPr>
           <p:nvPr/>
         </p:nvPicPr>
         <p:blipFill>
-          <a:blip r:embed="rId1"/>
-          <a:srcRect l="0" r="0" t="0" b="0"/>
+          <a:blip r:embed="rId3"/>
+          <a:srcRect/>
           <a:stretch/>
         </p:blipFill>
         <p:spPr>
@@ -9564,7 +9248,7 @@
           <a:bodyPr wrap="square" lIns="0" tIns="0" rIns="0" bIns="0" rtlCol="0" anchor="t"/>
           <a:lstStyle/>
           <a:p>
-            <a:pPr indent="0" marL="0">
+            <a:pPr marL="0" indent="0">
               <a:lnSpc>
                 <a:spcPct val="105000"/>
               </a:lnSpc>
@@ -9581,12 +9265,6 @@
               </a:rPr>
               <a:t>With both refinements, each per-pixel objective is concave — so a pixel-specific </a:t>
             </a:r>
-            <a:pPr indent="0" marL="0">
-              <a:lnSpc>
-                <a:spcPct val="105000"/>
-              </a:lnSpc>
-              <a:buNone/>
-            </a:pPr>
             <a:r>
               <a:rPr lang="en-US" sz="1400" b="1" dirty="0">
                 <a:solidFill>
@@ -9598,12 +9276,6 @@
               </a:rPr>
               <a:t>optimal rate</a:t>
             </a:r>
-            <a:pPr indent="0" marL="0">
-              <a:lnSpc>
-                <a:spcPct val="105000"/>
-              </a:lnSpc>
-              <a:buNone/>
-            </a:pPr>
             <a:r>
               <a:rPr lang="en-US" sz="1400" dirty="0">
                 <a:solidFill>
@@ -9640,7 +9312,7 @@
           <a:bodyPr wrap="square" lIns="0" tIns="0" rIns="0" bIns="0" rtlCol="0" anchor="ctr"/>
           <a:lstStyle/>
           <a:p>
-            <a:pPr algn="l" indent="0" marL="0">
+            <a:pPr marL="0" indent="0" algn="l">
               <a:buNone/>
             </a:pPr>
             <a:r>
@@ -9652,21 +9324,7 @@
                 <a:ea typeface="Calibri" pitchFamily="34" charset="-122"/>
                 <a:cs typeface="Calibri" pitchFamily="34" charset="-120"/>
               </a:rPr>
-              <a:t>Enhanced Rock Weathering — public &amp; private returns in SSA</a:t>
-            </a:r>
-            <a:pPr algn="l" indent="0" marL="0">
-              <a:buNone/>
-            </a:pPr>
-            <a:r>
-              <a:rPr lang="en-US" sz="900" dirty="0">
-                <a:solidFill>
-                  <a:srgbClr val="5B6B73"/>
-                </a:solidFill>
-                <a:latin typeface="Calibri" pitchFamily="34" charset="0"/>
-                <a:ea typeface="Calibri" pitchFamily="34" charset="-122"/>
-                <a:cs typeface="Calibri" pitchFamily="34" charset="-120"/>
-              </a:rPr>
-              <a:t>   ·   Gebrekidan &amp; Chamberlin (2026)</a:t>
+              <a:t>Enhanced Rock Weathering — public &amp; private returns in SSA   ·   Gebrekidan &amp; Chamberlin (2026)</a:t>
             </a:r>
             <a:endParaRPr lang="en-US" sz="900" dirty="0"/>
           </a:p>
@@ -9693,7 +9351,7 @@
           <a:bodyPr wrap="square" lIns="0" tIns="0" rIns="0" bIns="0" rtlCol="0" anchor="ctr"/>
           <a:lstStyle/>
           <a:p>
-            <a:pPr algn="r" indent="0" marL="0">
+            <a:pPr marL="0" indent="0" algn="r">
               <a:buNone/>
             </a:pPr>
             <a:r>
@@ -9727,6 +9385,7 @@
         <a:solidFill>
           <a:srgbClr val="FFFFFF"/>
         </a:solidFill>
+        <a:effectLst/>
       </p:bgPr>
     </p:bg>
     <p:spTree>
@@ -9764,11 +9423,11 @@
           <a:bodyPr wrap="square" lIns="0" tIns="0" rIns="0" bIns="0" rtlCol="0" anchor="ctr"/>
           <a:lstStyle/>
           <a:p>
-            <a:pPr indent="0" marL="0">
-              <a:buNone/>
-            </a:pPr>
-            <a:r>
-              <a:rPr lang="en-US" sz="1200" b="1" spc="200" kern="0" dirty="0">
+            <a:pPr marL="0" indent="0">
+              <a:buNone/>
+            </a:pPr>
+            <a:r>
+              <a:rPr lang="en-US" sz="1200" b="1" kern="0" spc="200" dirty="0">
                 <a:solidFill>
                   <a:srgbClr val="0F6E63"/>
                 </a:solidFill>
@@ -9803,7 +9462,7 @@
           <a:bodyPr wrap="square" lIns="0" tIns="0" rIns="0" bIns="0" rtlCol="0" anchor="ctr"/>
           <a:lstStyle/>
           <a:p>
-            <a:pPr indent="0" marL="0">
+            <a:pPr marL="0" indent="0">
               <a:buNone/>
             </a:pPr>
             <a:r>
@@ -9823,15 +9482,15 @@
       </p:sp>
       <p:pic>
         <p:nvPicPr>
-          <p:cNvPr id="4" name="Image 0" descr="img/core_priority.png">    </p:cNvPr>
+          <p:cNvPr id="4" name="Image 0" descr="img/core_priority.png"/>
           <p:cNvPicPr>
             <a:picLocks noChangeAspect="1"/>
           </p:cNvPicPr>
           <p:nvPr/>
         </p:nvPicPr>
         <p:blipFill>
-          <a:blip r:embed="rId1"/>
-          <a:srcRect l="0" r="0" t="0" b="0"/>
+          <a:blip r:embed="rId3"/>
+          <a:srcRect/>
           <a:stretch/>
         </p:blipFill>
         <p:spPr>
@@ -9865,7 +9524,7 @@
           <a:bodyPr wrap="square" lIns="0" tIns="0" rIns="0" bIns="0" rtlCol="0" anchor="ctr"/>
           <a:lstStyle/>
           <a:p>
-            <a:pPr indent="0" marL="0">
+            <a:pPr marL="0" indent="0">
               <a:buNone/>
             </a:pPr>
             <a:r>
@@ -9909,13 +9568,20 @@
             <a:prstDash val="solid"/>
           </a:ln>
           <a:effectLst>
-            <a:outerShdw sx="100000" sy="100000" kx="0" ky="0" algn="bl" rotWithShape="0" blurRad="88900" dist="38100" dir="5400000">
+            <a:outerShdw blurRad="88900" dist="38100" dir="5400000" algn="bl" rotWithShape="0">
               <a:srgbClr val="000000">
                 <a:alpha val="13000"/>
               </a:srgbClr>
             </a:outerShdw>
           </a:effectLst>
         </p:spPr>
+        <p:txBody>
+          <a:bodyPr/>
+          <a:lstStyle/>
+          <a:p>
+            <a:endParaRPr lang="en-US"/>
+          </a:p>
+        </p:txBody>
       </p:sp>
       <p:sp>
         <p:nvSpPr>
@@ -9938,7 +9604,7 @@
           <a:bodyPr wrap="square" lIns="0" tIns="0" rIns="0" bIns="0" rtlCol="0" anchor="ctr"/>
           <a:lstStyle/>
           <a:p>
-            <a:pPr indent="0" marL="0">
+            <a:pPr marL="0" indent="0">
               <a:buNone/>
             </a:pPr>
             <a:r>
@@ -9977,7 +9643,7 @@
           <a:bodyPr wrap="square" lIns="0" tIns="0" rIns="0" bIns="0" rtlCol="0" anchor="ctr"/>
           <a:lstStyle/>
           <a:p>
-            <a:pPr indent="0" marL="0">
+            <a:pPr marL="0" indent="0">
               <a:buNone/>
             </a:pPr>
             <a:r>
@@ -10021,13 +9687,20 @@
             <a:prstDash val="solid"/>
           </a:ln>
           <a:effectLst>
-            <a:outerShdw sx="100000" sy="100000" kx="0" ky="0" algn="bl" rotWithShape="0" blurRad="88900" dist="38100" dir="5400000">
+            <a:outerShdw blurRad="88900" dist="38100" dir="5400000" algn="bl" rotWithShape="0">
               <a:srgbClr val="000000">
                 <a:alpha val="13000"/>
               </a:srgbClr>
             </a:outerShdw>
           </a:effectLst>
         </p:spPr>
+        <p:txBody>
+          <a:bodyPr/>
+          <a:lstStyle/>
+          <a:p>
+            <a:endParaRPr lang="en-US"/>
+          </a:p>
+        </p:txBody>
       </p:sp>
       <p:sp>
         <p:nvSpPr>
@@ -10050,7 +9723,7 @@
           <a:bodyPr wrap="square" lIns="0" tIns="0" rIns="0" bIns="0" rtlCol="0" anchor="ctr"/>
           <a:lstStyle/>
           <a:p>
-            <a:pPr indent="0" marL="0">
+            <a:pPr marL="0" indent="0">
               <a:buNone/>
             </a:pPr>
             <a:r>
@@ -10089,7 +9762,7 @@
           <a:bodyPr wrap="square" lIns="0" tIns="0" rIns="0" bIns="0" rtlCol="0" anchor="ctr"/>
           <a:lstStyle/>
           <a:p>
-            <a:pPr indent="0" marL="0">
+            <a:pPr marL="0" indent="0">
               <a:buNone/>
             </a:pPr>
             <a:r>
@@ -10133,13 +9806,20 @@
             <a:prstDash val="solid"/>
           </a:ln>
           <a:effectLst>
-            <a:outerShdw sx="100000" sy="100000" kx="0" ky="0" algn="bl" rotWithShape="0" blurRad="88900" dist="38100" dir="5400000">
+            <a:outerShdw blurRad="88900" dist="38100" dir="5400000" algn="bl" rotWithShape="0">
               <a:srgbClr val="000000">
                 <a:alpha val="13000"/>
               </a:srgbClr>
             </a:outerShdw>
           </a:effectLst>
         </p:spPr>
+        <p:txBody>
+          <a:bodyPr/>
+          <a:lstStyle/>
+          <a:p>
+            <a:endParaRPr lang="en-US"/>
+          </a:p>
+        </p:txBody>
       </p:sp>
       <p:sp>
         <p:nvSpPr>
@@ -10162,7 +9842,7 @@
           <a:bodyPr wrap="square" lIns="0" tIns="0" rIns="0" bIns="0" rtlCol="0" anchor="ctr"/>
           <a:lstStyle/>
           <a:p>
-            <a:pPr indent="0" marL="0">
+            <a:pPr marL="0" indent="0">
               <a:buNone/>
             </a:pPr>
             <a:r>
@@ -10201,7 +9881,7 @@
           <a:bodyPr wrap="square" lIns="0" tIns="0" rIns="0" bIns="0" rtlCol="0" anchor="ctr"/>
           <a:lstStyle/>
           <a:p>
-            <a:pPr indent="0" marL="0">
+            <a:pPr marL="0" indent="0">
               <a:buNone/>
             </a:pPr>
             <a:r>
@@ -10240,7 +9920,7 @@
           <a:bodyPr wrap="square" lIns="0" tIns="0" rIns="0" bIns="0" rtlCol="0" anchor="ctr"/>
           <a:lstStyle/>
           <a:p>
-            <a:pPr indent="0" marL="0">
+            <a:pPr marL="0" indent="0">
               <a:buNone/>
             </a:pPr>
             <a:r>
@@ -10279,7 +9959,7 @@
           <a:bodyPr wrap="square" lIns="0" tIns="0" rIns="0" bIns="0" rtlCol="0" anchor="ctr"/>
           <a:lstStyle/>
           <a:p>
-            <a:pPr algn="l" indent="0" marL="0">
+            <a:pPr marL="0" indent="0" algn="l">
               <a:buNone/>
             </a:pPr>
             <a:r>
@@ -10291,21 +9971,7 @@
                 <a:ea typeface="Calibri" pitchFamily="34" charset="-122"/>
                 <a:cs typeface="Calibri" pitchFamily="34" charset="-120"/>
               </a:rPr>
-              <a:t>Enhanced Rock Weathering — public &amp; private returns in SSA</a:t>
-            </a:r>
-            <a:pPr algn="l" indent="0" marL="0">
-              <a:buNone/>
-            </a:pPr>
-            <a:r>
-              <a:rPr lang="en-US" sz="900" dirty="0">
-                <a:solidFill>
-                  <a:srgbClr val="5B6B73"/>
-                </a:solidFill>
-                <a:latin typeface="Calibri" pitchFamily="34" charset="0"/>
-                <a:ea typeface="Calibri" pitchFamily="34" charset="-122"/>
-                <a:cs typeface="Calibri" pitchFamily="34" charset="-120"/>
-              </a:rPr>
-              <a:t>   ·   Gebrekidan &amp; Chamberlin (2026)</a:t>
+              <a:t>Enhanced Rock Weathering — public &amp; private returns in SSA   ·   Gebrekidan &amp; Chamberlin (2026)</a:t>
             </a:r>
             <a:endParaRPr lang="en-US" sz="900" dirty="0"/>
           </a:p>
@@ -10332,7 +9998,7 @@
           <a:bodyPr wrap="square" lIns="0" tIns="0" rIns="0" bIns="0" rtlCol="0" anchor="ctr"/>
           <a:lstStyle/>
           <a:p>
-            <a:pPr algn="r" indent="0" marL="0">
+            <a:pPr marL="0" indent="0" algn="r">
               <a:buNone/>
             </a:pPr>
             <a:r>
@@ -10366,6 +10032,7 @@
         <a:solidFill>
           <a:srgbClr val="14232B"/>
         </a:solidFill>
+        <a:effectLst/>
       </p:bgPr>
     </p:bg>
     <p:spTree>
@@ -10403,11 +10070,11 @@
           <a:bodyPr wrap="square" lIns="0" tIns="0" rIns="0" bIns="0" rtlCol="0" anchor="ctr"/>
           <a:lstStyle/>
           <a:p>
-            <a:pPr indent="0" marL="0">
-              <a:buNone/>
-            </a:pPr>
-            <a:r>
-              <a:rPr lang="en-US" sz="1400" b="1" spc="300" kern="0" dirty="0">
+            <a:pPr marL="0" indent="0">
+              <a:buNone/>
+            </a:pPr>
+            <a:r>
+              <a:rPr lang="en-US" sz="1400" b="1" kern="0" spc="300" dirty="0">
                 <a:solidFill>
                   <a:srgbClr val="E8843C"/>
                 </a:solidFill>
@@ -10442,7 +10109,7 @@
           <a:bodyPr wrap="square" lIns="0" tIns="0" rIns="0" bIns="0" rtlCol="0" anchor="ctr"/>
           <a:lstStyle/>
           <a:p>
-            <a:pPr indent="0" marL="0">
+            <a:pPr marL="0" indent="0">
               <a:buNone/>
             </a:pPr>
             <a:r>
@@ -10479,6 +10146,13 @@
           </a:solidFill>
           <a:ln/>
         </p:spPr>
+        <p:txBody>
+          <a:bodyPr/>
+          <a:lstStyle/>
+          <a:p>
+            <a:endParaRPr lang="en-US"/>
+          </a:p>
+        </p:txBody>
       </p:sp>
       <p:sp>
         <p:nvSpPr>
@@ -10501,7 +10175,7 @@
           <a:bodyPr wrap="square" lIns="0" tIns="0" rIns="0" bIns="0" rtlCol="0" anchor="ctr"/>
           <a:lstStyle/>
           <a:p>
-            <a:pPr algn="ctr" indent="0" marL="0">
+            <a:pPr marL="0" indent="0" algn="ctr">
               <a:buNone/>
             </a:pPr>
             <a:r>
@@ -10540,7 +10214,7 @@
           <a:bodyPr wrap="square" lIns="0" tIns="0" rIns="0" bIns="0" rtlCol="0" anchor="t"/>
           <a:lstStyle/>
           <a:p>
-            <a:pPr indent="0" marL="0">
+            <a:pPr marL="0" indent="0">
               <a:lnSpc>
                 <a:spcPct val="102000"/>
               </a:lnSpc>
@@ -10558,13 +10232,127 @@
               <a:t>The two returns rarely each suffice alone
 </a:t>
             </a:r>
-            <a:pPr indent="0" marL="0">
+            <a:r>
+              <a:rPr lang="en-US" sz="1300" dirty="0">
+                <a:solidFill>
+                  <a:srgbClr val="AEC0C5"/>
+                </a:solidFill>
+                <a:latin typeface="Calibri" pitchFamily="34" charset="0"/>
+                <a:ea typeface="Calibri" pitchFamily="34" charset="-122"/>
+                <a:cs typeface="Calibri" pitchFamily="34" charset="-120"/>
+              </a:rPr>
+              <a:t>But together they make a meaningful area of SSA cropland profitable that neither would — the 2.1 Mha combined-only band.</a:t>
+            </a:r>
+            <a:endParaRPr lang="en-US" sz="1600" dirty="0"/>
+          </a:p>
+        </p:txBody>
+      </p:sp>
+      <p:sp>
+        <p:nvSpPr>
+          <p:cNvPr id="7" name="Shape 5"/>
+          <p:cNvSpPr/>
+          <p:nvPr/>
+        </p:nvSpPr>
+        <p:spPr>
+          <a:xfrm>
+            <a:off x="822960" y="3227832"/>
+            <a:ext cx="457200" cy="457200"/>
+          </a:xfrm>
+          <a:prstGeom prst="ellipse">
+            <a:avLst/>
+          </a:prstGeom>
+          <a:solidFill>
+            <a:srgbClr val="E8843C"/>
+          </a:solidFill>
+          <a:ln/>
+        </p:spPr>
+        <p:txBody>
+          <a:bodyPr/>
+          <a:lstStyle/>
+          <a:p>
+            <a:endParaRPr lang="en-US"/>
+          </a:p>
+        </p:txBody>
+      </p:sp>
+      <p:sp>
+        <p:nvSpPr>
+          <p:cNvPr id="8" name="Text 6"/>
+          <p:cNvSpPr/>
+          <p:nvPr/>
+        </p:nvSpPr>
+        <p:spPr>
+          <a:xfrm>
+            <a:off x="822960" y="3227832"/>
+            <a:ext cx="457200" cy="457200"/>
+          </a:xfrm>
+          <a:prstGeom prst="rect">
+            <a:avLst/>
+          </a:prstGeom>
+          <a:noFill/>
+          <a:ln/>
+        </p:spPr>
+        <p:txBody>
+          <a:bodyPr wrap="square" lIns="0" tIns="0" rIns="0" bIns="0" rtlCol="0" anchor="ctr"/>
+          <a:lstStyle/>
+          <a:p>
+            <a:pPr marL="0" indent="0" algn="ctr">
+              <a:buNone/>
+            </a:pPr>
+            <a:r>
+              <a:rPr lang="en-US" sz="1700" b="1" dirty="0">
+                <a:solidFill>
+                  <a:srgbClr val="14232B"/>
+                </a:solidFill>
+                <a:latin typeface="Cambria" pitchFamily="34" charset="0"/>
+                <a:ea typeface="Cambria" pitchFamily="34" charset="-122"/>
+                <a:cs typeface="Cambria" pitchFamily="34" charset="-120"/>
+              </a:rPr>
+              <a:t>2</a:t>
+            </a:r>
+            <a:endParaRPr lang="en-US" sz="1700" dirty="0"/>
+          </a:p>
+        </p:txBody>
+      </p:sp>
+      <p:sp>
+        <p:nvSpPr>
+          <p:cNvPr id="9" name="Text 7"/>
+          <p:cNvSpPr/>
+          <p:nvPr/>
+        </p:nvSpPr>
+        <p:spPr>
+          <a:xfrm>
+            <a:off x="1463040" y="3154680"/>
+            <a:ext cx="10058400" cy="1005840"/>
+          </a:xfrm>
+          <a:prstGeom prst="rect">
+            <a:avLst/>
+          </a:prstGeom>
+          <a:noFill/>
+          <a:ln/>
+        </p:spPr>
+        <p:txBody>
+          <a:bodyPr wrap="square" lIns="0" tIns="0" rIns="0" bIns="0" rtlCol="0" anchor="t"/>
+          <a:lstStyle/>
+          <a:p>
+            <a:pPr marL="0" indent="0">
               <a:lnSpc>
                 <a:spcPct val="102000"/>
               </a:lnSpc>
               <a:buNone/>
             </a:pPr>
             <a:r>
+              <a:rPr lang="en-US" sz="1600" b="1" dirty="0">
+                <a:solidFill>
+                  <a:srgbClr val="FFFFFF"/>
+                </a:solidFill>
+                <a:latin typeface="Calibri" pitchFamily="34" charset="0"/>
+                <a:ea typeface="Calibri" pitchFamily="34" charset="-122"/>
+                <a:cs typeface="Calibri" pitchFamily="34" charset="-120"/>
+              </a:rPr>
+              <a:t>Carbon finance is the margin, not a bonus
+</a:t>
+            </a:r>
+            <a:r>
               <a:rPr lang="en-US" sz="1300" dirty="0">
                 <a:solidFill>
                   <a:srgbClr val="AEC0C5"/>
@@ -10573,7 +10361,7 @@
                 <a:ea typeface="Calibri" pitchFamily="34" charset="-122"/>
                 <a:cs typeface="Calibri" pitchFamily="34" charset="-120"/>
               </a:rPr>
-              <a:t>But together they make a meaningful area of SSA cropland profitable that neither would — the 2.1 Mha combined-only band.</a:t>
+              <a:t>On most viable land, VCM revenue is what unlocks a yield-improving investment. That reframes ERW away from a pure CDR supply curve.</a:t>
             </a:r>
             <a:endParaRPr lang="en-US" sz="1600" dirty="0"/>
           </a:p>
@@ -10581,13 +10369,13 @@
       </p:sp>
       <p:sp>
         <p:nvSpPr>
-          <p:cNvPr id="7" name="Shape 5"/>
-          <p:cNvSpPr/>
-          <p:nvPr/>
-        </p:nvSpPr>
-        <p:spPr>
-          <a:xfrm>
-            <a:off x="822960" y="3227832"/>
+          <p:cNvPr id="10" name="Shape 8"/>
+          <p:cNvSpPr/>
+          <p:nvPr/>
+        </p:nvSpPr>
+        <p:spPr>
+          <a:xfrm>
+            <a:off x="822960" y="4306824"/>
             <a:ext cx="457200" cy="457200"/>
           </a:xfrm>
           <a:prstGeom prst="ellipse">
@@ -10598,16 +10386,23 @@
           </a:solidFill>
           <a:ln/>
         </p:spPr>
-      </p:sp>
-      <p:sp>
-        <p:nvSpPr>
-          <p:cNvPr id="8" name="Text 6"/>
-          <p:cNvSpPr/>
-          <p:nvPr/>
-        </p:nvSpPr>
-        <p:spPr>
-          <a:xfrm>
-            <a:off x="822960" y="3227832"/>
+        <p:txBody>
+          <a:bodyPr/>
+          <a:lstStyle/>
+          <a:p>
+            <a:endParaRPr lang="en-US"/>
+          </a:p>
+        </p:txBody>
+      </p:sp>
+      <p:sp>
+        <p:nvSpPr>
+          <p:cNvPr id="11" name="Text 9"/>
+          <p:cNvSpPr/>
+          <p:nvPr/>
+        </p:nvSpPr>
+        <p:spPr>
+          <a:xfrm>
+            <a:off x="822960" y="4306824"/>
             <a:ext cx="457200" cy="457200"/>
           </a:xfrm>
           <a:prstGeom prst="rect">
@@ -10620,7 +10415,7 @@
           <a:bodyPr wrap="square" lIns="0" tIns="0" rIns="0" bIns="0" rtlCol="0" anchor="ctr"/>
           <a:lstStyle/>
           <a:p>
-            <a:pPr algn="ctr" indent="0" marL="0">
+            <a:pPr marL="0" indent="0" algn="ctr">
               <a:buNone/>
             </a:pPr>
             <a:r>
@@ -10632,7 +10427,7 @@
                 <a:ea typeface="Cambria" pitchFamily="34" charset="-122"/>
                 <a:cs typeface="Cambria" pitchFamily="34" charset="-120"/>
               </a:rPr>
-              <a:t>2</a:t>
+              <a:t>3</a:t>
             </a:r>
             <a:endParaRPr lang="en-US" sz="1700" dirty="0"/>
           </a:p>
@@ -10640,13 +10435,13 @@
       </p:sp>
       <p:sp>
         <p:nvSpPr>
-          <p:cNvPr id="9" name="Text 7"/>
-          <p:cNvSpPr/>
-          <p:nvPr/>
-        </p:nvSpPr>
-        <p:spPr>
-          <a:xfrm>
-            <a:off x="1463040" y="3154680"/>
+          <p:cNvPr id="12" name="Text 10"/>
+          <p:cNvSpPr/>
+          <p:nvPr/>
+        </p:nvSpPr>
+        <p:spPr>
+          <a:xfrm>
+            <a:off x="1463040" y="4233672"/>
             <a:ext cx="10058400" cy="1005840"/>
           </a:xfrm>
           <a:prstGeom prst="rect">
@@ -10659,7 +10454,7 @@
           <a:bodyPr wrap="square" lIns="0" tIns="0" rIns="0" bIns="0" rtlCol="0" anchor="t"/>
           <a:lstStyle/>
           <a:p>
-            <a:pPr indent="0" marL="0">
+            <a:pPr marL="0" indent="0">
               <a:lnSpc>
                 <a:spcPct val="102000"/>
               </a:lnSpc>
@@ -10674,236 +10469,118 @@
                 <a:ea typeface="Calibri" pitchFamily="34" charset="-122"/>
                 <a:cs typeface="Calibri" pitchFamily="34" charset="-120"/>
               </a:rPr>
-              <a:t>Carbon finance is the margin, not a bonus
+              <a:t>The binding constraint is durable CDR per tonne
 </a:t>
             </a:r>
-            <a:pPr indent="0" marL="0">
+            <a:r>
+              <a:rPr lang="en-US" sz="1300" dirty="0">
+                <a:solidFill>
+                  <a:srgbClr val="AEC0C5"/>
+                </a:solidFill>
+                <a:latin typeface="Calibri" pitchFamily="34" charset="0"/>
+                <a:ea typeface="Calibri" pitchFamily="34" charset="-122"/>
+                <a:cs typeface="Calibri" pitchFamily="34" charset="-120"/>
+              </a:rPr>
+              <a:t>Net-export accounting cuts first-application removal ~80%; median MAC is $446. Price, delivered cost, and verified removal are the three levers.</a:t>
+            </a:r>
+            <a:endParaRPr lang="en-US" sz="1600" dirty="0"/>
+          </a:p>
+        </p:txBody>
+      </p:sp>
+      <p:sp>
+        <p:nvSpPr>
+          <p:cNvPr id="13" name="Shape 11"/>
+          <p:cNvSpPr/>
+          <p:nvPr/>
+        </p:nvSpPr>
+        <p:spPr>
+          <a:xfrm>
+            <a:off x="822960" y="5385816"/>
+            <a:ext cx="457200" cy="457200"/>
+          </a:xfrm>
+          <a:prstGeom prst="ellipse">
+            <a:avLst/>
+          </a:prstGeom>
+          <a:solidFill>
+            <a:srgbClr val="E8843C"/>
+          </a:solidFill>
+          <a:ln/>
+        </p:spPr>
+        <p:txBody>
+          <a:bodyPr/>
+          <a:lstStyle/>
+          <a:p>
+            <a:endParaRPr lang="en-US"/>
+          </a:p>
+        </p:txBody>
+      </p:sp>
+      <p:sp>
+        <p:nvSpPr>
+          <p:cNvPr id="14" name="Text 12"/>
+          <p:cNvSpPr/>
+          <p:nvPr/>
+        </p:nvSpPr>
+        <p:spPr>
+          <a:xfrm>
+            <a:off x="822960" y="5385816"/>
+            <a:ext cx="457200" cy="457200"/>
+          </a:xfrm>
+          <a:prstGeom prst="rect">
+            <a:avLst/>
+          </a:prstGeom>
+          <a:noFill/>
+          <a:ln/>
+        </p:spPr>
+        <p:txBody>
+          <a:bodyPr wrap="square" lIns="0" tIns="0" rIns="0" bIns="0" rtlCol="0" anchor="ctr"/>
+          <a:lstStyle/>
+          <a:p>
+            <a:pPr marL="0" indent="0" algn="ctr">
+              <a:buNone/>
+            </a:pPr>
+            <a:r>
+              <a:rPr lang="en-US" sz="1700" b="1" dirty="0">
+                <a:solidFill>
+                  <a:srgbClr val="14232B"/>
+                </a:solidFill>
+                <a:latin typeface="Cambria" pitchFamily="34" charset="0"/>
+                <a:ea typeface="Cambria" pitchFamily="34" charset="-122"/>
+                <a:cs typeface="Cambria" pitchFamily="34" charset="-120"/>
+              </a:rPr>
+              <a:t>4</a:t>
+            </a:r>
+            <a:endParaRPr lang="en-US" sz="1700" dirty="0"/>
+          </a:p>
+        </p:txBody>
+      </p:sp>
+      <p:sp>
+        <p:nvSpPr>
+          <p:cNvPr id="15" name="Text 13"/>
+          <p:cNvSpPr/>
+          <p:nvPr/>
+        </p:nvSpPr>
+        <p:spPr>
+          <a:xfrm>
+            <a:off x="1463040" y="5312664"/>
+            <a:ext cx="10058400" cy="1005840"/>
+          </a:xfrm>
+          <a:prstGeom prst="rect">
+            <a:avLst/>
+          </a:prstGeom>
+          <a:noFill/>
+          <a:ln/>
+        </p:spPr>
+        <p:txBody>
+          <a:bodyPr wrap="square" lIns="0" tIns="0" rIns="0" bIns="0" rtlCol="0" anchor="t"/>
+          <a:lstStyle/>
+          <a:p>
+            <a:pPr marL="0" indent="0">
               <a:lnSpc>
                 <a:spcPct val="102000"/>
               </a:lnSpc>
               <a:buNone/>
             </a:pPr>
             <a:r>
-              <a:rPr lang="en-US" sz="1300" dirty="0">
-                <a:solidFill>
-                  <a:srgbClr val="AEC0C5"/>
-                </a:solidFill>
-                <a:latin typeface="Calibri" pitchFamily="34" charset="0"/>
-                <a:ea typeface="Calibri" pitchFamily="34" charset="-122"/>
-                <a:cs typeface="Calibri" pitchFamily="34" charset="-120"/>
-              </a:rPr>
-              <a:t>On most viable land, VCM revenue is what unlocks a yield-improving investment. That reframes ERW away from a pure CDR supply curve.</a:t>
-            </a:r>
-            <a:endParaRPr lang="en-US" sz="1600" dirty="0"/>
-          </a:p>
-        </p:txBody>
-      </p:sp>
-      <p:sp>
-        <p:nvSpPr>
-          <p:cNvPr id="10" name="Shape 8"/>
-          <p:cNvSpPr/>
-          <p:nvPr/>
-        </p:nvSpPr>
-        <p:spPr>
-          <a:xfrm>
-            <a:off x="822960" y="4306824"/>
-            <a:ext cx="457200" cy="457200"/>
-          </a:xfrm>
-          <a:prstGeom prst="ellipse">
-            <a:avLst/>
-          </a:prstGeom>
-          <a:solidFill>
-            <a:srgbClr val="E8843C"/>
-          </a:solidFill>
-          <a:ln/>
-        </p:spPr>
-      </p:sp>
-      <p:sp>
-        <p:nvSpPr>
-          <p:cNvPr id="11" name="Text 9"/>
-          <p:cNvSpPr/>
-          <p:nvPr/>
-        </p:nvSpPr>
-        <p:spPr>
-          <a:xfrm>
-            <a:off x="822960" y="4306824"/>
-            <a:ext cx="457200" cy="457200"/>
-          </a:xfrm>
-          <a:prstGeom prst="rect">
-            <a:avLst/>
-          </a:prstGeom>
-          <a:noFill/>
-          <a:ln/>
-        </p:spPr>
-        <p:txBody>
-          <a:bodyPr wrap="square" lIns="0" tIns="0" rIns="0" bIns="0" rtlCol="0" anchor="ctr"/>
-          <a:lstStyle/>
-          <a:p>
-            <a:pPr algn="ctr" indent="0" marL="0">
-              <a:buNone/>
-            </a:pPr>
-            <a:r>
-              <a:rPr lang="en-US" sz="1700" b="1" dirty="0">
-                <a:solidFill>
-                  <a:srgbClr val="14232B"/>
-                </a:solidFill>
-                <a:latin typeface="Cambria" pitchFamily="34" charset="0"/>
-                <a:ea typeface="Cambria" pitchFamily="34" charset="-122"/>
-                <a:cs typeface="Cambria" pitchFamily="34" charset="-120"/>
-              </a:rPr>
-              <a:t>3</a:t>
-            </a:r>
-            <a:endParaRPr lang="en-US" sz="1700" dirty="0"/>
-          </a:p>
-        </p:txBody>
-      </p:sp>
-      <p:sp>
-        <p:nvSpPr>
-          <p:cNvPr id="12" name="Text 10"/>
-          <p:cNvSpPr/>
-          <p:nvPr/>
-        </p:nvSpPr>
-        <p:spPr>
-          <a:xfrm>
-            <a:off x="1463040" y="4233672"/>
-            <a:ext cx="10058400" cy="1005840"/>
-          </a:xfrm>
-          <a:prstGeom prst="rect">
-            <a:avLst/>
-          </a:prstGeom>
-          <a:noFill/>
-          <a:ln/>
-        </p:spPr>
-        <p:txBody>
-          <a:bodyPr wrap="square" lIns="0" tIns="0" rIns="0" bIns="0" rtlCol="0" anchor="t"/>
-          <a:lstStyle/>
-          <a:p>
-            <a:pPr indent="0" marL="0">
-              <a:lnSpc>
-                <a:spcPct val="102000"/>
-              </a:lnSpc>
-              <a:buNone/>
-            </a:pPr>
-            <a:r>
-              <a:rPr lang="en-US" sz="1600" b="1" dirty="0">
-                <a:solidFill>
-                  <a:srgbClr val="FFFFFF"/>
-                </a:solidFill>
-                <a:latin typeface="Calibri" pitchFamily="34" charset="0"/>
-                <a:ea typeface="Calibri" pitchFamily="34" charset="-122"/>
-                <a:cs typeface="Calibri" pitchFamily="34" charset="-120"/>
-              </a:rPr>
-              <a:t>The binding constraint is durable CDR per tonne
-</a:t>
-            </a:r>
-            <a:pPr indent="0" marL="0">
-              <a:lnSpc>
-                <a:spcPct val="102000"/>
-              </a:lnSpc>
-              <a:buNone/>
-            </a:pPr>
-            <a:r>
-              <a:rPr lang="en-US" sz="1300" dirty="0">
-                <a:solidFill>
-                  <a:srgbClr val="AEC0C5"/>
-                </a:solidFill>
-                <a:latin typeface="Calibri" pitchFamily="34" charset="0"/>
-                <a:ea typeface="Calibri" pitchFamily="34" charset="-122"/>
-                <a:cs typeface="Calibri" pitchFamily="34" charset="-120"/>
-              </a:rPr>
-              <a:t>Net-export accounting cuts first-application removal ~80%; median MAC is $446. Price, delivered cost, and verified removal are the three levers.</a:t>
-            </a:r>
-            <a:endParaRPr lang="en-US" sz="1600" dirty="0"/>
-          </a:p>
-        </p:txBody>
-      </p:sp>
-      <p:sp>
-        <p:nvSpPr>
-          <p:cNvPr id="13" name="Shape 11"/>
-          <p:cNvSpPr/>
-          <p:nvPr/>
-        </p:nvSpPr>
-        <p:spPr>
-          <a:xfrm>
-            <a:off x="822960" y="5385816"/>
-            <a:ext cx="457200" cy="457200"/>
-          </a:xfrm>
-          <a:prstGeom prst="ellipse">
-            <a:avLst/>
-          </a:prstGeom>
-          <a:solidFill>
-            <a:srgbClr val="E8843C"/>
-          </a:solidFill>
-          <a:ln/>
-        </p:spPr>
-      </p:sp>
-      <p:sp>
-        <p:nvSpPr>
-          <p:cNvPr id="14" name="Text 12"/>
-          <p:cNvSpPr/>
-          <p:nvPr/>
-        </p:nvSpPr>
-        <p:spPr>
-          <a:xfrm>
-            <a:off x="822960" y="5385816"/>
-            <a:ext cx="457200" cy="457200"/>
-          </a:xfrm>
-          <a:prstGeom prst="rect">
-            <a:avLst/>
-          </a:prstGeom>
-          <a:noFill/>
-          <a:ln/>
-        </p:spPr>
-        <p:txBody>
-          <a:bodyPr wrap="square" lIns="0" tIns="0" rIns="0" bIns="0" rtlCol="0" anchor="ctr"/>
-          <a:lstStyle/>
-          <a:p>
-            <a:pPr algn="ctr" indent="0" marL="0">
-              <a:buNone/>
-            </a:pPr>
-            <a:r>
-              <a:rPr lang="en-US" sz="1700" b="1" dirty="0">
-                <a:solidFill>
-                  <a:srgbClr val="14232B"/>
-                </a:solidFill>
-                <a:latin typeface="Cambria" pitchFamily="34" charset="0"/>
-                <a:ea typeface="Cambria" pitchFamily="34" charset="-122"/>
-                <a:cs typeface="Cambria" pitchFamily="34" charset="-120"/>
-              </a:rPr>
-              <a:t>4</a:t>
-            </a:r>
-            <a:endParaRPr lang="en-US" sz="1700" dirty="0"/>
-          </a:p>
-        </p:txBody>
-      </p:sp>
-      <p:sp>
-        <p:nvSpPr>
-          <p:cNvPr id="15" name="Text 13"/>
-          <p:cNvSpPr/>
-          <p:nvPr/>
-        </p:nvSpPr>
-        <p:spPr>
-          <a:xfrm>
-            <a:off x="1463040" y="5312664"/>
-            <a:ext cx="10058400" cy="1005840"/>
-          </a:xfrm>
-          <a:prstGeom prst="rect">
-            <a:avLst/>
-          </a:prstGeom>
-          <a:noFill/>
-          <a:ln/>
-        </p:spPr>
-        <p:txBody>
-          <a:bodyPr wrap="square" lIns="0" tIns="0" rIns="0" bIns="0" rtlCol="0" anchor="t"/>
-          <a:lstStyle/>
-          <a:p>
-            <a:pPr indent="0" marL="0">
-              <a:lnSpc>
-                <a:spcPct val="102000"/>
-              </a:lnSpc>
-              <a:buNone/>
-            </a:pPr>
-            <a:r>
               <a:rPr lang="en-US" sz="1600" b="1" dirty="0">
                 <a:solidFill>
                   <a:srgbClr val="FFFFFF"/>
@@ -10915,12 +10592,6 @@
               <a:t>Treating it as coupled changes the answer
 </a:t>
             </a:r>
-            <a:pPr indent="0" marL="0">
-              <a:lnSpc>
-                <a:spcPct val="102000"/>
-              </a:lnSpc>
-              <a:buNone/>
-            </a:pPr>
             <a:r>
               <a:rPr lang="en-US" sz="1300" dirty="0">
                 <a:solidFill>
@@ -10952,6 +10623,7 @@
         <a:solidFill>
           <a:srgbClr val="FFFFFF"/>
         </a:solidFill>
+        <a:effectLst/>
       </p:bgPr>
     </p:bg>
     <p:spTree>
@@ -10989,11 +10661,11 @@
           <a:bodyPr wrap="square" lIns="0" tIns="0" rIns="0" bIns="0" rtlCol="0" anchor="ctr"/>
           <a:lstStyle/>
           <a:p>
-            <a:pPr indent="0" marL="0">
-              <a:buNone/>
-            </a:pPr>
-            <a:r>
-              <a:rPr lang="en-US" sz="1200" b="1" spc="200" kern="0" dirty="0">
+            <a:pPr marL="0" indent="0">
+              <a:buNone/>
+            </a:pPr>
+            <a:r>
+              <a:rPr lang="en-US" sz="1200" b="1" kern="0" spc="200" dirty="0">
                 <a:solidFill>
                   <a:srgbClr val="E8843C"/>
                 </a:solidFill>
@@ -11028,7 +10700,7 @@
           <a:bodyPr wrap="square" lIns="0" tIns="0" rIns="0" bIns="0" rtlCol="0" anchor="ctr"/>
           <a:lstStyle/>
           <a:p>
-            <a:pPr indent="0" marL="0">
+            <a:pPr marL="0" indent="0">
               <a:buNone/>
             </a:pPr>
             <a:r>
@@ -11067,11 +10739,11 @@
           <a:bodyPr wrap="square" lIns="0" tIns="0" rIns="0" bIns="0" rtlCol="0" anchor="ctr"/>
           <a:lstStyle/>
           <a:p>
-            <a:pPr indent="0" marL="0">
-              <a:buNone/>
-            </a:pPr>
-            <a:r>
-              <a:rPr lang="en-US" sz="1200" b="1" spc="100" kern="0" dirty="0">
+            <a:pPr marL="0" indent="0">
+              <a:buNone/>
+            </a:pPr>
+            <a:r>
+              <a:rPr lang="en-US" sz="1200" b="1" kern="0" spc="100" dirty="0">
                 <a:solidFill>
                   <a:srgbClr val="5B6B73"/>
                 </a:solidFill>
@@ -11111,13 +10783,20 @@
             <a:prstDash val="solid"/>
           </a:ln>
           <a:effectLst>
-            <a:outerShdw sx="100000" sy="100000" kx="0" ky="0" algn="bl" rotWithShape="0" blurRad="88900" dist="38100" dir="5400000">
+            <a:outerShdw blurRad="88900" dist="38100" dir="5400000" algn="bl" rotWithShape="0">
               <a:srgbClr val="000000">
                 <a:alpha val="13000"/>
               </a:srgbClr>
             </a:outerShdw>
           </a:effectLst>
         </p:spPr>
+        <p:txBody>
+          <a:bodyPr/>
+          <a:lstStyle/>
+          <a:p>
+            <a:endParaRPr lang="en-US"/>
+          </a:p>
+        </p:txBody>
       </p:sp>
       <p:sp>
         <p:nvSpPr>
@@ -11140,7 +10819,7 @@
           <a:bodyPr wrap="square" lIns="0" tIns="0" rIns="0" bIns="0" rtlCol="0" anchor="t"/>
           <a:lstStyle/>
           <a:p>
-            <a:pPr indent="0" marL="0">
+            <a:pPr marL="0" indent="0">
               <a:lnSpc>
                 <a:spcPct val="102000"/>
               </a:lnSpc>
@@ -11158,12 +10837,6 @@
               <a:t>Priorities
 </a:t>
             </a:r>
-            <a:pPr indent="0" marL="0">
-              <a:lnSpc>
-                <a:spcPct val="102000"/>
-              </a:lnSpc>
-              <a:buNone/>
-            </a:pPr>
             <a:r>
               <a:rPr lang="en-US" sz="1250" dirty="0">
                 <a:solidFill>
@@ -11205,13 +10878,20 @@
             <a:prstDash val="solid"/>
           </a:ln>
           <a:effectLst>
-            <a:outerShdw sx="100000" sy="100000" kx="0" ky="0" algn="bl" rotWithShape="0" blurRad="88900" dist="38100" dir="5400000">
+            <a:outerShdw blurRad="88900" dist="38100" dir="5400000" algn="bl" rotWithShape="0">
               <a:srgbClr val="000000">
                 <a:alpha val="13000"/>
               </a:srgbClr>
             </a:outerShdw>
           </a:effectLst>
         </p:spPr>
+        <p:txBody>
+          <a:bodyPr/>
+          <a:lstStyle/>
+          <a:p>
+            <a:endParaRPr lang="en-US"/>
+          </a:p>
+        </p:txBody>
       </p:sp>
       <p:sp>
         <p:nvSpPr>
@@ -11234,7 +10914,7 @@
           <a:bodyPr wrap="square" lIns="0" tIns="0" rIns="0" bIns="0" rtlCol="0" anchor="t"/>
           <a:lstStyle/>
           <a:p>
-            <a:pPr indent="0" marL="0">
+            <a:pPr marL="0" indent="0">
               <a:lnSpc>
                 <a:spcPct val="102000"/>
               </a:lnSpc>
@@ -11252,12 +10932,6 @@
               <a:t>Not yet modeled
 </a:t>
             </a:r>
-            <a:pPr indent="0" marL="0">
-              <a:lnSpc>
-                <a:spcPct val="102000"/>
-              </a:lnSpc>
-              <a:buNone/>
-            </a:pPr>
             <a:r>
               <a:rPr lang="en-US" sz="1250" dirty="0">
                 <a:solidFill>
@@ -11299,13 +10973,20 @@
             <a:prstDash val="solid"/>
           </a:ln>
           <a:effectLst>
-            <a:outerShdw sx="100000" sy="100000" kx="0" ky="0" algn="bl" rotWithShape="0" blurRad="88900" dist="38100" dir="5400000">
+            <a:outerShdw blurRad="88900" dist="38100" dir="5400000" algn="bl" rotWithShape="0">
               <a:srgbClr val="000000">
                 <a:alpha val="13000"/>
               </a:srgbClr>
             </a:outerShdw>
           </a:effectLst>
         </p:spPr>
+        <p:txBody>
+          <a:bodyPr/>
+          <a:lstStyle/>
+          <a:p>
+            <a:endParaRPr lang="en-US"/>
+          </a:p>
+        </p:txBody>
       </p:sp>
       <p:sp>
         <p:nvSpPr>
@@ -11328,7 +11009,7 @@
           <a:bodyPr wrap="square" lIns="0" tIns="0" rIns="0" bIns="0" rtlCol="0" anchor="t"/>
           <a:lstStyle/>
           <a:p>
-            <a:pPr indent="0" marL="0">
+            <a:pPr marL="0" indent="0">
               <a:lnSpc>
                 <a:spcPct val="102000"/>
               </a:lnSpc>
@@ -11346,12 +11027,6 @@
               <a:t>Farm counts
 </a:t>
             </a:r>
-            <a:pPr indent="0" marL="0">
-              <a:lnSpc>
-                <a:spcPct val="102000"/>
-              </a:lnSpc>
-              <a:buNone/>
-            </a:pPr>
             <a:r>
               <a:rPr lang="en-US" sz="1250" dirty="0">
                 <a:solidFill>
@@ -11388,11 +11063,11 @@
           <a:bodyPr wrap="square" lIns="0" tIns="0" rIns="0" bIns="0" rtlCol="0" anchor="ctr"/>
           <a:lstStyle/>
           <a:p>
-            <a:pPr indent="0" marL="0">
-              <a:buNone/>
-            </a:pPr>
-            <a:r>
-              <a:rPr lang="en-US" sz="1200" b="1" spc="100" kern="0" dirty="0">
+            <a:pPr marL="0" indent="0">
+              <a:buNone/>
+            </a:pPr>
+            <a:r>
+              <a:rPr lang="en-US" sz="1200" b="1" kern="0" spc="100" dirty="0">
                 <a:solidFill>
                   <a:srgbClr val="E8843C"/>
                 </a:solidFill>
@@ -11432,13 +11107,20 @@
             <a:prstDash val="solid"/>
           </a:ln>
           <a:effectLst>
-            <a:outerShdw sx="100000" sy="100000" kx="0" ky="0" algn="bl" rotWithShape="0" blurRad="88900" dist="38100" dir="5400000">
+            <a:outerShdw blurRad="88900" dist="38100" dir="5400000" algn="bl" rotWithShape="0">
               <a:srgbClr val="000000">
                 <a:alpha val="13000"/>
               </a:srgbClr>
             </a:outerShdw>
           </a:effectLst>
         </p:spPr>
+        <p:txBody>
+          <a:bodyPr/>
+          <a:lstStyle/>
+          <a:p>
+            <a:endParaRPr lang="en-US"/>
+          </a:p>
+        </p:txBody>
       </p:sp>
       <p:sp>
         <p:nvSpPr>
@@ -11461,7 +11143,7 @@
           <a:bodyPr wrap="square" lIns="0" tIns="0" rIns="0" bIns="0" rtlCol="0" anchor="t"/>
           <a:lstStyle/>
           <a:p>
-            <a:pPr indent="0" marL="0">
+            <a:pPr marL="0" indent="0">
               <a:lnSpc>
                 <a:spcPct val="102000"/>
               </a:lnSpc>
@@ -11479,12 +11161,6 @@
               <a:t>Sensitivity sweep
 </a:t>
             </a:r>
-            <a:pPr indent="0" marL="0">
-              <a:lnSpc>
-                <a:spcPct val="102000"/>
-              </a:lnSpc>
-              <a:buNone/>
-            </a:pPr>
             <a:r>
               <a:rPr lang="en-US" sz="1250" dirty="0">
                 <a:solidFill>
@@ -11526,13 +11202,20 @@
             <a:prstDash val="solid"/>
           </a:ln>
           <a:effectLst>
-            <a:outerShdw sx="100000" sy="100000" kx="0" ky="0" algn="bl" rotWithShape="0" blurRad="88900" dist="38100" dir="5400000">
+            <a:outerShdw blurRad="88900" dist="38100" dir="5400000" algn="bl" rotWithShape="0">
               <a:srgbClr val="000000">
                 <a:alpha val="13000"/>
               </a:srgbClr>
             </a:outerShdw>
           </a:effectLst>
         </p:spPr>
+        <p:txBody>
+          <a:bodyPr/>
+          <a:lstStyle/>
+          <a:p>
+            <a:endParaRPr lang="en-US"/>
+          </a:p>
+        </p:txBody>
       </p:sp>
       <p:sp>
         <p:nvSpPr>
@@ -11555,7 +11238,7 @@
           <a:bodyPr wrap="square" lIns="0" tIns="0" rIns="0" bIns="0" rtlCol="0" anchor="t"/>
           <a:lstStyle/>
           <a:p>
-            <a:pPr indent="0" marL="0">
+            <a:pPr marL="0" indent="0">
               <a:lnSpc>
                 <a:spcPct val="102000"/>
               </a:lnSpc>
@@ -11573,12 +11256,6 @@
               <a:t>Optimal-rate maps
 </a:t>
             </a:r>
-            <a:pPr indent="0" marL="0">
-              <a:lnSpc>
-                <a:spcPct val="102000"/>
-              </a:lnSpc>
-              <a:buNone/>
-            </a:pPr>
             <a:r>
               <a:rPr lang="en-US" sz="1250" dirty="0">
                 <a:solidFill>
@@ -11620,13 +11297,20 @@
             <a:prstDash val="solid"/>
           </a:ln>
           <a:effectLst>
-            <a:outerShdw sx="100000" sy="100000" kx="0" ky="0" algn="bl" rotWithShape="0" blurRad="88900" dist="38100" dir="5400000">
+            <a:outerShdw blurRad="88900" dist="38100" dir="5400000" algn="bl" rotWithShape="0">
               <a:srgbClr val="000000">
                 <a:alpha val="13000"/>
               </a:srgbClr>
             </a:outerShdw>
           </a:effectLst>
         </p:spPr>
+        <p:txBody>
+          <a:bodyPr/>
+          <a:lstStyle/>
+          <a:p>
+            <a:endParaRPr lang="en-US"/>
+          </a:p>
+        </p:txBody>
       </p:sp>
       <p:sp>
         <p:nvSpPr>
@@ -11649,7 +11333,7 @@
           <a:bodyPr wrap="square" lIns="0" tIns="0" rIns="0" bIns="0" rtlCol="0" anchor="t"/>
           <a:lstStyle/>
           <a:p>
-            <a:pPr indent="0" marL="0">
+            <a:pPr marL="0" indent="0">
               <a:lnSpc>
                 <a:spcPct val="102000"/>
               </a:lnSpc>
@@ -11667,12 +11351,6 @@
               <a:t>Share &amp; collaborate
 </a:t>
             </a:r>
-            <a:pPr indent="0" marL="0">
-              <a:lnSpc>
-                <a:spcPct val="102000"/>
-              </a:lnSpc>
-              <a:buNone/>
-            </a:pPr>
             <a:r>
               <a:rPr lang="en-US" sz="1250" dirty="0">
                 <a:solidFill>
@@ -11709,7 +11387,7 @@
           <a:bodyPr wrap="square" lIns="0" tIns="0" rIns="0" bIns="0" rtlCol="0" anchor="ctr"/>
           <a:lstStyle/>
           <a:p>
-            <a:pPr algn="l" indent="0" marL="0">
+            <a:pPr marL="0" indent="0" algn="l">
               <a:buNone/>
             </a:pPr>
             <a:r>
@@ -11721,21 +11399,7 @@
                 <a:ea typeface="Calibri" pitchFamily="34" charset="-122"/>
                 <a:cs typeface="Calibri" pitchFamily="34" charset="-120"/>
               </a:rPr>
-              <a:t>Enhanced Rock Weathering — public &amp; private returns in SSA</a:t>
-            </a:r>
-            <a:pPr algn="l" indent="0" marL="0">
-              <a:buNone/>
-            </a:pPr>
-            <a:r>
-              <a:rPr lang="en-US" sz="900" dirty="0">
-                <a:solidFill>
-                  <a:srgbClr val="5B6B73"/>
-                </a:solidFill>
-                <a:latin typeface="Calibri" pitchFamily="34" charset="0"/>
-                <a:ea typeface="Calibri" pitchFamily="34" charset="-122"/>
-                <a:cs typeface="Calibri" pitchFamily="34" charset="-120"/>
-              </a:rPr>
-              <a:t>   ·   Gebrekidan &amp; Chamberlin (2026)</a:t>
+              <a:t>Enhanced Rock Weathering — public &amp; private returns in SSA   ·   Gebrekidan &amp; Chamberlin (2026)</a:t>
             </a:r>
             <a:endParaRPr lang="en-US" sz="900" dirty="0"/>
           </a:p>
@@ -11762,7 +11426,7 @@
           <a:bodyPr wrap="square" lIns="0" tIns="0" rIns="0" bIns="0" rtlCol="0" anchor="ctr"/>
           <a:lstStyle/>
           <a:p>
-            <a:pPr algn="r" indent="0" marL="0">
+            <a:pPr marL="0" indent="0" algn="r">
               <a:buNone/>
             </a:pPr>
             <a:r>
@@ -11796,6 +11460,7 @@
         <a:solidFill>
           <a:srgbClr val="FFFFFF"/>
         </a:solidFill>
+        <a:effectLst/>
       </p:bgPr>
     </p:bg>
     <p:spTree>
@@ -11833,11 +11498,11 @@
           <a:bodyPr wrap="square" lIns="0" tIns="0" rIns="0" bIns="0" rtlCol="0" anchor="ctr"/>
           <a:lstStyle/>
           <a:p>
-            <a:pPr indent="0" marL="0">
-              <a:buNone/>
-            </a:pPr>
-            <a:r>
-              <a:rPr lang="en-US" sz="1200" b="1" spc="200" kern="0" dirty="0">
+            <a:pPr marL="0" indent="0">
+              <a:buNone/>
+            </a:pPr>
+            <a:r>
+              <a:rPr lang="en-US" sz="1200" b="1" kern="0" spc="200" dirty="0">
                 <a:solidFill>
                   <a:srgbClr val="0F6E63"/>
                 </a:solidFill>
@@ -11872,7 +11537,7 @@
           <a:bodyPr wrap="square" lIns="0" tIns="0" rIns="0" bIns="0" rtlCol="0" anchor="ctr"/>
           <a:lstStyle/>
           <a:p>
-            <a:pPr indent="0" marL="0">
+            <a:pPr marL="0" indent="0">
               <a:buNone/>
             </a:pPr>
             <a:r>
@@ -11916,13 +11581,20 @@
             <a:prstDash val="solid"/>
           </a:ln>
           <a:effectLst>
-            <a:outerShdw sx="100000" sy="100000" kx="0" ky="0" algn="bl" rotWithShape="0" blurRad="88900" dist="38100" dir="5400000">
+            <a:outerShdw blurRad="88900" dist="38100" dir="5400000" algn="bl" rotWithShape="0">
               <a:srgbClr val="000000">
                 <a:alpha val="13000"/>
               </a:srgbClr>
             </a:outerShdw>
           </a:effectLst>
         </p:spPr>
+        <p:txBody>
+          <a:bodyPr/>
+          <a:lstStyle/>
+          <a:p>
+            <a:endParaRPr lang="en-US"/>
+          </a:p>
+        </p:txBody>
       </p:sp>
       <p:sp>
         <p:nvSpPr>
@@ -11943,6 +11615,13 @@
           </a:solidFill>
           <a:ln/>
         </p:spPr>
+        <p:txBody>
+          <a:bodyPr/>
+          <a:lstStyle/>
+          <a:p>
+            <a:endParaRPr lang="en-US"/>
+          </a:p>
+        </p:txBody>
       </p:sp>
       <p:sp>
         <p:nvSpPr>
@@ -11965,7 +11644,7 @@
           <a:bodyPr wrap="square" lIns="0" tIns="0" rIns="0" bIns="0" rtlCol="0" anchor="ctr"/>
           <a:lstStyle/>
           <a:p>
-            <a:pPr algn="ctr" indent="0" marL="0">
+            <a:pPr marL="0" indent="0" algn="ctr">
               <a:buNone/>
             </a:pPr>
             <a:r>
@@ -12004,7 +11683,7 @@
           <a:bodyPr wrap="square" lIns="0" tIns="0" rIns="0" bIns="0" rtlCol="0" anchor="ctr"/>
           <a:lstStyle/>
           <a:p>
-            <a:pPr indent="0" marL="0">
+            <a:pPr marL="0" indent="0">
               <a:lnSpc>
                 <a:spcPct val="103000"/>
               </a:lnSpc>
@@ -12051,13 +11730,20 @@
             <a:prstDash val="solid"/>
           </a:ln>
           <a:effectLst>
-            <a:outerShdw sx="100000" sy="100000" kx="0" ky="0" algn="bl" rotWithShape="0" blurRad="88900" dist="38100" dir="5400000">
+            <a:outerShdw blurRad="88900" dist="38100" dir="5400000" algn="bl" rotWithShape="0">
               <a:srgbClr val="000000">
                 <a:alpha val="13000"/>
               </a:srgbClr>
             </a:outerShdw>
           </a:effectLst>
         </p:spPr>
+        <p:txBody>
+          <a:bodyPr/>
+          <a:lstStyle/>
+          <a:p>
+            <a:endParaRPr lang="en-US"/>
+          </a:p>
+        </p:txBody>
       </p:sp>
       <p:sp>
         <p:nvSpPr>
@@ -12078,6 +11764,13 @@
           </a:solidFill>
           <a:ln/>
         </p:spPr>
+        <p:txBody>
+          <a:bodyPr/>
+          <a:lstStyle/>
+          <a:p>
+            <a:endParaRPr lang="en-US"/>
+          </a:p>
+        </p:txBody>
       </p:sp>
       <p:sp>
         <p:nvSpPr>
@@ -12100,7 +11793,7 @@
           <a:bodyPr wrap="square" lIns="0" tIns="0" rIns="0" bIns="0" rtlCol="0" anchor="ctr"/>
           <a:lstStyle/>
           <a:p>
-            <a:pPr algn="ctr" indent="0" marL="0">
+            <a:pPr marL="0" indent="0" algn="ctr">
               <a:buNone/>
             </a:pPr>
             <a:r>
@@ -12139,7 +11832,7 @@
           <a:bodyPr wrap="square" lIns="0" tIns="0" rIns="0" bIns="0" rtlCol="0" anchor="ctr"/>
           <a:lstStyle/>
           <a:p>
-            <a:pPr indent="0" marL="0">
+            <a:pPr marL="0" indent="0">
               <a:lnSpc>
                 <a:spcPct val="103000"/>
               </a:lnSpc>
@@ -12186,13 +11879,20 @@
             <a:prstDash val="solid"/>
           </a:ln>
           <a:effectLst>
-            <a:outerShdw sx="100000" sy="100000" kx="0" ky="0" algn="bl" rotWithShape="0" blurRad="88900" dist="38100" dir="5400000">
+            <a:outerShdw blurRad="88900" dist="38100" dir="5400000" algn="bl" rotWithShape="0">
               <a:srgbClr val="000000">
                 <a:alpha val="13000"/>
               </a:srgbClr>
             </a:outerShdw>
           </a:effectLst>
         </p:spPr>
+        <p:txBody>
+          <a:bodyPr/>
+          <a:lstStyle/>
+          <a:p>
+            <a:endParaRPr lang="en-US"/>
+          </a:p>
+        </p:txBody>
       </p:sp>
       <p:sp>
         <p:nvSpPr>
@@ -12213,6 +11913,13 @@
           </a:solidFill>
           <a:ln/>
         </p:spPr>
+        <p:txBody>
+          <a:bodyPr/>
+          <a:lstStyle/>
+          <a:p>
+            <a:endParaRPr lang="en-US"/>
+          </a:p>
+        </p:txBody>
       </p:sp>
       <p:sp>
         <p:nvSpPr>
@@ -12235,7 +11942,7 @@
           <a:bodyPr wrap="square" lIns="0" tIns="0" rIns="0" bIns="0" rtlCol="0" anchor="ctr"/>
           <a:lstStyle/>
           <a:p>
-            <a:pPr algn="ctr" indent="0" marL="0">
+            <a:pPr marL="0" indent="0" algn="ctr">
               <a:buNone/>
             </a:pPr>
             <a:r>
@@ -12274,7 +11981,7 @@
           <a:bodyPr wrap="square" lIns="0" tIns="0" rIns="0" bIns="0" rtlCol="0" anchor="ctr"/>
           <a:lstStyle/>
           <a:p>
-            <a:pPr indent="0" marL="0">
+            <a:pPr marL="0" indent="0">
               <a:lnSpc>
                 <a:spcPct val="103000"/>
               </a:lnSpc>
@@ -12321,13 +12028,20 @@
             <a:prstDash val="solid"/>
           </a:ln>
           <a:effectLst>
-            <a:outerShdw sx="100000" sy="100000" kx="0" ky="0" algn="bl" rotWithShape="0" blurRad="88900" dist="38100" dir="5400000">
+            <a:outerShdw blurRad="88900" dist="38100" dir="5400000" algn="bl" rotWithShape="0">
               <a:srgbClr val="000000">
                 <a:alpha val="13000"/>
               </a:srgbClr>
             </a:outerShdw>
           </a:effectLst>
         </p:spPr>
+        <p:txBody>
+          <a:bodyPr/>
+          <a:lstStyle/>
+          <a:p>
+            <a:endParaRPr lang="en-US"/>
+          </a:p>
+        </p:txBody>
       </p:sp>
       <p:sp>
         <p:nvSpPr>
@@ -12348,6 +12062,13 @@
           </a:solidFill>
           <a:ln/>
         </p:spPr>
+        <p:txBody>
+          <a:bodyPr/>
+          <a:lstStyle/>
+          <a:p>
+            <a:endParaRPr lang="en-US"/>
+          </a:p>
+        </p:txBody>
       </p:sp>
       <p:sp>
         <p:nvSpPr>
@@ -12370,7 +12091,7 @@
           <a:bodyPr wrap="square" lIns="0" tIns="0" rIns="0" bIns="0" rtlCol="0" anchor="ctr"/>
           <a:lstStyle/>
           <a:p>
-            <a:pPr algn="ctr" indent="0" marL="0">
+            <a:pPr marL="0" indent="0" algn="ctr">
               <a:buNone/>
             </a:pPr>
             <a:r>
@@ -12409,7 +12130,7 @@
           <a:bodyPr wrap="square" lIns="0" tIns="0" rIns="0" bIns="0" rtlCol="0" anchor="ctr"/>
           <a:lstStyle/>
           <a:p>
-            <a:pPr indent="0" marL="0">
+            <a:pPr marL="0" indent="0">
               <a:lnSpc>
                 <a:spcPct val="103000"/>
               </a:lnSpc>
@@ -12456,13 +12177,20 @@
             <a:prstDash val="solid"/>
           </a:ln>
           <a:effectLst>
-            <a:outerShdw sx="100000" sy="100000" kx="0" ky="0" algn="bl" rotWithShape="0" blurRad="88900" dist="38100" dir="5400000">
+            <a:outerShdw blurRad="88900" dist="38100" dir="5400000" algn="bl" rotWithShape="0">
               <a:srgbClr val="000000">
                 <a:alpha val="13000"/>
               </a:srgbClr>
             </a:outerShdw>
           </a:effectLst>
         </p:spPr>
+        <p:txBody>
+          <a:bodyPr/>
+          <a:lstStyle/>
+          <a:p>
+            <a:endParaRPr lang="en-US"/>
+          </a:p>
+        </p:txBody>
       </p:sp>
       <p:sp>
         <p:nvSpPr>
@@ -12483,6 +12211,13 @@
           </a:solidFill>
           <a:ln/>
         </p:spPr>
+        <p:txBody>
+          <a:bodyPr/>
+          <a:lstStyle/>
+          <a:p>
+            <a:endParaRPr lang="en-US"/>
+          </a:p>
+        </p:txBody>
       </p:sp>
       <p:sp>
         <p:nvSpPr>
@@ -12505,7 +12240,7 @@
           <a:bodyPr wrap="square" lIns="0" tIns="0" rIns="0" bIns="0" rtlCol="0" anchor="ctr"/>
           <a:lstStyle/>
           <a:p>
-            <a:pPr algn="ctr" indent="0" marL="0">
+            <a:pPr marL="0" indent="0" algn="ctr">
               <a:buNone/>
             </a:pPr>
             <a:r>
@@ -12544,7 +12279,7 @@
           <a:bodyPr wrap="square" lIns="0" tIns="0" rIns="0" bIns="0" rtlCol="0" anchor="ctr"/>
           <a:lstStyle/>
           <a:p>
-            <a:pPr indent="0" marL="0">
+            <a:pPr marL="0" indent="0">
               <a:lnSpc>
                 <a:spcPct val="103000"/>
               </a:lnSpc>
@@ -12591,13 +12326,20 @@
             <a:prstDash val="solid"/>
           </a:ln>
           <a:effectLst>
-            <a:outerShdw sx="100000" sy="100000" kx="0" ky="0" algn="bl" rotWithShape="0" blurRad="88900" dist="38100" dir="5400000">
+            <a:outerShdw blurRad="88900" dist="38100" dir="5400000" algn="bl" rotWithShape="0">
               <a:srgbClr val="000000">
                 <a:alpha val="13000"/>
               </a:srgbClr>
             </a:outerShdw>
           </a:effectLst>
         </p:spPr>
+        <p:txBody>
+          <a:bodyPr/>
+          <a:lstStyle/>
+          <a:p>
+            <a:endParaRPr lang="en-US"/>
+          </a:p>
+        </p:txBody>
       </p:sp>
       <p:sp>
         <p:nvSpPr>
@@ -12618,6 +12360,13 @@
           </a:solidFill>
           <a:ln/>
         </p:spPr>
+        <p:txBody>
+          <a:bodyPr/>
+          <a:lstStyle/>
+          <a:p>
+            <a:endParaRPr lang="en-US"/>
+          </a:p>
+        </p:txBody>
       </p:sp>
       <p:sp>
         <p:nvSpPr>
@@ -12640,7 +12389,7 @@
           <a:bodyPr wrap="square" lIns="0" tIns="0" rIns="0" bIns="0" rtlCol="0" anchor="ctr"/>
           <a:lstStyle/>
           <a:p>
-            <a:pPr algn="ctr" indent="0" marL="0">
+            <a:pPr marL="0" indent="0" algn="ctr">
               <a:buNone/>
             </a:pPr>
             <a:r>
@@ -12679,7 +12428,7 @@
           <a:bodyPr wrap="square" lIns="0" tIns="0" rIns="0" bIns="0" rtlCol="0" anchor="ctr"/>
           <a:lstStyle/>
           <a:p>
-            <a:pPr indent="0" marL="0">
+            <a:pPr marL="0" indent="0">
               <a:lnSpc>
                 <a:spcPct val="103000"/>
               </a:lnSpc>
@@ -12721,7 +12470,7 @@
           <a:bodyPr wrap="square" lIns="0" tIns="0" rIns="0" bIns="0" rtlCol="0" anchor="ctr"/>
           <a:lstStyle/>
           <a:p>
-            <a:pPr algn="l" indent="0" marL="0">
+            <a:pPr marL="0" indent="0" algn="l">
               <a:buNone/>
             </a:pPr>
             <a:r>
@@ -12733,21 +12482,7 @@
                 <a:ea typeface="Calibri" pitchFamily="34" charset="-122"/>
                 <a:cs typeface="Calibri" pitchFamily="34" charset="-120"/>
               </a:rPr>
-              <a:t>Enhanced Rock Weathering — public &amp; private returns in SSA</a:t>
-            </a:r>
-            <a:pPr algn="l" indent="0" marL="0">
-              <a:buNone/>
-            </a:pPr>
-            <a:r>
-              <a:rPr lang="en-US" sz="900" dirty="0">
-                <a:solidFill>
-                  <a:srgbClr val="5B6B73"/>
-                </a:solidFill>
-                <a:latin typeface="Calibri" pitchFamily="34" charset="0"/>
-                <a:ea typeface="Calibri" pitchFamily="34" charset="-122"/>
-                <a:cs typeface="Calibri" pitchFamily="34" charset="-120"/>
-              </a:rPr>
-              <a:t>   ·   Gebrekidan &amp; Chamberlin (2026)</a:t>
+              <a:t>Enhanced Rock Weathering — public &amp; private returns in SSA   ·   Gebrekidan &amp; Chamberlin (2026)</a:t>
             </a:r>
             <a:endParaRPr lang="en-US" sz="900" dirty="0"/>
           </a:p>
@@ -12774,7 +12509,7 @@
           <a:bodyPr wrap="square" lIns="0" tIns="0" rIns="0" bIns="0" rtlCol="0" anchor="ctr"/>
           <a:lstStyle/>
           <a:p>
-            <a:pPr algn="r" indent="0" marL="0">
+            <a:pPr marL="0" indent="0" algn="r">
               <a:buNone/>
             </a:pPr>
             <a:r>
@@ -12808,6 +12543,7 @@
         <a:solidFill>
           <a:srgbClr val="FFFFFF"/>
         </a:solidFill>
+        <a:effectLst/>
       </p:bgPr>
     </p:bg>
     <p:spTree>
@@ -12845,11 +12581,11 @@
           <a:bodyPr wrap="square" lIns="0" tIns="0" rIns="0" bIns="0" rtlCol="0" anchor="ctr"/>
           <a:lstStyle/>
           <a:p>
-            <a:pPr indent="0" marL="0">
-              <a:buNone/>
-            </a:pPr>
-            <a:r>
-              <a:rPr lang="en-US" sz="1200" b="1" spc="200" kern="0" dirty="0">
+            <a:pPr marL="0" indent="0">
+              <a:buNone/>
+            </a:pPr>
+            <a:r>
+              <a:rPr lang="en-US" sz="1200" b="1" kern="0" spc="200" dirty="0">
                 <a:solidFill>
                   <a:srgbClr val="0F6E63"/>
                 </a:solidFill>
@@ -12884,7 +12620,7 @@
           <a:bodyPr wrap="square" lIns="0" tIns="0" rIns="0" bIns="0" rtlCol="0" anchor="ctr"/>
           <a:lstStyle/>
           <a:p>
-            <a:pPr indent="0" marL="0">
+            <a:pPr marL="0" indent="0">
               <a:buNone/>
             </a:pPr>
             <a:r>
@@ -12928,13 +12664,20 @@
             <a:prstDash val="solid"/>
           </a:ln>
           <a:effectLst>
-            <a:outerShdw sx="100000" sy="100000" kx="0" ky="0" algn="bl" rotWithShape="0" blurRad="88900" dist="38100" dir="5400000">
+            <a:outerShdw blurRad="88900" dist="38100" dir="5400000" algn="bl" rotWithShape="0">
               <a:srgbClr val="000000">
                 <a:alpha val="13000"/>
               </a:srgbClr>
             </a:outerShdw>
           </a:effectLst>
         </p:spPr>
+        <p:txBody>
+          <a:bodyPr/>
+          <a:lstStyle/>
+          <a:p>
+            <a:endParaRPr lang="en-US"/>
+          </a:p>
+        </p:txBody>
       </p:sp>
       <p:sp>
         <p:nvSpPr>
@@ -12957,7 +12700,7 @@
           <a:bodyPr wrap="square" lIns="0" tIns="0" rIns="0" bIns="0" rtlCol="0" anchor="ctr"/>
           <a:lstStyle/>
           <a:p>
-            <a:pPr indent="0" marL="0">
+            <a:pPr marL="0" indent="0">
               <a:buNone/>
             </a:pPr>
             <a:r>
@@ -12971,9 +12714,6 @@
               </a:rPr>
               <a:t>π</a:t>
             </a:r>
-            <a:pPr indent="0" marL="0">
-              <a:buNone/>
-            </a:pPr>
             <a:r>
               <a:rPr lang="en-US" sz="2200" dirty="0">
                 <a:solidFill>
@@ -12985,9 +12725,6 @@
               </a:rPr>
               <a:t>  =  </a:t>
             </a:r>
-            <a:pPr indent="0" marL="0">
-              <a:buNone/>
-            </a:pPr>
             <a:r>
               <a:rPr lang="en-US" sz="2600" b="1" dirty="0">
                 <a:solidFill>
@@ -12999,9 +12736,6 @@
               </a:rPr>
               <a:t>R</a:t>
             </a:r>
-            <a:pPr indent="0" marL="0">
-              <a:buNone/>
-            </a:pPr>
             <a:r>
               <a:rPr lang="en-US" sz="1300" dirty="0">
                 <a:solidFill>
@@ -13013,9 +12747,6 @@
               </a:rPr>
               <a:t>agro</a:t>
             </a:r>
-            <a:pPr indent="0" marL="0">
-              <a:buNone/>
-            </a:pPr>
             <a:r>
               <a:rPr lang="en-US" sz="2200" dirty="0">
                 <a:solidFill>
@@ -13027,9 +12758,6 @@
               </a:rPr>
               <a:t>   +   </a:t>
             </a:r>
-            <a:pPr indent="0" marL="0">
-              <a:buNone/>
-            </a:pPr>
             <a:r>
               <a:rPr lang="en-US" sz="2600" b="1" dirty="0">
                 <a:solidFill>
@@ -13041,9 +12769,6 @@
               </a:rPr>
               <a:t>R</a:t>
             </a:r>
-            <a:pPr indent="0" marL="0">
-              <a:buNone/>
-            </a:pPr>
             <a:r>
               <a:rPr lang="en-US" sz="1300" dirty="0">
                 <a:solidFill>
@@ -13055,9 +12780,6 @@
               </a:rPr>
               <a:t>CDR</a:t>
             </a:r>
-            <a:pPr indent="0" marL="0">
-              <a:buNone/>
-            </a:pPr>
             <a:r>
               <a:rPr lang="en-US" sz="2200" dirty="0">
                 <a:solidFill>
@@ -13069,9 +12791,6 @@
               </a:rPr>
               <a:t>   −   </a:t>
             </a:r>
-            <a:pPr indent="0" marL="0">
-              <a:buNone/>
-            </a:pPr>
             <a:r>
               <a:rPr lang="en-US" sz="2600" b="1" dirty="0">
                 <a:solidFill>
@@ -13108,7 +12827,7 @@
           <a:bodyPr wrap="square" lIns="0" tIns="0" rIns="0" bIns="0" rtlCol="0" anchor="ctr"/>
           <a:lstStyle/>
           <a:p>
-            <a:pPr indent="0" marL="0">
+            <a:pPr marL="0" indent="0">
               <a:buNone/>
             </a:pPr>
             <a:r>
@@ -13128,15 +12847,15 @@
       </p:sp>
       <p:pic>
         <p:nvPicPr>
-          <p:cNvPr id="7" name="Image 0" descr="img/erw_model_architecture_three_streams.png">    </p:cNvPr>
+          <p:cNvPr id="7" name="Image 0" descr="img/erw_model_architecture_three_streams.png"/>
           <p:cNvPicPr>
             <a:picLocks noChangeAspect="1"/>
           </p:cNvPicPr>
           <p:nvPr/>
         </p:nvPicPr>
         <p:blipFill>
-          <a:blip r:embed="rId1"/>
-          <a:srcRect l="0" r="0" t="0" b="0"/>
+          <a:blip r:embed="rId3"/>
+          <a:srcRect/>
           <a:stretch/>
         </p:blipFill>
         <p:spPr>
@@ -13168,6 +12887,13 @@
           </a:solidFill>
           <a:ln/>
         </p:spPr>
+        <p:txBody>
+          <a:bodyPr/>
+          <a:lstStyle/>
+          <a:p>
+            <a:endParaRPr lang="en-US"/>
+          </a:p>
+        </p:txBody>
       </p:sp>
       <p:sp>
         <p:nvSpPr>
@@ -13190,7 +12916,7 @@
           <a:bodyPr wrap="square" lIns="0" tIns="0" rIns="0" bIns="0" rtlCol="0" anchor="t"/>
           <a:lstStyle/>
           <a:p>
-            <a:pPr indent="0" marL="0">
+            <a:pPr marL="0" indent="0">
               <a:lnSpc>
                 <a:spcPct val="100000"/>
               </a:lnSpc>
@@ -13207,13 +12933,87 @@
               </a:rPr>
               <a:t>Resolution  </a:t>
             </a:r>
-            <a:pPr indent="0" marL="0">
+            <a:r>
+              <a:rPr lang="en-US" sz="1300" dirty="0">
+                <a:solidFill>
+                  <a:srgbClr val="3C4B52"/>
+                </a:solidFill>
+                <a:latin typeface="Calibri" pitchFamily="34" charset="0"/>
+                <a:ea typeface="Calibri" pitchFamily="34" charset="-122"/>
+                <a:cs typeface="Calibri" pitchFamily="34" charset="-120"/>
+              </a:rPr>
+              <a:t>~0.083° grid × 44 SSA countries × 23 SPAM crops, area-weighted to each pixel.</a:t>
+            </a:r>
+            <a:endParaRPr lang="en-US" sz="1300" dirty="0"/>
+          </a:p>
+        </p:txBody>
+      </p:sp>
+      <p:sp>
+        <p:nvSpPr>
+          <p:cNvPr id="10" name="Shape 7"/>
+          <p:cNvSpPr/>
+          <p:nvPr/>
+        </p:nvSpPr>
+        <p:spPr>
+          <a:xfrm>
+            <a:off x="548640" y="3794760"/>
+            <a:ext cx="128016" cy="128016"/>
+          </a:xfrm>
+          <a:prstGeom prst="rect">
+            <a:avLst/>
+          </a:prstGeom>
+          <a:solidFill>
+            <a:srgbClr val="0F6E63"/>
+          </a:solidFill>
+          <a:ln/>
+        </p:spPr>
+        <p:txBody>
+          <a:bodyPr/>
+          <a:lstStyle/>
+          <a:p>
+            <a:endParaRPr lang="en-US"/>
+          </a:p>
+        </p:txBody>
+      </p:sp>
+      <p:sp>
+        <p:nvSpPr>
+          <p:cNvPr id="11" name="Text 8"/>
+          <p:cNvSpPr/>
+          <p:nvPr/>
+        </p:nvSpPr>
+        <p:spPr>
+          <a:xfrm>
+            <a:off x="777240" y="3685032"/>
+            <a:ext cx="4937760" cy="777240"/>
+          </a:xfrm>
+          <a:prstGeom prst="rect">
+            <a:avLst/>
+          </a:prstGeom>
+          <a:noFill/>
+          <a:ln/>
+        </p:spPr>
+        <p:txBody>
+          <a:bodyPr wrap="square" lIns="0" tIns="0" rIns="0" bIns="0" rtlCol="0" anchor="t"/>
+          <a:lstStyle/>
+          <a:p>
+            <a:pPr marL="0" indent="0">
               <a:lnSpc>
                 <a:spcPct val="100000"/>
               </a:lnSpc>
               <a:buNone/>
             </a:pPr>
             <a:r>
+              <a:rPr lang="en-US" sz="1300" b="1" dirty="0">
+                <a:solidFill>
+                  <a:srgbClr val="14232B"/>
+                </a:solidFill>
+                <a:latin typeface="Calibri" pitchFamily="34" charset="0"/>
+                <a:ea typeface="Calibri" pitchFamily="34" charset="-122"/>
+                <a:cs typeface="Calibri" pitchFamily="34" charset="-120"/>
+              </a:rPr>
+              <a:t>Three streams  </a:t>
+            </a:r>
+            <a:r>
               <a:rPr lang="en-US" sz="1300" dirty="0">
                 <a:solidFill>
                   <a:srgbClr val="3C4B52"/>
@@ -13222,7 +13022,7 @@
                 <a:ea typeface="Calibri" pitchFamily="34" charset="-122"/>
                 <a:cs typeface="Calibri" pitchFamily="34" charset="-120"/>
               </a:rPr>
-              <a:t>~0.083° grid × 44 SSA countries × 23 SPAM crops, area-weighted to each pixel.</a:t>
+              <a:t>Agronomic yield uplift, durable CDR credit, and a fully decomposed delivered cost.</a:t>
             </a:r>
             <a:endParaRPr lang="en-US" sz="1300" dirty="0"/>
           </a:p>
@@ -13230,13 +13030,13 @@
       </p:sp>
       <p:sp>
         <p:nvSpPr>
-          <p:cNvPr id="10" name="Shape 7"/>
-          <p:cNvSpPr/>
-          <p:nvPr/>
-        </p:nvSpPr>
-        <p:spPr>
-          <a:xfrm>
-            <a:off x="548640" y="3794760"/>
+          <p:cNvPr id="12" name="Shape 9"/>
+          <p:cNvSpPr/>
+          <p:nvPr/>
+        </p:nvSpPr>
+        <p:spPr>
+          <a:xfrm>
+            <a:off x="548640" y="4599432"/>
             <a:ext cx="128016" cy="128016"/>
           </a:xfrm>
           <a:prstGeom prst="rect">
@@ -13247,16 +13047,23 @@
           </a:solidFill>
           <a:ln/>
         </p:spPr>
-      </p:sp>
-      <p:sp>
-        <p:nvSpPr>
-          <p:cNvPr id="11" name="Text 8"/>
-          <p:cNvSpPr/>
-          <p:nvPr/>
-        </p:nvSpPr>
-        <p:spPr>
-          <a:xfrm>
-            <a:off x="777240" y="3685032"/>
+        <p:txBody>
+          <a:bodyPr/>
+          <a:lstStyle/>
+          <a:p>
+            <a:endParaRPr lang="en-US"/>
+          </a:p>
+        </p:txBody>
+      </p:sp>
+      <p:sp>
+        <p:nvSpPr>
+          <p:cNvPr id="13" name="Text 10"/>
+          <p:cNvSpPr/>
+          <p:nvPr/>
+        </p:nvSpPr>
+        <p:spPr>
+          <a:xfrm>
+            <a:off x="777240" y="4489704"/>
             <a:ext cx="4937760" cy="777240"/>
           </a:xfrm>
           <a:prstGeom prst="rect">
@@ -13269,7 +13076,7 @@
           <a:bodyPr wrap="square" lIns="0" tIns="0" rIns="0" bIns="0" rtlCol="0" anchor="t"/>
           <a:lstStyle/>
           <a:p>
-            <a:pPr indent="0" marL="0">
+            <a:pPr marL="0" indent="0">
               <a:lnSpc>
                 <a:spcPct val="100000"/>
               </a:lnSpc>
@@ -13284,77 +13091,78 @@
                 <a:ea typeface="Calibri" pitchFamily="34" charset="-122"/>
                 <a:cs typeface="Calibri" pitchFamily="34" charset="-120"/>
               </a:rPr>
-              <a:t>Three streams  </a:t>
-            </a:r>
-            <a:pPr indent="0" marL="0">
+              <a:t>Decision object  </a:t>
+            </a:r>
+            <a:r>
+              <a:rPr lang="en-US" sz="1300" dirty="0">
+                <a:solidFill>
+                  <a:srgbClr val="3C4B52"/>
+                </a:solidFill>
+                <a:latin typeface="Calibri" pitchFamily="34" charset="0"/>
+                <a:ea typeface="Calibri" pitchFamily="34" charset="-122"/>
+                <a:cs typeface="Calibri" pitchFamily="34" charset="-120"/>
+              </a:rPr>
+              <a:t>Each pixel is classified by which stream(s) make the margin positive — not a single supply curve.</a:t>
+            </a:r>
+            <a:endParaRPr lang="en-US" sz="1300" dirty="0"/>
+          </a:p>
+        </p:txBody>
+      </p:sp>
+      <p:sp>
+        <p:nvSpPr>
+          <p:cNvPr id="14" name="Shape 11"/>
+          <p:cNvSpPr/>
+          <p:nvPr/>
+        </p:nvSpPr>
+        <p:spPr>
+          <a:xfrm>
+            <a:off x="548640" y="5404104"/>
+            <a:ext cx="128016" cy="128016"/>
+          </a:xfrm>
+          <a:prstGeom prst="rect">
+            <a:avLst/>
+          </a:prstGeom>
+          <a:solidFill>
+            <a:srgbClr val="0F6E63"/>
+          </a:solidFill>
+          <a:ln/>
+        </p:spPr>
+        <p:txBody>
+          <a:bodyPr/>
+          <a:lstStyle/>
+          <a:p>
+            <a:endParaRPr lang="en-US"/>
+          </a:p>
+        </p:txBody>
+      </p:sp>
+      <p:sp>
+        <p:nvSpPr>
+          <p:cNvPr id="15" name="Text 12"/>
+          <p:cNvSpPr/>
+          <p:nvPr/>
+        </p:nvSpPr>
+        <p:spPr>
+          <a:xfrm>
+            <a:off x="777240" y="5294376"/>
+            <a:ext cx="4937760" cy="777240"/>
+          </a:xfrm>
+          <a:prstGeom prst="rect">
+            <a:avLst/>
+          </a:prstGeom>
+          <a:noFill/>
+          <a:ln/>
+        </p:spPr>
+        <p:txBody>
+          <a:bodyPr wrap="square" lIns="0" tIns="0" rIns="0" bIns="0" rtlCol="0" anchor="t"/>
+          <a:lstStyle/>
+          <a:p>
+            <a:pPr marL="0" indent="0">
               <a:lnSpc>
                 <a:spcPct val="100000"/>
               </a:lnSpc>
               <a:buNone/>
             </a:pPr>
             <a:r>
-              <a:rPr lang="en-US" sz="1300" dirty="0">
-                <a:solidFill>
-                  <a:srgbClr val="3C4B52"/>
-                </a:solidFill>
-                <a:latin typeface="Calibri" pitchFamily="34" charset="0"/>
-                <a:ea typeface="Calibri" pitchFamily="34" charset="-122"/>
-                <a:cs typeface="Calibri" pitchFamily="34" charset="-120"/>
-              </a:rPr>
-              <a:t>Agronomic yield uplift, durable CDR credit, and a fully decomposed delivered cost.</a:t>
-            </a:r>
-            <a:endParaRPr lang="en-US" sz="1300" dirty="0"/>
-          </a:p>
-        </p:txBody>
-      </p:sp>
-      <p:sp>
-        <p:nvSpPr>
-          <p:cNvPr id="12" name="Shape 9"/>
-          <p:cNvSpPr/>
-          <p:nvPr/>
-        </p:nvSpPr>
-        <p:spPr>
-          <a:xfrm>
-            <a:off x="548640" y="4599432"/>
-            <a:ext cx="128016" cy="128016"/>
-          </a:xfrm>
-          <a:prstGeom prst="rect">
-            <a:avLst/>
-          </a:prstGeom>
-          <a:solidFill>
-            <a:srgbClr val="0F6E63"/>
-          </a:solidFill>
-          <a:ln/>
-        </p:spPr>
-      </p:sp>
-      <p:sp>
-        <p:nvSpPr>
-          <p:cNvPr id="13" name="Text 10"/>
-          <p:cNvSpPr/>
-          <p:nvPr/>
-        </p:nvSpPr>
-        <p:spPr>
-          <a:xfrm>
-            <a:off x="777240" y="4489704"/>
-            <a:ext cx="4937760" cy="777240"/>
-          </a:xfrm>
-          <a:prstGeom prst="rect">
-            <a:avLst/>
-          </a:prstGeom>
-          <a:noFill/>
-          <a:ln/>
-        </p:spPr>
-        <p:txBody>
-          <a:bodyPr wrap="square" lIns="0" tIns="0" rIns="0" bIns="0" rtlCol="0" anchor="t"/>
-          <a:lstStyle/>
-          <a:p>
-            <a:pPr indent="0" marL="0">
-              <a:lnSpc>
-                <a:spcPct val="100000"/>
-              </a:lnSpc>
-              <a:buNone/>
-            </a:pPr>
-            <a:r>
               <a:rPr lang="en-US" sz="1300" b="1" dirty="0">
                 <a:solidFill>
                   <a:srgbClr val="14232B"/>
@@ -13363,93 +13171,8 @@
                 <a:ea typeface="Calibri" pitchFamily="34" charset="-122"/>
                 <a:cs typeface="Calibri" pitchFamily="34" charset="-120"/>
               </a:rPr>
-              <a:t>Decision object  </a:t>
-            </a:r>
-            <a:pPr indent="0" marL="0">
-              <a:lnSpc>
-                <a:spcPct val="100000"/>
-              </a:lnSpc>
-              <a:buNone/>
-            </a:pPr>
-            <a:r>
-              <a:rPr lang="en-US" sz="1300" dirty="0">
-                <a:solidFill>
-                  <a:srgbClr val="3C4B52"/>
-                </a:solidFill>
-                <a:latin typeface="Calibri" pitchFamily="34" charset="0"/>
-                <a:ea typeface="Calibri" pitchFamily="34" charset="-122"/>
-                <a:cs typeface="Calibri" pitchFamily="34" charset="-120"/>
-              </a:rPr>
-              <a:t>Each pixel is classified by which stream(s) make the margin positive — not a single supply curve.</a:t>
-            </a:r>
-            <a:endParaRPr lang="en-US" sz="1300" dirty="0"/>
-          </a:p>
-        </p:txBody>
-      </p:sp>
-      <p:sp>
-        <p:nvSpPr>
-          <p:cNvPr id="14" name="Shape 11"/>
-          <p:cNvSpPr/>
-          <p:nvPr/>
-        </p:nvSpPr>
-        <p:spPr>
-          <a:xfrm>
-            <a:off x="548640" y="5404104"/>
-            <a:ext cx="128016" cy="128016"/>
-          </a:xfrm>
-          <a:prstGeom prst="rect">
-            <a:avLst/>
-          </a:prstGeom>
-          <a:solidFill>
-            <a:srgbClr val="0F6E63"/>
-          </a:solidFill>
-          <a:ln/>
-        </p:spPr>
-      </p:sp>
-      <p:sp>
-        <p:nvSpPr>
-          <p:cNvPr id="15" name="Text 12"/>
-          <p:cNvSpPr/>
-          <p:nvPr/>
-        </p:nvSpPr>
-        <p:spPr>
-          <a:xfrm>
-            <a:off x="777240" y="5294376"/>
-            <a:ext cx="4937760" cy="777240"/>
-          </a:xfrm>
-          <a:prstGeom prst="rect">
-            <a:avLst/>
-          </a:prstGeom>
-          <a:noFill/>
-          <a:ln/>
-        </p:spPr>
-        <p:txBody>
-          <a:bodyPr wrap="square" lIns="0" tIns="0" rIns="0" bIns="0" rtlCol="0" anchor="t"/>
-          <a:lstStyle/>
-          <a:p>
-            <a:pPr indent="0" marL="0">
-              <a:lnSpc>
-                <a:spcPct val="100000"/>
-              </a:lnSpc>
-              <a:buNone/>
-            </a:pPr>
-            <a:r>
-              <a:rPr lang="en-US" sz="1300" b="1" dirty="0">
-                <a:solidFill>
-                  <a:srgbClr val="14232B"/>
-                </a:solidFill>
-                <a:latin typeface="Calibri" pitchFamily="34" charset="0"/>
-                <a:ea typeface="Calibri" pitchFamily="34" charset="-122"/>
-                <a:cs typeface="Calibri" pitchFamily="34" charset="-120"/>
-              </a:rPr>
               <a:t>Regimes  </a:t>
             </a:r>
-            <a:pPr indent="0" marL="0">
-              <a:lnSpc>
-                <a:spcPct val="100000"/>
-              </a:lnSpc>
-              <a:buNone/>
-            </a:pPr>
             <a:r>
               <a:rPr lang="en-US" sz="1300" dirty="0">
                 <a:solidFill>
@@ -13486,7 +13209,7 @@
           <a:bodyPr wrap="square" lIns="0" tIns="0" rIns="0" bIns="0" rtlCol="0" anchor="ctr"/>
           <a:lstStyle/>
           <a:p>
-            <a:pPr algn="l" indent="0" marL="0">
+            <a:pPr marL="0" indent="0" algn="l">
               <a:buNone/>
             </a:pPr>
             <a:r>
@@ -13498,21 +13221,7 @@
                 <a:ea typeface="Calibri" pitchFamily="34" charset="-122"/>
                 <a:cs typeface="Calibri" pitchFamily="34" charset="-120"/>
               </a:rPr>
-              <a:t>Enhanced Rock Weathering — public &amp; private returns in SSA</a:t>
-            </a:r>
-            <a:pPr algn="l" indent="0" marL="0">
-              <a:buNone/>
-            </a:pPr>
-            <a:r>
-              <a:rPr lang="en-US" sz="900" dirty="0">
-                <a:solidFill>
-                  <a:srgbClr val="5B6B73"/>
-                </a:solidFill>
-                <a:latin typeface="Calibri" pitchFamily="34" charset="0"/>
-                <a:ea typeface="Calibri" pitchFamily="34" charset="-122"/>
-                <a:cs typeface="Calibri" pitchFamily="34" charset="-120"/>
-              </a:rPr>
-              <a:t>   ·   Gebrekidan &amp; Chamberlin (2026)</a:t>
+              <a:t>Enhanced Rock Weathering — public &amp; private returns in SSA   ·   Gebrekidan &amp; Chamberlin (2026)</a:t>
             </a:r>
             <a:endParaRPr lang="en-US" sz="900" dirty="0"/>
           </a:p>
@@ -13539,7 +13248,7 @@
           <a:bodyPr wrap="square" lIns="0" tIns="0" rIns="0" bIns="0" rtlCol="0" anchor="ctr"/>
           <a:lstStyle/>
           <a:p>
-            <a:pPr algn="r" indent="0" marL="0">
+            <a:pPr marL="0" indent="0" algn="r">
               <a:buNone/>
             </a:pPr>
             <a:r>
@@ -13573,6 +13282,7 @@
         <a:solidFill>
           <a:srgbClr val="FFFFFF"/>
         </a:solidFill>
+        <a:effectLst/>
       </p:bgPr>
     </p:bg>
     <p:spTree>
@@ -13610,11 +13320,11 @@
           <a:bodyPr wrap="square" lIns="0" tIns="0" rIns="0" bIns="0" rtlCol="0" anchor="ctr"/>
           <a:lstStyle/>
           <a:p>
-            <a:pPr indent="0" marL="0">
-              <a:buNone/>
-            </a:pPr>
-            <a:r>
-              <a:rPr lang="en-US" sz="1200" b="1" spc="200" kern="0" dirty="0">
+            <a:pPr marL="0" indent="0">
+              <a:buNone/>
+            </a:pPr>
+            <a:r>
+              <a:rPr lang="en-US" sz="1200" b="1" kern="0" spc="200" dirty="0">
                 <a:solidFill>
                   <a:srgbClr val="0F6E63"/>
                 </a:solidFill>
@@ -13649,7 +13359,7 @@
           <a:bodyPr wrap="square" lIns="0" tIns="0" rIns="0" bIns="0" rtlCol="0" anchor="ctr"/>
           <a:lstStyle/>
           <a:p>
-            <a:pPr indent="0" marL="0">
+            <a:pPr marL="0" indent="0">
               <a:buNone/>
             </a:pPr>
             <a:r>
@@ -13693,13 +13403,20 @@
             <a:prstDash val="solid"/>
           </a:ln>
           <a:effectLst>
-            <a:outerShdw sx="100000" sy="100000" kx="0" ky="0" algn="bl" rotWithShape="0" blurRad="88900" dist="38100" dir="5400000">
+            <a:outerShdw blurRad="88900" dist="38100" dir="5400000" algn="bl" rotWithShape="0">
               <a:srgbClr val="000000">
                 <a:alpha val="13000"/>
               </a:srgbClr>
             </a:outerShdw>
           </a:effectLst>
         </p:spPr>
+        <p:txBody>
+          <a:bodyPr/>
+          <a:lstStyle/>
+          <a:p>
+            <a:endParaRPr lang="en-US"/>
+          </a:p>
+        </p:txBody>
       </p:sp>
       <p:sp>
         <p:nvSpPr>
@@ -13722,11 +13439,11 @@
           <a:bodyPr wrap="square" lIns="0" tIns="0" rIns="0" bIns="0" rtlCol="0" anchor="ctr"/>
           <a:lstStyle/>
           <a:p>
-            <a:pPr indent="0" marL="0">
-              <a:buNone/>
-            </a:pPr>
-            <a:r>
-              <a:rPr lang="en-US" sz="1100" b="1" spc="100" kern="0" dirty="0">
+            <a:pPr marL="0" indent="0">
+              <a:buNone/>
+            </a:pPr>
+            <a:r>
+              <a:rPr lang="en-US" sz="1100" b="1" kern="0" spc="100" dirty="0">
                 <a:solidFill>
                   <a:srgbClr val="0F6E63"/>
                 </a:solidFill>
@@ -13761,7 +13478,7 @@
           <a:bodyPr wrap="square" lIns="0" tIns="0" rIns="0" bIns="0" rtlCol="0" anchor="ctr"/>
           <a:lstStyle/>
           <a:p>
-            <a:pPr indent="0" marL="0">
+            <a:pPr marL="0" indent="0">
               <a:buNone/>
             </a:pPr>
             <a:r>
@@ -13800,7 +13517,7 @@
           <a:bodyPr wrap="square" lIns="0" tIns="0" rIns="0" bIns="0" rtlCol="0" anchor="t"/>
           <a:lstStyle/>
           <a:p>
-            <a:pPr indent="0" marL="0">
+            <a:pPr marL="0" indent="0">
               <a:buNone/>
             </a:pPr>
             <a:r>
@@ -13844,13 +13561,20 @@
             <a:prstDash val="solid"/>
           </a:ln>
           <a:effectLst>
-            <a:outerShdw sx="100000" sy="100000" kx="0" ky="0" algn="bl" rotWithShape="0" blurRad="88900" dist="38100" dir="5400000">
+            <a:outerShdw blurRad="88900" dist="38100" dir="5400000" algn="bl" rotWithShape="0">
               <a:srgbClr val="000000">
                 <a:alpha val="13000"/>
               </a:srgbClr>
             </a:outerShdw>
           </a:effectLst>
         </p:spPr>
+        <p:txBody>
+          <a:bodyPr/>
+          <a:lstStyle/>
+          <a:p>
+            <a:endParaRPr lang="en-US"/>
+          </a:p>
+        </p:txBody>
       </p:sp>
       <p:sp>
         <p:nvSpPr>
@@ -13873,11 +13597,11 @@
           <a:bodyPr wrap="square" lIns="0" tIns="0" rIns="0" bIns="0" rtlCol="0" anchor="ctr"/>
           <a:lstStyle/>
           <a:p>
-            <a:pPr indent="0" marL="0">
-              <a:buNone/>
-            </a:pPr>
-            <a:r>
-              <a:rPr lang="en-US" sz="1100" b="1" spc="100" kern="0" dirty="0">
+            <a:pPr marL="0" indent="0">
+              <a:buNone/>
+            </a:pPr>
+            <a:r>
+              <a:rPr lang="en-US" sz="1100" b="1" kern="0" spc="100" dirty="0">
                 <a:solidFill>
                   <a:srgbClr val="0F6E63"/>
                 </a:solidFill>
@@ -13912,7 +13636,7 @@
           <a:bodyPr wrap="square" lIns="0" tIns="0" rIns="0" bIns="0" rtlCol="0" anchor="ctr"/>
           <a:lstStyle/>
           <a:p>
-            <a:pPr indent="0" marL="0">
+            <a:pPr marL="0" indent="0">
               <a:buNone/>
             </a:pPr>
             <a:r>
@@ -13951,7 +13675,7 @@
           <a:bodyPr wrap="square" lIns="0" tIns="0" rIns="0" bIns="0" rtlCol="0" anchor="t"/>
           <a:lstStyle/>
           <a:p>
-            <a:pPr indent="0" marL="0">
+            <a:pPr marL="0" indent="0">
               <a:buNone/>
             </a:pPr>
             <a:r>
@@ -13995,13 +13719,20 @@
             <a:prstDash val="solid"/>
           </a:ln>
           <a:effectLst>
-            <a:outerShdw sx="100000" sy="100000" kx="0" ky="0" algn="bl" rotWithShape="0" blurRad="88900" dist="38100" dir="5400000">
+            <a:outerShdw blurRad="88900" dist="38100" dir="5400000" algn="bl" rotWithShape="0">
               <a:srgbClr val="000000">
                 <a:alpha val="13000"/>
               </a:srgbClr>
             </a:outerShdw>
           </a:effectLst>
         </p:spPr>
+        <p:txBody>
+          <a:bodyPr/>
+          <a:lstStyle/>
+          <a:p>
+            <a:endParaRPr lang="en-US"/>
+          </a:p>
+        </p:txBody>
       </p:sp>
       <p:sp>
         <p:nvSpPr>
@@ -14024,11 +13755,11 @@
           <a:bodyPr wrap="square" lIns="0" tIns="0" rIns="0" bIns="0" rtlCol="0" anchor="ctr"/>
           <a:lstStyle/>
           <a:p>
-            <a:pPr indent="0" marL="0">
-              <a:buNone/>
-            </a:pPr>
-            <a:r>
-              <a:rPr lang="en-US" sz="1100" b="1" spc="100" kern="0" dirty="0">
+            <a:pPr marL="0" indent="0">
+              <a:buNone/>
+            </a:pPr>
+            <a:r>
+              <a:rPr lang="en-US" sz="1100" b="1" kern="0" spc="100" dirty="0">
                 <a:solidFill>
                   <a:srgbClr val="0F6E63"/>
                 </a:solidFill>
@@ -14063,7 +13794,7 @@
           <a:bodyPr wrap="square" lIns="0" tIns="0" rIns="0" bIns="0" rtlCol="0" anchor="ctr"/>
           <a:lstStyle/>
           <a:p>
-            <a:pPr indent="0" marL="0">
+            <a:pPr marL="0" indent="0">
               <a:buNone/>
             </a:pPr>
             <a:r>
@@ -14102,7 +13833,7 @@
           <a:bodyPr wrap="square" lIns="0" tIns="0" rIns="0" bIns="0" rtlCol="0" anchor="t"/>
           <a:lstStyle/>
           <a:p>
-            <a:pPr indent="0" marL="0">
+            <a:pPr marL="0" indent="0">
               <a:buNone/>
             </a:pPr>
             <a:r>
@@ -14146,13 +13877,20 @@
             <a:prstDash val="solid"/>
           </a:ln>
           <a:effectLst>
-            <a:outerShdw sx="100000" sy="100000" kx="0" ky="0" algn="bl" rotWithShape="0" blurRad="88900" dist="38100" dir="5400000">
+            <a:outerShdw blurRad="88900" dist="38100" dir="5400000" algn="bl" rotWithShape="0">
               <a:srgbClr val="000000">
                 <a:alpha val="13000"/>
               </a:srgbClr>
             </a:outerShdw>
           </a:effectLst>
         </p:spPr>
+        <p:txBody>
+          <a:bodyPr/>
+          <a:lstStyle/>
+          <a:p>
+            <a:endParaRPr lang="en-US"/>
+          </a:p>
+        </p:txBody>
       </p:sp>
       <p:sp>
         <p:nvSpPr>
@@ -14175,11 +13913,11 @@
           <a:bodyPr wrap="square" lIns="0" tIns="0" rIns="0" bIns="0" rtlCol="0" anchor="ctr"/>
           <a:lstStyle/>
           <a:p>
-            <a:pPr indent="0" marL="0">
-              <a:buNone/>
-            </a:pPr>
-            <a:r>
-              <a:rPr lang="en-US" sz="1100" b="1" spc="100" kern="0" dirty="0">
+            <a:pPr marL="0" indent="0">
+              <a:buNone/>
+            </a:pPr>
+            <a:r>
+              <a:rPr lang="en-US" sz="1100" b="1" kern="0" spc="100" dirty="0">
                 <a:solidFill>
                   <a:srgbClr val="0F6E63"/>
                 </a:solidFill>
@@ -14214,7 +13952,7 @@
           <a:bodyPr wrap="square" lIns="0" tIns="0" rIns="0" bIns="0" rtlCol="0" anchor="ctr"/>
           <a:lstStyle/>
           <a:p>
-            <a:pPr indent="0" marL="0">
+            <a:pPr marL="0" indent="0">
               <a:buNone/>
             </a:pPr>
             <a:r>
@@ -14253,7 +13991,7 @@
           <a:bodyPr wrap="square" lIns="0" tIns="0" rIns="0" bIns="0" rtlCol="0" anchor="t"/>
           <a:lstStyle/>
           <a:p>
-            <a:pPr indent="0" marL="0">
+            <a:pPr marL="0" indent="0">
               <a:buNone/>
             </a:pPr>
             <a:r>
@@ -14297,13 +14035,20 @@
             <a:prstDash val="solid"/>
           </a:ln>
           <a:effectLst>
-            <a:outerShdw sx="100000" sy="100000" kx="0" ky="0" algn="bl" rotWithShape="0" blurRad="88900" dist="38100" dir="5400000">
+            <a:outerShdw blurRad="88900" dist="38100" dir="5400000" algn="bl" rotWithShape="0">
               <a:srgbClr val="000000">
                 <a:alpha val="13000"/>
               </a:srgbClr>
             </a:outerShdw>
           </a:effectLst>
         </p:spPr>
+        <p:txBody>
+          <a:bodyPr/>
+          <a:lstStyle/>
+          <a:p>
+            <a:endParaRPr lang="en-US"/>
+          </a:p>
+        </p:txBody>
       </p:sp>
       <p:sp>
         <p:nvSpPr>
@@ -14326,11 +14071,11 @@
           <a:bodyPr wrap="square" lIns="0" tIns="0" rIns="0" bIns="0" rtlCol="0" anchor="ctr"/>
           <a:lstStyle/>
           <a:p>
-            <a:pPr indent="0" marL="0">
-              <a:buNone/>
-            </a:pPr>
-            <a:r>
-              <a:rPr lang="en-US" sz="1100" b="1" spc="100" kern="0" dirty="0">
+            <a:pPr marL="0" indent="0">
+              <a:buNone/>
+            </a:pPr>
+            <a:r>
+              <a:rPr lang="en-US" sz="1100" b="1" kern="0" spc="100" dirty="0">
                 <a:solidFill>
                   <a:srgbClr val="0F6E63"/>
                 </a:solidFill>
@@ -14365,7 +14110,7 @@
           <a:bodyPr wrap="square" lIns="0" tIns="0" rIns="0" bIns="0" rtlCol="0" anchor="ctr"/>
           <a:lstStyle/>
           <a:p>
-            <a:pPr indent="0" marL="0">
+            <a:pPr marL="0" indent="0">
               <a:buNone/>
             </a:pPr>
             <a:r>
@@ -14404,7 +14149,7 @@
           <a:bodyPr wrap="square" lIns="0" tIns="0" rIns="0" bIns="0" rtlCol="0" anchor="t"/>
           <a:lstStyle/>
           <a:p>
-            <a:pPr indent="0" marL="0">
+            <a:pPr marL="0" indent="0">
               <a:buNone/>
             </a:pPr>
             <a:r>
@@ -14448,13 +14193,20 @@
             <a:prstDash val="solid"/>
           </a:ln>
           <a:effectLst>
-            <a:outerShdw sx="100000" sy="100000" kx="0" ky="0" algn="bl" rotWithShape="0" blurRad="88900" dist="38100" dir="5400000">
+            <a:outerShdw blurRad="88900" dist="38100" dir="5400000" algn="bl" rotWithShape="0">
               <a:srgbClr val="000000">
                 <a:alpha val="13000"/>
               </a:srgbClr>
             </a:outerShdw>
           </a:effectLst>
         </p:spPr>
+        <p:txBody>
+          <a:bodyPr/>
+          <a:lstStyle/>
+          <a:p>
+            <a:endParaRPr lang="en-US"/>
+          </a:p>
+        </p:txBody>
       </p:sp>
       <p:sp>
         <p:nvSpPr>
@@ -14477,11 +14229,11 @@
           <a:bodyPr wrap="square" lIns="0" tIns="0" rIns="0" bIns="0" rtlCol="0" anchor="ctr"/>
           <a:lstStyle/>
           <a:p>
-            <a:pPr indent="0" marL="0">
-              <a:buNone/>
-            </a:pPr>
-            <a:r>
-              <a:rPr lang="en-US" sz="1100" b="1" spc="100" kern="0" dirty="0">
+            <a:pPr marL="0" indent="0">
+              <a:buNone/>
+            </a:pPr>
+            <a:r>
+              <a:rPr lang="en-US" sz="1100" b="1" kern="0" spc="100" dirty="0">
                 <a:solidFill>
                   <a:srgbClr val="0F6E63"/>
                 </a:solidFill>
@@ -14516,7 +14268,7 @@
           <a:bodyPr wrap="square" lIns="0" tIns="0" rIns="0" bIns="0" rtlCol="0" anchor="ctr"/>
           <a:lstStyle/>
           <a:p>
-            <a:pPr indent="0" marL="0">
+            <a:pPr marL="0" indent="0">
               <a:buNone/>
             </a:pPr>
             <a:r>
@@ -14555,7 +14307,7 @@
           <a:bodyPr wrap="square" lIns="0" tIns="0" rIns="0" bIns="0" rtlCol="0" anchor="t"/>
           <a:lstStyle/>
           <a:p>
-            <a:pPr indent="0" marL="0">
+            <a:pPr marL="0" indent="0">
               <a:buNone/>
             </a:pPr>
             <a:r>
@@ -14599,13 +14351,20 @@
             <a:prstDash val="solid"/>
           </a:ln>
           <a:effectLst>
-            <a:outerShdw sx="100000" sy="100000" kx="0" ky="0" algn="bl" rotWithShape="0" blurRad="88900" dist="38100" dir="5400000">
+            <a:outerShdw blurRad="88900" dist="38100" dir="5400000" algn="bl" rotWithShape="0">
               <a:srgbClr val="000000">
                 <a:alpha val="13000"/>
               </a:srgbClr>
             </a:outerShdw>
           </a:effectLst>
         </p:spPr>
+        <p:txBody>
+          <a:bodyPr/>
+          <a:lstStyle/>
+          <a:p>
+            <a:endParaRPr lang="en-US"/>
+          </a:p>
+        </p:txBody>
       </p:sp>
       <p:sp>
         <p:nvSpPr>
@@ -14628,11 +14387,11 @@
           <a:bodyPr wrap="square" lIns="0" tIns="0" rIns="0" bIns="0" rtlCol="0" anchor="ctr"/>
           <a:lstStyle/>
           <a:p>
-            <a:pPr indent="0" marL="0">
-              <a:buNone/>
-            </a:pPr>
-            <a:r>
-              <a:rPr lang="en-US" sz="1100" b="1" spc="100" kern="0" dirty="0">
+            <a:pPr marL="0" indent="0">
+              <a:buNone/>
+            </a:pPr>
+            <a:r>
+              <a:rPr lang="en-US" sz="1100" b="1" kern="0" spc="100" dirty="0">
                 <a:solidFill>
                   <a:srgbClr val="0F6E63"/>
                 </a:solidFill>
@@ -14667,7 +14426,7 @@
           <a:bodyPr wrap="square" lIns="0" tIns="0" rIns="0" bIns="0" rtlCol="0" anchor="ctr"/>
           <a:lstStyle/>
           <a:p>
-            <a:pPr indent="0" marL="0">
+            <a:pPr marL="0" indent="0">
               <a:buNone/>
             </a:pPr>
             <a:r>
@@ -14706,7 +14465,7 @@
           <a:bodyPr wrap="square" lIns="0" tIns="0" rIns="0" bIns="0" rtlCol="0" anchor="t"/>
           <a:lstStyle/>
           <a:p>
-            <a:pPr indent="0" marL="0">
+            <a:pPr marL="0" indent="0">
               <a:buNone/>
             </a:pPr>
             <a:r>
@@ -14750,13 +14509,20 @@
             <a:prstDash val="solid"/>
           </a:ln>
           <a:effectLst>
-            <a:outerShdw sx="100000" sy="100000" kx="0" ky="0" algn="bl" rotWithShape="0" blurRad="88900" dist="38100" dir="5400000">
+            <a:outerShdw blurRad="88900" dist="38100" dir="5400000" algn="bl" rotWithShape="0">
               <a:srgbClr val="000000">
                 <a:alpha val="13000"/>
               </a:srgbClr>
             </a:outerShdw>
           </a:effectLst>
         </p:spPr>
+        <p:txBody>
+          <a:bodyPr/>
+          <a:lstStyle/>
+          <a:p>
+            <a:endParaRPr lang="en-US"/>
+          </a:p>
+        </p:txBody>
       </p:sp>
       <p:sp>
         <p:nvSpPr>
@@ -14779,11 +14545,11 @@
           <a:bodyPr wrap="square" lIns="0" tIns="0" rIns="0" bIns="0" rtlCol="0" anchor="ctr"/>
           <a:lstStyle/>
           <a:p>
-            <a:pPr indent="0" marL="0">
-              <a:buNone/>
-            </a:pPr>
-            <a:r>
-              <a:rPr lang="en-US" sz="1100" b="1" spc="100" kern="0" dirty="0">
+            <a:pPr marL="0" indent="0">
+              <a:buNone/>
+            </a:pPr>
+            <a:r>
+              <a:rPr lang="en-US" sz="1100" b="1" kern="0" spc="100" dirty="0">
                 <a:solidFill>
                   <a:srgbClr val="0F6E63"/>
                 </a:solidFill>
@@ -14818,7 +14584,7 @@
           <a:bodyPr wrap="square" lIns="0" tIns="0" rIns="0" bIns="0" rtlCol="0" anchor="ctr"/>
           <a:lstStyle/>
           <a:p>
-            <a:pPr indent="0" marL="0">
+            <a:pPr marL="0" indent="0">
               <a:buNone/>
             </a:pPr>
             <a:r>
@@ -14857,7 +14623,7 @@
           <a:bodyPr wrap="square" lIns="0" tIns="0" rIns="0" bIns="0" rtlCol="0" anchor="t"/>
           <a:lstStyle/>
           <a:p>
-            <a:pPr indent="0" marL="0">
+            <a:pPr marL="0" indent="0">
               <a:buNone/>
             </a:pPr>
             <a:r>
@@ -14901,13 +14667,20 @@
             <a:prstDash val="solid"/>
           </a:ln>
           <a:effectLst>
-            <a:outerShdw sx="100000" sy="100000" kx="0" ky="0" algn="bl" rotWithShape="0" blurRad="88900" dist="38100" dir="5400000">
+            <a:outerShdw blurRad="88900" dist="38100" dir="5400000" algn="bl" rotWithShape="0">
               <a:srgbClr val="000000">
                 <a:alpha val="13000"/>
               </a:srgbClr>
             </a:outerShdw>
           </a:effectLst>
         </p:spPr>
+        <p:txBody>
+          <a:bodyPr/>
+          <a:lstStyle/>
+          <a:p>
+            <a:endParaRPr lang="en-US"/>
+          </a:p>
+        </p:txBody>
       </p:sp>
       <p:sp>
         <p:nvSpPr>
@@ -14930,11 +14703,11 @@
           <a:bodyPr wrap="square" lIns="0" tIns="0" rIns="0" bIns="0" rtlCol="0" anchor="ctr"/>
           <a:lstStyle/>
           <a:p>
-            <a:pPr indent="0" marL="0">
-              <a:buNone/>
-            </a:pPr>
-            <a:r>
-              <a:rPr lang="en-US" sz="1100" b="1" spc="100" kern="0" dirty="0">
+            <a:pPr marL="0" indent="0">
+              <a:buNone/>
+            </a:pPr>
+            <a:r>
+              <a:rPr lang="en-US" sz="1100" b="1" kern="0" spc="100" dirty="0">
                 <a:solidFill>
                   <a:srgbClr val="0F6E63"/>
                 </a:solidFill>
@@ -14969,7 +14742,7 @@
           <a:bodyPr wrap="square" lIns="0" tIns="0" rIns="0" bIns="0" rtlCol="0" anchor="ctr"/>
           <a:lstStyle/>
           <a:p>
-            <a:pPr indent="0" marL="0">
+            <a:pPr marL="0" indent="0">
               <a:buNone/>
             </a:pPr>
             <a:r>
@@ -15008,7 +14781,7 @@
           <a:bodyPr wrap="square" lIns="0" tIns="0" rIns="0" bIns="0" rtlCol="0" anchor="t"/>
           <a:lstStyle/>
           <a:p>
-            <a:pPr indent="0" marL="0">
+            <a:pPr marL="0" indent="0">
               <a:buNone/>
             </a:pPr>
             <a:r>
@@ -15047,7 +14820,7 @@
           <a:bodyPr wrap="square" lIns="0" tIns="0" rIns="0" bIns="0" rtlCol="0" anchor="ctr"/>
           <a:lstStyle/>
           <a:p>
-            <a:pPr algn="l" indent="0" marL="0">
+            <a:pPr marL="0" indent="0" algn="l">
               <a:buNone/>
             </a:pPr>
             <a:r>
@@ -15059,21 +14832,7 @@
                 <a:ea typeface="Calibri" pitchFamily="34" charset="-122"/>
                 <a:cs typeface="Calibri" pitchFamily="34" charset="-120"/>
               </a:rPr>
-              <a:t>Enhanced Rock Weathering — public &amp; private returns in SSA</a:t>
-            </a:r>
-            <a:pPr algn="l" indent="0" marL="0">
-              <a:buNone/>
-            </a:pPr>
-            <a:r>
-              <a:rPr lang="en-US" sz="900" dirty="0">
-                <a:solidFill>
-                  <a:srgbClr val="5B6B73"/>
-                </a:solidFill>
-                <a:latin typeface="Calibri" pitchFamily="34" charset="0"/>
-                <a:ea typeface="Calibri" pitchFamily="34" charset="-122"/>
-                <a:cs typeface="Calibri" pitchFamily="34" charset="-120"/>
-              </a:rPr>
-              <a:t>   ·   Gebrekidan &amp; Chamberlin (2026)</a:t>
+              <a:t>Enhanced Rock Weathering — public &amp; private returns in SSA   ·   Gebrekidan &amp; Chamberlin (2026)</a:t>
             </a:r>
             <a:endParaRPr lang="en-US" sz="900" dirty="0"/>
           </a:p>
@@ -15100,7 +14859,7 @@
           <a:bodyPr wrap="square" lIns="0" tIns="0" rIns="0" bIns="0" rtlCol="0" anchor="ctr"/>
           <a:lstStyle/>
           <a:p>
-            <a:pPr algn="r" indent="0" marL="0">
+            <a:pPr marL="0" indent="0" algn="r">
               <a:buNone/>
             </a:pPr>
             <a:r>
@@ -15134,6 +14893,7 @@
         <a:solidFill>
           <a:srgbClr val="14232B"/>
         </a:solidFill>
+        <a:effectLst/>
       </p:bgPr>
     </p:bg>
     <p:spTree>
@@ -15171,11 +14931,11 @@
           <a:bodyPr wrap="square" lIns="0" tIns="0" rIns="0" bIns="0" rtlCol="0" anchor="ctr"/>
           <a:lstStyle/>
           <a:p>
-            <a:pPr indent="0" marL="0">
-              <a:buNone/>
-            </a:pPr>
-            <a:r>
-              <a:rPr lang="en-US" sz="1400" b="1" spc="300" kern="0" dirty="0">
+            <a:pPr marL="0" indent="0">
+              <a:buNone/>
+            </a:pPr>
+            <a:r>
+              <a:rPr lang="en-US" sz="1400" b="1" kern="0" spc="300" dirty="0">
                 <a:solidFill>
                   <a:srgbClr val="E8843C"/>
                 </a:solidFill>
@@ -15210,7 +14970,7 @@
           <a:bodyPr wrap="square" lIns="0" tIns="0" rIns="0" bIns="0" rtlCol="0" anchor="ctr"/>
           <a:lstStyle/>
           <a:p>
-            <a:pPr indent="0" marL="0">
+            <a:pPr marL="0" indent="0">
               <a:buNone/>
             </a:pPr>
             <a:r>
@@ -15222,7 +14982,7 @@
                 <a:ea typeface="Cambria" pitchFamily="34" charset="-122"/>
                 <a:cs typeface="Cambria" pitchFamily="34" charset="-120"/>
               </a:rPr>
-              <a:t>The assumption sets</a:t>
+              <a:t>Assumptions</a:t>
             </a:r>
             <a:endParaRPr lang="en-US" sz="4400" dirty="0"/>
           </a:p>
@@ -15249,7 +15009,7 @@
           <a:bodyPr wrap="square" lIns="0" tIns="0" rIns="0" bIns="0" rtlCol="0" anchor="ctr"/>
           <a:lstStyle/>
           <a:p>
-            <a:pPr indent="0" marL="0">
+            <a:pPr marL="0" indent="0">
               <a:lnSpc>
                 <a:spcPct val="110000"/>
               </a:lnSpc>
@@ -15286,6 +15046,7 @@
         <a:solidFill>
           <a:srgbClr val="FFFFFF"/>
         </a:solidFill>
+        <a:effectLst/>
       </p:bgPr>
     </p:bg>
     <p:spTree>
@@ -15323,11 +15084,11 @@
           <a:bodyPr wrap="square" lIns="0" tIns="0" rIns="0" bIns="0" rtlCol="0" anchor="ctr"/>
           <a:lstStyle/>
           <a:p>
-            <a:pPr indent="0" marL="0">
-              <a:buNone/>
-            </a:pPr>
-            <a:r>
-              <a:rPr lang="en-US" sz="1200" b="1" spc="200" kern="0" dirty="0">
+            <a:pPr marL="0" indent="0">
+              <a:buNone/>
+            </a:pPr>
+            <a:r>
+              <a:rPr lang="en-US" sz="1200" b="1" kern="0" spc="200" dirty="0">
                 <a:solidFill>
                   <a:srgbClr val="E8843C"/>
                 </a:solidFill>
@@ -15362,7 +15123,7 @@
           <a:bodyPr wrap="square" lIns="0" tIns="0" rIns="0" bIns="0" rtlCol="0" anchor="ctr"/>
           <a:lstStyle/>
           <a:p>
-            <a:pPr indent="0" marL="0">
+            <a:pPr marL="0" indent="0">
               <a:buNone/>
             </a:pPr>
             <a:r>
@@ -15382,15 +15143,15 @@
       </p:sp>
       <p:pic>
         <p:nvPicPr>
-          <p:cNvPr id="4" name="Image 0" descr="img/delivered_cost_saving_solar25.png">    </p:cNvPr>
+          <p:cNvPr id="4" name="Image 0" descr="img/delivered_cost_saving_solar25.png"/>
           <p:cNvPicPr>
             <a:picLocks noChangeAspect="1"/>
           </p:cNvPicPr>
           <p:nvPr/>
         </p:nvPicPr>
         <p:blipFill>
-          <a:blip r:embed="rId1"/>
-          <a:srcRect l="0" r="0" t="0" b="0"/>
+          <a:blip r:embed="rId3"/>
+          <a:srcRect/>
           <a:stretch/>
         </p:blipFill>
         <p:spPr>
@@ -15429,13 +15190,20 @@
             <a:prstDash val="solid"/>
           </a:ln>
           <a:effectLst>
-            <a:outerShdw sx="100000" sy="100000" kx="0" ky="0" algn="bl" rotWithShape="0" blurRad="88900" dist="38100" dir="5400000">
+            <a:outerShdw blurRad="88900" dist="38100" dir="5400000" algn="bl" rotWithShape="0">
               <a:srgbClr val="000000">
                 <a:alpha val="13000"/>
               </a:srgbClr>
             </a:outerShdw>
           </a:effectLst>
         </p:spPr>
+        <p:txBody>
+          <a:bodyPr/>
+          <a:lstStyle/>
+          <a:p>
+            <a:endParaRPr lang="en-US"/>
+          </a:p>
+        </p:txBody>
       </p:sp>
       <p:sp>
         <p:nvSpPr>
@@ -15458,7 +15226,7 @@
           <a:bodyPr wrap="square" lIns="0" tIns="0" rIns="0" bIns="0" rtlCol="0" anchor="t"/>
           <a:lstStyle/>
           <a:p>
-            <a:pPr indent="0" marL="0">
+            <a:pPr marL="0" indent="0">
               <a:lnSpc>
                 <a:spcPct val="100000"/>
               </a:lnSpc>
@@ -15476,12 +15244,6 @@
               <a:t>Decomposed cost
 </a:t>
             </a:r>
-            <a:pPr indent="0" marL="0">
-              <a:lnSpc>
-                <a:spcPct val="100000"/>
-              </a:lnSpc>
-              <a:buNone/>
-            </a:pPr>
             <a:r>
               <a:rPr lang="en-US" sz="1200" dirty="0">
                 <a:solidFill>
@@ -15523,13 +15285,20 @@
             <a:prstDash val="solid"/>
           </a:ln>
           <a:effectLst>
-            <a:outerShdw sx="100000" sy="100000" kx="0" ky="0" algn="bl" rotWithShape="0" blurRad="88900" dist="38100" dir="5400000">
+            <a:outerShdw blurRad="88900" dist="38100" dir="5400000" algn="bl" rotWithShape="0">
               <a:srgbClr val="000000">
                 <a:alpha val="13000"/>
               </a:srgbClr>
             </a:outerShdw>
           </a:effectLst>
         </p:spPr>
+        <p:txBody>
+          <a:bodyPr/>
+          <a:lstStyle/>
+          <a:p>
+            <a:endParaRPr lang="en-US"/>
+          </a:p>
+        </p:txBody>
       </p:sp>
       <p:sp>
         <p:nvSpPr>
@@ -15552,7 +15321,7 @@
           <a:bodyPr wrap="square" lIns="0" tIns="0" rIns="0" bIns="0" rtlCol="0" anchor="t"/>
           <a:lstStyle/>
           <a:p>
-            <a:pPr indent="0" marL="0">
+            <a:pPr marL="0" indent="0">
               <a:lnSpc>
                 <a:spcPct val="100000"/>
               </a:lnSpc>
@@ -15570,12 +15339,6 @@
               <a:t>Transport binds
 </a:t>
             </a:r>
-            <a:pPr indent="0" marL="0">
-              <a:lnSpc>
-                <a:spcPct val="100000"/>
-              </a:lnSpc>
-              <a:buNone/>
-            </a:pPr>
             <a:r>
               <a:rPr lang="en-US" sz="1200" dirty="0">
                 <a:solidFill>
@@ -15617,13 +15380,20 @@
             <a:prstDash val="solid"/>
           </a:ln>
           <a:effectLst>
-            <a:outerShdw sx="100000" sy="100000" kx="0" ky="0" algn="bl" rotWithShape="0" blurRad="88900" dist="38100" dir="5400000">
+            <a:outerShdw blurRad="88900" dist="38100" dir="5400000" algn="bl" rotWithShape="0">
               <a:srgbClr val="000000">
                 <a:alpha val="13000"/>
               </a:srgbClr>
             </a:outerShdw>
           </a:effectLst>
         </p:spPr>
+        <p:txBody>
+          <a:bodyPr/>
+          <a:lstStyle/>
+          <a:p>
+            <a:endParaRPr lang="en-US"/>
+          </a:p>
+        </p:txBody>
       </p:sp>
       <p:sp>
         <p:nvSpPr>
@@ -15646,7 +15416,7 @@
           <a:bodyPr wrap="square" lIns="0" tIns="0" rIns="0" bIns="0" rtlCol="0" anchor="t"/>
           <a:lstStyle/>
           <a:p>
-            <a:pPr indent="0" marL="0">
+            <a:pPr marL="0" indent="0">
               <a:lnSpc>
                 <a:spcPct val="100000"/>
               </a:lnSpc>
@@ -15664,12 +15434,6 @@
               <a:t>The solar lever
 </a:t>
             </a:r>
-            <a:pPr indent="0" marL="0">
-              <a:lnSpc>
-                <a:spcPct val="100000"/>
-              </a:lnSpc>
-              <a:buNone/>
-            </a:pPr>
             <a:r>
               <a:rPr lang="en-US" sz="1200" dirty="0">
                 <a:solidFill>
@@ -15711,13 +15475,20 @@
             <a:prstDash val="solid"/>
           </a:ln>
           <a:effectLst>
-            <a:outerShdw sx="100000" sy="100000" kx="0" ky="0" algn="bl" rotWithShape="0" blurRad="88900" dist="38100" dir="5400000">
+            <a:outerShdw blurRad="88900" dist="38100" dir="5400000" algn="bl" rotWithShape="0">
               <a:srgbClr val="000000">
                 <a:alpha val="13000"/>
               </a:srgbClr>
             </a:outerShdw>
           </a:effectLst>
         </p:spPr>
+        <p:txBody>
+          <a:bodyPr/>
+          <a:lstStyle/>
+          <a:p>
+            <a:endParaRPr lang="en-US"/>
+          </a:p>
+        </p:txBody>
       </p:sp>
       <p:sp>
         <p:nvSpPr>
@@ -15740,7 +15511,7 @@
           <a:bodyPr wrap="square" lIns="0" tIns="0" rIns="0" bIns="0" rtlCol="0" anchor="t"/>
           <a:lstStyle/>
           <a:p>
-            <a:pPr indent="0" marL="0">
+            <a:pPr marL="0" indent="0">
               <a:lnSpc>
                 <a:spcPct val="100000"/>
               </a:lnSpc>
@@ -15758,12 +15529,6 @@
               <a:t>MRV
 </a:t>
             </a:r>
-            <a:pPr indent="0" marL="0">
-              <a:lnSpc>
-                <a:spcPct val="100000"/>
-              </a:lnSpc>
-              <a:buNone/>
-            </a:pPr>
             <a:r>
               <a:rPr lang="en-US" sz="1200" dirty="0">
                 <a:solidFill>
@@ -15800,7 +15565,7 @@
           <a:bodyPr wrap="square" lIns="0" tIns="0" rIns="0" bIns="0" rtlCol="0" anchor="ctr"/>
           <a:lstStyle/>
           <a:p>
-            <a:pPr algn="l" indent="0" marL="0">
+            <a:pPr marL="0" indent="0" algn="l">
               <a:buNone/>
             </a:pPr>
             <a:r>
@@ -15812,21 +15577,7 @@
                 <a:ea typeface="Calibri" pitchFamily="34" charset="-122"/>
                 <a:cs typeface="Calibri" pitchFamily="34" charset="-120"/>
               </a:rPr>
-              <a:t>Enhanced Rock Weathering — public &amp; private returns in SSA</a:t>
-            </a:r>
-            <a:pPr algn="l" indent="0" marL="0">
-              <a:buNone/>
-            </a:pPr>
-            <a:r>
-              <a:rPr lang="en-US" sz="900" dirty="0">
-                <a:solidFill>
-                  <a:srgbClr val="5B6B73"/>
-                </a:solidFill>
-                <a:latin typeface="Calibri" pitchFamily="34" charset="0"/>
-                <a:ea typeface="Calibri" pitchFamily="34" charset="-122"/>
-                <a:cs typeface="Calibri" pitchFamily="34" charset="-120"/>
-              </a:rPr>
-              <a:t>   ·   Gebrekidan &amp; Chamberlin (2026)</a:t>
+              <a:t>Enhanced Rock Weathering — public &amp; private returns in SSA   ·   Gebrekidan &amp; Chamberlin (2026)</a:t>
             </a:r>
             <a:endParaRPr lang="en-US" sz="900" dirty="0"/>
           </a:p>
@@ -15853,7 +15604,7 @@
           <a:bodyPr wrap="square" lIns="0" tIns="0" rIns="0" bIns="0" rtlCol="0" anchor="ctr"/>
           <a:lstStyle/>
           <a:p>
-            <a:pPr algn="r" indent="0" marL="0">
+            <a:pPr marL="0" indent="0" algn="r">
               <a:buNone/>
             </a:pPr>
             <a:r>
@@ -15887,6 +15638,7 @@
         <a:solidFill>
           <a:srgbClr val="FFFFFF"/>
         </a:solidFill>
+        <a:effectLst/>
       </p:bgPr>
     </p:bg>
     <p:spTree>
@@ -15924,11 +15676,11 @@
           <a:bodyPr wrap="square" lIns="0" tIns="0" rIns="0" bIns="0" rtlCol="0" anchor="ctr"/>
           <a:lstStyle/>
           <a:p>
-            <a:pPr indent="0" marL="0">
-              <a:buNone/>
-            </a:pPr>
-            <a:r>
-              <a:rPr lang="en-US" sz="1200" b="1" spc="200" kern="0" dirty="0">
+            <a:pPr marL="0" indent="0">
+              <a:buNone/>
+            </a:pPr>
+            <a:r>
+              <a:rPr lang="en-US" sz="1200" b="1" kern="0" spc="200" dirty="0">
                 <a:solidFill>
                   <a:srgbClr val="E8843C"/>
                 </a:solidFill>
@@ -15963,7 +15715,7 @@
           <a:bodyPr wrap="square" lIns="0" tIns="0" rIns="0" bIns="0" rtlCol="0" anchor="ctr"/>
           <a:lstStyle/>
           <a:p>
-            <a:pPr indent="0" marL="0">
+            <a:pPr marL="0" indent="0">
               <a:buNone/>
             </a:pPr>
             <a:r>
@@ -16007,13 +15759,20 @@
             <a:prstDash val="solid"/>
           </a:ln>
           <a:effectLst>
-            <a:outerShdw sx="100000" sy="100000" kx="0" ky="0" algn="bl" rotWithShape="0" blurRad="88900" dist="38100" dir="5400000">
+            <a:outerShdw blurRad="88900" dist="38100" dir="5400000" algn="bl" rotWithShape="0">
               <a:srgbClr val="000000">
                 <a:alpha val="13000"/>
               </a:srgbClr>
             </a:outerShdw>
           </a:effectLst>
         </p:spPr>
+        <p:txBody>
+          <a:bodyPr/>
+          <a:lstStyle/>
+          <a:p>
+            <a:endParaRPr lang="en-US"/>
+          </a:p>
+        </p:txBody>
       </p:sp>
       <p:sp>
         <p:nvSpPr>
@@ -16036,7 +15795,7 @@
           <a:bodyPr wrap="square" lIns="0" tIns="0" rIns="0" bIns="0" rtlCol="0" anchor="ctr"/>
           <a:lstStyle/>
           <a:p>
-            <a:pPr indent="0" marL="0">
+            <a:pPr marL="0" indent="0">
               <a:buNone/>
             </a:pPr>
             <a:r>
@@ -16050,9 +15809,6 @@
               </a:rPr>
               <a:t>R</a:t>
             </a:r>
-            <a:pPr indent="0" marL="0">
-              <a:buNone/>
-            </a:pPr>
             <a:r>
               <a:rPr lang="en-US" sz="1200" dirty="0">
                 <a:solidFill>
@@ -16064,9 +15820,6 @@
               </a:rPr>
               <a:t>CDR</a:t>
             </a:r>
-            <a:pPr indent="0" marL="0">
-              <a:buNone/>
-            </a:pPr>
             <a:r>
               <a:rPr lang="en-US" sz="1900" b="1" dirty="0">
                 <a:solidFill>
@@ -16103,7 +15856,7 @@
           <a:bodyPr wrap="square" lIns="0" tIns="0" rIns="0" bIns="0" rtlCol="0" anchor="ctr"/>
           <a:lstStyle/>
           <a:p>
-            <a:pPr indent="0" marL="0">
+            <a:pPr marL="0" indent="0">
               <a:buNone/>
             </a:pPr>
             <a:r>
@@ -16142,7 +15895,7 @@
           <a:bodyPr wrap="square" lIns="0" tIns="0" rIns="0" bIns="0" rtlCol="0" anchor="t"/>
           <a:lstStyle/>
           <a:p>
-            <a:pPr indent="0" marL="0">
+            <a:pPr marL="0" indent="0">
               <a:lnSpc>
                 <a:spcPct val="105000"/>
               </a:lnSpc>
@@ -16159,12 +15912,6 @@
               </a:rPr>
               <a:t>Baseline today’s price is </a:t>
             </a:r>
-            <a:pPr indent="0" marL="0">
-              <a:lnSpc>
-                <a:spcPct val="105000"/>
-              </a:lnSpc>
-              <a:buNone/>
-            </a:pPr>
             <a:r>
               <a:rPr lang="en-US" sz="1400" b="1" dirty="0">
                 <a:solidFill>
@@ -16176,12 +15923,6 @@
               </a:rPr>
               <a:t>$150/tCO₂</a:t>
             </a:r>
-            <a:pPr indent="0" marL="0">
-              <a:lnSpc>
-                <a:spcPct val="105000"/>
-              </a:lnSpc>
-              <a:buNone/>
-            </a:pPr>
             <a:r>
               <a:rPr lang="en-US" sz="1400" dirty="0">
                 <a:solidFill>
@@ -16223,13 +15964,20 @@
             <a:prstDash val="solid"/>
           </a:ln>
           <a:effectLst>
-            <a:outerShdw sx="100000" sy="100000" kx="0" ky="0" algn="bl" rotWithShape="0" blurRad="88900" dist="38100" dir="5400000">
+            <a:outerShdw blurRad="88900" dist="38100" dir="5400000" algn="bl" rotWithShape="0">
               <a:srgbClr val="000000">
                 <a:alpha val="13000"/>
               </a:srgbClr>
             </a:outerShdw>
           </a:effectLst>
         </p:spPr>
+        <p:txBody>
+          <a:bodyPr/>
+          <a:lstStyle/>
+          <a:p>
+            <a:endParaRPr lang="en-US"/>
+          </a:p>
+        </p:txBody>
       </p:sp>
       <p:sp>
         <p:nvSpPr>
@@ -16252,7 +16000,7 @@
           <a:bodyPr wrap="square" lIns="0" tIns="0" rIns="0" bIns="0" rtlCol="0" anchor="ctr"/>
           <a:lstStyle/>
           <a:p>
-            <a:pPr indent="0" marL="0">
+            <a:pPr marL="0" indent="0">
               <a:buNone/>
             </a:pPr>
             <a:r>
@@ -16272,7 +16020,7 @@
       </p:sp>
       <p:graphicFrame>
         <p:nvGraphicFramePr>
-          <p:cNvPr id="9" name="Table 0"/>
+          <p:cNvPr id="10" name="Table 0"/>
           <p:cNvGraphicFramePr>
             <a:graphicFrameLocks noGrp="1"/>
           </p:cNvGraphicFramePr>
@@ -16286,17 +16034,41 @@
         </p:nvGraphicFramePr>
         <p:xfrm>
           <a:off x="6400800" y="2103120"/>
-          <a:ext cx="5120640" cy="914400"/>
+          <a:ext cx="5120640" cy="2773680"/>
         </p:xfrm>
         <a:graphic>
           <a:graphicData uri="http://schemas.openxmlformats.org/drawingml/2006/table">
             <a:tbl>
               <a:tblPr/>
               <a:tblGrid>
-                <a:gridCol w="1097280"/>
-                <a:gridCol w="1371600"/>
-                <a:gridCol w="1280160"/>
-                <a:gridCol w="1371600"/>
+                <a:gridCol w="1097280">
+                  <a:extLst>
+                    <a:ext uri="{9D8B030D-6E8A-4147-A177-3AD203B41FA5}">
+                      <a16:colId xmlns:a16="http://schemas.microsoft.com/office/drawing/2014/main" val="20000"/>
+                    </a:ext>
+                  </a:extLst>
+                </a:gridCol>
+                <a:gridCol w="1371600">
+                  <a:extLst>
+                    <a:ext uri="{9D8B030D-6E8A-4147-A177-3AD203B41FA5}">
+                      <a16:colId xmlns:a16="http://schemas.microsoft.com/office/drawing/2014/main" val="20001"/>
+                    </a:ext>
+                  </a:extLst>
+                </a:gridCol>
+                <a:gridCol w="1280160">
+                  <a:extLst>
+                    <a:ext uri="{9D8B030D-6E8A-4147-A177-3AD203B41FA5}">
+                      <a16:colId xmlns:a16="http://schemas.microsoft.com/office/drawing/2014/main" val="20002"/>
+                    </a:ext>
+                  </a:extLst>
+                </a:gridCol>
+                <a:gridCol w="1371600">
+                  <a:extLst>
+                    <a:ext uri="{9D8B030D-6E8A-4147-A177-3AD203B41FA5}">
+                      <a16:colId xmlns:a16="http://schemas.microsoft.com/office/drawing/2014/main" val="20003"/>
+                    </a:ext>
+                  </a:extLst>
+                </a:gridCol>
               </a:tblGrid>
               <a:tr h="457200">
                 <a:tc>
@@ -16304,7 +16076,7 @@
                     <a:bodyPr/>
                     <a:lstStyle/>
                     <a:p>
-                      <a:pPr algn="ctr" indent="0" marL="0">
+                      <a:pPr marL="0" indent="0" algn="ctr">
                         <a:buNone/>
                       </a:pPr>
                       <a:r>
@@ -16325,7 +16097,7 @@
                       </a:endParaRPr>
                     </a:p>
                   </a:txBody>
-                  <a:tcPr marL="91440" marR="91440" marT="45720" marB="45720" anchor="ctr">
+                  <a:tcPr anchor="ctr">
                     <a:lnL w="6350" cap="flat" cmpd="sng" algn="ctr">
                       <a:solidFill>
                         <a:srgbClr val="D5DDDE"/>
@@ -16372,7 +16144,7 @@
                     <a:bodyPr/>
                     <a:lstStyle/>
                     <a:p>
-                      <a:pPr algn="ctr" indent="0" marL="0">
+                      <a:pPr marL="0" indent="0" algn="ctr">
                         <a:buNone/>
                       </a:pPr>
                       <a:r>
@@ -16393,7 +16165,7 @@
                       </a:endParaRPr>
                     </a:p>
                   </a:txBody>
-                  <a:tcPr marL="91440" marR="91440" marT="45720" marB="45720" anchor="ctr">
+                  <a:tcPr anchor="ctr">
                     <a:lnL w="6350" cap="flat" cmpd="sng" algn="ctr">
                       <a:solidFill>
                         <a:srgbClr val="D5DDDE"/>
@@ -16440,7 +16212,7 @@
                     <a:bodyPr/>
                     <a:lstStyle/>
                     <a:p>
-                      <a:pPr algn="ctr" indent="0" marL="0">
+                      <a:pPr marL="0" indent="0" algn="ctr">
                         <a:buNone/>
                       </a:pPr>
                       <a:r>
@@ -16461,7 +16233,7 @@
                       </a:endParaRPr>
                     </a:p>
                   </a:txBody>
-                  <a:tcPr marL="91440" marR="91440" marT="45720" marB="45720" anchor="ctr">
+                  <a:tcPr anchor="ctr">
                     <a:lnL w="6350" cap="flat" cmpd="sng" algn="ctr">
                       <a:solidFill>
                         <a:srgbClr val="D5DDDE"/>
@@ -16508,7 +16280,7 @@
                     <a:bodyPr/>
                     <a:lstStyle/>
                     <a:p>
-                      <a:pPr algn="ctr" indent="0" marL="0">
+                      <a:pPr marL="0" indent="0" algn="ctr">
                         <a:buNone/>
                       </a:pPr>
                       <a:r>
@@ -16529,7 +16301,7 @@
                       </a:endParaRPr>
                     </a:p>
                   </a:txBody>
-                  <a:tcPr marL="91440" marR="91440" marT="45720" marB="45720" anchor="ctr">
+                  <a:tcPr anchor="ctr">
                     <a:lnL w="6350" cap="flat" cmpd="sng" algn="ctr">
                       <a:solidFill>
                         <a:srgbClr val="D5DDDE"/>
@@ -16571,6 +16343,11 @@
                     </a:solidFill>
                   </a:tcPr>
                 </a:tc>
+                <a:extLst>
+                  <a:ext uri="{0D108BD9-81ED-4DB2-BD59-A6C34878D82A}">
+                    <a16:rowId xmlns:a16="http://schemas.microsoft.com/office/drawing/2014/main" val="10000"/>
+                  </a:ext>
+                </a:extLst>
               </a:tr>
               <a:tr h="457200">
                 <a:tc>
@@ -16578,7 +16355,7 @@
                     <a:bodyPr/>
                     <a:lstStyle/>
                     <a:p>
-                      <a:pPr algn="ctr" indent="0" marL="0">
+                      <a:pPr marL="0" indent="0" algn="ctr">
                         <a:buNone/>
                       </a:pPr>
                       <a:r>
@@ -16599,7 +16376,7 @@
                       </a:endParaRPr>
                     </a:p>
                   </a:txBody>
-                  <a:tcPr marL="91440" marR="91440" marT="45720" marB="45720" anchor="ctr">
+                  <a:tcPr anchor="ctr">
                     <a:lnL w="6350" cap="flat" cmpd="sng" algn="ctr">
                       <a:solidFill>
                         <a:srgbClr val="D5DDDE"/>
@@ -16646,7 +16423,7 @@
                     <a:bodyPr/>
                     <a:lstStyle/>
                     <a:p>
-                      <a:pPr algn="ctr" indent="0" marL="0">
+                      <a:pPr marL="0" indent="0" algn="ctr">
                         <a:buNone/>
                       </a:pPr>
                       <a:r>
@@ -16667,7 +16444,7 @@
                       </a:endParaRPr>
                     </a:p>
                   </a:txBody>
-                  <a:tcPr marL="91440" marR="91440" marT="45720" marB="45720" anchor="ctr">
+                  <a:tcPr anchor="ctr">
                     <a:lnL w="6350" cap="flat" cmpd="sng" algn="ctr">
                       <a:solidFill>
                         <a:srgbClr val="D5DDDE"/>
@@ -16714,7 +16491,7 @@
                     <a:bodyPr/>
                     <a:lstStyle/>
                     <a:p>
-                      <a:pPr algn="ctr" indent="0" marL="0">
+                      <a:pPr marL="0" indent="0" algn="ctr">
                         <a:buNone/>
                       </a:pPr>
                       <a:r>
@@ -16735,7 +16512,7 @@
                       </a:endParaRPr>
                     </a:p>
                   </a:txBody>
-                  <a:tcPr marL="91440" marR="91440" marT="45720" marB="45720" anchor="ctr">
+                  <a:tcPr anchor="ctr">
                     <a:lnL w="6350" cap="flat" cmpd="sng" algn="ctr">
                       <a:solidFill>
                         <a:srgbClr val="D5DDDE"/>
@@ -16782,7 +16559,7 @@
                     <a:bodyPr/>
                     <a:lstStyle/>
                     <a:p>
-                      <a:pPr algn="ctr" indent="0" marL="0">
+                      <a:pPr marL="0" indent="0" algn="ctr">
                         <a:buNone/>
                       </a:pPr>
                       <a:r>
@@ -16803,7 +16580,7 @@
                       </a:endParaRPr>
                     </a:p>
                   </a:txBody>
-                  <a:tcPr marL="91440" marR="91440" marT="45720" marB="45720" anchor="ctr">
+                  <a:tcPr anchor="ctr">
                     <a:lnL w="6350" cap="flat" cmpd="sng" algn="ctr">
                       <a:solidFill>
                         <a:srgbClr val="D5DDDE"/>
@@ -16845,6 +16622,11 @@
                     </a:solidFill>
                   </a:tcPr>
                 </a:tc>
+                <a:extLst>
+                  <a:ext uri="{0D108BD9-81ED-4DB2-BD59-A6C34878D82A}">
+                    <a16:rowId xmlns:a16="http://schemas.microsoft.com/office/drawing/2014/main" val="10001"/>
+                  </a:ext>
+                </a:extLst>
               </a:tr>
               <a:tr h="457200">
                 <a:tc>
@@ -16852,7 +16634,7 @@
                     <a:bodyPr/>
                     <a:lstStyle/>
                     <a:p>
-                      <a:pPr algn="ctr" indent="0" marL="0">
+                      <a:pPr marL="0" indent="0" algn="ctr">
                         <a:buNone/>
                       </a:pPr>
                       <a:r>
@@ -16873,7 +16655,7 @@
                       </a:endParaRPr>
                     </a:p>
                   </a:txBody>
-                  <a:tcPr marL="91440" marR="91440" marT="45720" marB="45720" anchor="ctr">
+                  <a:tcPr anchor="ctr">
                     <a:lnL w="6350" cap="flat" cmpd="sng" algn="ctr">
                       <a:solidFill>
                         <a:srgbClr val="D5DDDE"/>
@@ -16920,7 +16702,7 @@
                     <a:bodyPr/>
                     <a:lstStyle/>
                     <a:p>
-                      <a:pPr algn="ctr" indent="0" marL="0">
+                      <a:pPr marL="0" indent="0" algn="ctr">
                         <a:buNone/>
                       </a:pPr>
                       <a:r>
@@ -16941,7 +16723,7 @@
                       </a:endParaRPr>
                     </a:p>
                   </a:txBody>
-                  <a:tcPr marL="91440" marR="91440" marT="45720" marB="45720" anchor="ctr">
+                  <a:tcPr anchor="ctr">
                     <a:lnL w="6350" cap="flat" cmpd="sng" algn="ctr">
                       <a:solidFill>
                         <a:srgbClr val="D5DDDE"/>
@@ -16988,7 +16770,7 @@
                     <a:bodyPr/>
                     <a:lstStyle/>
                     <a:p>
-                      <a:pPr algn="ctr" indent="0" marL="0">
+                      <a:pPr marL="0" indent="0" algn="ctr">
                         <a:buNone/>
                       </a:pPr>
                       <a:r>
@@ -17009,7 +16791,7 @@
                       </a:endParaRPr>
                     </a:p>
                   </a:txBody>
-                  <a:tcPr marL="91440" marR="91440" marT="45720" marB="45720" anchor="ctr">
+                  <a:tcPr anchor="ctr">
                     <a:lnL w="6350" cap="flat" cmpd="sng" algn="ctr">
                       <a:solidFill>
                         <a:srgbClr val="D5DDDE"/>
@@ -17056,7 +16838,7 @@
                     <a:bodyPr/>
                     <a:lstStyle/>
                     <a:p>
-                      <a:pPr algn="ctr" indent="0" marL="0">
+                      <a:pPr marL="0" indent="0" algn="ctr">
                         <a:buNone/>
                       </a:pPr>
                       <a:r>
@@ -17077,7 +16859,7 @@
                       </a:endParaRPr>
                     </a:p>
                   </a:txBody>
-                  <a:tcPr marL="91440" marR="91440" marT="45720" marB="45720" anchor="ctr">
+                  <a:tcPr anchor="ctr">
                     <a:lnL w="6350" cap="flat" cmpd="sng" algn="ctr">
                       <a:solidFill>
                         <a:srgbClr val="D5DDDE"/>
@@ -17119,6 +16901,11 @@
                     </a:solidFill>
                   </a:tcPr>
                 </a:tc>
+                <a:extLst>
+                  <a:ext uri="{0D108BD9-81ED-4DB2-BD59-A6C34878D82A}">
+                    <a16:rowId xmlns:a16="http://schemas.microsoft.com/office/drawing/2014/main" val="10002"/>
+                  </a:ext>
+                </a:extLst>
               </a:tr>
               <a:tr h="457200">
                 <a:tc>
@@ -17126,7 +16913,7 @@
                     <a:bodyPr/>
                     <a:lstStyle/>
                     <a:p>
-                      <a:pPr algn="ctr" indent="0" marL="0">
+                      <a:pPr marL="0" indent="0" algn="ctr">
                         <a:buNone/>
                       </a:pPr>
                       <a:r>
@@ -17147,7 +16934,7 @@
                       </a:endParaRPr>
                     </a:p>
                   </a:txBody>
-                  <a:tcPr marL="91440" marR="91440" marT="45720" marB="45720" anchor="ctr">
+                  <a:tcPr anchor="ctr">
                     <a:lnL w="6350" cap="flat" cmpd="sng" algn="ctr">
                       <a:solidFill>
                         <a:srgbClr val="D5DDDE"/>
@@ -17194,7 +16981,7 @@
                     <a:bodyPr/>
                     <a:lstStyle/>
                     <a:p>
-                      <a:pPr algn="ctr" indent="0" marL="0">
+                      <a:pPr marL="0" indent="0" algn="ctr">
                         <a:buNone/>
                       </a:pPr>
                       <a:r>
@@ -17215,7 +17002,7 @@
                       </a:endParaRPr>
                     </a:p>
                   </a:txBody>
-                  <a:tcPr marL="91440" marR="91440" marT="45720" marB="45720" anchor="ctr">
+                  <a:tcPr anchor="ctr">
                     <a:lnL w="6350" cap="flat" cmpd="sng" algn="ctr">
                       <a:solidFill>
                         <a:srgbClr val="D5DDDE"/>
@@ -17262,7 +17049,7 @@
                     <a:bodyPr/>
                     <a:lstStyle/>
                     <a:p>
-                      <a:pPr algn="ctr" indent="0" marL="0">
+                      <a:pPr marL="0" indent="0" algn="ctr">
                         <a:buNone/>
                       </a:pPr>
                       <a:r>
@@ -17283,7 +17070,7 @@
                       </a:endParaRPr>
                     </a:p>
                   </a:txBody>
-                  <a:tcPr marL="91440" marR="91440" marT="45720" marB="45720" anchor="ctr">
+                  <a:tcPr anchor="ctr">
                     <a:lnL w="6350" cap="flat" cmpd="sng" algn="ctr">
                       <a:solidFill>
                         <a:srgbClr val="D5DDDE"/>
@@ -17330,7 +17117,7 @@
                     <a:bodyPr/>
                     <a:lstStyle/>
                     <a:p>
-                      <a:pPr algn="ctr" indent="0" marL="0">
+                      <a:pPr marL="0" indent="0" algn="ctr">
                         <a:buNone/>
                       </a:pPr>
                       <a:r>
@@ -17351,7 +17138,7 @@
                       </a:endParaRPr>
                     </a:p>
                   </a:txBody>
-                  <a:tcPr marL="91440" marR="91440" marT="45720" marB="45720" anchor="ctr">
+                  <a:tcPr anchor="ctr">
                     <a:lnL w="6350" cap="flat" cmpd="sng" algn="ctr">
                       <a:solidFill>
                         <a:srgbClr val="D5DDDE"/>
@@ -17393,6 +17180,11 @@
                     </a:solidFill>
                   </a:tcPr>
                 </a:tc>
+                <a:extLst>
+                  <a:ext uri="{0D108BD9-81ED-4DB2-BD59-A6C34878D82A}">
+                    <a16:rowId xmlns:a16="http://schemas.microsoft.com/office/drawing/2014/main" val="10003"/>
+                  </a:ext>
+                </a:extLst>
               </a:tr>
               <a:tr h="457200">
                 <a:tc>
@@ -17400,7 +17192,7 @@
                     <a:bodyPr/>
                     <a:lstStyle/>
                     <a:p>
-                      <a:pPr algn="ctr" indent="0" marL="0">
+                      <a:pPr marL="0" indent="0" algn="ctr">
                         <a:buNone/>
                       </a:pPr>
                       <a:r>
@@ -17421,7 +17213,7 @@
                       </a:endParaRPr>
                     </a:p>
                   </a:txBody>
-                  <a:tcPr marL="91440" marR="91440" marT="45720" marB="45720" anchor="ctr">
+                  <a:tcPr anchor="ctr">
                     <a:lnL w="6350" cap="flat" cmpd="sng" algn="ctr">
                       <a:solidFill>
                         <a:srgbClr val="D5DDDE"/>
@@ -17468,7 +17260,7 @@
                     <a:bodyPr/>
                     <a:lstStyle/>
                     <a:p>
-                      <a:pPr algn="ctr" indent="0" marL="0">
+                      <a:pPr marL="0" indent="0" algn="ctr">
                         <a:buNone/>
                       </a:pPr>
                       <a:r>
@@ -17489,7 +17281,7 @@
                       </a:endParaRPr>
                     </a:p>
                   </a:txBody>
-                  <a:tcPr marL="91440" marR="91440" marT="45720" marB="45720" anchor="ctr">
+                  <a:tcPr anchor="ctr">
                     <a:lnL w="6350" cap="flat" cmpd="sng" algn="ctr">
                       <a:solidFill>
                         <a:srgbClr val="D5DDDE"/>
@@ -17536,7 +17328,7 @@
                     <a:bodyPr/>
                     <a:lstStyle/>
                     <a:p>
-                      <a:pPr algn="ctr" indent="0" marL="0">
+                      <a:pPr marL="0" indent="0" algn="ctr">
                         <a:buNone/>
                       </a:pPr>
                       <a:r>
@@ -17557,7 +17349,7 @@
                       </a:endParaRPr>
                     </a:p>
                   </a:txBody>
-                  <a:tcPr marL="91440" marR="91440" marT="45720" marB="45720" anchor="ctr">
+                  <a:tcPr anchor="ctr">
                     <a:lnL w="6350" cap="flat" cmpd="sng" algn="ctr">
                       <a:solidFill>
                         <a:srgbClr val="D5DDDE"/>
@@ -17604,7 +17396,7 @@
                     <a:bodyPr/>
                     <a:lstStyle/>
                     <a:p>
-                      <a:pPr algn="ctr" indent="0" marL="0">
+                      <a:pPr marL="0" indent="0" algn="ctr">
                         <a:buNone/>
                       </a:pPr>
                       <a:r>
@@ -17625,7 +17417,7 @@
                       </a:endParaRPr>
                     </a:p>
                   </a:txBody>
-                  <a:tcPr marL="91440" marR="91440" marT="45720" marB="45720" anchor="ctr">
+                  <a:tcPr anchor="ctr">
                     <a:lnL w="6350" cap="flat" cmpd="sng" algn="ctr">
                       <a:solidFill>
                         <a:srgbClr val="D5DDDE"/>
@@ -17667,6 +17459,11 @@
                     </a:solidFill>
                   </a:tcPr>
                 </a:tc>
+                <a:extLst>
+                  <a:ext uri="{0D108BD9-81ED-4DB2-BD59-A6C34878D82A}">
+                    <a16:rowId xmlns:a16="http://schemas.microsoft.com/office/drawing/2014/main" val="10004"/>
+                  </a:ext>
+                </a:extLst>
               </a:tr>
               <a:tr h="457200">
                 <a:tc>
@@ -17674,7 +17471,7 @@
                     <a:bodyPr/>
                     <a:lstStyle/>
                     <a:p>
-                      <a:pPr algn="ctr" indent="0" marL="0">
+                      <a:pPr marL="0" indent="0" algn="ctr">
                         <a:buNone/>
                       </a:pPr>
                       <a:r>
@@ -17695,7 +17492,7 @@
                       </a:endParaRPr>
                     </a:p>
                   </a:txBody>
-                  <a:tcPr marL="91440" marR="91440" marT="45720" marB="45720" anchor="ctr">
+                  <a:tcPr anchor="ctr">
                     <a:lnL w="6350" cap="flat" cmpd="sng" algn="ctr">
                       <a:solidFill>
                         <a:srgbClr val="D5DDDE"/>
@@ -17742,7 +17539,7 @@
                     <a:bodyPr/>
                     <a:lstStyle/>
                     <a:p>
-                      <a:pPr algn="ctr" indent="0" marL="0">
+                      <a:pPr marL="0" indent="0" algn="ctr">
                         <a:buNone/>
                       </a:pPr>
                       <a:r>
@@ -17763,7 +17560,7 @@
                       </a:endParaRPr>
                     </a:p>
                   </a:txBody>
-                  <a:tcPr marL="91440" marR="91440" marT="45720" marB="45720" anchor="ctr">
+                  <a:tcPr anchor="ctr">
                     <a:lnL w="6350" cap="flat" cmpd="sng" algn="ctr">
                       <a:solidFill>
                         <a:srgbClr val="D5DDDE"/>
@@ -17810,7 +17607,7 @@
                     <a:bodyPr/>
                     <a:lstStyle/>
                     <a:p>
-                      <a:pPr algn="ctr" indent="0" marL="0">
+                      <a:pPr marL="0" indent="0" algn="ctr">
                         <a:buNone/>
                       </a:pPr>
                       <a:r>
@@ -17831,7 +17628,7 @@
                       </a:endParaRPr>
                     </a:p>
                   </a:txBody>
-                  <a:tcPr marL="91440" marR="91440" marT="45720" marB="45720" anchor="ctr">
+                  <a:tcPr anchor="ctr">
                     <a:lnL w="6350" cap="flat" cmpd="sng" algn="ctr">
                       <a:solidFill>
                         <a:srgbClr val="D5DDDE"/>
@@ -17878,7 +17675,7 @@
                     <a:bodyPr/>
                     <a:lstStyle/>
                     <a:p>
-                      <a:pPr algn="ctr" indent="0" marL="0">
+                      <a:pPr marL="0" indent="0" algn="ctr">
                         <a:buNone/>
                       </a:pPr>
                       <a:r>
@@ -17899,7 +17696,7 @@
                       </a:endParaRPr>
                     </a:p>
                   </a:txBody>
-                  <a:tcPr marL="91440" marR="91440" marT="45720" marB="45720" anchor="ctr">
+                  <a:tcPr anchor="ctr">
                     <a:lnL w="6350" cap="flat" cmpd="sng" algn="ctr">
                       <a:solidFill>
                         <a:srgbClr val="D5DDDE"/>
@@ -17941,6 +17738,11 @@
                     </a:solidFill>
                   </a:tcPr>
                 </a:tc>
+                <a:extLst>
+                  <a:ext uri="{0D108BD9-81ED-4DB2-BD59-A6C34878D82A}">
+                    <a16:rowId xmlns:a16="http://schemas.microsoft.com/office/drawing/2014/main" val="10005"/>
+                  </a:ext>
+                </a:extLst>
               </a:tr>
             </a:tbl>
           </a:graphicData>
@@ -17967,7 +17769,7 @@
           <a:bodyPr wrap="square" lIns="0" tIns="0" rIns="0" bIns="0" rtlCol="0" anchor="ctr"/>
           <a:lstStyle/>
           <a:p>
-            <a:pPr indent="0" marL="0">
+            <a:pPr marL="0" indent="0">
               <a:buNone/>
             </a:pPr>
             <a:r>
@@ -18006,7 +17808,7 @@
           <a:bodyPr wrap="square" lIns="0" tIns="0" rIns="0" bIns="0" rtlCol="0" anchor="ctr"/>
           <a:lstStyle/>
           <a:p>
-            <a:pPr algn="l" indent="0" marL="0">
+            <a:pPr marL="0" indent="0" algn="l">
               <a:buNone/>
             </a:pPr>
             <a:r>
@@ -18018,21 +17820,7 @@
                 <a:ea typeface="Calibri" pitchFamily="34" charset="-122"/>
                 <a:cs typeface="Calibri" pitchFamily="34" charset="-120"/>
               </a:rPr>
-              <a:t>Enhanced Rock Weathering — public &amp; private returns in SSA</a:t>
-            </a:r>
-            <a:pPr algn="l" indent="0" marL="0">
-              <a:buNone/>
-            </a:pPr>
-            <a:r>
-              <a:rPr lang="en-US" sz="900" dirty="0">
-                <a:solidFill>
-                  <a:srgbClr val="5B6B73"/>
-                </a:solidFill>
-                <a:latin typeface="Calibri" pitchFamily="34" charset="0"/>
-                <a:ea typeface="Calibri" pitchFamily="34" charset="-122"/>
-                <a:cs typeface="Calibri" pitchFamily="34" charset="-120"/>
-              </a:rPr>
-              <a:t>   ·   Gebrekidan &amp; Chamberlin (2026)</a:t>
+              <a:t>Enhanced Rock Weathering — public &amp; private returns in SSA   ·   Gebrekidan &amp; Chamberlin (2026)</a:t>
             </a:r>
             <a:endParaRPr lang="en-US" sz="900" dirty="0"/>
           </a:p>
@@ -18059,7 +17847,7 @@
           <a:bodyPr wrap="square" lIns="0" tIns="0" rIns="0" bIns="0" rtlCol="0" anchor="ctr"/>
           <a:lstStyle/>
           <a:p>
-            <a:pPr algn="r" indent="0" marL="0">
+            <a:pPr marL="0" indent="0" algn="r">
               <a:buNone/>
             </a:pPr>
             <a:r>
@@ -18093,6 +17881,7 @@
         <a:solidFill>
           <a:srgbClr val="FFFFFF"/>
         </a:solidFill>
+        <a:effectLst/>
       </p:bgPr>
     </p:bg>
     <p:spTree>
@@ -18130,11 +17919,11 @@
           <a:bodyPr wrap="square" lIns="0" tIns="0" rIns="0" bIns="0" rtlCol="0" anchor="ctr"/>
           <a:lstStyle/>
           <a:p>
-            <a:pPr indent="0" marL="0">
-              <a:buNone/>
-            </a:pPr>
-            <a:r>
-              <a:rPr lang="en-US" sz="1200" b="1" spc="200" kern="0" dirty="0">
+            <a:pPr marL="0" indent="0">
+              <a:buNone/>
+            </a:pPr>
+            <a:r>
+              <a:rPr lang="en-US" sz="1200" b="1" kern="0" spc="200" dirty="0">
                 <a:solidFill>
                   <a:srgbClr val="E8843C"/>
                 </a:solidFill>
@@ -18169,7 +17958,7 @@
           <a:bodyPr wrap="square" lIns="0" tIns="0" rIns="0" bIns="0" rtlCol="0" anchor="ctr"/>
           <a:lstStyle/>
           <a:p>
-            <a:pPr indent="0" marL="0">
+            <a:pPr marL="0" indent="0">
               <a:buNone/>
             </a:pPr>
             <a:r>
@@ -18189,15 +17978,15 @@
       </p:sp>
       <p:pic>
         <p:nvPicPr>
-          <p:cNvPr id="4" name="Image 0" descr="img/netexport_cdr_gradient_npv.png">    </p:cNvPr>
+          <p:cNvPr id="4" name="Image 0" descr="img/netexport_cdr_gradient_npv.png"/>
           <p:cNvPicPr>
             <a:picLocks noChangeAspect="1"/>
           </p:cNvPicPr>
           <p:nvPr/>
         </p:nvPicPr>
         <p:blipFill>
-          <a:blip r:embed="rId1"/>
-          <a:srcRect l="0" r="0" t="0" b="0"/>
+          <a:blip r:embed="rId3"/>
+          <a:srcRect/>
           <a:stretch/>
         </p:blipFill>
         <p:spPr>
@@ -18236,13 +18025,20 @@
             <a:prstDash val="solid"/>
           </a:ln>
           <a:effectLst>
-            <a:outerShdw sx="100000" sy="100000" kx="0" ky="0" algn="bl" rotWithShape="0" blurRad="88900" dist="38100" dir="5400000">
+            <a:outerShdw blurRad="88900" dist="38100" dir="5400000" algn="bl" rotWithShape="0">
               <a:srgbClr val="000000">
                 <a:alpha val="13000"/>
               </a:srgbClr>
             </a:outerShdw>
           </a:effectLst>
         </p:spPr>
+        <p:txBody>
+          <a:bodyPr/>
+          <a:lstStyle/>
+          <a:p>
+            <a:endParaRPr lang="en-US"/>
+          </a:p>
+        </p:txBody>
       </p:sp>
       <p:sp>
         <p:nvSpPr>
@@ -18265,7 +18061,7 @@
           <a:bodyPr wrap="square" lIns="0" tIns="0" rIns="0" bIns="0" rtlCol="0" anchor="t"/>
           <a:lstStyle/>
           <a:p>
-            <a:pPr indent="0" marL="0">
+            <a:pPr marL="0" indent="0">
               <a:lnSpc>
                 <a:spcPct val="110000"/>
               </a:lnSpc>
@@ -18283,12 +18079,6 @@
               <a:t>durable CDR  =  max( gross CDR  −  F · S ,  0 )
 </a:t>
             </a:r>
-            <a:pPr indent="0" marL="0">
-              <a:lnSpc>
-                <a:spcPct val="110000"/>
-              </a:lnSpc>
-              <a:buNone/>
-            </a:pPr>
             <a:r>
               <a:rPr lang="en-US" sz="1250" i="1" dirty="0">
                 <a:solidFill>
@@ -18325,7 +18115,7 @@
           <a:bodyPr wrap="square" lIns="0" tIns="0" rIns="0" bIns="0" rtlCol="0" anchor="t"/>
           <a:lstStyle/>
           <a:p>
-            <a:pPr indent="0" marL="0">
+            <a:pPr marL="0" indent="0">
               <a:lnSpc>
                 <a:spcPct val="102000"/>
               </a:lnSpc>
@@ -18372,13 +18162,20 @@
             <a:prstDash val="solid"/>
           </a:ln>
           <a:effectLst>
-            <a:outerShdw sx="100000" sy="100000" kx="0" ky="0" algn="bl" rotWithShape="0" blurRad="88900" dist="38100" dir="5400000">
+            <a:outerShdw blurRad="88900" dist="38100" dir="5400000" algn="bl" rotWithShape="0">
               <a:srgbClr val="000000">
                 <a:alpha val="13000"/>
               </a:srgbClr>
             </a:outerShdw>
           </a:effectLst>
         </p:spPr>
+        <p:txBody>
+          <a:bodyPr/>
+          <a:lstStyle/>
+          <a:p>
+            <a:endParaRPr lang="en-US"/>
+          </a:p>
+        </p:txBody>
       </p:sp>
       <p:sp>
         <p:nvSpPr>
@@ -18401,7 +18198,7 @@
           <a:bodyPr wrap="square" lIns="0" tIns="0" rIns="0" bIns="0" rtlCol="0" anchor="ctr"/>
           <a:lstStyle/>
           <a:p>
-            <a:pPr indent="0" marL="0">
+            <a:pPr marL="0" indent="0">
               <a:buNone/>
             </a:pPr>
             <a:r>
@@ -18440,7 +18237,7 @@
           <a:bodyPr wrap="square" lIns="0" tIns="0" rIns="0" bIns="0" rtlCol="0" anchor="t"/>
           <a:lstStyle/>
           <a:p>
-            <a:pPr indent="0" marL="0">
+            <a:pPr marL="0" indent="0">
               <a:lnSpc>
                 <a:spcPct val="105000"/>
               </a:lnSpc>
@@ -18458,12 +18255,6 @@
               <a:t>≈ 80%
 </a:t>
             </a:r>
-            <a:pPr indent="0" marL="0">
-              <a:lnSpc>
-                <a:spcPct val="105000"/>
-              </a:lnSpc>
-              <a:buNone/>
-            </a:pPr>
             <a:r>
               <a:rPr lang="en-US" sz="1350" dirty="0">
                 <a:solidFill>
@@ -18474,31 +18265,8 @@
                 <a:cs typeface="Calibri" pitchFamily="34" charset="-120"/>
               </a:rPr>
               <a:t>of credited removal is cut at first application once acidity neutralization is netted out.
-</a:t>
-            </a:r>
-            <a:pPr indent="0" marL="0">
-              <a:lnSpc>
-                <a:spcPct val="105000"/>
-              </a:lnSpc>
-              <a:buNone/>
-            </a:pPr>
-            <a:r>
-              <a:rPr lang="en-US" sz="1350" dirty="0">
-                <a:solidFill>
-                  <a:srgbClr val="CBD6D9"/>
-                </a:solidFill>
-                <a:latin typeface="Calibri" pitchFamily="34" charset="0"/>
-                <a:ea typeface="Calibri" pitchFamily="34" charset="-122"/>
-                <a:cs typeface="Calibri" pitchFamily="34" charset="-120"/>
-              </a:rPr>
-              <a:t>Durable removal is largely a </a:t>
-            </a:r>
-            <a:pPr indent="0" marL="0">
-              <a:lnSpc>
-                <a:spcPct val="105000"/>
-              </a:lnSpc>
-              <a:buNone/>
-            </a:pPr>
+Durable removal is largely a </a:t>
+            </a:r>
             <a:r>
               <a:rPr lang="en-US" sz="1350" b="1" dirty="0">
                 <a:solidFill>
@@ -18510,12 +18278,6 @@
               </a:rPr>
               <a:t>steady-state phenomenon</a:t>
             </a:r>
-            <a:pPr indent="0" marL="0">
-              <a:lnSpc>
-                <a:spcPct val="105000"/>
-              </a:lnSpc>
-              <a:buNone/>
-            </a:pPr>
             <a:r>
               <a:rPr lang="en-US" sz="1350" dirty="0">
                 <a:solidFill>
@@ -18552,7 +18314,7 @@
           <a:bodyPr wrap="square" lIns="0" tIns="0" rIns="0" bIns="0" rtlCol="0" anchor="ctr"/>
           <a:lstStyle/>
           <a:p>
-            <a:pPr algn="l" indent="0" marL="0">
+            <a:pPr marL="0" indent="0" algn="l">
               <a:buNone/>
             </a:pPr>
             <a:r>
@@ -18564,21 +18326,7 @@
                 <a:ea typeface="Calibri" pitchFamily="34" charset="-122"/>
                 <a:cs typeface="Calibri" pitchFamily="34" charset="-120"/>
               </a:rPr>
-              <a:t>Enhanced Rock Weathering — public &amp; private returns in SSA</a:t>
-            </a:r>
-            <a:pPr algn="l" indent="0" marL="0">
-              <a:buNone/>
-            </a:pPr>
-            <a:r>
-              <a:rPr lang="en-US" sz="900" dirty="0">
-                <a:solidFill>
-                  <a:srgbClr val="5B6B73"/>
-                </a:solidFill>
-                <a:latin typeface="Calibri" pitchFamily="34" charset="0"/>
-                <a:ea typeface="Calibri" pitchFamily="34" charset="-122"/>
-                <a:cs typeface="Calibri" pitchFamily="34" charset="-120"/>
-              </a:rPr>
-              <a:t>   ·   Gebrekidan &amp; Chamberlin (2026)</a:t>
+              <a:t>Enhanced Rock Weathering — public &amp; private returns in SSA   ·   Gebrekidan &amp; Chamberlin (2026)</a:t>
             </a:r>
             <a:endParaRPr lang="en-US" sz="900" dirty="0"/>
           </a:p>
@@ -18605,7 +18353,7 @@
           <a:bodyPr wrap="square" lIns="0" tIns="0" rIns="0" bIns="0" rtlCol="0" anchor="ctr"/>
           <a:lstStyle/>
           <a:p>
-            <a:pPr algn="r" indent="0" marL="0">
+            <a:pPr marL="0" indent="0" algn="r">
               <a:buNone/>
             </a:pPr>
             <a:r>
@@ -18924,4 +18672,319 @@
     </a:ext>
   </a:extLst>
 </a:theme>
+</file>
+
+<file path=ppt/theme/theme2.xml><?xml version="1.0" encoding="utf-8"?>
+<a:theme xmlns:a="http://schemas.openxmlformats.org/drawingml/2006/main" name="Office Theme">
+  <a:themeElements>
+    <a:clrScheme name="Office">
+      <a:dk1>
+        <a:sysClr val="windowText" lastClr="000000"/>
+      </a:dk1>
+      <a:lt1>
+        <a:sysClr val="window" lastClr="FFFFFF"/>
+      </a:lt1>
+      <a:dk2>
+        <a:srgbClr val="0E2841"/>
+      </a:dk2>
+      <a:lt2>
+        <a:srgbClr val="E8E8E8"/>
+      </a:lt2>
+      <a:accent1>
+        <a:srgbClr val="156082"/>
+      </a:accent1>
+      <a:accent2>
+        <a:srgbClr val="E97132"/>
+      </a:accent2>
+      <a:accent3>
+        <a:srgbClr val="196B24"/>
+      </a:accent3>
+      <a:accent4>
+        <a:srgbClr val="0F9ED5"/>
+      </a:accent4>
+      <a:accent5>
+        <a:srgbClr val="A02B93"/>
+      </a:accent5>
+      <a:accent6>
+        <a:srgbClr val="4EA72E"/>
+      </a:accent6>
+      <a:hlink>
+        <a:srgbClr val="467886"/>
+      </a:hlink>
+      <a:folHlink>
+        <a:srgbClr val="96607D"/>
+      </a:folHlink>
+    </a:clrScheme>
+    <a:fontScheme name="Office">
+      <a:majorFont>
+        <a:latin typeface="Aptos Display" panose="02110004020202020204"/>
+        <a:ea typeface=""/>
+        <a:cs typeface=""/>
+        <a:font script="Jpan" typeface="游ゴシック Light"/>
+        <a:font script="Hang" typeface="맑은 고딕"/>
+        <a:font script="Hans" typeface="等线 Light"/>
+        <a:font script="Hant" typeface="新細明體"/>
+        <a:font script="Arab" typeface="Times New Roman"/>
+        <a:font script="Hebr" typeface="Times New Roman"/>
+        <a:font script="Thai" typeface="Angsana New"/>
+        <a:font script="Ethi" typeface="Nyala"/>
+        <a:font script="Beng" typeface="Vrinda"/>
+        <a:font script="Gujr" typeface="Shruti"/>
+        <a:font script="Khmr" typeface="MoolBoran"/>
+        <a:font script="Knda" typeface="Tunga"/>
+        <a:font script="Guru" typeface="Raavi"/>
+        <a:font script="Cans" typeface="Euphemia"/>
+        <a:font script="Cher" typeface="Plantagenet Cherokee"/>
+        <a:font script="Yiii" typeface="Microsoft Yi Baiti"/>
+        <a:font script="Tibt" typeface="Microsoft Himalaya"/>
+        <a:font script="Thaa" typeface="MV Boli"/>
+        <a:font script="Deva" typeface="Mangal"/>
+        <a:font script="Telu" typeface="Gautami"/>
+        <a:font script="Taml" typeface="Latha"/>
+        <a:font script="Syrc" typeface="Estrangelo Edessa"/>
+        <a:font script="Orya" typeface="Kalinga"/>
+        <a:font script="Mlym" typeface="Kartika"/>
+        <a:font script="Laoo" typeface="DokChampa"/>
+        <a:font script="Sinh" typeface="Iskoola Pota"/>
+        <a:font script="Mong" typeface="Mongolian Baiti"/>
+        <a:font script="Viet" typeface="Times New Roman"/>
+        <a:font script="Uigh" typeface="Microsoft Uighur"/>
+        <a:font script="Geor" typeface="Sylfaen"/>
+        <a:font script="Armn" typeface="Arial"/>
+        <a:font script="Bugi" typeface="Leelawadee UI"/>
+        <a:font script="Bopo" typeface="Microsoft JhengHei"/>
+        <a:font script="Java" typeface="Javanese Text"/>
+        <a:font script="Lisu" typeface="Segoe UI"/>
+        <a:font script="Mymr" typeface="Myanmar Text"/>
+        <a:font script="Nkoo" typeface="Ebrima"/>
+        <a:font script="Olck" typeface="Nirmala UI"/>
+        <a:font script="Osma" typeface="Ebrima"/>
+        <a:font script="Phag" typeface="Phagspa"/>
+        <a:font script="Syrn" typeface="Estrangelo Edessa"/>
+        <a:font script="Syrj" typeface="Estrangelo Edessa"/>
+        <a:font script="Syre" typeface="Estrangelo Edessa"/>
+        <a:font script="Sora" typeface="Nirmala UI"/>
+        <a:font script="Tale" typeface="Microsoft Tai Le"/>
+        <a:font script="Talu" typeface="Microsoft New Tai Lue"/>
+        <a:font script="Tfng" typeface="Ebrima"/>
+      </a:majorFont>
+      <a:minorFont>
+        <a:latin typeface="Aptos" panose="02110004020202020204"/>
+        <a:ea typeface=""/>
+        <a:cs typeface=""/>
+        <a:font script="Jpan" typeface="游ゴシック"/>
+        <a:font script="Hang" typeface="맑은 고딕"/>
+        <a:font script="Hans" typeface="等线"/>
+        <a:font script="Hant" typeface="新細明體"/>
+        <a:font script="Arab" typeface="Arial"/>
+        <a:font script="Hebr" typeface="Arial"/>
+        <a:font script="Thai" typeface="Cordia New"/>
+        <a:font script="Ethi" typeface="Nyala"/>
+        <a:font script="Beng" typeface="Vrinda"/>
+        <a:font script="Gujr" typeface="Shruti"/>
+        <a:font script="Khmr" typeface="DaunPenh"/>
+        <a:font script="Knda" typeface="Tunga"/>
+        <a:font script="Guru" typeface="Raavi"/>
+        <a:font script="Cans" typeface="Euphemia"/>
+        <a:font script="Cher" typeface="Plantagenet Cherokee"/>
+        <a:font script="Yiii" typeface="Microsoft Yi Baiti"/>
+        <a:font script="Tibt" typeface="Microsoft Himalaya"/>
+        <a:font script="Thaa" typeface="MV Boli"/>
+        <a:font script="Deva" typeface="Mangal"/>
+        <a:font script="Telu" typeface="Gautami"/>
+        <a:font script="Taml" typeface="Latha"/>
+        <a:font script="Syrc" typeface="Estrangelo Edessa"/>
+        <a:font script="Orya" typeface="Kalinga"/>
+        <a:font script="Mlym" typeface="Kartika"/>
+        <a:font script="Laoo" typeface="DokChampa"/>
+        <a:font script="Sinh" typeface="Iskoola Pota"/>
+        <a:font script="Mong" typeface="Mongolian Baiti"/>
+        <a:font script="Viet" typeface="Arial"/>
+        <a:font script="Uigh" typeface="Microsoft Uighur"/>
+        <a:font script="Geor" typeface="Sylfaen"/>
+        <a:font script="Armn" typeface="Arial"/>
+        <a:font script="Bugi" typeface="Leelawadee UI"/>
+        <a:font script="Bopo" typeface="Microsoft JhengHei"/>
+        <a:font script="Java" typeface="Javanese Text"/>
+        <a:font script="Lisu" typeface="Segoe UI"/>
+        <a:font script="Mymr" typeface="Myanmar Text"/>
+        <a:font script="Nkoo" typeface="Ebrima"/>
+        <a:font script="Olck" typeface="Nirmala UI"/>
+        <a:font script="Osma" typeface="Ebrima"/>
+        <a:font script="Phag" typeface="Phagspa"/>
+        <a:font script="Syrn" typeface="Estrangelo Edessa"/>
+        <a:font script="Syrj" typeface="Estrangelo Edessa"/>
+        <a:font script="Syre" typeface="Estrangelo Edessa"/>
+        <a:font script="Sora" typeface="Nirmala UI"/>
+        <a:font script="Tale" typeface="Microsoft Tai Le"/>
+        <a:font script="Talu" typeface="Microsoft New Tai Lue"/>
+        <a:font script="Tfng" typeface="Ebrima"/>
+      </a:minorFont>
+    </a:fontScheme>
+    <a:fmtScheme name="Office">
+      <a:fillStyleLst>
+        <a:solidFill>
+          <a:schemeClr val="phClr"/>
+        </a:solidFill>
+        <a:gradFill rotWithShape="1">
+          <a:gsLst>
+            <a:gs pos="0">
+              <a:schemeClr val="phClr">
+                <a:lumMod val="110000"/>
+                <a:satMod val="105000"/>
+                <a:tint val="67000"/>
+              </a:schemeClr>
+            </a:gs>
+            <a:gs pos="50000">
+              <a:schemeClr val="phClr">
+                <a:lumMod val="105000"/>
+                <a:satMod val="103000"/>
+                <a:tint val="73000"/>
+              </a:schemeClr>
+            </a:gs>
+            <a:gs pos="100000">
+              <a:schemeClr val="phClr">
+                <a:lumMod val="105000"/>
+                <a:satMod val="109000"/>
+                <a:tint val="81000"/>
+              </a:schemeClr>
+            </a:gs>
+          </a:gsLst>
+          <a:lin ang="5400000" scaled="0"/>
+        </a:gradFill>
+        <a:gradFill rotWithShape="1">
+          <a:gsLst>
+            <a:gs pos="0">
+              <a:schemeClr val="phClr">
+                <a:satMod val="103000"/>
+                <a:lumMod val="102000"/>
+                <a:tint val="94000"/>
+              </a:schemeClr>
+            </a:gs>
+            <a:gs pos="50000">
+              <a:schemeClr val="phClr">
+                <a:satMod val="110000"/>
+                <a:lumMod val="100000"/>
+                <a:shade val="100000"/>
+              </a:schemeClr>
+            </a:gs>
+            <a:gs pos="100000">
+              <a:schemeClr val="phClr">
+                <a:lumMod val="99000"/>
+                <a:satMod val="120000"/>
+                <a:shade val="78000"/>
+              </a:schemeClr>
+            </a:gs>
+          </a:gsLst>
+          <a:lin ang="5400000" scaled="0"/>
+        </a:gradFill>
+      </a:fillStyleLst>
+      <a:lnStyleLst>
+        <a:ln w="12700" cap="flat" cmpd="sng" algn="ctr">
+          <a:solidFill>
+            <a:schemeClr val="phClr"/>
+          </a:solidFill>
+          <a:prstDash val="solid"/>
+          <a:miter lim="800000"/>
+        </a:ln>
+        <a:ln w="19050" cap="flat" cmpd="sng" algn="ctr">
+          <a:solidFill>
+            <a:schemeClr val="phClr"/>
+          </a:solidFill>
+          <a:prstDash val="solid"/>
+          <a:miter lim="800000"/>
+        </a:ln>
+        <a:ln w="25400" cap="flat" cmpd="sng" algn="ctr">
+          <a:solidFill>
+            <a:schemeClr val="phClr"/>
+          </a:solidFill>
+          <a:prstDash val="solid"/>
+          <a:miter lim="800000"/>
+        </a:ln>
+      </a:lnStyleLst>
+      <a:effectStyleLst>
+        <a:effectStyle>
+          <a:effectLst/>
+        </a:effectStyle>
+        <a:effectStyle>
+          <a:effectLst/>
+        </a:effectStyle>
+        <a:effectStyle>
+          <a:effectLst>
+            <a:outerShdw blurRad="57150" dist="19050" dir="5400000" algn="ctr" rotWithShape="0">
+              <a:srgbClr val="000000">
+                <a:alpha val="63000"/>
+              </a:srgbClr>
+            </a:outerShdw>
+          </a:effectLst>
+        </a:effectStyle>
+      </a:effectStyleLst>
+      <a:bgFillStyleLst>
+        <a:solidFill>
+          <a:schemeClr val="phClr"/>
+        </a:solidFill>
+        <a:solidFill>
+          <a:schemeClr val="phClr">
+            <a:tint val="95000"/>
+            <a:satMod val="170000"/>
+          </a:schemeClr>
+        </a:solidFill>
+        <a:gradFill rotWithShape="1">
+          <a:gsLst>
+            <a:gs pos="0">
+              <a:schemeClr val="phClr">
+                <a:tint val="93000"/>
+                <a:satMod val="150000"/>
+                <a:shade val="98000"/>
+                <a:lumMod val="102000"/>
+              </a:schemeClr>
+            </a:gs>
+            <a:gs pos="50000">
+              <a:schemeClr val="phClr">
+                <a:tint val="98000"/>
+                <a:satMod val="130000"/>
+                <a:shade val="90000"/>
+                <a:lumMod val="103000"/>
+              </a:schemeClr>
+            </a:gs>
+            <a:gs pos="100000">
+              <a:schemeClr val="phClr">
+                <a:shade val="63000"/>
+                <a:satMod val="120000"/>
+              </a:schemeClr>
+            </a:gs>
+          </a:gsLst>
+          <a:lin ang="5400000" scaled="0"/>
+        </a:gradFill>
+      </a:bgFillStyleLst>
+    </a:fmtScheme>
+  </a:themeElements>
+  <a:objectDefaults>
+    <a:lnDef>
+      <a:spPr/>
+      <a:bodyPr/>
+      <a:lstStyle/>
+      <a:style>
+        <a:lnRef idx="2">
+          <a:schemeClr val="accent1"/>
+        </a:lnRef>
+        <a:fillRef idx="0">
+          <a:schemeClr val="accent1"/>
+        </a:fillRef>
+        <a:effectRef idx="1">
+          <a:schemeClr val="accent1"/>
+        </a:effectRef>
+        <a:fontRef idx="minor">
+          <a:schemeClr val="tx1"/>
+        </a:fontRef>
+      </a:style>
+    </a:lnDef>
+  </a:objectDefaults>
+  <a:extraClrSchemeLst/>
+  <a:extLst>
+    <a:ext uri="{05A4C25C-085E-4340-85A3-A5531E510DB2}">
+      <thm15:themeFamily xmlns:thm15="http://schemas.microsoft.com/office/thememl/2012/main" name="Office Theme" id="{2E142A2C-CD16-42D6-873A-C26D2A0506FA}" vid="{1BDDFF52-6CD6-40A5-AB3C-68EB2F1E4D0A}"/>
+    </a:ext>
+  </a:extLst>
+</a:theme>
 </file>
--- a/paper/ERW_public_private_returns_walkthrough.pptx
+++ b/paper/ERW_public_private_returns_walkthrough.pptx
@@ -1141,7 +1141,7 @@
           <a:p>
             <a:r>
               <a:rPr lang="en-US" dirty="0"/>
-              <a:t/>
+              <a:t>Q: What total expenditure is required to achieve the $3.5 B private return? A: about $1.74 B in delivered basalt cost, summed over the 4.31 Mha private-sufficient envelope (equilibrium maintenance cycle, targeted allocation). So the $3.5 B is gross yield value; net of the $1.74 B ERW cost the private gross margin is about $1.75 B - a benefit-cost ratio of roughly 2:1, before any carbon revenue. Delivered cost here is quarry + grinding + transport + spreading (no MRV, since this is the yield-only case). Source: envelope table, targeted Private row - Area 4.31 Mha, Private $3,496 M, Cost $1,743 M, net-export CDR 7.1 Mt.</a:t>
             </a:r>
             <a:endParaRPr lang="en-US" dirty="0"/>
           </a:p>
@@ -7018,7 +7018,7 @@
       </p:sp>
       <p:sp>
         <p:nvSpPr>
-          <p:cNvPr id="13" name="Text 10"/>
+          <p:cNvPr id="14" name="Text 10"/>
           <p:cNvSpPr/>
           <p:nvPr/>
         </p:nvSpPr>
@@ -7071,7 +7071,7 @@
       </p:sp>
       <p:sp>
         <p:nvSpPr>
-          <p:cNvPr id="14" name="Text 11"/>
+          <p:cNvPr id="15" name="Text 11"/>
           <p:cNvSpPr/>
           <p:nvPr/>
         </p:nvSpPr>

--- a/paper/ERW_public_private_returns_walkthrough.pptx
+++ b/paper/ERW_public_private_returns_walkthrough.pptx
@@ -29,9 +29,10 @@
     <p:sldId id="277" r:id="rId23"/>
     <p:sldId id="278" r:id="rId24"/>
     <p:sldId id="279" r:id="rId25"/>
+    <p:sldId id="280" r:id="rId26"/>
   </p:sldIdLst>
   <p:notesMasterIdLst>
-    <p:notesMasterId r:id="rId26"/>
+    <p:notesMasterId r:id="rId27"/>
   </p:notesMasterIdLst>
   <p:sldSz cx="12192000" cy="6858000"/>
   <p:notesSz cx="6858000" cy="12192000"/>
@@ -1141,7 +1142,7 @@
           <a:p>
             <a:r>
               <a:rPr lang="en-US" dirty="0"/>
-              <a:t>Q: What total expenditure is required to achieve the $3.5 B private return? A: about $1.74 B in delivered basalt cost, summed over the 4.31 Mha private-sufficient envelope (equilibrium maintenance cycle, targeted allocation). So the $3.5 B is gross yield value; net of the $1.74 B ERW cost the private gross margin is about $1.75 B - a benefit-cost ratio of roughly 2:1, before any carbon revenue. Delivered cost here is quarry + grinding + transport + spreading (no MRV, since this is the yield-only case). Source: envelope table, targeted Private row - Area 4.31 Mha, Private $3,496 M, Cost $1,743 M, net-export CDR 7.1 Mt.</a:t>
+              <a:t/>
             </a:r>
             <a:endParaRPr lang="en-US" dirty="0"/>
           </a:p>
@@ -1229,7 +1230,7 @@
           <a:p>
             <a:r>
               <a:rPr lang="en-US" dirty="0"/>
-              <a:t/>
+              <a:t>Q: What total expenditure is required to achieve the $3.5 B private return? A: about $1.74 B in delivered basalt cost, summed over the 4.31 Mha private-sufficient envelope (equilibrium maintenance cycle, targeted allocation). So the $3.5 B is gross yield value; net of the $1.74 B ERW cost the private gross margin is about $1.75 B - a benefit-cost ratio of roughly 2:1, before any carbon revenue. Delivered cost here is quarry + grinding + transport + spreading (no MRV, since this is the yield-only case). Source: envelope table, targeted Private row - Area 4.31 Mha, Private $3,496 M, Cost $1,743 M, net-export CDR 7.1 Mt.</a:t>
             </a:r>
             <a:endParaRPr lang="en-US" dirty="0"/>
           </a:p>
@@ -1957,6 +1958,94 @@
             <a:fld id="{F7021451-1387-4CA6-816F-3879F97B5CBC}" type="slidenum">
               <a:rPr lang="en-US"/>
               <a:t>24</a:t>
+            </a:fld>
+            <a:endParaRPr lang="en-US"/>
+          </a:p>
+        </p:txBody>
+      </p:sp>
+    </p:spTree>
+    <p:extLst>
+      <p:ext uri="{BB962C8B-B14F-4D97-AF65-F5344CB8AC3E}">
+        <p14:creationId xmlns:p14="http://schemas.microsoft.com/office/powerpoint/2010/main" val="1024086991"/>
+      </p:ext>
+    </p:extLst>
+  </p:cSld>
+  <p:clrMapOvr>
+    <a:masterClrMapping/>
+  </p:clrMapOvr>
+</p:notes>
+</file>
+
+<file path=ppt/notesSlides/notesSlide25.xml><?xml version="1.0" encoding="utf-8"?>
+<p:notes xmlns:a="http://schemas.openxmlformats.org/drawingml/2006/main" xmlns:r="http://schemas.openxmlformats.org/officeDocument/2006/relationships" xmlns:p="http://schemas.openxmlformats.org/presentationml/2006/main">
+  <p:cSld>
+    <p:spTree>
+      <p:nvGrpSpPr>
+        <p:cNvPr id="1" name=""/>
+        <p:cNvGrpSpPr/>
+        <p:nvPr/>
+      </p:nvGrpSpPr>
+      <p:grpSpPr>
+        <a:xfrm>
+          <a:off x="0" y="0"/>
+          <a:ext cx="0" cy="0"/>
+          <a:chOff x="0" y="0"/>
+          <a:chExt cx="0" cy="0"/>
+        </a:xfrm>
+      </p:grpSpPr>
+      <p:sp>
+        <p:nvSpPr>
+          <p:cNvPr id="2" name="Slide Image Placeholder 1"/>
+          <p:cNvSpPr>
+            <a:spLocks noGrp="1" noRot="1" noChangeAspect="1"/>
+          </p:cNvSpPr>
+          <p:nvPr>
+            <p:ph type="sldImg"/>
+          </p:nvPr>
+        </p:nvSpPr>
+        <p:spPr/>
+      </p:sp>
+      <p:sp>
+        <p:nvSpPr>
+          <p:cNvPr id="3" name="Notes Placeholder 2"/>
+          <p:cNvSpPr>
+            <a:spLocks noGrp="1"/>
+          </p:cNvSpPr>
+          <p:nvPr>
+            <p:ph type="body" idx="1"/>
+          </p:nvPr>
+        </p:nvSpPr>
+        <p:spPr/>
+        <p:txBody>
+          <a:bodyPr/>
+          <a:lstStyle/>
+          <a:p>
+            <a:r>
+              <a:rPr lang="en-US" dirty="0"/>
+              <a:t/>
+            </a:r>
+            <a:endParaRPr lang="en-US" dirty="0"/>
+          </a:p>
+        </p:txBody>
+      </p:sp>
+      <p:sp>
+        <p:nvSpPr>
+          <p:cNvPr id="4" name="Slide Number Placeholder 3"/>
+          <p:cNvSpPr>
+            <a:spLocks noGrp="1"/>
+          </p:cNvSpPr>
+          <p:nvPr>
+            <p:ph type="sldNum" sz="quarter" idx="10"/>
+          </p:nvPr>
+        </p:nvSpPr>
+        <p:spPr/>
+        <p:txBody>
+          <a:bodyPr/>
+          <a:lstStyle/>
+          <a:p>
+            <a:fld id="{F7021451-1387-4CA6-816F-3879F97B5CBC}" type="slidenum">
+              <a:rPr lang="en-US"/>
+              <a:t>25</a:t>
             </a:fld>
             <a:endParaRPr lang="en-US"/>
           </a:p>
@@ -5663,6 +5752,916 @@
     <p:bg>
       <p:bgPr>
         <a:solidFill>
+          <a:srgbClr val="FFFFFF"/>
+        </a:solidFill>
+      </p:bgPr>
+    </p:bg>
+    <p:spTree>
+      <p:nvGrpSpPr>
+        <p:cNvPr id="1" name=""/>
+        <p:cNvGrpSpPr/>
+        <p:nvPr/>
+      </p:nvGrpSpPr>
+      <p:grpSpPr>
+        <a:xfrm>
+          <a:off x="0" y="0"/>
+          <a:ext cx="0" cy="0"/>
+          <a:chOff x="0" y="0"/>
+          <a:chExt cx="0" cy="0"/>
+        </a:xfrm>
+      </p:grpSpPr>
+      <p:sp>
+        <p:nvSpPr>
+          <p:cNvPr id="2" name="Text 0"/>
+          <p:cNvSpPr/>
+          <p:nvPr/>
+        </p:nvSpPr>
+        <p:spPr>
+          <a:xfrm>
+            <a:off x="502920" y="310896"/>
+            <a:ext cx="10058400" cy="274320"/>
+          </a:xfrm>
+          <a:prstGeom prst="rect">
+            <a:avLst/>
+          </a:prstGeom>
+          <a:noFill/>
+          <a:ln/>
+        </p:spPr>
+        <p:txBody>
+          <a:bodyPr wrap="square" lIns="0" tIns="0" rIns="0" bIns="0" rtlCol="0" anchor="ctr"/>
+          <a:lstStyle/>
+          <a:p>
+            <a:pPr indent="0" marL="0">
+              <a:buNone/>
+            </a:pPr>
+            <a:r>
+              <a:rPr lang="en-US" sz="1200" b="1" spc="200" kern="0" dirty="0">
+                <a:solidFill>
+                  <a:srgbClr val="E8843C"/>
+                </a:solidFill>
+                <a:latin typeface="Calibri" pitchFamily="34" charset="0"/>
+                <a:ea typeface="Calibri" pitchFamily="34" charset="-122"/>
+                <a:cs typeface="Calibri" pitchFamily="34" charset="-120"/>
+              </a:rPr>
+              <a:t>HOW TO READ THE RETURNS</a:t>
+            </a:r>
+            <a:endParaRPr lang="en-US" sz="1200" dirty="0"/>
+          </a:p>
+        </p:txBody>
+      </p:sp>
+      <p:sp>
+        <p:nvSpPr>
+          <p:cNvPr id="3" name="Text 1"/>
+          <p:cNvSpPr/>
+          <p:nvPr/>
+        </p:nvSpPr>
+        <p:spPr>
+          <a:xfrm>
+            <a:off x="502920" y="566928"/>
+            <a:ext cx="11155680" cy="685800"/>
+          </a:xfrm>
+          <a:prstGeom prst="rect">
+            <a:avLst/>
+          </a:prstGeom>
+          <a:noFill/>
+          <a:ln/>
+        </p:spPr>
+        <p:txBody>
+          <a:bodyPr wrap="square" lIns="0" tIns="0" rIns="0" bIns="0" rtlCol="0" anchor="ctr"/>
+          <a:lstStyle/>
+          <a:p>
+            <a:pPr indent="0" marL="0">
+              <a:buNone/>
+            </a:pPr>
+            <a:r>
+              <a:rPr lang="en-US" sz="2900" b="1" dirty="0">
+                <a:solidFill>
+                  <a:srgbClr val="14232B"/>
+                </a:solidFill>
+                <a:latin typeface="Cambria" pitchFamily="34" charset="0"/>
+                <a:ea typeface="Cambria" pitchFamily="34" charset="-122"/>
+                <a:cs typeface="Cambria" pitchFamily="34" charset="-120"/>
+              </a:rPr>
+              <a:t>Establishment dose vs. steady-state maintenance</a:t>
+            </a:r>
+            <a:endParaRPr lang="en-US" sz="2900" dirty="0"/>
+          </a:p>
+        </p:txBody>
+      </p:sp>
+      <p:sp>
+        <p:nvSpPr>
+          <p:cNvPr id="4" name="Shape 2"/>
+          <p:cNvSpPr/>
+          <p:nvPr/>
+        </p:nvSpPr>
+        <p:spPr>
+          <a:xfrm>
+            <a:off x="640080" y="1371600"/>
+            <a:ext cx="10927080" cy="548640"/>
+          </a:xfrm>
+          <a:prstGeom prst="roundRect">
+            <a:avLst>
+              <a:gd name="adj" fmla="val 10000"/>
+            </a:avLst>
+          </a:prstGeom>
+          <a:solidFill>
+            <a:srgbClr val="E7F3E7"/>
+          </a:solidFill>
+          <a:ln w="12700">
+            <a:solidFill>
+              <a:srgbClr val="2E7D32"/>
+            </a:solidFill>
+            <a:prstDash val="solid"/>
+          </a:ln>
+        </p:spPr>
+      </p:sp>
+      <p:sp>
+        <p:nvSpPr>
+          <p:cNvPr id="5" name="Text 3"/>
+          <p:cNvSpPr/>
+          <p:nvPr/>
+        </p:nvSpPr>
+        <p:spPr>
+          <a:xfrm>
+            <a:off x="640080" y="1371600"/>
+            <a:ext cx="10927080" cy="548640"/>
+          </a:xfrm>
+          <a:prstGeom prst="rect">
+            <a:avLst/>
+          </a:prstGeom>
+          <a:noFill/>
+          <a:ln/>
+        </p:spPr>
+        <p:txBody>
+          <a:bodyPr wrap="square" lIns="0" tIns="0" rIns="0" bIns="0" rtlCol="0" anchor="ctr"/>
+          <a:lstStyle/>
+          <a:p>
+            <a:pPr algn="ctr" indent="0" marL="0">
+              <a:buNone/>
+            </a:pPr>
+            <a:r>
+              <a:rPr lang="en-US" sz="1300" b="1" dirty="0">
+                <a:solidFill>
+                  <a:srgbClr val="2E7D32"/>
+                </a:solidFill>
+                <a:latin typeface="Calibri" pitchFamily="34" charset="0"/>
+                <a:ea typeface="Calibri" pitchFamily="34" charset="-122"/>
+                <a:cs typeface="Calibri" pitchFamily="34" charset="-120"/>
+              </a:rPr>
+              <a:t>Full annual yield benefit — realized every year once soils are held at target</a:t>
+            </a:r>
+            <a:endParaRPr lang="en-US" sz="1300" dirty="0"/>
+          </a:p>
+        </p:txBody>
+      </p:sp>
+      <p:sp>
+        <p:nvSpPr>
+          <p:cNvPr id="6" name="Shape 4"/>
+          <p:cNvSpPr/>
+          <p:nvPr/>
+        </p:nvSpPr>
+        <p:spPr>
+          <a:xfrm>
+            <a:off x="731520" y="3383280"/>
+            <a:ext cx="10698480" cy="0"/>
+          </a:xfrm>
+          <a:prstGeom prst="line">
+            <a:avLst/>
+          </a:prstGeom>
+          <a:noFill/>
+          <a:ln w="12700">
+            <a:solidFill>
+              <a:srgbClr val="5B6B73"/>
+            </a:solidFill>
+            <a:prstDash val="solid"/>
+          </a:ln>
+        </p:spPr>
+      </p:sp>
+      <p:sp>
+        <p:nvSpPr>
+          <p:cNvPr id="7" name="Shape 5"/>
+          <p:cNvSpPr/>
+          <p:nvPr/>
+        </p:nvSpPr>
+        <p:spPr>
+          <a:xfrm>
+            <a:off x="1371600" y="2148840"/>
+            <a:ext cx="1005840" cy="1234440"/>
+          </a:xfrm>
+          <a:prstGeom prst="rect">
+            <a:avLst/>
+          </a:prstGeom>
+          <a:solidFill>
+            <a:srgbClr val="E8843C"/>
+          </a:solidFill>
+          <a:ln/>
+        </p:spPr>
+      </p:sp>
+      <p:sp>
+        <p:nvSpPr>
+          <p:cNvPr id="8" name="Text 6"/>
+          <p:cNvSpPr/>
+          <p:nvPr/>
+        </p:nvSpPr>
+        <p:spPr>
+          <a:xfrm>
+            <a:off x="914400" y="3438144"/>
+            <a:ext cx="1920240" cy="502920"/>
+          </a:xfrm>
+          <a:prstGeom prst="rect">
+            <a:avLst/>
+          </a:prstGeom>
+          <a:noFill/>
+          <a:ln/>
+        </p:spPr>
+        <p:txBody>
+          <a:bodyPr wrap="square" lIns="0" tIns="0" rIns="0" bIns="0" rtlCol="0" anchor="t"/>
+          <a:lstStyle/>
+          <a:p>
+            <a:pPr algn="ctr" indent="0" marL="0">
+              <a:lnSpc>
+                <a:spcPct val="95000"/>
+              </a:lnSpc>
+              <a:buNone/>
+            </a:pPr>
+            <a:r>
+              <a:rPr lang="en-US" sz="1100" dirty="0">
+                <a:solidFill>
+                  <a:srgbClr val="14232B"/>
+                </a:solidFill>
+                <a:latin typeface="Calibri" pitchFamily="34" charset="0"/>
+                <a:ea typeface="Calibri" pitchFamily="34" charset="-122"/>
+                <a:cs typeface="Calibri" pitchFamily="34" charset="-120"/>
+              </a:rPr>
+              <a:t>Year 1</a:t>
+            </a:r>
+            <a:endParaRPr lang="en-US" sz="1100" dirty="0"/>
+          </a:p>
+          <a:p>
+            <a:pPr algn="ctr" indent="0" marL="0">
+              <a:lnSpc>
+                <a:spcPct val="95000"/>
+              </a:lnSpc>
+              <a:buNone/>
+            </a:pPr>
+            <a:r>
+              <a:rPr lang="en-US" sz="1100" dirty="0">
+                <a:solidFill>
+                  <a:srgbClr val="14232B"/>
+                </a:solidFill>
+                <a:latin typeface="Calibri" pitchFamily="34" charset="0"/>
+                <a:ea typeface="Calibri" pitchFamily="34" charset="-122"/>
+                <a:cs typeface="Calibri" pitchFamily="34" charset="-120"/>
+              </a:rPr>
+              <a:t>(establishment)</a:t>
+            </a:r>
+            <a:endParaRPr lang="en-US" sz="1100" dirty="0"/>
+          </a:p>
+        </p:txBody>
+      </p:sp>
+      <p:sp>
+        <p:nvSpPr>
+          <p:cNvPr id="9" name="Shape 7"/>
+          <p:cNvSpPr/>
+          <p:nvPr/>
+        </p:nvSpPr>
+        <p:spPr>
+          <a:xfrm>
+            <a:off x="3474720" y="3017520"/>
+            <a:ext cx="1005840" cy="365760"/>
+          </a:xfrm>
+          <a:prstGeom prst="rect">
+            <a:avLst/>
+          </a:prstGeom>
+          <a:solidFill>
+            <a:srgbClr val="0F6E63"/>
+          </a:solidFill>
+          <a:ln/>
+        </p:spPr>
+      </p:sp>
+      <p:sp>
+        <p:nvSpPr>
+          <p:cNvPr id="10" name="Text 8"/>
+          <p:cNvSpPr/>
+          <p:nvPr/>
+        </p:nvSpPr>
+        <p:spPr>
+          <a:xfrm>
+            <a:off x="3017520" y="3438144"/>
+            <a:ext cx="1920240" cy="502920"/>
+          </a:xfrm>
+          <a:prstGeom prst="rect">
+            <a:avLst/>
+          </a:prstGeom>
+          <a:noFill/>
+          <a:ln/>
+        </p:spPr>
+        <p:txBody>
+          <a:bodyPr wrap="square" lIns="0" tIns="0" rIns="0" bIns="0" rtlCol="0" anchor="t"/>
+          <a:lstStyle/>
+          <a:p>
+            <a:pPr algn="ctr" indent="0" marL="0">
+              <a:lnSpc>
+                <a:spcPct val="95000"/>
+              </a:lnSpc>
+              <a:buNone/>
+            </a:pPr>
+            <a:r>
+              <a:rPr lang="en-US" sz="1100" dirty="0">
+                <a:solidFill>
+                  <a:srgbClr val="14232B"/>
+                </a:solidFill>
+                <a:latin typeface="Calibri" pitchFamily="34" charset="0"/>
+                <a:ea typeface="Calibri" pitchFamily="34" charset="-122"/>
+                <a:cs typeface="Calibri" pitchFamily="34" charset="-120"/>
+              </a:rPr>
+              <a:t>Year 2</a:t>
+            </a:r>
+            <a:endParaRPr lang="en-US" sz="1100" dirty="0"/>
+          </a:p>
+        </p:txBody>
+      </p:sp>
+      <p:sp>
+        <p:nvSpPr>
+          <p:cNvPr id="11" name="Shape 9"/>
+          <p:cNvSpPr/>
+          <p:nvPr/>
+        </p:nvSpPr>
+        <p:spPr>
+          <a:xfrm>
+            <a:off x="5577840" y="3017520"/>
+            <a:ext cx="1005840" cy="365760"/>
+          </a:xfrm>
+          <a:prstGeom prst="rect">
+            <a:avLst/>
+          </a:prstGeom>
+          <a:solidFill>
+            <a:srgbClr val="0F6E63"/>
+          </a:solidFill>
+          <a:ln/>
+        </p:spPr>
+      </p:sp>
+      <p:sp>
+        <p:nvSpPr>
+          <p:cNvPr id="12" name="Text 10"/>
+          <p:cNvSpPr/>
+          <p:nvPr/>
+        </p:nvSpPr>
+        <p:spPr>
+          <a:xfrm>
+            <a:off x="5120640" y="3438144"/>
+            <a:ext cx="1920240" cy="502920"/>
+          </a:xfrm>
+          <a:prstGeom prst="rect">
+            <a:avLst/>
+          </a:prstGeom>
+          <a:noFill/>
+          <a:ln/>
+        </p:spPr>
+        <p:txBody>
+          <a:bodyPr wrap="square" lIns="0" tIns="0" rIns="0" bIns="0" rtlCol="0" anchor="t"/>
+          <a:lstStyle/>
+          <a:p>
+            <a:pPr algn="ctr" indent="0" marL="0">
+              <a:lnSpc>
+                <a:spcPct val="95000"/>
+              </a:lnSpc>
+              <a:buNone/>
+            </a:pPr>
+            <a:r>
+              <a:rPr lang="en-US" sz="1100" dirty="0">
+                <a:solidFill>
+                  <a:srgbClr val="14232B"/>
+                </a:solidFill>
+                <a:latin typeface="Calibri" pitchFamily="34" charset="0"/>
+                <a:ea typeface="Calibri" pitchFamily="34" charset="-122"/>
+                <a:cs typeface="Calibri" pitchFamily="34" charset="-120"/>
+              </a:rPr>
+              <a:t>Year 3</a:t>
+            </a:r>
+            <a:endParaRPr lang="en-US" sz="1100" dirty="0"/>
+          </a:p>
+        </p:txBody>
+      </p:sp>
+      <p:sp>
+        <p:nvSpPr>
+          <p:cNvPr id="13" name="Shape 11"/>
+          <p:cNvSpPr/>
+          <p:nvPr/>
+        </p:nvSpPr>
+        <p:spPr>
+          <a:xfrm>
+            <a:off x="7680960" y="3017520"/>
+            <a:ext cx="1005840" cy="365760"/>
+          </a:xfrm>
+          <a:prstGeom prst="rect">
+            <a:avLst/>
+          </a:prstGeom>
+          <a:solidFill>
+            <a:srgbClr val="0F6E63"/>
+          </a:solidFill>
+          <a:ln/>
+        </p:spPr>
+      </p:sp>
+      <p:sp>
+        <p:nvSpPr>
+          <p:cNvPr id="14" name="Text 12"/>
+          <p:cNvSpPr/>
+          <p:nvPr/>
+        </p:nvSpPr>
+        <p:spPr>
+          <a:xfrm>
+            <a:off x="7223760" y="3438144"/>
+            <a:ext cx="1920240" cy="502920"/>
+          </a:xfrm>
+          <a:prstGeom prst="rect">
+            <a:avLst/>
+          </a:prstGeom>
+          <a:noFill/>
+          <a:ln/>
+        </p:spPr>
+        <p:txBody>
+          <a:bodyPr wrap="square" lIns="0" tIns="0" rIns="0" bIns="0" rtlCol="0" anchor="t"/>
+          <a:lstStyle/>
+          <a:p>
+            <a:pPr algn="ctr" indent="0" marL="0">
+              <a:lnSpc>
+                <a:spcPct val="95000"/>
+              </a:lnSpc>
+              <a:buNone/>
+            </a:pPr>
+            <a:r>
+              <a:rPr lang="en-US" sz="1100" dirty="0">
+                <a:solidFill>
+                  <a:srgbClr val="14232B"/>
+                </a:solidFill>
+                <a:latin typeface="Calibri" pitchFamily="34" charset="0"/>
+                <a:ea typeface="Calibri" pitchFamily="34" charset="-122"/>
+                <a:cs typeface="Calibri" pitchFamily="34" charset="-120"/>
+              </a:rPr>
+              <a:t>Year 4</a:t>
+            </a:r>
+            <a:endParaRPr lang="en-US" sz="1100" dirty="0"/>
+          </a:p>
+        </p:txBody>
+      </p:sp>
+      <p:sp>
+        <p:nvSpPr>
+          <p:cNvPr id="15" name="Shape 13"/>
+          <p:cNvSpPr/>
+          <p:nvPr/>
+        </p:nvSpPr>
+        <p:spPr>
+          <a:xfrm>
+            <a:off x="9784080" y="3017520"/>
+            <a:ext cx="1005840" cy="365760"/>
+          </a:xfrm>
+          <a:prstGeom prst="rect">
+            <a:avLst/>
+          </a:prstGeom>
+          <a:solidFill>
+            <a:srgbClr val="0F6E63"/>
+          </a:solidFill>
+          <a:ln/>
+        </p:spPr>
+      </p:sp>
+      <p:sp>
+        <p:nvSpPr>
+          <p:cNvPr id="16" name="Text 14"/>
+          <p:cNvSpPr/>
+          <p:nvPr/>
+        </p:nvSpPr>
+        <p:spPr>
+          <a:xfrm>
+            <a:off x="9326880" y="3438144"/>
+            <a:ext cx="1920240" cy="502920"/>
+          </a:xfrm>
+          <a:prstGeom prst="rect">
+            <a:avLst/>
+          </a:prstGeom>
+          <a:noFill/>
+          <a:ln/>
+        </p:spPr>
+        <p:txBody>
+          <a:bodyPr wrap="square" lIns="0" tIns="0" rIns="0" bIns="0" rtlCol="0" anchor="t"/>
+          <a:lstStyle/>
+          <a:p>
+            <a:pPr algn="ctr" indent="0" marL="0">
+              <a:lnSpc>
+                <a:spcPct val="95000"/>
+              </a:lnSpc>
+              <a:buNone/>
+            </a:pPr>
+            <a:r>
+              <a:rPr lang="en-US" sz="1100" dirty="0">
+                <a:solidFill>
+                  <a:srgbClr val="14232B"/>
+                </a:solidFill>
+                <a:latin typeface="Calibri" pitchFamily="34" charset="0"/>
+                <a:ea typeface="Calibri" pitchFamily="34" charset="-122"/>
+                <a:cs typeface="Calibri" pitchFamily="34" charset="-120"/>
+              </a:rPr>
+              <a:t>steady state</a:t>
+            </a:r>
+            <a:endParaRPr lang="en-US" sz="1100" dirty="0"/>
+          </a:p>
+          <a:p>
+            <a:pPr algn="ctr" indent="0" marL="0">
+              <a:lnSpc>
+                <a:spcPct val="95000"/>
+              </a:lnSpc>
+              <a:buNone/>
+            </a:pPr>
+            <a:r>
+              <a:rPr lang="en-US" sz="1100" dirty="0">
+                <a:solidFill>
+                  <a:srgbClr val="14232B"/>
+                </a:solidFill>
+                <a:latin typeface="Calibri" pitchFamily="34" charset="0"/>
+                <a:ea typeface="Calibri" pitchFamily="34" charset="-122"/>
+                <a:cs typeface="Calibri" pitchFamily="34" charset="-120"/>
+              </a:rPr>
+              <a:t>(maintenance)</a:t>
+            </a:r>
+            <a:endParaRPr lang="en-US" sz="1100" dirty="0"/>
+          </a:p>
+        </p:txBody>
+      </p:sp>
+      <p:sp>
+        <p:nvSpPr>
+          <p:cNvPr id="17" name="Text 15"/>
+          <p:cNvSpPr/>
+          <p:nvPr/>
+        </p:nvSpPr>
+        <p:spPr>
+          <a:xfrm>
+            <a:off x="731520" y="3950208"/>
+            <a:ext cx="10698480" cy="256032"/>
+          </a:xfrm>
+          <a:prstGeom prst="rect">
+            <a:avLst/>
+          </a:prstGeom>
+          <a:noFill/>
+          <a:ln/>
+        </p:spPr>
+        <p:txBody>
+          <a:bodyPr wrap="square" lIns="0" tIns="0" rIns="0" bIns="0" rtlCol="0" anchor="ctr"/>
+          <a:lstStyle/>
+          <a:p>
+            <a:pPr algn="ctr" indent="0" marL="0">
+              <a:buNone/>
+            </a:pPr>
+            <a:r>
+              <a:rPr lang="en-US" sz="1100" i="1" dirty="0">
+                <a:solidFill>
+                  <a:srgbClr val="5B6B73"/>
+                </a:solidFill>
+                <a:latin typeface="Calibri" pitchFamily="34" charset="0"/>
+                <a:ea typeface="Calibri" pitchFamily="34" charset="-122"/>
+                <a:cs typeface="Calibri" pitchFamily="34" charset="-120"/>
+              </a:rPr>
+              <a:t>bar height ∝ basalt applied that period — charged at its full delivered cost</a:t>
+            </a:r>
+            <a:endParaRPr lang="en-US" sz="1100" dirty="0"/>
+          </a:p>
+        </p:txBody>
+      </p:sp>
+      <p:sp>
+        <p:nvSpPr>
+          <p:cNvPr id="18" name="Shape 16"/>
+          <p:cNvSpPr/>
+          <p:nvPr/>
+        </p:nvSpPr>
+        <p:spPr>
+          <a:xfrm>
+            <a:off x="640080" y="4279392"/>
+            <a:ext cx="5394960" cy="1298448"/>
+          </a:xfrm>
+          <a:prstGeom prst="roundRect">
+            <a:avLst>
+              <a:gd name="adj" fmla="val 5634"/>
+            </a:avLst>
+          </a:prstGeom>
+          <a:solidFill>
+            <a:srgbClr val="E7F0EE"/>
+          </a:solidFill>
+          <a:ln w="12700">
+            <a:solidFill>
+              <a:srgbClr val="D5DDDE"/>
+            </a:solidFill>
+            <a:prstDash val="solid"/>
+          </a:ln>
+          <a:effectLst>
+            <a:outerShdw sx="100000" sy="100000" kx="0" ky="0" algn="bl" rotWithShape="0" blurRad="88900" dist="38100" dir="5400000">
+              <a:srgbClr val="000000">
+                <a:alpha val="13000"/>
+              </a:srgbClr>
+            </a:outerShdw>
+          </a:effectLst>
+        </p:spPr>
+      </p:sp>
+      <p:sp>
+        <p:nvSpPr>
+          <p:cNvPr id="19" name="Text 17"/>
+          <p:cNvSpPr/>
+          <p:nvPr/>
+        </p:nvSpPr>
+        <p:spPr>
+          <a:xfrm>
+            <a:off x="868680" y="4389120"/>
+            <a:ext cx="4983480" cy="1115568"/>
+          </a:xfrm>
+          <a:prstGeom prst="rect">
+            <a:avLst/>
+          </a:prstGeom>
+          <a:noFill/>
+          <a:ln/>
+        </p:spPr>
+        <p:txBody>
+          <a:bodyPr wrap="square" lIns="0" tIns="0" rIns="0" bIns="0" rtlCol="0" anchor="t"/>
+          <a:lstStyle/>
+          <a:p>
+            <a:pPr indent="0" marL="0">
+              <a:lnSpc>
+                <a:spcPct val="102000"/>
+              </a:lnSpc>
+              <a:buNone/>
+            </a:pPr>
+            <a:r>
+              <a:rPr lang="en-US" sz="1400" b="1" dirty="0">
+                <a:solidFill>
+                  <a:srgbClr val="0F6E63"/>
+                </a:solidFill>
+                <a:latin typeface="Calibri" pitchFamily="34" charset="0"/>
+                <a:ea typeface="Calibri" pitchFamily="34" charset="-122"/>
+                <a:cs typeface="Calibri" pitchFamily="34" charset="-120"/>
+              </a:rPr>
+              <a:t>EQUILIBRIUM — the headline
+</a:t>
+            </a:r>
+            <a:pPr indent="0" marL="0">
+              <a:lnSpc>
+                <a:spcPct val="102000"/>
+              </a:lnSpc>
+              <a:buNone/>
+            </a:pPr>
+            <a:r>
+              <a:rPr lang="en-US" sz="1200" dirty="0">
+                <a:solidFill>
+                  <a:srgbClr val="14232B"/>
+                </a:solidFill>
+                <a:latin typeface="Calibri" pitchFamily="34" charset="0"/>
+                <a:ea typeface="Calibri" pitchFamily="34" charset="-122"/>
+                <a:cs typeface="Calibri" pitchFamily="34" charset="-120"/>
+              </a:rPr>
+              <a:t>Full annual yield vs the fully-costed maintenance top-up, once soils are at target. Private envelope: ≈ $3.5 B yield for ≈ $1.74 B rock (~2:1 per cycle). Excludes the establishment dose.</a:t>
+            </a:r>
+            <a:endParaRPr lang="en-US" sz="1400" dirty="0"/>
+          </a:p>
+        </p:txBody>
+      </p:sp>
+      <p:sp>
+        <p:nvSpPr>
+          <p:cNvPr id="20" name="Shape 18"/>
+          <p:cNvSpPr/>
+          <p:nvPr/>
+        </p:nvSpPr>
+        <p:spPr>
+          <a:xfrm>
+            <a:off x="6172200" y="4279392"/>
+            <a:ext cx="5394960" cy="1298448"/>
+          </a:xfrm>
+          <a:prstGeom prst="roundRect">
+            <a:avLst>
+              <a:gd name="adj" fmla="val 5634"/>
+            </a:avLst>
+          </a:prstGeom>
+          <a:solidFill>
+            <a:srgbClr val="FBF3EC"/>
+          </a:solidFill>
+          <a:ln w="12700">
+            <a:solidFill>
+              <a:srgbClr val="D5DDDE"/>
+            </a:solidFill>
+            <a:prstDash val="solid"/>
+          </a:ln>
+          <a:effectLst>
+            <a:outerShdw sx="100000" sy="100000" kx="0" ky="0" algn="bl" rotWithShape="0" blurRad="88900" dist="38100" dir="5400000">
+              <a:srgbClr val="000000">
+                <a:alpha val="13000"/>
+              </a:srgbClr>
+            </a:outerShdw>
+          </a:effectLst>
+        </p:spPr>
+      </p:sp>
+      <p:sp>
+        <p:nvSpPr>
+          <p:cNvPr id="21" name="Text 19"/>
+          <p:cNvSpPr/>
+          <p:nvPr/>
+        </p:nvSpPr>
+        <p:spPr>
+          <a:xfrm>
+            <a:off x="6400800" y="4389120"/>
+            <a:ext cx="4983480" cy="1115568"/>
+          </a:xfrm>
+          <a:prstGeom prst="rect">
+            <a:avLst/>
+          </a:prstGeom>
+          <a:noFill/>
+          <a:ln/>
+        </p:spPr>
+        <p:txBody>
+          <a:bodyPr wrap="square" lIns="0" tIns="0" rIns="0" bIns="0" rtlCol="0" anchor="t"/>
+          <a:lstStyle/>
+          <a:p>
+            <a:pPr indent="0" marL="0">
+              <a:lnSpc>
+                <a:spcPct val="102000"/>
+              </a:lnSpc>
+              <a:buNone/>
+            </a:pPr>
+            <a:r>
+              <a:rPr lang="en-US" sz="1400" b="1" dirty="0">
+                <a:solidFill>
+                  <a:srgbClr val="E8843C"/>
+                </a:solidFill>
+                <a:latin typeface="Calibri" pitchFamily="34" charset="0"/>
+                <a:ea typeface="Calibri" pitchFamily="34" charset="-122"/>
+                <a:cs typeface="Calibri" pitchFamily="34" charset="-120"/>
+              </a:rPr>
+              <a:t>YEAR 1 — establishment
+</a:t>
+            </a:r>
+            <a:pPr indent="0" marL="0">
+              <a:lnSpc>
+                <a:spcPct val="102000"/>
+              </a:lnSpc>
+              <a:buNone/>
+            </a:pPr>
+            <a:r>
+              <a:rPr lang="en-US" sz="1200" dirty="0">
+                <a:solidFill>
+                  <a:srgbClr val="14232B"/>
+                </a:solidFill>
+                <a:latin typeface="Calibri" pitchFamily="34" charset="0"/>
+                <a:ea typeface="Calibri" pitchFamily="34" charset="-122"/>
+                <a:cs typeface="Calibri" pitchFamily="34" charset="-120"/>
+              </a:rPr>
+              <a:t>One-time full lime-equivalent dose: larger upfront cost, and durable carbon largely collapses (alkalinity first pays down the standing acidity debt). Reported separately as the establishment / upper-bound contrast.</a:t>
+            </a:r>
+            <a:endParaRPr lang="en-US" sz="1400" dirty="0"/>
+          </a:p>
+        </p:txBody>
+      </p:sp>
+      <p:sp>
+        <p:nvSpPr>
+          <p:cNvPr id="22" name="Text 20"/>
+          <p:cNvSpPr/>
+          <p:nvPr/>
+        </p:nvSpPr>
+        <p:spPr>
+          <a:xfrm>
+            <a:off x="640080" y="5705856"/>
+            <a:ext cx="10927080" cy="548640"/>
+          </a:xfrm>
+          <a:prstGeom prst="rect">
+            <a:avLst/>
+          </a:prstGeom>
+          <a:noFill/>
+          <a:ln/>
+        </p:spPr>
+        <p:txBody>
+          <a:bodyPr wrap="square" lIns="0" tIns="0" rIns="0" bIns="0" rtlCol="0" anchor="ctr"/>
+          <a:lstStyle/>
+          <a:p>
+            <a:pPr algn="ctr" indent="0" marL="0">
+              <a:lnSpc>
+                <a:spcPct val="100000"/>
+              </a:lnSpc>
+              <a:buNone/>
+            </a:pPr>
+            <a:r>
+              <a:rPr lang="en-US" sz="1150" i="1" dirty="0">
+                <a:solidFill>
+                  <a:srgbClr val="5B6B73"/>
+                </a:solidFill>
+                <a:latin typeface="Calibri" pitchFamily="34" charset="0"/>
+                <a:ea typeface="Calibri" pitchFamily="34" charset="-122"/>
+                <a:cs typeface="Calibri" pitchFamily="34" charset="-120"/>
+              </a:rPr>
+              <a:t>Headline figures are steady-state annual — full yield against a fully-costed recurring dose; the upfront establishment investment is captured in the year-1 regime, not folded into the equilibrium ratio.</a:t>
+            </a:r>
+            <a:endParaRPr lang="en-US" sz="1150" dirty="0"/>
+          </a:p>
+        </p:txBody>
+      </p:sp>
+      <p:sp>
+        <p:nvSpPr>
+          <p:cNvPr id="23" name="Text 21"/>
+          <p:cNvSpPr/>
+          <p:nvPr/>
+        </p:nvSpPr>
+        <p:spPr>
+          <a:xfrm>
+            <a:off x="502920" y="6473952"/>
+            <a:ext cx="9601200" cy="274320"/>
+          </a:xfrm>
+          <a:prstGeom prst="rect">
+            <a:avLst/>
+          </a:prstGeom>
+          <a:noFill/>
+          <a:ln/>
+        </p:spPr>
+        <p:txBody>
+          <a:bodyPr wrap="square" lIns="0" tIns="0" rIns="0" bIns="0" rtlCol="0" anchor="ctr"/>
+          <a:lstStyle/>
+          <a:p>
+            <a:pPr algn="l" indent="0" marL="0">
+              <a:buNone/>
+            </a:pPr>
+            <a:r>
+              <a:rPr lang="en-US" sz="900" dirty="0">
+                <a:solidFill>
+                  <a:srgbClr val="5B6B73"/>
+                </a:solidFill>
+                <a:latin typeface="Calibri" pitchFamily="34" charset="0"/>
+                <a:ea typeface="Calibri" pitchFamily="34" charset="-122"/>
+                <a:cs typeface="Calibri" pitchFamily="34" charset="-120"/>
+              </a:rPr>
+              <a:t>Enhanced Rock Weathering — public &amp; private returns in SSA</a:t>
+            </a:r>
+            <a:pPr algn="l" indent="0" marL="0">
+              <a:buNone/>
+            </a:pPr>
+            <a:r>
+              <a:rPr lang="en-US" sz="900" dirty="0">
+                <a:solidFill>
+                  <a:srgbClr val="5B6B73"/>
+                </a:solidFill>
+                <a:latin typeface="Calibri" pitchFamily="34" charset="0"/>
+                <a:ea typeface="Calibri" pitchFamily="34" charset="-122"/>
+                <a:cs typeface="Calibri" pitchFamily="34" charset="-120"/>
+              </a:rPr>
+              <a:t>   ·   Gebrekidan &amp; Chamberlin (2026)</a:t>
+            </a:r>
+            <a:endParaRPr lang="en-US" sz="900" dirty="0"/>
+          </a:p>
+        </p:txBody>
+      </p:sp>
+      <p:sp>
+        <p:nvSpPr>
+          <p:cNvPr id="24" name="Text 22"/>
+          <p:cNvSpPr/>
+          <p:nvPr/>
+        </p:nvSpPr>
+        <p:spPr>
+          <a:xfrm>
+            <a:off x="11274552" y="6473952"/>
+            <a:ext cx="457200" cy="274320"/>
+          </a:xfrm>
+          <a:prstGeom prst="rect">
+            <a:avLst/>
+          </a:prstGeom>
+          <a:noFill/>
+          <a:ln/>
+        </p:spPr>
+        <p:txBody>
+          <a:bodyPr wrap="square" lIns="0" tIns="0" rIns="0" bIns="0" rtlCol="0" anchor="ctr"/>
+          <a:lstStyle/>
+          <a:p>
+            <a:pPr algn="r" indent="0" marL="0">
+              <a:buNone/>
+            </a:pPr>
+            <a:r>
+              <a:rPr lang="en-US" sz="900" dirty="0">
+                <a:solidFill>
+                  <a:srgbClr val="5B6B73"/>
+                </a:solidFill>
+                <a:latin typeface="Calibri" pitchFamily="34" charset="0"/>
+                <a:ea typeface="Calibri" pitchFamily="34" charset="-122"/>
+                <a:cs typeface="Calibri" pitchFamily="34" charset="-120"/>
+              </a:rPr>
+              <a:t>14</a:t>
+            </a:r>
+            <a:endParaRPr lang="en-US" sz="900" dirty="0"/>
+          </a:p>
+        </p:txBody>
+      </p:sp>
+    </p:spTree>
+  </p:cSld>
+  <p:clrMapOvr>
+    <a:masterClrMapping/>
+  </p:clrMapOvr>
+</p:sld>
+</file>
+
+<file path=ppt/slides/slide15.xml><?xml version="1.0" encoding="utf-8"?>
+<p:sld xmlns:a="http://schemas.openxmlformats.org/drawingml/2006/main" xmlns:r="http://schemas.openxmlformats.org/officeDocument/2006/relationships" xmlns:p="http://schemas.openxmlformats.org/presentationml/2006/main">
+  <p:cSld name="Slide 15">
+    <p:bg>
+      <p:bgPr>
+        <a:solidFill>
           <a:srgbClr val="14232B"/>
         </a:solidFill>
       </p:bgPr>
@@ -5798,766 +6797,6 @@
               <a:t>Envelopes and the combined-only band · durable carbon and marginal abatement cost · what shifts the public frontier · optimal rates · the robust core geography.</a:t>
             </a:r>
             <a:endParaRPr lang="en-US" sz="1600" dirty="0"/>
-          </a:p>
-        </p:txBody>
-      </p:sp>
-    </p:spTree>
-  </p:cSld>
-  <p:clrMapOvr>
-    <a:masterClrMapping/>
-  </p:clrMapOvr>
-</p:sld>
-</file>
-
-<file path=ppt/slides/slide15.xml><?xml version="1.0" encoding="utf-8"?>
-<p:sld xmlns:a="http://schemas.openxmlformats.org/drawingml/2006/main" xmlns:r="http://schemas.openxmlformats.org/officeDocument/2006/relationships" xmlns:p="http://schemas.openxmlformats.org/presentationml/2006/main">
-  <p:cSld name="Slide 15">
-    <p:bg>
-      <p:bgPr>
-        <a:solidFill>
-          <a:srgbClr val="FFFFFF"/>
-        </a:solidFill>
-      </p:bgPr>
-    </p:bg>
-    <p:spTree>
-      <p:nvGrpSpPr>
-        <p:cNvPr id="1" name=""/>
-        <p:cNvGrpSpPr/>
-        <p:nvPr/>
-      </p:nvGrpSpPr>
-      <p:grpSpPr>
-        <a:xfrm>
-          <a:off x="0" y="0"/>
-          <a:ext cx="0" cy="0"/>
-          <a:chOff x="0" y="0"/>
-          <a:chExt cx="0" cy="0"/>
-        </a:xfrm>
-      </p:grpSpPr>
-      <p:sp>
-        <p:nvSpPr>
-          <p:cNvPr id="2" name="Text 0"/>
-          <p:cNvSpPr/>
-          <p:nvPr/>
-        </p:nvSpPr>
-        <p:spPr>
-          <a:xfrm>
-            <a:off x="502920" y="310896"/>
-            <a:ext cx="10058400" cy="274320"/>
-          </a:xfrm>
-          <a:prstGeom prst="rect">
-            <a:avLst/>
-          </a:prstGeom>
-          <a:noFill/>
-          <a:ln/>
-        </p:spPr>
-        <p:txBody>
-          <a:bodyPr wrap="square" lIns="0" tIns="0" rIns="0" bIns="0" rtlCol="0" anchor="ctr"/>
-          <a:lstStyle/>
-          <a:p>
-            <a:pPr indent="0" marL="0">
-              <a:buNone/>
-            </a:pPr>
-            <a:r>
-              <a:rPr lang="en-US" sz="1200" b="1" spc="200" kern="0" dirty="0">
-                <a:solidFill>
-                  <a:srgbClr val="0F6E63"/>
-                </a:solidFill>
-                <a:latin typeface="Calibri" pitchFamily="34" charset="0"/>
-                <a:ea typeface="Calibri" pitchFamily="34" charset="-122"/>
-                <a:cs typeface="Calibri" pitchFamily="34" charset="-120"/>
-              </a:rPr>
-              <a:t>RESULTS · TYPOLOGY</a:t>
-            </a:r>
-            <a:endParaRPr lang="en-US" sz="1200" dirty="0"/>
-          </a:p>
-        </p:txBody>
-      </p:sp>
-      <p:sp>
-        <p:nvSpPr>
-          <p:cNvPr id="3" name="Text 1"/>
-          <p:cNvSpPr/>
-          <p:nvPr/>
-        </p:nvSpPr>
-        <p:spPr>
-          <a:xfrm>
-            <a:off x="502920" y="566928"/>
-            <a:ext cx="11155680" cy="685800"/>
-          </a:xfrm>
-          <a:prstGeom prst="rect">
-            <a:avLst/>
-          </a:prstGeom>
-          <a:noFill/>
-          <a:ln/>
-        </p:spPr>
-        <p:txBody>
-          <a:bodyPr wrap="square" lIns="0" tIns="0" rIns="0" bIns="0" rtlCol="0" anchor="ctr"/>
-          <a:lstStyle/>
-          <a:p>
-            <a:pPr indent="0" marL="0">
-              <a:buNone/>
-            </a:pPr>
-            <a:r>
-              <a:rPr lang="en-US" sz="2900" b="1" dirty="0">
-                <a:solidFill>
-                  <a:srgbClr val="14232B"/>
-                </a:solidFill>
-                <a:latin typeface="Cambria" pitchFamily="34" charset="0"/>
-                <a:ea typeface="Cambria" pitchFamily="34" charset="-122"/>
-                <a:cs typeface="Cambria" pitchFamily="34" charset="-120"/>
-              </a:rPr>
-              <a:t>A five-way pixel classification</a:t>
-            </a:r>
-            <a:endParaRPr lang="en-US" sz="2900" dirty="0"/>
-          </a:p>
-        </p:txBody>
-      </p:sp>
-      <p:pic>
-        <p:nvPicPr>
-          <p:cNvPr id="4" name="Image 0" descr="img/env_typology_targeted_eqnx.png">    </p:cNvPr>
-          <p:cNvPicPr>
-            <a:picLocks noChangeAspect="1"/>
-          </p:cNvPicPr>
-          <p:nvPr/>
-        </p:nvPicPr>
-        <p:blipFill>
-          <a:blip r:embed="rId1"/>
-          <a:srcRect l="0" r="0" t="0" b="0"/>
-          <a:stretch/>
-        </p:blipFill>
-        <p:spPr>
-          <a:xfrm>
-            <a:off x="6766560" y="1371600"/>
-            <a:ext cx="5029200" cy="4846320"/>
-          </a:xfrm>
-          <a:prstGeom prst="rect">
-            <a:avLst/>
-          </a:prstGeom>
-        </p:spPr>
-      </p:pic>
-      <p:sp>
-        <p:nvSpPr>
-          <p:cNvPr id="5" name="Shape 2"/>
-          <p:cNvSpPr/>
-          <p:nvPr/>
-        </p:nvSpPr>
-        <p:spPr>
-          <a:xfrm>
-            <a:off x="502920" y="1554480"/>
-            <a:ext cx="5943600" cy="841248"/>
-          </a:xfrm>
-          <a:prstGeom prst="roundRect">
-            <a:avLst>
-              <a:gd name="adj" fmla="val 8696"/>
-            </a:avLst>
-          </a:prstGeom>
-          <a:solidFill>
-            <a:srgbClr val="FFFFFF"/>
-          </a:solidFill>
-          <a:ln w="12700">
-            <a:solidFill>
-              <a:srgbClr val="D5DDDE"/>
-            </a:solidFill>
-            <a:prstDash val="solid"/>
-          </a:ln>
-          <a:effectLst>
-            <a:outerShdw sx="100000" sy="100000" kx="0" ky="0" algn="bl" rotWithShape="0" blurRad="88900" dist="38100" dir="5400000">
-              <a:srgbClr val="000000">
-                <a:alpha val="13000"/>
-              </a:srgbClr>
-            </a:outerShdw>
-          </a:effectLst>
-        </p:spPr>
-      </p:sp>
-      <p:sp>
-        <p:nvSpPr>
-          <p:cNvPr id="6" name="Shape 3"/>
-          <p:cNvSpPr/>
-          <p:nvPr/>
-        </p:nvSpPr>
-        <p:spPr>
-          <a:xfrm>
-            <a:off x="685800" y="1810512"/>
-            <a:ext cx="329184" cy="329184"/>
-          </a:xfrm>
-          <a:prstGeom prst="ellipse">
-            <a:avLst/>
-          </a:prstGeom>
-          <a:solidFill>
-            <a:srgbClr val="2E7D32"/>
-          </a:solidFill>
-          <a:ln/>
-        </p:spPr>
-      </p:sp>
-      <p:sp>
-        <p:nvSpPr>
-          <p:cNvPr id="7" name="Text 4"/>
-          <p:cNvSpPr/>
-          <p:nvPr/>
-        </p:nvSpPr>
-        <p:spPr>
-          <a:xfrm>
-            <a:off x="1188720" y="1554480"/>
-            <a:ext cx="5120640" cy="841248"/>
-          </a:xfrm>
-          <a:prstGeom prst="rect">
-            <a:avLst/>
-          </a:prstGeom>
-          <a:noFill/>
-          <a:ln/>
-        </p:spPr>
-        <p:txBody>
-          <a:bodyPr wrap="square" lIns="0" tIns="0" rIns="0" bIns="0" rtlCol="0" anchor="ctr"/>
-          <a:lstStyle/>
-          <a:p>
-            <a:pPr indent="0" marL="0">
-              <a:buNone/>
-            </a:pPr>
-            <a:r>
-              <a:rPr lang="en-US" sz="1450" b="1" dirty="0">
-                <a:solidFill>
-                  <a:srgbClr val="14232B"/>
-                </a:solidFill>
-                <a:latin typeface="Calibri" pitchFamily="34" charset="0"/>
-                <a:ea typeface="Calibri" pitchFamily="34" charset="-122"/>
-                <a:cs typeface="Calibri" pitchFamily="34" charset="-120"/>
-              </a:rPr>
-              <a:t>Private-sufficient   </a:t>
-            </a:r>
-            <a:pPr indent="0" marL="0">
-              <a:buNone/>
-            </a:pPr>
-            <a:r>
-              <a:rPr lang="en-US" sz="1250" i="1" dirty="0">
-                <a:solidFill>
-                  <a:srgbClr val="5B6B73"/>
-                </a:solidFill>
-                <a:latin typeface="Calibri" pitchFamily="34" charset="0"/>
-                <a:ea typeface="Calibri" pitchFamily="34" charset="-122"/>
-                <a:cs typeface="Calibri" pitchFamily="34" charset="-120"/>
-              </a:rPr>
-              <a:t>R_agro − C &gt; 0</a:t>
-            </a:r>
-            <a:endParaRPr lang="en-US" sz="1450" dirty="0"/>
-          </a:p>
-        </p:txBody>
-      </p:sp>
-      <p:sp>
-        <p:nvSpPr>
-          <p:cNvPr id="8" name="Shape 5"/>
-          <p:cNvSpPr/>
-          <p:nvPr/>
-        </p:nvSpPr>
-        <p:spPr>
-          <a:xfrm>
-            <a:off x="502920" y="2487168"/>
-            <a:ext cx="5943600" cy="841248"/>
-          </a:xfrm>
-          <a:prstGeom prst="roundRect">
-            <a:avLst>
-              <a:gd name="adj" fmla="val 8696"/>
-            </a:avLst>
-          </a:prstGeom>
-          <a:solidFill>
-            <a:srgbClr val="FFFFFF"/>
-          </a:solidFill>
-          <a:ln w="12700">
-            <a:solidFill>
-              <a:srgbClr val="D5DDDE"/>
-            </a:solidFill>
-            <a:prstDash val="solid"/>
-          </a:ln>
-          <a:effectLst>
-            <a:outerShdw sx="100000" sy="100000" kx="0" ky="0" algn="bl" rotWithShape="0" blurRad="88900" dist="38100" dir="5400000">
-              <a:srgbClr val="000000">
-                <a:alpha val="13000"/>
-              </a:srgbClr>
-            </a:outerShdw>
-          </a:effectLst>
-        </p:spPr>
-      </p:sp>
-      <p:sp>
-        <p:nvSpPr>
-          <p:cNvPr id="9" name="Shape 6"/>
-          <p:cNvSpPr/>
-          <p:nvPr/>
-        </p:nvSpPr>
-        <p:spPr>
-          <a:xfrm>
-            <a:off x="685800" y="2743200"/>
-            <a:ext cx="329184" cy="329184"/>
-          </a:xfrm>
-          <a:prstGeom prst="ellipse">
-            <a:avLst/>
-          </a:prstGeom>
-          <a:solidFill>
-            <a:srgbClr val="1C6BA0"/>
-          </a:solidFill>
-          <a:ln/>
-        </p:spPr>
-      </p:sp>
-      <p:sp>
-        <p:nvSpPr>
-          <p:cNvPr id="10" name="Text 7"/>
-          <p:cNvSpPr/>
-          <p:nvPr/>
-        </p:nvSpPr>
-        <p:spPr>
-          <a:xfrm>
-            <a:off x="1188720" y="2487168"/>
-            <a:ext cx="5120640" cy="841248"/>
-          </a:xfrm>
-          <a:prstGeom prst="rect">
-            <a:avLst/>
-          </a:prstGeom>
-          <a:noFill/>
-          <a:ln/>
-        </p:spPr>
-        <p:txBody>
-          <a:bodyPr wrap="square" lIns="0" tIns="0" rIns="0" bIns="0" rtlCol="0" anchor="ctr"/>
-          <a:lstStyle/>
-          <a:p>
-            <a:pPr indent="0" marL="0">
-              <a:buNone/>
-            </a:pPr>
-            <a:r>
-              <a:rPr lang="en-US" sz="1450" b="1" dirty="0">
-                <a:solidFill>
-                  <a:srgbClr val="14232B"/>
-                </a:solidFill>
-                <a:latin typeface="Calibri" pitchFamily="34" charset="0"/>
-                <a:ea typeface="Calibri" pitchFamily="34" charset="-122"/>
-                <a:cs typeface="Calibri" pitchFamily="34" charset="-120"/>
-              </a:rPr>
-              <a:t>Public-sufficient   </a:t>
-            </a:r>
-            <a:pPr indent="0" marL="0">
-              <a:buNone/>
-            </a:pPr>
-            <a:r>
-              <a:rPr lang="en-US" sz="1250" i="1" dirty="0">
-                <a:solidFill>
-                  <a:srgbClr val="5B6B73"/>
-                </a:solidFill>
-                <a:latin typeface="Calibri" pitchFamily="34" charset="0"/>
-                <a:ea typeface="Calibri" pitchFamily="34" charset="-122"/>
-                <a:cs typeface="Calibri" pitchFamily="34" charset="-120"/>
-              </a:rPr>
-              <a:t>R_CDR − C &gt; 0</a:t>
-            </a:r>
-            <a:endParaRPr lang="en-US" sz="1450" dirty="0"/>
-          </a:p>
-        </p:txBody>
-      </p:sp>
-      <p:sp>
-        <p:nvSpPr>
-          <p:cNvPr id="11" name="Shape 8"/>
-          <p:cNvSpPr/>
-          <p:nvPr/>
-        </p:nvSpPr>
-        <p:spPr>
-          <a:xfrm>
-            <a:off x="502920" y="3419856"/>
-            <a:ext cx="5943600" cy="841248"/>
-          </a:xfrm>
-          <a:prstGeom prst="roundRect">
-            <a:avLst>
-              <a:gd name="adj" fmla="val 8696"/>
-            </a:avLst>
-          </a:prstGeom>
-          <a:solidFill>
-            <a:srgbClr val="FFFFFF"/>
-          </a:solidFill>
-          <a:ln w="12700">
-            <a:solidFill>
-              <a:srgbClr val="D5DDDE"/>
-            </a:solidFill>
-            <a:prstDash val="solid"/>
-          </a:ln>
-          <a:effectLst>
-            <a:outerShdw sx="100000" sy="100000" kx="0" ky="0" algn="bl" rotWithShape="0" blurRad="88900" dist="38100" dir="5400000">
-              <a:srgbClr val="000000">
-                <a:alpha val="13000"/>
-              </a:srgbClr>
-            </a:outerShdw>
-          </a:effectLst>
-        </p:spPr>
-      </p:sp>
-      <p:sp>
-        <p:nvSpPr>
-          <p:cNvPr id="12" name="Shape 9"/>
-          <p:cNvSpPr/>
-          <p:nvPr/>
-        </p:nvSpPr>
-        <p:spPr>
-          <a:xfrm>
-            <a:off x="685800" y="3675888"/>
-            <a:ext cx="329184" cy="329184"/>
-          </a:xfrm>
-          <a:prstGeom prst="ellipse">
-            <a:avLst/>
-          </a:prstGeom>
-          <a:solidFill>
-            <a:srgbClr val="0F6E63"/>
-          </a:solidFill>
-          <a:ln/>
-        </p:spPr>
-      </p:sp>
-      <p:sp>
-        <p:nvSpPr>
-          <p:cNvPr id="13" name="Text 10"/>
-          <p:cNvSpPr/>
-          <p:nvPr/>
-        </p:nvSpPr>
-        <p:spPr>
-          <a:xfrm>
-            <a:off x="1188720" y="3419856"/>
-            <a:ext cx="5120640" cy="841248"/>
-          </a:xfrm>
-          <a:prstGeom prst="rect">
-            <a:avLst/>
-          </a:prstGeom>
-          <a:noFill/>
-          <a:ln/>
-        </p:spPr>
-        <p:txBody>
-          <a:bodyPr wrap="square" lIns="0" tIns="0" rIns="0" bIns="0" rtlCol="0" anchor="ctr"/>
-          <a:lstStyle/>
-          <a:p>
-            <a:pPr indent="0" marL="0">
-              <a:buNone/>
-            </a:pPr>
-            <a:r>
-              <a:rPr lang="en-US" sz="1450" b="1" dirty="0">
-                <a:solidFill>
-                  <a:srgbClr val="14232B"/>
-                </a:solidFill>
-                <a:latin typeface="Calibri" pitchFamily="34" charset="0"/>
-                <a:ea typeface="Calibri" pitchFamily="34" charset="-122"/>
-                <a:cs typeface="Calibri" pitchFamily="34" charset="-120"/>
-              </a:rPr>
-              <a:t>Intersection   </a:t>
-            </a:r>
-            <a:pPr indent="0" marL="0">
-              <a:buNone/>
-            </a:pPr>
-            <a:r>
-              <a:rPr lang="en-US" sz="1250" i="1" dirty="0">
-                <a:solidFill>
-                  <a:srgbClr val="5B6B73"/>
-                </a:solidFill>
-                <a:latin typeface="Calibri" pitchFamily="34" charset="0"/>
-                <a:ea typeface="Calibri" pitchFamily="34" charset="-122"/>
-                <a:cs typeface="Calibri" pitchFamily="34" charset="-120"/>
-              </a:rPr>
-              <a:t>both hold at the same pixel</a:t>
-            </a:r>
-            <a:endParaRPr lang="en-US" sz="1450" dirty="0"/>
-          </a:p>
-        </p:txBody>
-      </p:sp>
-      <p:sp>
-        <p:nvSpPr>
-          <p:cNvPr id="14" name="Shape 11"/>
-          <p:cNvSpPr/>
-          <p:nvPr/>
-        </p:nvSpPr>
-        <p:spPr>
-          <a:xfrm>
-            <a:off x="502920" y="4352544"/>
-            <a:ext cx="5943600" cy="841248"/>
-          </a:xfrm>
-          <a:prstGeom prst="roundRect">
-            <a:avLst>
-              <a:gd name="adj" fmla="val 8696"/>
-            </a:avLst>
-          </a:prstGeom>
-          <a:solidFill>
-            <a:srgbClr val="FFFFFF"/>
-          </a:solidFill>
-          <a:ln w="12700">
-            <a:solidFill>
-              <a:srgbClr val="D5DDDE"/>
-            </a:solidFill>
-            <a:prstDash val="solid"/>
-          </a:ln>
-          <a:effectLst>
-            <a:outerShdw sx="100000" sy="100000" kx="0" ky="0" algn="bl" rotWithShape="0" blurRad="88900" dist="38100" dir="5400000">
-              <a:srgbClr val="000000">
-                <a:alpha val="13000"/>
-              </a:srgbClr>
-            </a:outerShdw>
-          </a:effectLst>
-        </p:spPr>
-      </p:sp>
-      <p:sp>
-        <p:nvSpPr>
-          <p:cNvPr id="15" name="Shape 12"/>
-          <p:cNvSpPr/>
-          <p:nvPr/>
-        </p:nvSpPr>
-        <p:spPr>
-          <a:xfrm>
-            <a:off x="685800" y="4608576"/>
-            <a:ext cx="329184" cy="329184"/>
-          </a:xfrm>
-          <a:prstGeom prst="ellipse">
-            <a:avLst/>
-          </a:prstGeom>
-          <a:solidFill>
-            <a:srgbClr val="E8843C"/>
-          </a:solidFill>
-          <a:ln/>
-        </p:spPr>
-      </p:sp>
-      <p:sp>
-        <p:nvSpPr>
-          <p:cNvPr id="16" name="Text 13"/>
-          <p:cNvSpPr/>
-          <p:nvPr/>
-        </p:nvSpPr>
-        <p:spPr>
-          <a:xfrm>
-            <a:off x="1188720" y="4352544"/>
-            <a:ext cx="5120640" cy="841248"/>
-          </a:xfrm>
-          <a:prstGeom prst="rect">
-            <a:avLst/>
-          </a:prstGeom>
-          <a:noFill/>
-          <a:ln/>
-        </p:spPr>
-        <p:txBody>
-          <a:bodyPr wrap="square" lIns="0" tIns="0" rIns="0" bIns="0" rtlCol="0" anchor="ctr"/>
-          <a:lstStyle/>
-          <a:p>
-            <a:pPr indent="0" marL="0">
-              <a:buNone/>
-            </a:pPr>
-            <a:r>
-              <a:rPr lang="en-US" sz="1450" b="1" dirty="0">
-                <a:solidFill>
-                  <a:srgbClr val="14232B"/>
-                </a:solidFill>
-                <a:latin typeface="Calibri" pitchFamily="34" charset="0"/>
-                <a:ea typeface="Calibri" pitchFamily="34" charset="-122"/>
-                <a:cs typeface="Calibri" pitchFamily="34" charset="-120"/>
-              </a:rPr>
-              <a:t>Combined-only   </a:t>
-            </a:r>
-            <a:pPr indent="0" marL="0">
-              <a:buNone/>
-            </a:pPr>
-            <a:r>
-              <a:rPr lang="en-US" sz="1250" i="1" dirty="0">
-                <a:solidFill>
-                  <a:srgbClr val="5B6B73"/>
-                </a:solidFill>
-                <a:latin typeface="Calibri" pitchFamily="34" charset="0"/>
-                <a:ea typeface="Calibri" pitchFamily="34" charset="-122"/>
-                <a:cs typeface="Calibri" pitchFamily="34" charset="-120"/>
-              </a:rPr>
-              <a:t>neither alone, but GM &gt; 0</a:t>
-            </a:r>
-            <a:endParaRPr lang="en-US" sz="1450" dirty="0"/>
-          </a:p>
-        </p:txBody>
-      </p:sp>
-      <p:sp>
-        <p:nvSpPr>
-          <p:cNvPr id="17" name="Shape 14"/>
-          <p:cNvSpPr/>
-          <p:nvPr/>
-        </p:nvSpPr>
-        <p:spPr>
-          <a:xfrm>
-            <a:off x="502920" y="5285232"/>
-            <a:ext cx="5943600" cy="841248"/>
-          </a:xfrm>
-          <a:prstGeom prst="roundRect">
-            <a:avLst>
-              <a:gd name="adj" fmla="val 8696"/>
-            </a:avLst>
-          </a:prstGeom>
-          <a:solidFill>
-            <a:srgbClr val="FFFFFF"/>
-          </a:solidFill>
-          <a:ln w="12700">
-            <a:solidFill>
-              <a:srgbClr val="D5DDDE"/>
-            </a:solidFill>
-            <a:prstDash val="solid"/>
-          </a:ln>
-          <a:effectLst>
-            <a:outerShdw sx="100000" sy="100000" kx="0" ky="0" algn="bl" rotWithShape="0" blurRad="88900" dist="38100" dir="5400000">
-              <a:srgbClr val="000000">
-                <a:alpha val="13000"/>
-              </a:srgbClr>
-            </a:outerShdw>
-          </a:effectLst>
-        </p:spPr>
-      </p:sp>
-      <p:sp>
-        <p:nvSpPr>
-          <p:cNvPr id="18" name="Shape 15"/>
-          <p:cNvSpPr/>
-          <p:nvPr/>
-        </p:nvSpPr>
-        <p:spPr>
-          <a:xfrm>
-            <a:off x="685800" y="5541264"/>
-            <a:ext cx="329184" cy="329184"/>
-          </a:xfrm>
-          <a:prstGeom prst="ellipse">
-            <a:avLst/>
-          </a:prstGeom>
-          <a:solidFill>
-            <a:srgbClr val="8794A0"/>
-          </a:solidFill>
-          <a:ln/>
-        </p:spPr>
-      </p:sp>
-      <p:sp>
-        <p:nvSpPr>
-          <p:cNvPr id="19" name="Text 16"/>
-          <p:cNvSpPr/>
-          <p:nvPr/>
-        </p:nvSpPr>
-        <p:spPr>
-          <a:xfrm>
-            <a:off x="1188720" y="5285232"/>
-            <a:ext cx="5120640" cy="841248"/>
-          </a:xfrm>
-          <a:prstGeom prst="rect">
-            <a:avLst/>
-          </a:prstGeom>
-          <a:noFill/>
-          <a:ln/>
-        </p:spPr>
-        <p:txBody>
-          <a:bodyPr wrap="square" lIns="0" tIns="0" rIns="0" bIns="0" rtlCol="0" anchor="ctr"/>
-          <a:lstStyle/>
-          <a:p>
-            <a:pPr indent="0" marL="0">
-              <a:buNone/>
-            </a:pPr>
-            <a:r>
-              <a:rPr lang="en-US" sz="1450" b="1" dirty="0">
-                <a:solidFill>
-                  <a:srgbClr val="14232B"/>
-                </a:solidFill>
-                <a:latin typeface="Calibri" pitchFamily="34" charset="0"/>
-                <a:ea typeface="Calibri" pitchFamily="34" charset="-122"/>
-                <a:cs typeface="Calibri" pitchFamily="34" charset="-120"/>
-              </a:rPr>
-              <a:t>Neither   </a:t>
-            </a:r>
-            <a:pPr indent="0" marL="0">
-              <a:buNone/>
-            </a:pPr>
-            <a:r>
-              <a:rPr lang="en-US" sz="1250" i="1" dirty="0">
-                <a:solidFill>
-                  <a:srgbClr val="5B6B73"/>
-                </a:solidFill>
-                <a:latin typeface="Calibri" pitchFamily="34" charset="0"/>
-                <a:ea typeface="Calibri" pitchFamily="34" charset="-122"/>
-                <a:cs typeface="Calibri" pitchFamily="34" charset="-120"/>
-              </a:rPr>
-              <a:t>GM ≤ 0 — not deployable</a:t>
-            </a:r>
-            <a:endParaRPr lang="en-US" sz="1450" dirty="0"/>
-          </a:p>
-        </p:txBody>
-      </p:sp>
-      <p:sp>
-        <p:nvSpPr>
-          <p:cNvPr id="20" name="Text 17"/>
-          <p:cNvSpPr/>
-          <p:nvPr/>
-        </p:nvSpPr>
-        <p:spPr>
-          <a:xfrm>
-            <a:off x="502920" y="6473952"/>
-            <a:ext cx="9601200" cy="274320"/>
-          </a:xfrm>
-          <a:prstGeom prst="rect">
-            <a:avLst/>
-          </a:prstGeom>
-          <a:noFill/>
-          <a:ln/>
-        </p:spPr>
-        <p:txBody>
-          <a:bodyPr wrap="square" lIns="0" tIns="0" rIns="0" bIns="0" rtlCol="0" anchor="ctr"/>
-          <a:lstStyle/>
-          <a:p>
-            <a:pPr algn="l" indent="0" marL="0">
-              <a:buNone/>
-            </a:pPr>
-            <a:r>
-              <a:rPr lang="en-US" sz="900" dirty="0">
-                <a:solidFill>
-                  <a:srgbClr val="5B6B73"/>
-                </a:solidFill>
-                <a:latin typeface="Calibri" pitchFamily="34" charset="0"/>
-                <a:ea typeface="Calibri" pitchFamily="34" charset="-122"/>
-                <a:cs typeface="Calibri" pitchFamily="34" charset="-120"/>
-              </a:rPr>
-              <a:t>Enhanced Rock Weathering — public &amp; private returns in SSA</a:t>
-            </a:r>
-            <a:pPr algn="l" indent="0" marL="0">
-              <a:buNone/>
-            </a:pPr>
-            <a:r>
-              <a:rPr lang="en-US" sz="900" dirty="0">
-                <a:solidFill>
-                  <a:srgbClr val="5B6B73"/>
-                </a:solidFill>
-                <a:latin typeface="Calibri" pitchFamily="34" charset="0"/>
-                <a:ea typeface="Calibri" pitchFamily="34" charset="-122"/>
-                <a:cs typeface="Calibri" pitchFamily="34" charset="-120"/>
-              </a:rPr>
-              <a:t>   ·   Gebrekidan &amp; Chamberlin (2026)</a:t>
-            </a:r>
-            <a:endParaRPr lang="en-US" sz="900" dirty="0"/>
-          </a:p>
-        </p:txBody>
-      </p:sp>
-      <p:sp>
-        <p:nvSpPr>
-          <p:cNvPr id="21" name="Text 18"/>
-          <p:cNvSpPr/>
-          <p:nvPr/>
-        </p:nvSpPr>
-        <p:spPr>
-          <a:xfrm>
-            <a:off x="11274552" y="6473952"/>
-            <a:ext cx="457200" cy="274320"/>
-          </a:xfrm>
-          <a:prstGeom prst="rect">
-            <a:avLst/>
-          </a:prstGeom>
-          <a:noFill/>
-          <a:ln/>
-        </p:spPr>
-        <p:txBody>
-          <a:bodyPr wrap="square" lIns="0" tIns="0" rIns="0" bIns="0" rtlCol="0" anchor="ctr"/>
-          <a:lstStyle/>
-          <a:p>
-            <a:pPr algn="r" indent="0" marL="0">
-              <a:buNone/>
-            </a:pPr>
-            <a:r>
-              <a:rPr lang="en-US" sz="900" dirty="0">
-                <a:solidFill>
-                  <a:srgbClr val="5B6B73"/>
-                </a:solidFill>
-                <a:latin typeface="Calibri" pitchFamily="34" charset="0"/>
-                <a:ea typeface="Calibri" pitchFamily="34" charset="-122"/>
-                <a:cs typeface="Calibri" pitchFamily="34" charset="-120"/>
-              </a:rPr>
-              <a:t>15</a:t>
-            </a:r>
-            <a:endParaRPr lang="en-US" sz="900" dirty="0"/>
           </a:p>
         </p:txBody>
       </p:sp>
@@ -6620,13 +6859,13 @@
             <a:r>
               <a:rPr lang="en-US" sz="1200" b="1" spc="200" kern="0" dirty="0">
                 <a:solidFill>
-                  <a:srgbClr val="2E7D32"/>
-                </a:solidFill>
-                <a:latin typeface="Calibri" pitchFamily="34" charset="0"/>
-                <a:ea typeface="Calibri" pitchFamily="34" charset="-122"/>
-                <a:cs typeface="Calibri" pitchFamily="34" charset="-120"/>
-              </a:rPr>
-              <a:t>RESULTS · PRIVATE ENVELOPE</a:t>
+                  <a:srgbClr val="0F6E63"/>
+                </a:solidFill>
+                <a:latin typeface="Calibri" pitchFamily="34" charset="0"/>
+                <a:ea typeface="Calibri" pitchFamily="34" charset="-122"/>
+                <a:cs typeface="Calibri" pitchFamily="34" charset="-120"/>
+              </a:rPr>
+              <a:t>RESULTS · TYPOLOGY</a:t>
             </a:r>
             <a:endParaRPr lang="en-US" sz="1200" dirty="0"/>
           </a:p>
@@ -6665,7 +6904,7 @@
                 <a:ea typeface="Cambria" pitchFamily="34" charset="-122"/>
                 <a:cs typeface="Cambria" pitchFamily="34" charset="-120"/>
               </a:rPr>
-              <a:t>Where yield alone pays</a:t>
+              <a:t>A five-way pixel classification</a:t>
             </a:r>
             <a:endParaRPr lang="en-US" sz="2900" dirty="0"/>
           </a:p>
@@ -6673,7 +6912,7 @@
       </p:sp>
       <p:pic>
         <p:nvPicPr>
-          <p:cNvPr id="4" name="Image 0" descr="img/env_private_targeted_eqnx.png">    </p:cNvPr>
+          <p:cNvPr id="4" name="Image 0" descr="img/env_typology_targeted_eqnx.png">    </p:cNvPr>
           <p:cNvPicPr>
             <a:picLocks noChangeAspect="1"/>
           </p:cNvPicPr>
@@ -6696,61 +6935,22 @@
       </p:pic>
       <p:sp>
         <p:nvSpPr>
-          <p:cNvPr id="5" name="Text 2"/>
-          <p:cNvSpPr/>
-          <p:nvPr/>
-        </p:nvSpPr>
-        <p:spPr>
-          <a:xfrm>
-            <a:off x="502920" y="1508760"/>
-            <a:ext cx="5852160" cy="731520"/>
-          </a:xfrm>
-          <a:prstGeom prst="rect">
-            <a:avLst/>
-          </a:prstGeom>
-          <a:noFill/>
-          <a:ln/>
-        </p:spPr>
-        <p:txBody>
-          <a:bodyPr wrap="square" lIns="0" tIns="0" rIns="0" bIns="0" rtlCol="0" anchor="ctr"/>
-          <a:lstStyle/>
-          <a:p>
-            <a:pPr indent="0" marL="0">
-              <a:buNone/>
-            </a:pPr>
-            <a:r>
-              <a:rPr lang="en-US" sz="1500" dirty="0">
-                <a:solidFill>
-                  <a:srgbClr val="14232B"/>
-                </a:solidFill>
-                <a:latin typeface="Calibri" pitchFamily="34" charset="0"/>
-                <a:ea typeface="Calibri" pitchFamily="34" charset="-122"/>
-                <a:cs typeface="Calibri" pitchFamily="34" charset="-120"/>
-              </a:rPr>
-              <a:t>Land where the agronomic return covers the full delivered cost with no carbon credit at all.</a:t>
-            </a:r>
-            <a:endParaRPr lang="en-US" sz="1500" dirty="0"/>
-          </a:p>
-        </p:txBody>
-      </p:sp>
-      <p:sp>
-        <p:nvSpPr>
-          <p:cNvPr id="6" name="Shape 3"/>
-          <p:cNvSpPr/>
-          <p:nvPr/>
-        </p:nvSpPr>
-        <p:spPr>
-          <a:xfrm>
-            <a:off x="502920" y="2377440"/>
-            <a:ext cx="2788920" cy="1417320"/>
+          <p:cNvPr id="5" name="Shape 2"/>
+          <p:cNvSpPr/>
+          <p:nvPr/>
+        </p:nvSpPr>
+        <p:spPr>
+          <a:xfrm>
+            <a:off x="502920" y="1554480"/>
+            <a:ext cx="5943600" cy="841248"/>
           </a:xfrm>
           <a:prstGeom prst="roundRect">
             <a:avLst>
-              <a:gd name="adj" fmla="val 5161"/>
+              <a:gd name="adj" fmla="val 8696"/>
             </a:avLst>
           </a:prstGeom>
           <a:solidFill>
-            <a:srgbClr val="F1F7F1"/>
+            <a:srgbClr val="FFFFFF"/>
           </a:solidFill>
           <a:ln w="12700">
             <a:solidFill>
@@ -6769,14 +6969,34 @@
       </p:sp>
       <p:sp>
         <p:nvSpPr>
+          <p:cNvPr id="6" name="Shape 3"/>
+          <p:cNvSpPr/>
+          <p:nvPr/>
+        </p:nvSpPr>
+        <p:spPr>
+          <a:xfrm>
+            <a:off x="685800" y="1810512"/>
+            <a:ext cx="329184" cy="329184"/>
+          </a:xfrm>
+          <a:prstGeom prst="ellipse">
+            <a:avLst/>
+          </a:prstGeom>
+          <a:solidFill>
+            <a:srgbClr val="2E7D32"/>
+          </a:solidFill>
+          <a:ln/>
+        </p:spPr>
+      </p:sp>
+      <p:sp>
+        <p:nvSpPr>
           <p:cNvPr id="7" name="Text 4"/>
           <p:cNvSpPr/>
           <p:nvPr/>
         </p:nvSpPr>
         <p:spPr>
           <a:xfrm>
-            <a:off x="594360" y="2560320"/>
-            <a:ext cx="2606040" cy="640080"/>
+            <a:off x="1188720" y="1554480"/>
+            <a:ext cx="5120640" cy="841248"/>
           </a:xfrm>
           <a:prstGeom prst="rect">
             <a:avLst/>
@@ -6788,50 +7008,25 @@
           <a:bodyPr wrap="square" lIns="0" tIns="0" rIns="0" bIns="0" rtlCol="0" anchor="ctr"/>
           <a:lstStyle/>
           <a:p>
-            <a:pPr algn="ctr" indent="0" marL="0">
-              <a:buNone/>
-            </a:pPr>
-            <a:r>
-              <a:rPr lang="en-US" sz="3300" b="1" dirty="0">
-                <a:solidFill>
-                  <a:srgbClr val="2E7D32"/>
-                </a:solidFill>
-                <a:latin typeface="Cambria" pitchFamily="34" charset="0"/>
-                <a:ea typeface="Cambria" pitchFamily="34" charset="-122"/>
-                <a:cs typeface="Cambria" pitchFamily="34" charset="-120"/>
-              </a:rPr>
-              <a:t>4.3 Mha</a:t>
-            </a:r>
-            <a:endParaRPr lang="en-US" sz="3300" dirty="0"/>
-          </a:p>
-        </p:txBody>
-      </p:sp>
-      <p:sp>
-        <p:nvSpPr>
-          <p:cNvPr id="8" name="Text 5"/>
-          <p:cNvSpPr/>
-          <p:nvPr/>
-        </p:nvSpPr>
-        <p:spPr>
-          <a:xfrm>
-            <a:off x="594360" y="3246120"/>
-            <a:ext cx="2606040" cy="457200"/>
-          </a:xfrm>
-          <a:prstGeom prst="rect">
-            <a:avLst/>
-          </a:prstGeom>
-          <a:noFill/>
-          <a:ln/>
-        </p:spPr>
-        <p:txBody>
-          <a:bodyPr wrap="square" lIns="0" tIns="0" rIns="0" bIns="0" rtlCol="0" anchor="ctr"/>
-          <a:lstStyle/>
-          <a:p>
-            <a:pPr algn="ctr" indent="0" marL="0">
-              <a:buNone/>
-            </a:pPr>
-            <a:r>
-              <a:rPr lang="en-US" sz="1200" dirty="0">
+            <a:pPr indent="0" marL="0">
+              <a:buNone/>
+            </a:pPr>
+            <a:r>
+              <a:rPr lang="en-US" sz="1450" b="1" dirty="0">
+                <a:solidFill>
+                  <a:srgbClr val="14232B"/>
+                </a:solidFill>
+                <a:latin typeface="Calibri" pitchFamily="34" charset="0"/>
+                <a:ea typeface="Calibri" pitchFamily="34" charset="-122"/>
+                <a:cs typeface="Calibri" pitchFamily="34" charset="-120"/>
+              </a:rPr>
+              <a:t>Private-sufficient   </a:t>
+            </a:r>
+            <a:pPr indent="0" marL="0">
+              <a:buNone/>
+            </a:pPr>
+            <a:r>
+              <a:rPr lang="en-US" sz="1250" i="1" dirty="0">
                 <a:solidFill>
                   <a:srgbClr val="5B6B73"/>
                 </a:solidFill>
@@ -6839,30 +7034,30 @@
                 <a:ea typeface="Calibri" pitchFamily="34" charset="-122"/>
                 <a:cs typeface="Calibri" pitchFamily="34" charset="-120"/>
               </a:rPr>
-              <a:t>private-sufficient area</a:t>
-            </a:r>
-            <a:endParaRPr lang="en-US" sz="1200" dirty="0"/>
-          </a:p>
-        </p:txBody>
-      </p:sp>
-      <p:sp>
-        <p:nvSpPr>
-          <p:cNvPr id="9" name="Shape 6"/>
-          <p:cNvSpPr/>
-          <p:nvPr/>
-        </p:nvSpPr>
-        <p:spPr>
-          <a:xfrm>
-            <a:off x="3520440" y="2377440"/>
-            <a:ext cx="2788920" cy="1417320"/>
+              <a:t>R_agro − C &gt; 0</a:t>
+            </a:r>
+            <a:endParaRPr lang="en-US" sz="1450" dirty="0"/>
+          </a:p>
+        </p:txBody>
+      </p:sp>
+      <p:sp>
+        <p:nvSpPr>
+          <p:cNvPr id="8" name="Shape 5"/>
+          <p:cNvSpPr/>
+          <p:nvPr/>
+        </p:nvSpPr>
+        <p:spPr>
+          <a:xfrm>
+            <a:off x="502920" y="2487168"/>
+            <a:ext cx="5943600" cy="841248"/>
           </a:xfrm>
           <a:prstGeom prst="roundRect">
             <a:avLst>
-              <a:gd name="adj" fmla="val 5161"/>
+              <a:gd name="adj" fmla="val 8696"/>
             </a:avLst>
           </a:prstGeom>
           <a:solidFill>
-            <a:srgbClr val="F1F7F1"/>
+            <a:srgbClr val="FFFFFF"/>
           </a:solidFill>
           <a:ln w="12700">
             <a:solidFill>
@@ -6881,14 +7076,34 @@
       </p:sp>
       <p:sp>
         <p:nvSpPr>
+          <p:cNvPr id="9" name="Shape 6"/>
+          <p:cNvSpPr/>
+          <p:nvPr/>
+        </p:nvSpPr>
+        <p:spPr>
+          <a:xfrm>
+            <a:off x="685800" y="2743200"/>
+            <a:ext cx="329184" cy="329184"/>
+          </a:xfrm>
+          <a:prstGeom prst="ellipse">
+            <a:avLst/>
+          </a:prstGeom>
+          <a:solidFill>
+            <a:srgbClr val="1C6BA0"/>
+          </a:solidFill>
+          <a:ln/>
+        </p:spPr>
+      </p:sp>
+      <p:sp>
+        <p:nvSpPr>
           <p:cNvPr id="10" name="Text 7"/>
           <p:cNvSpPr/>
           <p:nvPr/>
         </p:nvSpPr>
         <p:spPr>
           <a:xfrm>
-            <a:off x="3611880" y="2560320"/>
-            <a:ext cx="2606040" cy="640080"/>
+            <a:off x="1188720" y="2487168"/>
+            <a:ext cx="5120640" cy="841248"/>
           </a:xfrm>
           <a:prstGeom prst="rect">
             <a:avLst/>
@@ -6900,34 +7115,102 @@
           <a:bodyPr wrap="square" lIns="0" tIns="0" rIns="0" bIns="0" rtlCol="0" anchor="ctr"/>
           <a:lstStyle/>
           <a:p>
-            <a:pPr algn="ctr" indent="0" marL="0">
-              <a:buNone/>
-            </a:pPr>
-            <a:r>
-              <a:rPr lang="en-US" sz="3300" b="1" dirty="0">
-                <a:solidFill>
-                  <a:srgbClr val="2E7D32"/>
-                </a:solidFill>
-                <a:latin typeface="Cambria" pitchFamily="34" charset="0"/>
-                <a:ea typeface="Cambria" pitchFamily="34" charset="-122"/>
-                <a:cs typeface="Cambria" pitchFamily="34" charset="-120"/>
-              </a:rPr>
-              <a:t>$3.5 B</a:t>
-            </a:r>
-            <a:endParaRPr lang="en-US" sz="3300" dirty="0"/>
-          </a:p>
-        </p:txBody>
-      </p:sp>
-      <p:sp>
-        <p:nvSpPr>
-          <p:cNvPr id="11" name="Text 8"/>
-          <p:cNvSpPr/>
-          <p:nvPr/>
-        </p:nvSpPr>
-        <p:spPr>
-          <a:xfrm>
-            <a:off x="3611880" y="3246120"/>
-            <a:ext cx="2606040" cy="457200"/>
+            <a:pPr indent="0" marL="0">
+              <a:buNone/>
+            </a:pPr>
+            <a:r>
+              <a:rPr lang="en-US" sz="1450" b="1" dirty="0">
+                <a:solidFill>
+                  <a:srgbClr val="14232B"/>
+                </a:solidFill>
+                <a:latin typeface="Calibri" pitchFamily="34" charset="0"/>
+                <a:ea typeface="Calibri" pitchFamily="34" charset="-122"/>
+                <a:cs typeface="Calibri" pitchFamily="34" charset="-120"/>
+              </a:rPr>
+              <a:t>Public-sufficient   </a:t>
+            </a:r>
+            <a:pPr indent="0" marL="0">
+              <a:buNone/>
+            </a:pPr>
+            <a:r>
+              <a:rPr lang="en-US" sz="1250" i="1" dirty="0">
+                <a:solidFill>
+                  <a:srgbClr val="5B6B73"/>
+                </a:solidFill>
+                <a:latin typeface="Calibri" pitchFamily="34" charset="0"/>
+                <a:ea typeface="Calibri" pitchFamily="34" charset="-122"/>
+                <a:cs typeface="Calibri" pitchFamily="34" charset="-120"/>
+              </a:rPr>
+              <a:t>R_CDR − C &gt; 0</a:t>
+            </a:r>
+            <a:endParaRPr lang="en-US" sz="1450" dirty="0"/>
+          </a:p>
+        </p:txBody>
+      </p:sp>
+      <p:sp>
+        <p:nvSpPr>
+          <p:cNvPr id="11" name="Shape 8"/>
+          <p:cNvSpPr/>
+          <p:nvPr/>
+        </p:nvSpPr>
+        <p:spPr>
+          <a:xfrm>
+            <a:off x="502920" y="3419856"/>
+            <a:ext cx="5943600" cy="841248"/>
+          </a:xfrm>
+          <a:prstGeom prst="roundRect">
+            <a:avLst>
+              <a:gd name="adj" fmla="val 8696"/>
+            </a:avLst>
+          </a:prstGeom>
+          <a:solidFill>
+            <a:srgbClr val="FFFFFF"/>
+          </a:solidFill>
+          <a:ln w="12700">
+            <a:solidFill>
+              <a:srgbClr val="D5DDDE"/>
+            </a:solidFill>
+            <a:prstDash val="solid"/>
+          </a:ln>
+          <a:effectLst>
+            <a:outerShdw sx="100000" sy="100000" kx="0" ky="0" algn="bl" rotWithShape="0" blurRad="88900" dist="38100" dir="5400000">
+              <a:srgbClr val="000000">
+                <a:alpha val="13000"/>
+              </a:srgbClr>
+            </a:outerShdw>
+          </a:effectLst>
+        </p:spPr>
+      </p:sp>
+      <p:sp>
+        <p:nvSpPr>
+          <p:cNvPr id="12" name="Shape 9"/>
+          <p:cNvSpPr/>
+          <p:nvPr/>
+        </p:nvSpPr>
+        <p:spPr>
+          <a:xfrm>
+            <a:off x="685800" y="3675888"/>
+            <a:ext cx="329184" cy="329184"/>
+          </a:xfrm>
+          <a:prstGeom prst="ellipse">
+            <a:avLst/>
+          </a:prstGeom>
+          <a:solidFill>
+            <a:srgbClr val="0F6E63"/>
+          </a:solidFill>
+          <a:ln/>
+        </p:spPr>
+      </p:sp>
+      <p:sp>
+        <p:nvSpPr>
+          <p:cNvPr id="13" name="Text 10"/>
+          <p:cNvSpPr/>
+          <p:nvPr/>
+        </p:nvSpPr>
+        <p:spPr>
+          <a:xfrm>
+            <a:off x="1188720" y="3419856"/>
+            <a:ext cx="5120640" cy="841248"/>
           </a:xfrm>
           <a:prstGeom prst="rect">
             <a:avLst/>
@@ -6939,11 +7222,25 @@
           <a:bodyPr wrap="square" lIns="0" tIns="0" rIns="0" bIns="0" rtlCol="0" anchor="ctr"/>
           <a:lstStyle/>
           <a:p>
-            <a:pPr algn="ctr" indent="0" marL="0">
-              <a:buNone/>
-            </a:pPr>
-            <a:r>
-              <a:rPr lang="en-US" sz="1200" dirty="0">
+            <a:pPr indent="0" marL="0">
+              <a:buNone/>
+            </a:pPr>
+            <a:r>
+              <a:rPr lang="en-US" sz="1450" b="1" dirty="0">
+                <a:solidFill>
+                  <a:srgbClr val="14232B"/>
+                </a:solidFill>
+                <a:latin typeface="Calibri" pitchFamily="34" charset="0"/>
+                <a:ea typeface="Calibri" pitchFamily="34" charset="-122"/>
+                <a:cs typeface="Calibri" pitchFamily="34" charset="-120"/>
+              </a:rPr>
+              <a:t>Intersection   </a:t>
+            </a:r>
+            <a:pPr indent="0" marL="0">
+              <a:buNone/>
+            </a:pPr>
+            <a:r>
+              <a:rPr lang="en-US" sz="1250" i="1" dirty="0">
                 <a:solidFill>
                   <a:srgbClr val="5B6B73"/>
                 </a:solidFill>
@@ -6951,41 +7248,92 @@
                 <a:ea typeface="Calibri" pitchFamily="34" charset="-122"/>
                 <a:cs typeface="Calibri" pitchFamily="34" charset="-120"/>
               </a:rPr>
-              <a:t>private return</a:t>
-            </a:r>
-            <a:endParaRPr lang="en-US" sz="1200" dirty="0"/>
-          </a:p>
-        </p:txBody>
-      </p:sp>
-      <p:sp>
-        <p:nvSpPr>
-          <p:cNvPr id="12" name="Text 9"/>
-          <p:cNvSpPr/>
-          <p:nvPr/>
-        </p:nvSpPr>
-        <p:spPr>
-          <a:xfrm>
-            <a:off x="502920" y="4069080"/>
-            <a:ext cx="5806440" cy="1280160"/>
-          </a:xfrm>
-          <a:prstGeom prst="rect">
-            <a:avLst/>
-          </a:prstGeom>
-          <a:noFill/>
-          <a:ln/>
-        </p:spPr>
-        <p:txBody>
-          <a:bodyPr wrap="square" lIns="0" tIns="0" rIns="0" bIns="0" rtlCol="0" anchor="t"/>
-          <a:lstStyle/>
-          <a:p>
-            <a:pPr indent="0" marL="0">
-              <a:lnSpc>
-                <a:spcPct val="105000"/>
-              </a:lnSpc>
-              <a:buNone/>
-            </a:pPr>
-            <a:r>
-              <a:rPr lang="en-US" sz="1400" dirty="0">
+              <a:t>both hold at the same pixel</a:t>
+            </a:r>
+            <a:endParaRPr lang="en-US" sz="1450" dirty="0"/>
+          </a:p>
+        </p:txBody>
+      </p:sp>
+      <p:sp>
+        <p:nvSpPr>
+          <p:cNvPr id="14" name="Shape 11"/>
+          <p:cNvSpPr/>
+          <p:nvPr/>
+        </p:nvSpPr>
+        <p:spPr>
+          <a:xfrm>
+            <a:off x="502920" y="4352544"/>
+            <a:ext cx="5943600" cy="841248"/>
+          </a:xfrm>
+          <a:prstGeom prst="roundRect">
+            <a:avLst>
+              <a:gd name="adj" fmla="val 8696"/>
+            </a:avLst>
+          </a:prstGeom>
+          <a:solidFill>
+            <a:srgbClr val="FFFFFF"/>
+          </a:solidFill>
+          <a:ln w="12700">
+            <a:solidFill>
+              <a:srgbClr val="D5DDDE"/>
+            </a:solidFill>
+            <a:prstDash val="solid"/>
+          </a:ln>
+          <a:effectLst>
+            <a:outerShdw sx="100000" sy="100000" kx="0" ky="0" algn="bl" rotWithShape="0" blurRad="88900" dist="38100" dir="5400000">
+              <a:srgbClr val="000000">
+                <a:alpha val="13000"/>
+              </a:srgbClr>
+            </a:outerShdw>
+          </a:effectLst>
+        </p:spPr>
+      </p:sp>
+      <p:sp>
+        <p:nvSpPr>
+          <p:cNvPr id="15" name="Shape 12"/>
+          <p:cNvSpPr/>
+          <p:nvPr/>
+        </p:nvSpPr>
+        <p:spPr>
+          <a:xfrm>
+            <a:off x="685800" y="4608576"/>
+            <a:ext cx="329184" cy="329184"/>
+          </a:xfrm>
+          <a:prstGeom prst="ellipse">
+            <a:avLst/>
+          </a:prstGeom>
+          <a:solidFill>
+            <a:srgbClr val="E8843C"/>
+          </a:solidFill>
+          <a:ln/>
+        </p:spPr>
+      </p:sp>
+      <p:sp>
+        <p:nvSpPr>
+          <p:cNvPr id="16" name="Text 13"/>
+          <p:cNvSpPr/>
+          <p:nvPr/>
+        </p:nvSpPr>
+        <p:spPr>
+          <a:xfrm>
+            <a:off x="1188720" y="4352544"/>
+            <a:ext cx="5120640" cy="841248"/>
+          </a:xfrm>
+          <a:prstGeom prst="rect">
+            <a:avLst/>
+          </a:prstGeom>
+          <a:noFill/>
+          <a:ln/>
+        </p:spPr>
+        <p:txBody>
+          <a:bodyPr wrap="square" lIns="0" tIns="0" rIns="0" bIns="0" rtlCol="0" anchor="ctr"/>
+          <a:lstStyle/>
+          <a:p>
+            <a:pPr indent="0" marL="0">
+              <a:buNone/>
+            </a:pPr>
+            <a:r>
+              <a:rPr lang="en-US" sz="1450" b="1" dirty="0">
                 <a:solidFill>
                   <a:srgbClr val="14232B"/>
                 </a:solidFill>
@@ -6993,16 +7341,106 @@
                 <a:ea typeface="Calibri" pitchFamily="34" charset="-122"/>
                 <a:cs typeface="Calibri" pitchFamily="34" charset="-120"/>
               </a:rPr>
-              <a:t>The largest single envelope under the targeted dose.  </a:t>
-            </a:r>
-            <a:pPr indent="0" marL="0">
-              <a:lnSpc>
-                <a:spcPct val="105000"/>
-              </a:lnSpc>
-              <a:buNone/>
-            </a:pPr>
-            <a:r>
-              <a:rPr lang="en-US" sz="1400" b="1" dirty="0">
+              <a:t>Combined-only   </a:t>
+            </a:r>
+            <a:pPr indent="0" marL="0">
+              <a:buNone/>
+            </a:pPr>
+            <a:r>
+              <a:rPr lang="en-US" sz="1250" i="1" dirty="0">
+                <a:solidFill>
+                  <a:srgbClr val="5B6B73"/>
+                </a:solidFill>
+                <a:latin typeface="Calibri" pitchFamily="34" charset="0"/>
+                <a:ea typeface="Calibri" pitchFamily="34" charset="-122"/>
+                <a:cs typeface="Calibri" pitchFamily="34" charset="-120"/>
+              </a:rPr>
+              <a:t>neither alone, but GM &gt; 0</a:t>
+            </a:r>
+            <a:endParaRPr lang="en-US" sz="1450" dirty="0"/>
+          </a:p>
+        </p:txBody>
+      </p:sp>
+      <p:sp>
+        <p:nvSpPr>
+          <p:cNvPr id="17" name="Shape 14"/>
+          <p:cNvSpPr/>
+          <p:nvPr/>
+        </p:nvSpPr>
+        <p:spPr>
+          <a:xfrm>
+            <a:off x="502920" y="5285232"/>
+            <a:ext cx="5943600" cy="841248"/>
+          </a:xfrm>
+          <a:prstGeom prst="roundRect">
+            <a:avLst>
+              <a:gd name="adj" fmla="val 8696"/>
+            </a:avLst>
+          </a:prstGeom>
+          <a:solidFill>
+            <a:srgbClr val="FFFFFF"/>
+          </a:solidFill>
+          <a:ln w="12700">
+            <a:solidFill>
+              <a:srgbClr val="D5DDDE"/>
+            </a:solidFill>
+            <a:prstDash val="solid"/>
+          </a:ln>
+          <a:effectLst>
+            <a:outerShdw sx="100000" sy="100000" kx="0" ky="0" algn="bl" rotWithShape="0" blurRad="88900" dist="38100" dir="5400000">
+              <a:srgbClr val="000000">
+                <a:alpha val="13000"/>
+              </a:srgbClr>
+            </a:outerShdw>
+          </a:effectLst>
+        </p:spPr>
+      </p:sp>
+      <p:sp>
+        <p:nvSpPr>
+          <p:cNvPr id="18" name="Shape 15"/>
+          <p:cNvSpPr/>
+          <p:nvPr/>
+        </p:nvSpPr>
+        <p:spPr>
+          <a:xfrm>
+            <a:off x="685800" y="5541264"/>
+            <a:ext cx="329184" cy="329184"/>
+          </a:xfrm>
+          <a:prstGeom prst="ellipse">
+            <a:avLst/>
+          </a:prstGeom>
+          <a:solidFill>
+            <a:srgbClr val="8794A0"/>
+          </a:solidFill>
+          <a:ln/>
+        </p:spPr>
+      </p:sp>
+      <p:sp>
+        <p:nvSpPr>
+          <p:cNvPr id="19" name="Text 16"/>
+          <p:cNvSpPr/>
+          <p:nvPr/>
+        </p:nvSpPr>
+        <p:spPr>
+          <a:xfrm>
+            <a:off x="1188720" y="5285232"/>
+            <a:ext cx="5120640" cy="841248"/>
+          </a:xfrm>
+          <a:prstGeom prst="rect">
+            <a:avLst/>
+          </a:prstGeom>
+          <a:noFill/>
+          <a:ln/>
+        </p:spPr>
+        <p:txBody>
+          <a:bodyPr wrap="square" lIns="0" tIns="0" rIns="0" bIns="0" rtlCol="0" anchor="ctr"/>
+          <a:lstStyle/>
+          <a:p>
+            <a:pPr indent="0" marL="0">
+              <a:buNone/>
+            </a:pPr>
+            <a:r>
+              <a:rPr lang="en-US" sz="1450" b="1" dirty="0">
                 <a:solidFill>
                   <a:srgbClr val="14232B"/>
                 </a:solidFill>
@@ -7010,15 +7448,29 @@
                 <a:ea typeface="Calibri" pitchFamily="34" charset="-122"/>
                 <a:cs typeface="Calibri" pitchFamily="34" charset="-120"/>
               </a:rPr>
-              <a:t>But it is a minority of acid cropland — most viable land needs more than yield to pencil.</a:t>
-            </a:r>
-            <a:endParaRPr lang="en-US" sz="1400" dirty="0"/>
-          </a:p>
-        </p:txBody>
-      </p:sp>
-      <p:sp>
-        <p:nvSpPr>
-          <p:cNvPr id="14" name="Text 10"/>
+              <a:t>Neither   </a:t>
+            </a:r>
+            <a:pPr indent="0" marL="0">
+              <a:buNone/>
+            </a:pPr>
+            <a:r>
+              <a:rPr lang="en-US" sz="1250" i="1" dirty="0">
+                <a:solidFill>
+                  <a:srgbClr val="5B6B73"/>
+                </a:solidFill>
+                <a:latin typeface="Calibri" pitchFamily="34" charset="0"/>
+                <a:ea typeface="Calibri" pitchFamily="34" charset="-122"/>
+                <a:cs typeface="Calibri" pitchFamily="34" charset="-120"/>
+              </a:rPr>
+              <a:t>GM ≤ 0 — not deployable</a:t>
+            </a:r>
+            <a:endParaRPr lang="en-US" sz="1450" dirty="0"/>
+          </a:p>
+        </p:txBody>
+      </p:sp>
+      <p:sp>
+        <p:nvSpPr>
+          <p:cNvPr id="20" name="Text 17"/>
           <p:cNvSpPr/>
           <p:nvPr/>
         </p:nvSpPr>
@@ -7071,7 +7523,7 @@
       </p:sp>
       <p:sp>
         <p:nvSpPr>
-          <p:cNvPr id="15" name="Text 11"/>
+          <p:cNvPr id="21" name="Text 18"/>
           <p:cNvSpPr/>
           <p:nvPr/>
         </p:nvSpPr>
@@ -7167,13 +7619,13 @@
             <a:r>
               <a:rPr lang="en-US" sz="1200" b="1" spc="200" kern="0" dirty="0">
                 <a:solidFill>
-                  <a:srgbClr val="1C6BA0"/>
-                </a:solidFill>
-                <a:latin typeface="Calibri" pitchFamily="34" charset="0"/>
-                <a:ea typeface="Calibri" pitchFamily="34" charset="-122"/>
-                <a:cs typeface="Calibri" pitchFamily="34" charset="-120"/>
-              </a:rPr>
-              <a:t>RESULTS · PUBLIC ENVELOPE</a:t>
+                  <a:srgbClr val="2E7D32"/>
+                </a:solidFill>
+                <a:latin typeface="Calibri" pitchFamily="34" charset="0"/>
+                <a:ea typeface="Calibri" pitchFamily="34" charset="-122"/>
+                <a:cs typeface="Calibri" pitchFamily="34" charset="-120"/>
+              </a:rPr>
+              <a:t>RESULTS · PRIVATE ENVELOPE</a:t>
             </a:r>
             <a:endParaRPr lang="en-US" sz="1200" dirty="0"/>
           </a:p>
@@ -7212,7 +7664,7 @@
                 <a:ea typeface="Cambria" pitchFamily="34" charset="-122"/>
                 <a:cs typeface="Cambria" pitchFamily="34" charset="-120"/>
               </a:rPr>
-              <a:t>Where carbon alone pays (durably)</a:t>
+              <a:t>Where yield alone pays</a:t>
             </a:r>
             <a:endParaRPr lang="en-US" sz="2900" dirty="0"/>
           </a:p>
@@ -7220,7 +7672,7 @@
       </p:sp>
       <p:pic>
         <p:nvPicPr>
-          <p:cNvPr id="4" name="Image 0" descr="img/env_public_targeted_eqnx.png">    </p:cNvPr>
+          <p:cNvPr id="4" name="Image 0" descr="img/env_private_targeted_eqnx.png">    </p:cNvPr>
           <p:cNvPicPr>
             <a:picLocks noChangeAspect="1"/>
           </p:cNvPicPr>
@@ -7274,7 +7726,7 @@
                 <a:ea typeface="Calibri" pitchFamily="34" charset="-122"/>
                 <a:cs typeface="Calibri" pitchFamily="34" charset="-120"/>
               </a:rPr>
-              <a:t>Land where durable, net-export CDR at $150/tCO₂ covers cost with no yield benefit.</a:t>
+              <a:t>Land where the agronomic return covers the full delivered cost with no carbon credit at all.</a:t>
             </a:r>
             <a:endParaRPr lang="en-US" sz="1500" dirty="0"/>
           </a:p>
@@ -7297,7 +7749,7 @@
             </a:avLst>
           </a:prstGeom>
           <a:solidFill>
-            <a:srgbClr val="EFF4F8"/>
+            <a:srgbClr val="F1F7F1"/>
           </a:solidFill>
           <a:ln w="12700">
             <a:solidFill>
@@ -7341,13 +7793,13 @@
             <a:r>
               <a:rPr lang="en-US" sz="3300" b="1" dirty="0">
                 <a:solidFill>
-                  <a:srgbClr val="1C6BA0"/>
+                  <a:srgbClr val="2E7D32"/>
                 </a:solidFill>
                 <a:latin typeface="Cambria" pitchFamily="34" charset="0"/>
                 <a:ea typeface="Cambria" pitchFamily="34" charset="-122"/>
                 <a:cs typeface="Cambria" pitchFamily="34" charset="-120"/>
               </a:rPr>
-              <a:t>1.7 Mha</a:t>
+              <a:t>4.3 Mha</a:t>
             </a:r>
             <a:endParaRPr lang="en-US" sz="3300" dirty="0"/>
           </a:p>
@@ -7386,7 +7838,7 @@
                 <a:ea typeface="Calibri" pitchFamily="34" charset="-122"/>
                 <a:cs typeface="Calibri" pitchFamily="34" charset="-120"/>
               </a:rPr>
-              <a:t>durable public area</a:t>
+              <a:t>private-sufficient area</a:t>
             </a:r>
             <a:endParaRPr lang="en-US" sz="1200" dirty="0"/>
           </a:p>
@@ -7409,7 +7861,7 @@
             </a:avLst>
           </a:prstGeom>
           <a:solidFill>
-            <a:srgbClr val="EFF4F8"/>
+            <a:srgbClr val="F1F7F1"/>
           </a:solidFill>
           <a:ln w="12700">
             <a:solidFill>
@@ -7453,13 +7905,13 @@
             <a:r>
               <a:rPr lang="en-US" sz="3300" b="1" dirty="0">
                 <a:solidFill>
-                  <a:srgbClr val="1C6BA0"/>
+                  <a:srgbClr val="2E7D32"/>
                 </a:solidFill>
                 <a:latin typeface="Cambria" pitchFamily="34" charset="0"/>
                 <a:ea typeface="Cambria" pitchFamily="34" charset="-122"/>
                 <a:cs typeface="Cambria" pitchFamily="34" charset="-120"/>
               </a:rPr>
-              <a:t>9.4%</a:t>
+              <a:t>$3.5 B</a:t>
             </a:r>
             <a:endParaRPr lang="en-US" sz="3300" dirty="0"/>
           </a:p>
@@ -7498,7 +7950,7 @@
                 <a:ea typeface="Calibri" pitchFamily="34" charset="-122"/>
                 <a:cs typeface="Calibri" pitchFamily="34" charset="-120"/>
               </a:rPr>
-              <a:t>of treated cropland</a:t>
+              <a:t>private return</a:t>
             </a:r>
             <a:endParaRPr lang="en-US" sz="1200" dirty="0"/>
           </a:p>
@@ -7513,7 +7965,7 @@
         <p:spPr>
           <a:xfrm>
             <a:off x="502920" y="4069080"/>
-            <a:ext cx="5806440" cy="1371600"/>
+            <a:ext cx="5806440" cy="1280160"/>
           </a:xfrm>
           <a:prstGeom prst="rect">
             <a:avLst/>
@@ -7540,7 +7992,7 @@
                 <a:ea typeface="Calibri" pitchFamily="34" charset="-122"/>
                 <a:cs typeface="Calibri" pitchFamily="34" charset="-120"/>
               </a:rPr>
-              <a:t>Smaller than the private envelope, and price-conditional.  </a:t>
+              <a:t>The largest single envelope under the targeted dose.  </a:t>
             </a:r>
             <a:pPr indent="0" marL="0">
               <a:lnSpc>
@@ -7557,7 +8009,7 @@
                 <a:ea typeface="Calibri" pitchFamily="34" charset="-122"/>
                 <a:cs typeface="Calibri" pitchFamily="34" charset="-120"/>
               </a:rPr>
-              <a:t>Net-export accounting and today’s VCM price keep the carbon-only case tightly bound — the reason the combined case matters.</a:t>
+              <a:t>But it is a minority of acid cropland — most viable land needs more than yield to pencil.</a:t>
             </a:r>
             <a:endParaRPr lang="en-US" sz="1400" dirty="0"/>
           </a:p>
@@ -7565,7 +8017,7 @@
       </p:sp>
       <p:sp>
         <p:nvSpPr>
-          <p:cNvPr id="13" name="Text 10"/>
+          <p:cNvPr id="14" name="Text 10"/>
           <p:cNvSpPr/>
           <p:nvPr/>
         </p:nvSpPr>
@@ -7618,7 +8070,7 @@
       </p:sp>
       <p:sp>
         <p:nvSpPr>
-          <p:cNvPr id="14" name="Text 11"/>
+          <p:cNvPr id="15" name="Text 11"/>
           <p:cNvSpPr/>
           <p:nvPr/>
         </p:nvSpPr>
@@ -7714,13 +8166,13 @@
             <a:r>
               <a:rPr lang="en-US" sz="1200" b="1" spc="200" kern="0" dirty="0">
                 <a:solidFill>
-                  <a:srgbClr val="E8843C"/>
-                </a:solidFill>
-                <a:latin typeface="Calibri" pitchFamily="34" charset="0"/>
-                <a:ea typeface="Calibri" pitchFamily="34" charset="-122"/>
-                <a:cs typeface="Calibri" pitchFamily="34" charset="-120"/>
-              </a:rPr>
-              <a:t>RESULTS · THE CENTRAL RESULT</a:t>
+                  <a:srgbClr val="1C6BA0"/>
+                </a:solidFill>
+                <a:latin typeface="Calibri" pitchFamily="34" charset="0"/>
+                <a:ea typeface="Calibri" pitchFamily="34" charset="-122"/>
+                <a:cs typeface="Calibri" pitchFamily="34" charset="-120"/>
+              </a:rPr>
+              <a:t>RESULTS · PUBLIC ENVELOPE</a:t>
             </a:r>
             <a:endParaRPr lang="en-US" sz="1200" dirty="0"/>
           </a:p>
@@ -7759,7 +8211,7 @@
                 <a:ea typeface="Cambria" pitchFamily="34" charset="-122"/>
                 <a:cs typeface="Cambria" pitchFamily="34" charset="-120"/>
               </a:rPr>
-              <a:t>The combined-only band is the policy object</a:t>
+              <a:t>Where carbon alone pays (durably)</a:t>
             </a:r>
             <a:endParaRPr lang="en-US" sz="2900" dirty="0"/>
           </a:p>
@@ -7767,7 +8219,7 @@
       </p:sp>
       <p:pic>
         <p:nvPicPr>
-          <p:cNvPr id="4" name="Image 0" descr="img/env_intersection_targeted_eqnx.png">    </p:cNvPr>
+          <p:cNvPr id="4" name="Image 0" descr="img/env_public_targeted_eqnx.png">    </p:cNvPr>
           <p:cNvPicPr>
             <a:picLocks noChangeAspect="1"/>
           </p:cNvPicPr>
@@ -7790,22 +8242,61 @@
       </p:pic>
       <p:sp>
         <p:nvSpPr>
-          <p:cNvPr id="5" name="Shape 2"/>
-          <p:cNvSpPr/>
-          <p:nvPr/>
-        </p:nvSpPr>
-        <p:spPr>
-          <a:xfrm>
-            <a:off x="502920" y="1463040"/>
-            <a:ext cx="5943600" cy="1691640"/>
+          <p:cNvPr id="5" name="Text 2"/>
+          <p:cNvSpPr/>
+          <p:nvPr/>
+        </p:nvSpPr>
+        <p:spPr>
+          <a:xfrm>
+            <a:off x="502920" y="1508760"/>
+            <a:ext cx="5852160" cy="731520"/>
+          </a:xfrm>
+          <a:prstGeom prst="rect">
+            <a:avLst/>
+          </a:prstGeom>
+          <a:noFill/>
+          <a:ln/>
+        </p:spPr>
+        <p:txBody>
+          <a:bodyPr wrap="square" lIns="0" tIns="0" rIns="0" bIns="0" rtlCol="0" anchor="ctr"/>
+          <a:lstStyle/>
+          <a:p>
+            <a:pPr indent="0" marL="0">
+              <a:buNone/>
+            </a:pPr>
+            <a:r>
+              <a:rPr lang="en-US" sz="1500" dirty="0">
+                <a:solidFill>
+                  <a:srgbClr val="14232B"/>
+                </a:solidFill>
+                <a:latin typeface="Calibri" pitchFamily="34" charset="0"/>
+                <a:ea typeface="Calibri" pitchFamily="34" charset="-122"/>
+                <a:cs typeface="Calibri" pitchFamily="34" charset="-120"/>
+              </a:rPr>
+              <a:t>Land where durable, net-export CDR at $150/tCO₂ covers cost with no yield benefit.</a:t>
+            </a:r>
+            <a:endParaRPr lang="en-US" sz="1500" dirty="0"/>
+          </a:p>
+        </p:txBody>
+      </p:sp>
+      <p:sp>
+        <p:nvSpPr>
+          <p:cNvPr id="6" name="Shape 3"/>
+          <p:cNvSpPr/>
+          <p:nvPr/>
+        </p:nvSpPr>
+        <p:spPr>
+          <a:xfrm>
+            <a:off x="502920" y="2377440"/>
+            <a:ext cx="2788920" cy="1417320"/>
           </a:xfrm>
           <a:prstGeom prst="roundRect">
             <a:avLst>
-              <a:gd name="adj" fmla="val 4324"/>
+              <a:gd name="adj" fmla="val 5161"/>
             </a:avLst>
           </a:prstGeom>
           <a:solidFill>
-            <a:srgbClr val="14232B"/>
+            <a:srgbClr val="EFF4F8"/>
           </a:solidFill>
           <a:ln w="12700">
             <a:solidFill>
@@ -7824,14 +8315,14 @@
       </p:sp>
       <p:sp>
         <p:nvSpPr>
-          <p:cNvPr id="6" name="Text 3"/>
-          <p:cNvSpPr/>
-          <p:nvPr/>
-        </p:nvSpPr>
-        <p:spPr>
-          <a:xfrm>
-            <a:off x="731520" y="1645920"/>
-            <a:ext cx="5486400" cy="777240"/>
+          <p:cNvPr id="7" name="Text 4"/>
+          <p:cNvSpPr/>
+          <p:nvPr/>
+        </p:nvSpPr>
+        <p:spPr>
+          <a:xfrm>
+            <a:off x="594360" y="2560320"/>
+            <a:ext cx="2606040" cy="640080"/>
           </a:xfrm>
           <a:prstGeom prst="rect">
             <a:avLst/>
@@ -7843,48 +8334,34 @@
           <a:bodyPr wrap="square" lIns="0" tIns="0" rIns="0" bIns="0" rtlCol="0" anchor="ctr"/>
           <a:lstStyle/>
           <a:p>
-            <a:pPr indent="0" marL="0">
-              <a:buNone/>
-            </a:pPr>
-            <a:r>
-              <a:rPr lang="en-US" sz="4400" b="1" dirty="0">
-                <a:solidFill>
-                  <a:srgbClr val="E8843C"/>
+            <a:pPr algn="ctr" indent="0" marL="0">
+              <a:buNone/>
+            </a:pPr>
+            <a:r>
+              <a:rPr lang="en-US" sz="3300" b="1" dirty="0">
+                <a:solidFill>
+                  <a:srgbClr val="1C6BA0"/>
                 </a:solidFill>
                 <a:latin typeface="Cambria" pitchFamily="34" charset="0"/>
                 <a:ea typeface="Cambria" pitchFamily="34" charset="-122"/>
                 <a:cs typeface="Cambria" pitchFamily="34" charset="-120"/>
               </a:rPr>
-              <a:t>2.1 Mha</a:t>
-            </a:r>
-            <a:pPr indent="0" marL="0">
-              <a:buNone/>
-            </a:pPr>
-            <a:r>
-              <a:rPr lang="en-US" sz="2000" b="1" dirty="0">
-                <a:solidFill>
-                  <a:srgbClr val="FFFFFF"/>
-                </a:solidFill>
-                <a:latin typeface="Cambria" pitchFamily="34" charset="0"/>
-                <a:ea typeface="Cambria" pitchFamily="34" charset="-122"/>
-                <a:cs typeface="Cambria" pitchFamily="34" charset="-120"/>
-              </a:rPr>
-              <a:t>  combined-only</a:t>
-            </a:r>
-            <a:endParaRPr lang="en-US" sz="4400" dirty="0"/>
-          </a:p>
-        </p:txBody>
-      </p:sp>
-      <p:sp>
-        <p:nvSpPr>
-          <p:cNvPr id="7" name="Text 4"/>
-          <p:cNvSpPr/>
-          <p:nvPr/>
-        </p:nvSpPr>
-        <p:spPr>
-          <a:xfrm>
-            <a:off x="731520" y="2468880"/>
-            <a:ext cx="5486400" cy="594360"/>
+              <a:t>1.7 Mha</a:t>
+            </a:r>
+            <a:endParaRPr lang="en-US" sz="3300" dirty="0"/>
+          </a:p>
+        </p:txBody>
+      </p:sp>
+      <p:sp>
+        <p:nvSpPr>
+          <p:cNvPr id="8" name="Text 5"/>
+          <p:cNvSpPr/>
+          <p:nvPr/>
+        </p:nvSpPr>
+        <p:spPr>
+          <a:xfrm>
+            <a:off x="594360" y="3246120"/>
+            <a:ext cx="2606040" cy="457200"/>
           </a:xfrm>
           <a:prstGeom prst="rect">
             <a:avLst/>
@@ -7896,42 +8373,42 @@
           <a:bodyPr wrap="square" lIns="0" tIns="0" rIns="0" bIns="0" rtlCol="0" anchor="ctr"/>
           <a:lstStyle/>
           <a:p>
-            <a:pPr indent="0" marL="0">
-              <a:buNone/>
-            </a:pPr>
-            <a:r>
-              <a:rPr lang="en-US" sz="1350" i="1" dirty="0">
-                <a:solidFill>
-                  <a:srgbClr val="CBD6D9"/>
-                </a:solidFill>
-                <a:latin typeface="Calibri" pitchFamily="34" charset="0"/>
-                <a:ea typeface="Calibri" pitchFamily="34" charset="-122"/>
-                <a:cs typeface="Calibri" pitchFamily="34" charset="-120"/>
-              </a:rPr>
-              <a:t>neither the yield return nor the carbon return alone covers cost — yet together the margin is positive.</a:t>
-            </a:r>
-            <a:endParaRPr lang="en-US" sz="1350" dirty="0"/>
-          </a:p>
-        </p:txBody>
-      </p:sp>
-      <p:sp>
-        <p:nvSpPr>
-          <p:cNvPr id="8" name="Shape 5"/>
-          <p:cNvSpPr/>
-          <p:nvPr/>
-        </p:nvSpPr>
-        <p:spPr>
-          <a:xfrm>
-            <a:off x="502920" y="3337560"/>
-            <a:ext cx="1874520" cy="1097280"/>
+            <a:pPr algn="ctr" indent="0" marL="0">
+              <a:buNone/>
+            </a:pPr>
+            <a:r>
+              <a:rPr lang="en-US" sz="1200" dirty="0">
+                <a:solidFill>
+                  <a:srgbClr val="5B6B73"/>
+                </a:solidFill>
+                <a:latin typeface="Calibri" pitchFamily="34" charset="0"/>
+                <a:ea typeface="Calibri" pitchFamily="34" charset="-122"/>
+                <a:cs typeface="Calibri" pitchFamily="34" charset="-120"/>
+              </a:rPr>
+              <a:t>durable public area</a:t>
+            </a:r>
+            <a:endParaRPr lang="en-US" sz="1200" dirty="0"/>
+          </a:p>
+        </p:txBody>
+      </p:sp>
+      <p:sp>
+        <p:nvSpPr>
+          <p:cNvPr id="9" name="Shape 6"/>
+          <p:cNvSpPr/>
+          <p:nvPr/>
+        </p:nvSpPr>
+        <p:spPr>
+          <a:xfrm>
+            <a:off x="3520440" y="2377440"/>
+            <a:ext cx="2788920" cy="1417320"/>
           </a:xfrm>
           <a:prstGeom prst="roundRect">
             <a:avLst>
-              <a:gd name="adj" fmla="val 6667"/>
+              <a:gd name="adj" fmla="val 5161"/>
             </a:avLst>
           </a:prstGeom>
           <a:solidFill>
-            <a:srgbClr val="FFFFFF"/>
+            <a:srgbClr val="EFF4F8"/>
           </a:solidFill>
           <a:ln w="12700">
             <a:solidFill>
@@ -7950,14 +8427,14 @@
       </p:sp>
       <p:sp>
         <p:nvSpPr>
-          <p:cNvPr id="9" name="Text 6"/>
-          <p:cNvSpPr/>
-          <p:nvPr/>
-        </p:nvSpPr>
-        <p:spPr>
-          <a:xfrm>
-            <a:off x="502920" y="3474720"/>
-            <a:ext cx="1874520" cy="548640"/>
+          <p:cNvPr id="10" name="Text 7"/>
+          <p:cNvSpPr/>
+          <p:nvPr/>
+        </p:nvSpPr>
+        <p:spPr>
+          <a:xfrm>
+            <a:off x="3611880" y="2560320"/>
+            <a:ext cx="2606040" cy="640080"/>
           </a:xfrm>
           <a:prstGeom prst="rect">
             <a:avLst/>
@@ -7973,30 +8450,30 @@
               <a:buNone/>
             </a:pPr>
             <a:r>
-              <a:rPr lang="en-US" sz="2600" b="1" dirty="0">
-                <a:solidFill>
-                  <a:srgbClr val="14232B"/>
+              <a:rPr lang="en-US" sz="3300" b="1" dirty="0">
+                <a:solidFill>
+                  <a:srgbClr val="1C6BA0"/>
                 </a:solidFill>
                 <a:latin typeface="Cambria" pitchFamily="34" charset="0"/>
                 <a:ea typeface="Cambria" pitchFamily="34" charset="-122"/>
                 <a:cs typeface="Cambria" pitchFamily="34" charset="-120"/>
               </a:rPr>
-              <a:t>4.3</a:t>
-            </a:r>
-            <a:endParaRPr lang="en-US" sz="2600" dirty="0"/>
-          </a:p>
-        </p:txBody>
-      </p:sp>
-      <p:sp>
-        <p:nvSpPr>
-          <p:cNvPr id="10" name="Text 7"/>
-          <p:cNvSpPr/>
-          <p:nvPr/>
-        </p:nvSpPr>
-        <p:spPr>
-          <a:xfrm>
-            <a:off x="594360" y="4023360"/>
-            <a:ext cx="1691640" cy="365760"/>
+              <a:t>9.4%</a:t>
+            </a:r>
+            <a:endParaRPr lang="en-US" sz="3300" dirty="0"/>
+          </a:p>
+        </p:txBody>
+      </p:sp>
+      <p:sp>
+        <p:nvSpPr>
+          <p:cNvPr id="11" name="Text 8"/>
+          <p:cNvSpPr/>
+          <p:nvPr/>
+        </p:nvSpPr>
+        <p:spPr>
+          <a:xfrm>
+            <a:off x="3611880" y="3246120"/>
+            <a:ext cx="2606040" cy="457200"/>
           </a:xfrm>
           <a:prstGeom prst="rect">
             <a:avLst/>
@@ -8012,7 +8489,7 @@
               <a:buNone/>
             </a:pPr>
             <a:r>
-              <a:rPr lang="en-US" sz="1150" dirty="0">
+              <a:rPr lang="en-US" sz="1200" dirty="0">
                 <a:solidFill>
                   <a:srgbClr val="5B6B73"/>
                 </a:solidFill>
@@ -8020,45 +8497,11 @@
                 <a:ea typeface="Calibri" pitchFamily="34" charset="-122"/>
                 <a:cs typeface="Calibri" pitchFamily="34" charset="-120"/>
               </a:rPr>
-              <a:t>private (Mha)</a:t>
-            </a:r>
-            <a:endParaRPr lang="en-US" sz="1150" dirty="0"/>
-          </a:p>
-        </p:txBody>
-      </p:sp>
-      <p:sp>
-        <p:nvSpPr>
-          <p:cNvPr id="11" name="Shape 8"/>
-          <p:cNvSpPr/>
-          <p:nvPr/>
-        </p:nvSpPr>
-        <p:spPr>
-          <a:xfrm>
-            <a:off x="2542032" y="3337560"/>
-            <a:ext cx="1874520" cy="1097280"/>
-          </a:xfrm>
-          <a:prstGeom prst="roundRect">
-            <a:avLst>
-              <a:gd name="adj" fmla="val 6667"/>
-            </a:avLst>
-          </a:prstGeom>
-          <a:solidFill>
-            <a:srgbClr val="FFFFFF"/>
-          </a:solidFill>
-          <a:ln w="12700">
-            <a:solidFill>
-              <a:srgbClr val="D5DDDE"/>
-            </a:solidFill>
-            <a:prstDash val="solid"/>
-          </a:ln>
-          <a:effectLst>
-            <a:outerShdw sx="100000" sy="100000" kx="0" ky="0" algn="bl" rotWithShape="0" blurRad="88900" dist="38100" dir="5400000">
-              <a:srgbClr val="000000">
-                <a:alpha val="13000"/>
-              </a:srgbClr>
-            </a:outerShdw>
-          </a:effectLst>
-        </p:spPr>
+              <a:t>of treated cropland</a:t>
+            </a:r>
+            <a:endParaRPr lang="en-US" sz="1200" dirty="0"/>
+          </a:p>
+        </p:txBody>
       </p:sp>
       <p:sp>
         <p:nvSpPr>
@@ -8068,250 +8511,60 @@
         </p:nvSpPr>
         <p:spPr>
           <a:xfrm>
-            <a:off x="2542032" y="3474720"/>
-            <a:ext cx="1874520" cy="548640"/>
-          </a:xfrm>
-          <a:prstGeom prst="rect">
-            <a:avLst/>
-          </a:prstGeom>
-          <a:noFill/>
-          <a:ln/>
-        </p:spPr>
-        <p:txBody>
-          <a:bodyPr wrap="square" lIns="0" tIns="0" rIns="0" bIns="0" rtlCol="0" anchor="ctr"/>
-          <a:lstStyle/>
-          <a:p>
-            <a:pPr algn="ctr" indent="0" marL="0">
-              <a:buNone/>
-            </a:pPr>
-            <a:r>
-              <a:rPr lang="en-US" sz="2600" b="1" dirty="0">
+            <a:off x="502920" y="4069080"/>
+            <a:ext cx="5806440" cy="1371600"/>
+          </a:xfrm>
+          <a:prstGeom prst="rect">
+            <a:avLst/>
+          </a:prstGeom>
+          <a:noFill/>
+          <a:ln/>
+        </p:spPr>
+        <p:txBody>
+          <a:bodyPr wrap="square" lIns="0" tIns="0" rIns="0" bIns="0" rtlCol="0" anchor="t"/>
+          <a:lstStyle/>
+          <a:p>
+            <a:pPr indent="0" marL="0">
+              <a:lnSpc>
+                <a:spcPct val="105000"/>
+              </a:lnSpc>
+              <a:buNone/>
+            </a:pPr>
+            <a:r>
+              <a:rPr lang="en-US" sz="1400" dirty="0">
                 <a:solidFill>
                   <a:srgbClr val="14232B"/>
                 </a:solidFill>
-                <a:latin typeface="Cambria" pitchFamily="34" charset="0"/>
-                <a:ea typeface="Cambria" pitchFamily="34" charset="-122"/>
-                <a:cs typeface="Cambria" pitchFamily="34" charset="-120"/>
-              </a:rPr>
-              <a:t>1.7</a:t>
-            </a:r>
-            <a:endParaRPr lang="en-US" sz="2600" dirty="0"/>
+                <a:latin typeface="Calibri" pitchFamily="34" charset="0"/>
+                <a:ea typeface="Calibri" pitchFamily="34" charset="-122"/>
+                <a:cs typeface="Calibri" pitchFamily="34" charset="-120"/>
+              </a:rPr>
+              <a:t>Smaller than the private envelope, and price-conditional.  </a:t>
+            </a:r>
+            <a:pPr indent="0" marL="0">
+              <a:lnSpc>
+                <a:spcPct val="105000"/>
+              </a:lnSpc>
+              <a:buNone/>
+            </a:pPr>
+            <a:r>
+              <a:rPr lang="en-US" sz="1400" b="1" dirty="0">
+                <a:solidFill>
+                  <a:srgbClr val="14232B"/>
+                </a:solidFill>
+                <a:latin typeface="Calibri" pitchFamily="34" charset="0"/>
+                <a:ea typeface="Calibri" pitchFamily="34" charset="-122"/>
+                <a:cs typeface="Calibri" pitchFamily="34" charset="-120"/>
+              </a:rPr>
+              <a:t>Net-export accounting and today’s VCM price keep the carbon-only case tightly bound — the reason the combined case matters.</a:t>
+            </a:r>
+            <a:endParaRPr lang="en-US" sz="1400" dirty="0"/>
           </a:p>
         </p:txBody>
       </p:sp>
       <p:sp>
         <p:nvSpPr>
           <p:cNvPr id="13" name="Text 10"/>
-          <p:cNvSpPr/>
-          <p:nvPr/>
-        </p:nvSpPr>
-        <p:spPr>
-          <a:xfrm>
-            <a:off x="2633472" y="4023360"/>
-            <a:ext cx="1691640" cy="365760"/>
-          </a:xfrm>
-          <a:prstGeom prst="rect">
-            <a:avLst/>
-          </a:prstGeom>
-          <a:noFill/>
-          <a:ln/>
-        </p:spPr>
-        <p:txBody>
-          <a:bodyPr wrap="square" lIns="0" tIns="0" rIns="0" bIns="0" rtlCol="0" anchor="ctr"/>
-          <a:lstStyle/>
-          <a:p>
-            <a:pPr algn="ctr" indent="0" marL="0">
-              <a:buNone/>
-            </a:pPr>
-            <a:r>
-              <a:rPr lang="en-US" sz="1150" dirty="0">
-                <a:solidFill>
-                  <a:srgbClr val="5B6B73"/>
-                </a:solidFill>
-                <a:latin typeface="Calibri" pitchFamily="34" charset="0"/>
-                <a:ea typeface="Calibri" pitchFamily="34" charset="-122"/>
-                <a:cs typeface="Calibri" pitchFamily="34" charset="-120"/>
-              </a:rPr>
-              <a:t>public (Mha)</a:t>
-            </a:r>
-            <a:endParaRPr lang="en-US" sz="1150" dirty="0"/>
-          </a:p>
-        </p:txBody>
-      </p:sp>
-      <p:sp>
-        <p:nvSpPr>
-          <p:cNvPr id="14" name="Shape 11"/>
-          <p:cNvSpPr/>
-          <p:nvPr/>
-        </p:nvSpPr>
-        <p:spPr>
-          <a:xfrm>
-            <a:off x="4572000" y="3337560"/>
-            <a:ext cx="1874520" cy="1097280"/>
-          </a:xfrm>
-          <a:prstGeom prst="roundRect">
-            <a:avLst>
-              <a:gd name="adj" fmla="val 6667"/>
-            </a:avLst>
-          </a:prstGeom>
-          <a:solidFill>
-            <a:srgbClr val="FFFFFF"/>
-          </a:solidFill>
-          <a:ln w="12700">
-            <a:solidFill>
-              <a:srgbClr val="D5DDDE"/>
-            </a:solidFill>
-            <a:prstDash val="solid"/>
-          </a:ln>
-          <a:effectLst>
-            <a:outerShdw sx="100000" sy="100000" kx="0" ky="0" algn="bl" rotWithShape="0" blurRad="88900" dist="38100" dir="5400000">
-              <a:srgbClr val="000000">
-                <a:alpha val="13000"/>
-              </a:srgbClr>
-            </a:outerShdw>
-          </a:effectLst>
-        </p:spPr>
-      </p:sp>
-      <p:sp>
-        <p:nvSpPr>
-          <p:cNvPr id="15" name="Text 12"/>
-          <p:cNvSpPr/>
-          <p:nvPr/>
-        </p:nvSpPr>
-        <p:spPr>
-          <a:xfrm>
-            <a:off x="4572000" y="3474720"/>
-            <a:ext cx="1874520" cy="548640"/>
-          </a:xfrm>
-          <a:prstGeom prst="rect">
-            <a:avLst/>
-          </a:prstGeom>
-          <a:noFill/>
-          <a:ln/>
-        </p:spPr>
-        <p:txBody>
-          <a:bodyPr wrap="square" lIns="0" tIns="0" rIns="0" bIns="0" rtlCol="0" anchor="ctr"/>
-          <a:lstStyle/>
-          <a:p>
-            <a:pPr algn="ctr" indent="0" marL="0">
-              <a:buNone/>
-            </a:pPr>
-            <a:r>
-              <a:rPr lang="en-US" sz="2600" b="1" dirty="0">
-                <a:solidFill>
-                  <a:srgbClr val="14232B"/>
-                </a:solidFill>
-                <a:latin typeface="Cambria" pitchFamily="34" charset="0"/>
-                <a:ea typeface="Cambria" pitchFamily="34" charset="-122"/>
-                <a:cs typeface="Cambria" pitchFamily="34" charset="-120"/>
-              </a:rPr>
-              <a:t>6.9</a:t>
-            </a:r>
-            <a:endParaRPr lang="en-US" sz="2600" dirty="0"/>
-          </a:p>
-        </p:txBody>
-      </p:sp>
-      <p:sp>
-        <p:nvSpPr>
-          <p:cNvPr id="16" name="Text 13"/>
-          <p:cNvSpPr/>
-          <p:nvPr/>
-        </p:nvSpPr>
-        <p:spPr>
-          <a:xfrm>
-            <a:off x="4663440" y="4023360"/>
-            <a:ext cx="1691640" cy="365760"/>
-          </a:xfrm>
-          <a:prstGeom prst="rect">
-            <a:avLst/>
-          </a:prstGeom>
-          <a:noFill/>
-          <a:ln/>
-        </p:spPr>
-        <p:txBody>
-          <a:bodyPr wrap="square" lIns="0" tIns="0" rIns="0" bIns="0" rtlCol="0" anchor="ctr"/>
-          <a:lstStyle/>
-          <a:p>
-            <a:pPr algn="ctr" indent="0" marL="0">
-              <a:buNone/>
-            </a:pPr>
-            <a:r>
-              <a:rPr lang="en-US" sz="1150" dirty="0">
-                <a:solidFill>
-                  <a:srgbClr val="5B6B73"/>
-                </a:solidFill>
-                <a:latin typeface="Calibri" pitchFamily="34" charset="0"/>
-                <a:ea typeface="Calibri" pitchFamily="34" charset="-122"/>
-                <a:cs typeface="Calibri" pitchFamily="34" charset="-120"/>
-              </a:rPr>
-              <a:t>combined (Mha)</a:t>
-            </a:r>
-            <a:endParaRPr lang="en-US" sz="1150" dirty="0"/>
-          </a:p>
-        </p:txBody>
-      </p:sp>
-      <p:sp>
-        <p:nvSpPr>
-          <p:cNvPr id="17" name="Text 14"/>
-          <p:cNvSpPr/>
-          <p:nvPr/>
-        </p:nvSpPr>
-        <p:spPr>
-          <a:xfrm>
-            <a:off x="502920" y="4663440"/>
-            <a:ext cx="5943600" cy="1280160"/>
-          </a:xfrm>
-          <a:prstGeom prst="rect">
-            <a:avLst/>
-          </a:prstGeom>
-          <a:noFill/>
-          <a:ln/>
-        </p:spPr>
-        <p:txBody>
-          <a:bodyPr wrap="square" lIns="0" tIns="0" rIns="0" bIns="0" rtlCol="0" anchor="t"/>
-          <a:lstStyle/>
-          <a:p>
-            <a:pPr indent="0" marL="0">
-              <a:lnSpc>
-                <a:spcPct val="106000"/>
-              </a:lnSpc>
-              <a:buNone/>
-            </a:pPr>
-            <a:r>
-              <a:rPr lang="en-US" sz="1400" b="1" dirty="0">
-                <a:solidFill>
-                  <a:srgbClr val="E8843C"/>
-                </a:solidFill>
-                <a:latin typeface="Calibri" pitchFamily="34" charset="0"/>
-                <a:ea typeface="Calibri" pitchFamily="34" charset="-122"/>
-                <a:cs typeface="Calibri" pitchFamily="34" charset="-120"/>
-              </a:rPr>
-              <a:t>The economic point:  </a:t>
-            </a:r>
-            <a:pPr indent="0" marL="0">
-              <a:lnSpc>
-                <a:spcPct val="106000"/>
-              </a:lnSpc>
-              <a:buNone/>
-            </a:pPr>
-            <a:r>
-              <a:rPr lang="en-US" sz="1400" dirty="0">
-                <a:solidFill>
-                  <a:srgbClr val="14232B"/>
-                </a:solidFill>
-                <a:latin typeface="Calibri" pitchFamily="34" charset="0"/>
-                <a:ea typeface="Calibri" pitchFamily="34" charset="-122"/>
-                <a:cs typeface="Calibri" pitchFamily="34" charset="-120"/>
-              </a:rPr>
-              <a:t>voluntary carbon finance is not a bonus on an already-profitable practice — it is the marginal revenue that unlocks an otherwise-unprofitable, yield-improving investment.</a:t>
-            </a:r>
-            <a:endParaRPr lang="en-US" sz="1400" dirty="0"/>
-          </a:p>
-        </p:txBody>
-      </p:sp>
-      <p:sp>
-        <p:nvSpPr>
-          <p:cNvPr id="18" name="Text 15"/>
           <p:cNvSpPr/>
           <p:nvPr/>
         </p:nvSpPr>
@@ -8364,7 +8617,7 @@
       </p:sp>
       <p:sp>
         <p:nvSpPr>
-          <p:cNvPr id="19" name="Text 16"/>
+          <p:cNvPr id="14" name="Text 11"/>
           <p:cNvSpPr/>
           <p:nvPr/>
         </p:nvSpPr>
@@ -8460,13 +8713,13 @@
             <a:r>
               <a:rPr lang="en-US" sz="1200" b="1" spc="200" kern="0" dirty="0">
                 <a:solidFill>
-                  <a:srgbClr val="1C6BA0"/>
-                </a:solidFill>
-                <a:latin typeface="Calibri" pitchFamily="34" charset="0"/>
-                <a:ea typeface="Calibri" pitchFamily="34" charset="-122"/>
-                <a:cs typeface="Calibri" pitchFamily="34" charset="-120"/>
-              </a:rPr>
-              <a:t>RESULTS · WHAT BINDS THE CARBON CASE</a:t>
+                  <a:srgbClr val="E8843C"/>
+                </a:solidFill>
+                <a:latin typeface="Calibri" pitchFamily="34" charset="0"/>
+                <a:ea typeface="Calibri" pitchFamily="34" charset="-122"/>
+                <a:cs typeface="Calibri" pitchFamily="34" charset="-120"/>
+              </a:rPr>
+              <a:t>RESULTS · THE CENTRAL RESULT</a:t>
             </a:r>
             <a:endParaRPr lang="en-US" sz="1200" dirty="0"/>
           </a:p>
@@ -8505,7 +8758,7 @@
                 <a:ea typeface="Cambria" pitchFamily="34" charset="-122"/>
                 <a:cs typeface="Cambria" pitchFamily="34" charset="-120"/>
               </a:rPr>
-              <a:t>Marginal abatement cost, not kinetics</a:t>
+              <a:t>The combined-only band is the policy object</a:t>
             </a:r>
             <a:endParaRPr lang="en-US" sz="2900" dirty="0"/>
           </a:p>
@@ -8513,7 +8766,7 @@
       </p:sp>
       <p:pic>
         <p:nvPicPr>
-          <p:cNvPr id="4" name="Image 0" descr="img/mac_targeted_eqnx.png">    </p:cNvPr>
+          <p:cNvPr id="4" name="Image 0" descr="img/env_intersection_targeted_eqnx.png">    </p:cNvPr>
           <p:cNvPicPr>
             <a:picLocks noChangeAspect="1"/>
           </p:cNvPicPr>
@@ -8526,8 +8779,8 @@
         </p:blipFill>
         <p:spPr>
           <a:xfrm>
-            <a:off x="6583680" y="1463040"/>
-            <a:ext cx="5120640" cy="4206240"/>
+            <a:off x="6766560" y="1371600"/>
+            <a:ext cx="5029200" cy="4846320"/>
           </a:xfrm>
           <a:prstGeom prst="rect">
             <a:avLst/>
@@ -8542,12 +8795,12 @@
         </p:nvSpPr>
         <p:spPr>
           <a:xfrm>
-            <a:off x="502920" y="1508760"/>
-            <a:ext cx="5760720" cy="1371600"/>
+            <a:off x="502920" y="1463040"/>
+            <a:ext cx="5943600" cy="1691640"/>
           </a:xfrm>
           <a:prstGeom prst="roundRect">
             <a:avLst>
-              <a:gd name="adj" fmla="val 5333"/>
+              <a:gd name="adj" fmla="val 4324"/>
             </a:avLst>
           </a:prstGeom>
           <a:solidFill>
@@ -8577,7 +8830,7 @@
         <p:spPr>
           <a:xfrm>
             <a:off x="731520" y="1645920"/>
-            <a:ext cx="5394960" cy="640080"/>
+            <a:ext cx="5486400" cy="777240"/>
           </a:xfrm>
           <a:prstGeom prst="rect">
             <a:avLst/>
@@ -8593,31 +8846,31 @@
               <a:buNone/>
             </a:pPr>
             <a:r>
-              <a:rPr lang="en-US" sz="4000" b="1" dirty="0">
-                <a:solidFill>
-                  <a:srgbClr val="FFFFFF"/>
+              <a:rPr lang="en-US" sz="4400" b="1" dirty="0">
+                <a:solidFill>
+                  <a:srgbClr val="E8843C"/>
                 </a:solidFill>
                 <a:latin typeface="Cambria" pitchFamily="34" charset="0"/>
                 <a:ea typeface="Cambria" pitchFamily="34" charset="-122"/>
                 <a:cs typeface="Cambria" pitchFamily="34" charset="-120"/>
               </a:rPr>
-              <a:t>$446</a:t>
-            </a:r>
-            <a:pPr indent="0" marL="0">
-              <a:buNone/>
-            </a:pPr>
-            <a:r>
-              <a:rPr lang="en-US" sz="2000" dirty="0">
-                <a:solidFill>
-                  <a:srgbClr val="9FB2B8"/>
+              <a:t>2.1 Mha</a:t>
+            </a:r>
+            <a:pPr indent="0" marL="0">
+              <a:buNone/>
+            </a:pPr>
+            <a:r>
+              <a:rPr lang="en-US" sz="2000" b="1" dirty="0">
+                <a:solidFill>
+                  <a:srgbClr val="FFFFFF"/>
                 </a:solidFill>
                 <a:latin typeface="Cambria" pitchFamily="34" charset="0"/>
                 <a:ea typeface="Cambria" pitchFamily="34" charset="-122"/>
                 <a:cs typeface="Cambria" pitchFamily="34" charset="-120"/>
               </a:rPr>
-              <a:t> / tCO₂</a:t>
-            </a:r>
-            <a:endParaRPr lang="en-US" sz="4000" dirty="0"/>
+              <a:t>  combined-only</a:t>
+            </a:r>
+            <a:endParaRPr lang="en-US" sz="4400" dirty="0"/>
           </a:p>
         </p:txBody>
       </p:sp>
@@ -8629,8 +8882,8 @@
         </p:nvSpPr>
         <p:spPr>
           <a:xfrm>
-            <a:off x="731520" y="2331720"/>
-            <a:ext cx="5394960" cy="457200"/>
+            <a:off x="731520" y="2468880"/>
+            <a:ext cx="5486400" cy="594360"/>
           </a:xfrm>
           <a:prstGeom prst="rect">
             <a:avLst/>
@@ -8646,7 +8899,7 @@
               <a:buNone/>
             </a:pPr>
             <a:r>
-              <a:rPr lang="en-US" sz="1300" i="1" dirty="0">
+              <a:rPr lang="en-US" sz="1350" i="1" dirty="0">
                 <a:solidFill>
                   <a:srgbClr val="CBD6D9"/>
                 </a:solidFill>
@@ -8654,22 +8907,358 @@
                 <a:ea typeface="Calibri" pitchFamily="34" charset="-122"/>
                 <a:cs typeface="Calibri" pitchFamily="34" charset="-120"/>
               </a:rPr>
-              <a:t>median marginal abatement cost — well above today’s $150 VCM price</a:t>
-            </a:r>
-            <a:endParaRPr lang="en-US" sz="1300" dirty="0"/>
-          </a:p>
-        </p:txBody>
-      </p:sp>
-      <p:sp>
-        <p:nvSpPr>
-          <p:cNvPr id="8" name="Text 5"/>
-          <p:cNvSpPr/>
-          <p:nvPr/>
-        </p:nvSpPr>
-        <p:spPr>
-          <a:xfrm>
-            <a:off x="502920" y="3063240"/>
-            <a:ext cx="5760720" cy="914400"/>
+              <a:t>neither the yield return nor the carbon return alone covers cost — yet together the margin is positive.</a:t>
+            </a:r>
+            <a:endParaRPr lang="en-US" sz="1350" dirty="0"/>
+          </a:p>
+        </p:txBody>
+      </p:sp>
+      <p:sp>
+        <p:nvSpPr>
+          <p:cNvPr id="8" name="Shape 5"/>
+          <p:cNvSpPr/>
+          <p:nvPr/>
+        </p:nvSpPr>
+        <p:spPr>
+          <a:xfrm>
+            <a:off x="502920" y="3337560"/>
+            <a:ext cx="1874520" cy="1097280"/>
+          </a:xfrm>
+          <a:prstGeom prst="roundRect">
+            <a:avLst>
+              <a:gd name="adj" fmla="val 6667"/>
+            </a:avLst>
+          </a:prstGeom>
+          <a:solidFill>
+            <a:srgbClr val="FFFFFF"/>
+          </a:solidFill>
+          <a:ln w="12700">
+            <a:solidFill>
+              <a:srgbClr val="D5DDDE"/>
+            </a:solidFill>
+            <a:prstDash val="solid"/>
+          </a:ln>
+          <a:effectLst>
+            <a:outerShdw sx="100000" sy="100000" kx="0" ky="0" algn="bl" rotWithShape="0" blurRad="88900" dist="38100" dir="5400000">
+              <a:srgbClr val="000000">
+                <a:alpha val="13000"/>
+              </a:srgbClr>
+            </a:outerShdw>
+          </a:effectLst>
+        </p:spPr>
+      </p:sp>
+      <p:sp>
+        <p:nvSpPr>
+          <p:cNvPr id="9" name="Text 6"/>
+          <p:cNvSpPr/>
+          <p:nvPr/>
+        </p:nvSpPr>
+        <p:spPr>
+          <a:xfrm>
+            <a:off x="502920" y="3474720"/>
+            <a:ext cx="1874520" cy="548640"/>
+          </a:xfrm>
+          <a:prstGeom prst="rect">
+            <a:avLst/>
+          </a:prstGeom>
+          <a:noFill/>
+          <a:ln/>
+        </p:spPr>
+        <p:txBody>
+          <a:bodyPr wrap="square" lIns="0" tIns="0" rIns="0" bIns="0" rtlCol="0" anchor="ctr"/>
+          <a:lstStyle/>
+          <a:p>
+            <a:pPr algn="ctr" indent="0" marL="0">
+              <a:buNone/>
+            </a:pPr>
+            <a:r>
+              <a:rPr lang="en-US" sz="2600" b="1" dirty="0">
+                <a:solidFill>
+                  <a:srgbClr val="14232B"/>
+                </a:solidFill>
+                <a:latin typeface="Cambria" pitchFamily="34" charset="0"/>
+                <a:ea typeface="Cambria" pitchFamily="34" charset="-122"/>
+                <a:cs typeface="Cambria" pitchFamily="34" charset="-120"/>
+              </a:rPr>
+              <a:t>4.3</a:t>
+            </a:r>
+            <a:endParaRPr lang="en-US" sz="2600" dirty="0"/>
+          </a:p>
+        </p:txBody>
+      </p:sp>
+      <p:sp>
+        <p:nvSpPr>
+          <p:cNvPr id="10" name="Text 7"/>
+          <p:cNvSpPr/>
+          <p:nvPr/>
+        </p:nvSpPr>
+        <p:spPr>
+          <a:xfrm>
+            <a:off x="594360" y="4023360"/>
+            <a:ext cx="1691640" cy="365760"/>
+          </a:xfrm>
+          <a:prstGeom prst="rect">
+            <a:avLst/>
+          </a:prstGeom>
+          <a:noFill/>
+          <a:ln/>
+        </p:spPr>
+        <p:txBody>
+          <a:bodyPr wrap="square" lIns="0" tIns="0" rIns="0" bIns="0" rtlCol="0" anchor="ctr"/>
+          <a:lstStyle/>
+          <a:p>
+            <a:pPr algn="ctr" indent="0" marL="0">
+              <a:buNone/>
+            </a:pPr>
+            <a:r>
+              <a:rPr lang="en-US" sz="1150" dirty="0">
+                <a:solidFill>
+                  <a:srgbClr val="5B6B73"/>
+                </a:solidFill>
+                <a:latin typeface="Calibri" pitchFamily="34" charset="0"/>
+                <a:ea typeface="Calibri" pitchFamily="34" charset="-122"/>
+                <a:cs typeface="Calibri" pitchFamily="34" charset="-120"/>
+              </a:rPr>
+              <a:t>private (Mha)</a:t>
+            </a:r>
+            <a:endParaRPr lang="en-US" sz="1150" dirty="0"/>
+          </a:p>
+        </p:txBody>
+      </p:sp>
+      <p:sp>
+        <p:nvSpPr>
+          <p:cNvPr id="11" name="Shape 8"/>
+          <p:cNvSpPr/>
+          <p:nvPr/>
+        </p:nvSpPr>
+        <p:spPr>
+          <a:xfrm>
+            <a:off x="2542032" y="3337560"/>
+            <a:ext cx="1874520" cy="1097280"/>
+          </a:xfrm>
+          <a:prstGeom prst="roundRect">
+            <a:avLst>
+              <a:gd name="adj" fmla="val 6667"/>
+            </a:avLst>
+          </a:prstGeom>
+          <a:solidFill>
+            <a:srgbClr val="FFFFFF"/>
+          </a:solidFill>
+          <a:ln w="12700">
+            <a:solidFill>
+              <a:srgbClr val="D5DDDE"/>
+            </a:solidFill>
+            <a:prstDash val="solid"/>
+          </a:ln>
+          <a:effectLst>
+            <a:outerShdw sx="100000" sy="100000" kx="0" ky="0" algn="bl" rotWithShape="0" blurRad="88900" dist="38100" dir="5400000">
+              <a:srgbClr val="000000">
+                <a:alpha val="13000"/>
+              </a:srgbClr>
+            </a:outerShdw>
+          </a:effectLst>
+        </p:spPr>
+      </p:sp>
+      <p:sp>
+        <p:nvSpPr>
+          <p:cNvPr id="12" name="Text 9"/>
+          <p:cNvSpPr/>
+          <p:nvPr/>
+        </p:nvSpPr>
+        <p:spPr>
+          <a:xfrm>
+            <a:off x="2542032" y="3474720"/>
+            <a:ext cx="1874520" cy="548640"/>
+          </a:xfrm>
+          <a:prstGeom prst="rect">
+            <a:avLst/>
+          </a:prstGeom>
+          <a:noFill/>
+          <a:ln/>
+        </p:spPr>
+        <p:txBody>
+          <a:bodyPr wrap="square" lIns="0" tIns="0" rIns="0" bIns="0" rtlCol="0" anchor="ctr"/>
+          <a:lstStyle/>
+          <a:p>
+            <a:pPr algn="ctr" indent="0" marL="0">
+              <a:buNone/>
+            </a:pPr>
+            <a:r>
+              <a:rPr lang="en-US" sz="2600" b="1" dirty="0">
+                <a:solidFill>
+                  <a:srgbClr val="14232B"/>
+                </a:solidFill>
+                <a:latin typeface="Cambria" pitchFamily="34" charset="0"/>
+                <a:ea typeface="Cambria" pitchFamily="34" charset="-122"/>
+                <a:cs typeface="Cambria" pitchFamily="34" charset="-120"/>
+              </a:rPr>
+              <a:t>1.7</a:t>
+            </a:r>
+            <a:endParaRPr lang="en-US" sz="2600" dirty="0"/>
+          </a:p>
+        </p:txBody>
+      </p:sp>
+      <p:sp>
+        <p:nvSpPr>
+          <p:cNvPr id="13" name="Text 10"/>
+          <p:cNvSpPr/>
+          <p:nvPr/>
+        </p:nvSpPr>
+        <p:spPr>
+          <a:xfrm>
+            <a:off x="2633472" y="4023360"/>
+            <a:ext cx="1691640" cy="365760"/>
+          </a:xfrm>
+          <a:prstGeom prst="rect">
+            <a:avLst/>
+          </a:prstGeom>
+          <a:noFill/>
+          <a:ln/>
+        </p:spPr>
+        <p:txBody>
+          <a:bodyPr wrap="square" lIns="0" tIns="0" rIns="0" bIns="0" rtlCol="0" anchor="ctr"/>
+          <a:lstStyle/>
+          <a:p>
+            <a:pPr algn="ctr" indent="0" marL="0">
+              <a:buNone/>
+            </a:pPr>
+            <a:r>
+              <a:rPr lang="en-US" sz="1150" dirty="0">
+                <a:solidFill>
+                  <a:srgbClr val="5B6B73"/>
+                </a:solidFill>
+                <a:latin typeface="Calibri" pitchFamily="34" charset="0"/>
+                <a:ea typeface="Calibri" pitchFamily="34" charset="-122"/>
+                <a:cs typeface="Calibri" pitchFamily="34" charset="-120"/>
+              </a:rPr>
+              <a:t>public (Mha)</a:t>
+            </a:r>
+            <a:endParaRPr lang="en-US" sz="1150" dirty="0"/>
+          </a:p>
+        </p:txBody>
+      </p:sp>
+      <p:sp>
+        <p:nvSpPr>
+          <p:cNvPr id="14" name="Shape 11"/>
+          <p:cNvSpPr/>
+          <p:nvPr/>
+        </p:nvSpPr>
+        <p:spPr>
+          <a:xfrm>
+            <a:off x="4572000" y="3337560"/>
+            <a:ext cx="1874520" cy="1097280"/>
+          </a:xfrm>
+          <a:prstGeom prst="roundRect">
+            <a:avLst>
+              <a:gd name="adj" fmla="val 6667"/>
+            </a:avLst>
+          </a:prstGeom>
+          <a:solidFill>
+            <a:srgbClr val="FFFFFF"/>
+          </a:solidFill>
+          <a:ln w="12700">
+            <a:solidFill>
+              <a:srgbClr val="D5DDDE"/>
+            </a:solidFill>
+            <a:prstDash val="solid"/>
+          </a:ln>
+          <a:effectLst>
+            <a:outerShdw sx="100000" sy="100000" kx="0" ky="0" algn="bl" rotWithShape="0" blurRad="88900" dist="38100" dir="5400000">
+              <a:srgbClr val="000000">
+                <a:alpha val="13000"/>
+              </a:srgbClr>
+            </a:outerShdw>
+          </a:effectLst>
+        </p:spPr>
+      </p:sp>
+      <p:sp>
+        <p:nvSpPr>
+          <p:cNvPr id="15" name="Text 12"/>
+          <p:cNvSpPr/>
+          <p:nvPr/>
+        </p:nvSpPr>
+        <p:spPr>
+          <a:xfrm>
+            <a:off x="4572000" y="3474720"/>
+            <a:ext cx="1874520" cy="548640"/>
+          </a:xfrm>
+          <a:prstGeom prst="rect">
+            <a:avLst/>
+          </a:prstGeom>
+          <a:noFill/>
+          <a:ln/>
+        </p:spPr>
+        <p:txBody>
+          <a:bodyPr wrap="square" lIns="0" tIns="0" rIns="0" bIns="0" rtlCol="0" anchor="ctr"/>
+          <a:lstStyle/>
+          <a:p>
+            <a:pPr algn="ctr" indent="0" marL="0">
+              <a:buNone/>
+            </a:pPr>
+            <a:r>
+              <a:rPr lang="en-US" sz="2600" b="1" dirty="0">
+                <a:solidFill>
+                  <a:srgbClr val="14232B"/>
+                </a:solidFill>
+                <a:latin typeface="Cambria" pitchFamily="34" charset="0"/>
+                <a:ea typeface="Cambria" pitchFamily="34" charset="-122"/>
+                <a:cs typeface="Cambria" pitchFamily="34" charset="-120"/>
+              </a:rPr>
+              <a:t>6.9</a:t>
+            </a:r>
+            <a:endParaRPr lang="en-US" sz="2600" dirty="0"/>
+          </a:p>
+        </p:txBody>
+      </p:sp>
+      <p:sp>
+        <p:nvSpPr>
+          <p:cNvPr id="16" name="Text 13"/>
+          <p:cNvSpPr/>
+          <p:nvPr/>
+        </p:nvSpPr>
+        <p:spPr>
+          <a:xfrm>
+            <a:off x="4663440" y="4023360"/>
+            <a:ext cx="1691640" cy="365760"/>
+          </a:xfrm>
+          <a:prstGeom prst="rect">
+            <a:avLst/>
+          </a:prstGeom>
+          <a:noFill/>
+          <a:ln/>
+        </p:spPr>
+        <p:txBody>
+          <a:bodyPr wrap="square" lIns="0" tIns="0" rIns="0" bIns="0" rtlCol="0" anchor="ctr"/>
+          <a:lstStyle/>
+          <a:p>
+            <a:pPr algn="ctr" indent="0" marL="0">
+              <a:buNone/>
+            </a:pPr>
+            <a:r>
+              <a:rPr lang="en-US" sz="1150" dirty="0">
+                <a:solidFill>
+                  <a:srgbClr val="5B6B73"/>
+                </a:solidFill>
+                <a:latin typeface="Calibri" pitchFamily="34" charset="0"/>
+                <a:ea typeface="Calibri" pitchFamily="34" charset="-122"/>
+                <a:cs typeface="Calibri" pitchFamily="34" charset="-120"/>
+              </a:rPr>
+              <a:t>combined (Mha)</a:t>
+            </a:r>
+            <a:endParaRPr lang="en-US" sz="1150" dirty="0"/>
+          </a:p>
+        </p:txBody>
+      </p:sp>
+      <p:sp>
+        <p:nvSpPr>
+          <p:cNvPr id="17" name="Text 14"/>
+          <p:cNvSpPr/>
+          <p:nvPr/>
+        </p:nvSpPr>
+        <p:spPr>
+          <a:xfrm>
+            <a:off x="502920" y="4663440"/>
+            <a:ext cx="5943600" cy="1280160"/>
           </a:xfrm>
           <a:prstGeom prst="rect">
             <a:avLst/>
@@ -8683,54 +9272,29 @@
           <a:p>
             <a:pPr indent="0" marL="0">
               <a:lnSpc>
-                <a:spcPct val="103000"/>
+                <a:spcPct val="106000"/>
               </a:lnSpc>
               <a:buNone/>
             </a:pPr>
             <a:r>
-              <a:rPr lang="en-US" sz="1350" dirty="0">
-                <a:solidFill>
-                  <a:srgbClr val="3C4B52"/>
-                </a:solidFill>
-                <a:latin typeface="Calibri" pitchFamily="34" charset="0"/>
-                <a:ea typeface="Calibri" pitchFamily="34" charset="-122"/>
-                <a:cs typeface="Calibri" pitchFamily="34" charset="-120"/>
-              </a:rPr>
-              <a:t>MAC  =  delivered cost per tonne of rock  ÷  durable CDR per tonne.  The public envelope is exactly the land where MAC &lt; net price (p − m).</a:t>
-            </a:r>
-            <a:endParaRPr lang="en-US" sz="1350" dirty="0"/>
-          </a:p>
-        </p:txBody>
-      </p:sp>
-      <p:sp>
-        <p:nvSpPr>
-          <p:cNvPr id="9" name="Text 6"/>
-          <p:cNvSpPr/>
-          <p:nvPr/>
-        </p:nvSpPr>
-        <p:spPr>
-          <a:xfrm>
-            <a:off x="502920" y="4069080"/>
-            <a:ext cx="5760720" cy="1280160"/>
-          </a:xfrm>
-          <a:prstGeom prst="rect">
-            <a:avLst/>
-          </a:prstGeom>
-          <a:noFill/>
-          <a:ln/>
-        </p:spPr>
-        <p:txBody>
-          <a:bodyPr wrap="square" lIns="0" tIns="0" rIns="0" bIns="0" rtlCol="0" anchor="t"/>
-          <a:lstStyle/>
-          <a:p>
+              <a:rPr lang="en-US" sz="1400" b="1" dirty="0">
+                <a:solidFill>
+                  <a:srgbClr val="E8843C"/>
+                </a:solidFill>
+                <a:latin typeface="Calibri" pitchFamily="34" charset="0"/>
+                <a:ea typeface="Calibri" pitchFamily="34" charset="-122"/>
+                <a:cs typeface="Calibri" pitchFamily="34" charset="-120"/>
+              </a:rPr>
+              <a:t>The economic point:  </a:t>
+            </a:r>
             <a:pPr indent="0" marL="0">
               <a:lnSpc>
-                <a:spcPct val="105000"/>
+                <a:spcPct val="106000"/>
               </a:lnSpc>
               <a:buNone/>
             </a:pPr>
             <a:r>
-              <a:rPr lang="en-US" sz="1350" dirty="0">
+              <a:rPr lang="en-US" sz="1400" dirty="0">
                 <a:solidFill>
                   <a:srgbClr val="14232B"/>
                 </a:solidFill>
@@ -8738,49 +9302,15 @@
                 <a:ea typeface="Calibri" pitchFamily="34" charset="-122"/>
                 <a:cs typeface="Calibri" pitchFamily="34" charset="-120"/>
               </a:rPr>
-              <a:t>So the carbon case is limited by </a:t>
-            </a:r>
-            <a:pPr indent="0" marL="0">
-              <a:lnSpc>
-                <a:spcPct val="105000"/>
-              </a:lnSpc>
-              <a:buNone/>
-            </a:pPr>
-            <a:r>
-              <a:rPr lang="en-US" sz="1350" b="1" dirty="0">
-                <a:solidFill>
-                  <a:srgbClr val="1C6BA0"/>
-                </a:solidFill>
-                <a:latin typeface="Calibri" pitchFamily="34" charset="0"/>
-                <a:ea typeface="Calibri" pitchFamily="34" charset="-122"/>
-                <a:cs typeface="Calibri" pitchFamily="34" charset="-120"/>
-              </a:rPr>
-              <a:t>how much CO₂ a tonne of rock verifiably removes</a:t>
-            </a:r>
-            <a:pPr indent="0" marL="0">
-              <a:lnSpc>
-                <a:spcPct val="105000"/>
-              </a:lnSpc>
-              <a:buNone/>
-            </a:pPr>
-            <a:r>
-              <a:rPr lang="en-US" sz="1350" dirty="0">
-                <a:solidFill>
-                  <a:srgbClr val="14232B"/>
-                </a:solidFill>
-                <a:latin typeface="Calibri" pitchFamily="34" charset="0"/>
-                <a:ea typeface="Calibri" pitchFamily="34" charset="-122"/>
-                <a:cs typeface="Calibri" pitchFamily="34" charset="-120"/>
-              </a:rPr>
-              <a:t> — the largest and least-resolved lever, and the clear field-calibration priority.</a:t>
-            </a:r>
-            <a:endParaRPr lang="en-US" sz="1350" dirty="0"/>
-          </a:p>
-        </p:txBody>
-      </p:sp>
-      <p:sp>
-        <p:nvSpPr>
-          <p:cNvPr id="10" name="Text 7"/>
+              <a:t>voluntary carbon finance is not a bonus on an already-profitable practice — it is the marginal revenue that unlocks an otherwise-unprofitable, yield-improving investment.</a:t>
+            </a:r>
+            <a:endParaRPr lang="en-US" sz="1400" dirty="0"/>
+          </a:p>
+        </p:txBody>
+      </p:sp>
+      <p:sp>
+        <p:nvSpPr>
+          <p:cNvPr id="18" name="Text 15"/>
           <p:cNvSpPr/>
           <p:nvPr/>
         </p:nvSpPr>
@@ -8833,7 +9363,7 @@
       </p:sp>
       <p:sp>
         <p:nvSpPr>
-          <p:cNvPr id="11" name="Text 8"/>
+          <p:cNvPr id="19" name="Text 16"/>
           <p:cNvSpPr/>
           <p:nvPr/>
         </p:nvSpPr>
@@ -9426,7 +9956,7 @@
                 <a:ea typeface="Calibri" pitchFamily="34" charset="-122"/>
                 <a:cs typeface="Calibri" pitchFamily="34" charset="-120"/>
               </a:rPr>
-              <a:t>RESULTS · THREE LEVERS</a:t>
+              <a:t>RESULTS · WHAT BINDS THE CARBON CASE</a:t>
             </a:r>
             <a:endParaRPr lang="en-US" sz="1200" dirty="0"/>
           </a:p>
@@ -9465,7 +9995,7 @@
                 <a:ea typeface="Cambria" pitchFamily="34" charset="-122"/>
                 <a:cs typeface="Cambria" pitchFamily="34" charset="-120"/>
               </a:rPr>
-              <a:t>What shifts the public envelope outward</a:t>
+              <a:t>Marginal abatement cost, not kinetics</a:t>
             </a:r>
             <a:endParaRPr lang="en-US" sz="2900" dirty="0"/>
           </a:p>
@@ -9473,7 +10003,7 @@
       </p:sp>
       <p:pic>
         <p:nvPicPr>
-          <p:cNvPr id="4" name="Image 0" descr="img/public_area_vs_price.png">    </p:cNvPr>
+          <p:cNvPr id="4" name="Image 0" descr="img/mac_targeted_eqnx.png">    </p:cNvPr>
           <p:cNvPicPr>
             <a:picLocks noChangeAspect="1"/>
           </p:cNvPicPr>
@@ -9486,8 +10016,8 @@
         </p:blipFill>
         <p:spPr>
           <a:xfrm>
-            <a:off x="6675120" y="1737360"/>
-            <a:ext cx="5029200" cy="3566160"/>
+            <a:off x="6583680" y="1463040"/>
+            <a:ext cx="5120640" cy="4206240"/>
           </a:xfrm>
           <a:prstGeom prst="rect">
             <a:avLst/>
@@ -9502,7 +10032,7 @@
         </p:nvSpPr>
         <p:spPr>
           <a:xfrm>
-            <a:off x="502920" y="1600200"/>
+            <a:off x="502920" y="1508760"/>
             <a:ext cx="5760720" cy="1371600"/>
           </a:xfrm>
           <a:prstGeom prst="roundRect">
@@ -9511,7 +10041,7 @@
             </a:avLst>
           </a:prstGeom>
           <a:solidFill>
-            <a:srgbClr val="EFF4F8"/>
+            <a:srgbClr val="14232B"/>
           </a:solidFill>
           <a:ln w="12700">
             <a:solidFill>
@@ -9530,34 +10060,14 @@
       </p:sp>
       <p:sp>
         <p:nvSpPr>
-          <p:cNvPr id="6" name="Shape 3"/>
-          <p:cNvSpPr/>
-          <p:nvPr/>
-        </p:nvSpPr>
-        <p:spPr>
-          <a:xfrm>
-            <a:off x="685800" y="2011680"/>
-            <a:ext cx="548640" cy="548640"/>
-          </a:xfrm>
-          <a:prstGeom prst="ellipse">
-            <a:avLst/>
-          </a:prstGeom>
-          <a:solidFill>
-            <a:srgbClr val="1C6BA0"/>
-          </a:solidFill>
-          <a:ln/>
-        </p:spPr>
-      </p:sp>
-      <p:sp>
-        <p:nvSpPr>
-          <p:cNvPr id="7" name="Text 4"/>
-          <p:cNvSpPr/>
-          <p:nvPr/>
-        </p:nvSpPr>
-        <p:spPr>
-          <a:xfrm>
-            <a:off x="685800" y="2011680"/>
-            <a:ext cx="548640" cy="548640"/>
+          <p:cNvPr id="6" name="Text 3"/>
+          <p:cNvSpPr/>
+          <p:nvPr/>
+        </p:nvSpPr>
+        <p:spPr>
+          <a:xfrm>
+            <a:off x="731520" y="1645920"/>
+            <a:ext cx="5394960" cy="640080"/>
           </a:xfrm>
           <a:prstGeom prst="rect">
             <a:avLst/>
@@ -9569,11 +10079,11 @@
           <a:bodyPr wrap="square" lIns="0" tIns="0" rIns="0" bIns="0" rtlCol="0" anchor="ctr"/>
           <a:lstStyle/>
           <a:p>
-            <a:pPr algn="ctr" indent="0" marL="0">
-              <a:buNone/>
-            </a:pPr>
-            <a:r>
-              <a:rPr lang="en-US" sz="2000" b="1" dirty="0">
+            <a:pPr indent="0" marL="0">
+              <a:buNone/>
+            </a:pPr>
+            <a:r>
+              <a:rPr lang="en-US" sz="4000" b="1" dirty="0">
                 <a:solidFill>
                   <a:srgbClr val="FFFFFF"/>
                 </a:solidFill>
@@ -9581,175 +10091,75 @@
                 <a:ea typeface="Cambria" pitchFamily="34" charset="-122"/>
                 <a:cs typeface="Cambria" pitchFamily="34" charset="-120"/>
               </a:rPr>
-              <a:t>1</a:t>
-            </a:r>
-            <a:endParaRPr lang="en-US" sz="2000" dirty="0"/>
-          </a:p>
-        </p:txBody>
-      </p:sp>
-      <p:sp>
-        <p:nvSpPr>
-          <p:cNvPr id="8" name="Text 5"/>
-          <p:cNvSpPr/>
-          <p:nvPr/>
-        </p:nvSpPr>
-        <p:spPr>
-          <a:xfrm>
-            <a:off x="1417320" y="1737360"/>
-            <a:ext cx="4709160" cy="1097280"/>
-          </a:xfrm>
-          <a:prstGeom prst="rect">
-            <a:avLst/>
-          </a:prstGeom>
-          <a:noFill/>
-          <a:ln/>
-        </p:spPr>
-        <p:txBody>
-          <a:bodyPr wrap="square" lIns="0" tIns="0" rIns="0" bIns="0" rtlCol="0" anchor="t"/>
-          <a:lstStyle/>
-          <a:p>
-            <a:pPr indent="0" marL="0">
-              <a:lnSpc>
-                <a:spcPct val="102000"/>
-              </a:lnSpc>
-              <a:buNone/>
-            </a:pPr>
-            <a:r>
-              <a:rPr lang="en-US" sz="1400" b="1" dirty="0">
-                <a:solidFill>
-                  <a:srgbClr val="14232B"/>
-                </a:solidFill>
-                <a:latin typeface="Calibri" pitchFamily="34" charset="0"/>
-                <a:ea typeface="Calibri" pitchFamily="34" charset="-122"/>
-                <a:cs typeface="Calibri" pitchFamily="34" charset="-120"/>
-              </a:rPr>
-              <a:t>Higher VCM price (p)
-</a:t>
-            </a:r>
-            <a:pPr indent="0" marL="0">
-              <a:lnSpc>
-                <a:spcPct val="102000"/>
-              </a:lnSpc>
-              <a:buNone/>
-            </a:pPr>
-            <a:r>
-              <a:rPr lang="en-US" sz="1250" dirty="0">
-                <a:solidFill>
-                  <a:srgbClr val="3C4B52"/>
-                </a:solidFill>
-                <a:latin typeface="Calibri" pitchFamily="34" charset="0"/>
-                <a:ea typeface="Calibri" pitchFamily="34" charset="-122"/>
-                <a:cs typeface="Calibri" pitchFamily="34" charset="-120"/>
-              </a:rPr>
-              <a:t>Public area climbs from 2% of treated cropland at $100 to ~50% at $500. The most direct lever.</a:t>
-            </a:r>
-            <a:endParaRPr lang="en-US" sz="1400" dirty="0"/>
-          </a:p>
-        </p:txBody>
-      </p:sp>
-      <p:sp>
-        <p:nvSpPr>
-          <p:cNvPr id="9" name="Shape 6"/>
-          <p:cNvSpPr/>
-          <p:nvPr/>
-        </p:nvSpPr>
-        <p:spPr>
-          <a:xfrm>
-            <a:off x="502920" y="3081528"/>
-            <a:ext cx="5760720" cy="1371600"/>
-          </a:xfrm>
-          <a:prstGeom prst="roundRect">
-            <a:avLst>
-              <a:gd name="adj" fmla="val 5333"/>
-            </a:avLst>
-          </a:prstGeom>
-          <a:solidFill>
-            <a:srgbClr val="EFF4F8"/>
-          </a:solidFill>
-          <a:ln w="12700">
-            <a:solidFill>
-              <a:srgbClr val="D5DDDE"/>
-            </a:solidFill>
-            <a:prstDash val="solid"/>
-          </a:ln>
-          <a:effectLst>
-            <a:outerShdw sx="100000" sy="100000" kx="0" ky="0" algn="bl" rotWithShape="0" blurRad="88900" dist="38100" dir="5400000">
-              <a:srgbClr val="000000">
-                <a:alpha val="13000"/>
-              </a:srgbClr>
-            </a:outerShdw>
-          </a:effectLst>
-        </p:spPr>
-      </p:sp>
-      <p:sp>
-        <p:nvSpPr>
-          <p:cNvPr id="10" name="Shape 7"/>
-          <p:cNvSpPr/>
-          <p:nvPr/>
-        </p:nvSpPr>
-        <p:spPr>
-          <a:xfrm>
-            <a:off x="685800" y="3493008"/>
-            <a:ext cx="548640" cy="548640"/>
-          </a:xfrm>
-          <a:prstGeom prst="ellipse">
-            <a:avLst/>
-          </a:prstGeom>
-          <a:solidFill>
-            <a:srgbClr val="1C6BA0"/>
-          </a:solidFill>
-          <a:ln/>
-        </p:spPr>
-      </p:sp>
-      <p:sp>
-        <p:nvSpPr>
-          <p:cNvPr id="11" name="Text 8"/>
-          <p:cNvSpPr/>
-          <p:nvPr/>
-        </p:nvSpPr>
-        <p:spPr>
-          <a:xfrm>
-            <a:off x="685800" y="3493008"/>
-            <a:ext cx="548640" cy="548640"/>
-          </a:xfrm>
-          <a:prstGeom prst="rect">
-            <a:avLst/>
-          </a:prstGeom>
-          <a:noFill/>
-          <a:ln/>
-        </p:spPr>
-        <p:txBody>
-          <a:bodyPr wrap="square" lIns="0" tIns="0" rIns="0" bIns="0" rtlCol="0" anchor="ctr"/>
-          <a:lstStyle/>
-          <a:p>
-            <a:pPr algn="ctr" indent="0" marL="0">
-              <a:buNone/>
-            </a:pPr>
-            <a:r>
-              <a:rPr lang="en-US" sz="2000" b="1" dirty="0">
-                <a:solidFill>
-                  <a:srgbClr val="FFFFFF"/>
+              <a:t>$446</a:t>
+            </a:r>
+            <a:pPr indent="0" marL="0">
+              <a:buNone/>
+            </a:pPr>
+            <a:r>
+              <a:rPr lang="en-US" sz="2000" dirty="0">
+                <a:solidFill>
+                  <a:srgbClr val="9FB2B8"/>
                 </a:solidFill>
                 <a:latin typeface="Cambria" pitchFamily="34" charset="0"/>
                 <a:ea typeface="Cambria" pitchFamily="34" charset="-122"/>
                 <a:cs typeface="Cambria" pitchFamily="34" charset="-120"/>
               </a:rPr>
-              <a:t>2</a:t>
-            </a:r>
-            <a:endParaRPr lang="en-US" sz="2000" dirty="0"/>
-          </a:p>
-        </p:txBody>
-      </p:sp>
-      <p:sp>
-        <p:nvSpPr>
-          <p:cNvPr id="12" name="Text 9"/>
-          <p:cNvSpPr/>
-          <p:nvPr/>
-        </p:nvSpPr>
-        <p:spPr>
-          <a:xfrm>
-            <a:off x="1417320" y="3218688"/>
-            <a:ext cx="4709160" cy="1097280"/>
+              <a:t> / tCO₂</a:t>
+            </a:r>
+            <a:endParaRPr lang="en-US" sz="4000" dirty="0"/>
+          </a:p>
+        </p:txBody>
+      </p:sp>
+      <p:sp>
+        <p:nvSpPr>
+          <p:cNvPr id="7" name="Text 4"/>
+          <p:cNvSpPr/>
+          <p:nvPr/>
+        </p:nvSpPr>
+        <p:spPr>
+          <a:xfrm>
+            <a:off x="731520" y="2331720"/>
+            <a:ext cx="5394960" cy="457200"/>
+          </a:xfrm>
+          <a:prstGeom prst="rect">
+            <a:avLst/>
+          </a:prstGeom>
+          <a:noFill/>
+          <a:ln/>
+        </p:spPr>
+        <p:txBody>
+          <a:bodyPr wrap="square" lIns="0" tIns="0" rIns="0" bIns="0" rtlCol="0" anchor="ctr"/>
+          <a:lstStyle/>
+          <a:p>
+            <a:pPr indent="0" marL="0">
+              <a:buNone/>
+            </a:pPr>
+            <a:r>
+              <a:rPr lang="en-US" sz="1300" i="1" dirty="0">
+                <a:solidFill>
+                  <a:srgbClr val="CBD6D9"/>
+                </a:solidFill>
+                <a:latin typeface="Calibri" pitchFamily="34" charset="0"/>
+                <a:ea typeface="Calibri" pitchFamily="34" charset="-122"/>
+                <a:cs typeface="Calibri" pitchFamily="34" charset="-120"/>
+              </a:rPr>
+              <a:t>median marginal abatement cost — well above today’s $150 VCM price</a:t>
+            </a:r>
+            <a:endParaRPr lang="en-US" sz="1300" dirty="0"/>
+          </a:p>
+        </p:txBody>
+      </p:sp>
+      <p:sp>
+        <p:nvSpPr>
+          <p:cNvPr id="8" name="Text 5"/>
+          <p:cNvSpPr/>
+          <p:nvPr/>
+        </p:nvSpPr>
+        <p:spPr>
+          <a:xfrm>
+            <a:off x="502920" y="3063240"/>
+            <a:ext cx="5760720" cy="914400"/>
           </a:xfrm>
           <a:prstGeom prst="rect">
             <a:avLst/>
@@ -9763,12 +10173,54 @@
           <a:p>
             <a:pPr indent="0" marL="0">
               <a:lnSpc>
-                <a:spcPct val="102000"/>
+                <a:spcPct val="103000"/>
               </a:lnSpc>
               <a:buNone/>
             </a:pPr>
             <a:r>
-              <a:rPr lang="en-US" sz="1400" b="1" dirty="0">
+              <a:rPr lang="en-US" sz="1350" dirty="0">
+                <a:solidFill>
+                  <a:srgbClr val="3C4B52"/>
+                </a:solidFill>
+                <a:latin typeface="Calibri" pitchFamily="34" charset="0"/>
+                <a:ea typeface="Calibri" pitchFamily="34" charset="-122"/>
+                <a:cs typeface="Calibri" pitchFamily="34" charset="-120"/>
+              </a:rPr>
+              <a:t>MAC  =  delivered cost per tonne of rock  ÷  durable CDR per tonne.  The public envelope is exactly the land where MAC &lt; net price (p − m).</a:t>
+            </a:r>
+            <a:endParaRPr lang="en-US" sz="1350" dirty="0"/>
+          </a:p>
+        </p:txBody>
+      </p:sp>
+      <p:sp>
+        <p:nvSpPr>
+          <p:cNvPr id="9" name="Text 6"/>
+          <p:cNvSpPr/>
+          <p:nvPr/>
+        </p:nvSpPr>
+        <p:spPr>
+          <a:xfrm>
+            <a:off x="502920" y="4069080"/>
+            <a:ext cx="5760720" cy="1280160"/>
+          </a:xfrm>
+          <a:prstGeom prst="rect">
+            <a:avLst/>
+          </a:prstGeom>
+          <a:noFill/>
+          <a:ln/>
+        </p:spPr>
+        <p:txBody>
+          <a:bodyPr wrap="square" lIns="0" tIns="0" rIns="0" bIns="0" rtlCol="0" anchor="t"/>
+          <a:lstStyle/>
+          <a:p>
+            <a:pPr indent="0" marL="0">
+              <a:lnSpc>
+                <a:spcPct val="105000"/>
+              </a:lnSpc>
+              <a:buNone/>
+            </a:pPr>
+            <a:r>
+              <a:rPr lang="en-US" sz="1350" dirty="0">
                 <a:solidFill>
                   <a:srgbClr val="14232B"/>
                 </a:solidFill>
@@ -9776,152 +10228,33 @@
                 <a:ea typeface="Calibri" pitchFamily="34" charset="-122"/>
                 <a:cs typeface="Calibri" pitchFamily="34" charset="-120"/>
               </a:rPr>
-              <a:t>Lower delivered cost (C)
-</a:t>
+              <a:t>So the carbon case is limited by </a:t>
             </a:r>
             <a:pPr indent="0" marL="0">
               <a:lnSpc>
-                <a:spcPct val="102000"/>
+                <a:spcPct val="105000"/>
               </a:lnSpc>
               <a:buNone/>
             </a:pPr>
             <a:r>
-              <a:rPr lang="en-US" sz="1250" dirty="0">
-                <a:solidFill>
-                  <a:srgbClr val="3C4B52"/>
-                </a:solidFill>
-                <a:latin typeface="Calibri" pitchFamily="34" charset="0"/>
-                <a:ea typeface="Calibri" pitchFamily="34" charset="-122"/>
-                <a:cs typeface="Calibri" pitchFamily="34" charset="-120"/>
-              </a:rPr>
-              <a:t>Transport-cost reductions (e.g. solar haulage) lower MAC pixel-by-pixel — see Assumption 1.</a:t>
-            </a:r>
-            <a:endParaRPr lang="en-US" sz="1400" dirty="0"/>
-          </a:p>
-        </p:txBody>
-      </p:sp>
-      <p:sp>
-        <p:nvSpPr>
-          <p:cNvPr id="13" name="Shape 10"/>
-          <p:cNvSpPr/>
-          <p:nvPr/>
-        </p:nvSpPr>
-        <p:spPr>
-          <a:xfrm>
-            <a:off x="502920" y="4562856"/>
-            <a:ext cx="5760720" cy="1371600"/>
-          </a:xfrm>
-          <a:prstGeom prst="roundRect">
-            <a:avLst>
-              <a:gd name="adj" fmla="val 5333"/>
-            </a:avLst>
-          </a:prstGeom>
-          <a:solidFill>
-            <a:srgbClr val="EFF4F8"/>
-          </a:solidFill>
-          <a:ln w="12700">
-            <a:solidFill>
-              <a:srgbClr val="D5DDDE"/>
-            </a:solidFill>
-            <a:prstDash val="solid"/>
-          </a:ln>
-          <a:effectLst>
-            <a:outerShdw sx="100000" sy="100000" kx="0" ky="0" algn="bl" rotWithShape="0" blurRad="88900" dist="38100" dir="5400000">
-              <a:srgbClr val="000000">
-                <a:alpha val="13000"/>
-              </a:srgbClr>
-            </a:outerShdw>
-          </a:effectLst>
-        </p:spPr>
-      </p:sp>
-      <p:sp>
-        <p:nvSpPr>
-          <p:cNvPr id="14" name="Shape 11"/>
-          <p:cNvSpPr/>
-          <p:nvPr/>
-        </p:nvSpPr>
-        <p:spPr>
-          <a:xfrm>
-            <a:off x="685800" y="4974336"/>
-            <a:ext cx="548640" cy="548640"/>
-          </a:xfrm>
-          <a:prstGeom prst="ellipse">
-            <a:avLst/>
-          </a:prstGeom>
-          <a:solidFill>
-            <a:srgbClr val="1C6BA0"/>
-          </a:solidFill>
-          <a:ln/>
-        </p:spPr>
-      </p:sp>
-      <p:sp>
-        <p:nvSpPr>
-          <p:cNvPr id="15" name="Text 12"/>
-          <p:cNvSpPr/>
-          <p:nvPr/>
-        </p:nvSpPr>
-        <p:spPr>
-          <a:xfrm>
-            <a:off x="685800" y="4974336"/>
-            <a:ext cx="548640" cy="548640"/>
-          </a:xfrm>
-          <a:prstGeom prst="rect">
-            <a:avLst/>
-          </a:prstGeom>
-          <a:noFill/>
-          <a:ln/>
-        </p:spPr>
-        <p:txBody>
-          <a:bodyPr wrap="square" lIns="0" tIns="0" rIns="0" bIns="0" rtlCol="0" anchor="ctr"/>
-          <a:lstStyle/>
-          <a:p>
-            <a:pPr algn="ctr" indent="0" marL="0">
-              <a:buNone/>
-            </a:pPr>
-            <a:r>
-              <a:rPr lang="en-US" sz="2000" b="1" dirty="0">
-                <a:solidFill>
-                  <a:srgbClr val="FFFFFF"/>
-                </a:solidFill>
-                <a:latin typeface="Cambria" pitchFamily="34" charset="0"/>
-                <a:ea typeface="Cambria" pitchFamily="34" charset="-122"/>
-                <a:cs typeface="Cambria" pitchFamily="34" charset="-120"/>
-              </a:rPr>
-              <a:t>3</a:t>
-            </a:r>
-            <a:endParaRPr lang="en-US" sz="2000" dirty="0"/>
-          </a:p>
-        </p:txBody>
-      </p:sp>
-      <p:sp>
-        <p:nvSpPr>
-          <p:cNvPr id="16" name="Text 13"/>
-          <p:cNvSpPr/>
-          <p:nvPr/>
-        </p:nvSpPr>
-        <p:spPr>
-          <a:xfrm>
-            <a:off x="1417320" y="4700016"/>
-            <a:ext cx="4709160" cy="1097280"/>
-          </a:xfrm>
-          <a:prstGeom prst="rect">
-            <a:avLst/>
-          </a:prstGeom>
-          <a:noFill/>
-          <a:ln/>
-        </p:spPr>
-        <p:txBody>
-          <a:bodyPr wrap="square" lIns="0" tIns="0" rIns="0" bIns="0" rtlCol="0" anchor="t"/>
-          <a:lstStyle/>
-          <a:p>
+              <a:rPr lang="en-US" sz="1350" b="1" dirty="0">
+                <a:solidFill>
+                  <a:srgbClr val="1C6BA0"/>
+                </a:solidFill>
+                <a:latin typeface="Calibri" pitchFamily="34" charset="0"/>
+                <a:ea typeface="Calibri" pitchFamily="34" charset="-122"/>
+                <a:cs typeface="Calibri" pitchFamily="34" charset="-120"/>
+              </a:rPr>
+              <a:t>how much CO₂ a tonne of rock verifiably removes</a:t>
+            </a:r>
             <a:pPr indent="0" marL="0">
               <a:lnSpc>
-                <a:spcPct val="102000"/>
+                <a:spcPct val="105000"/>
               </a:lnSpc>
               <a:buNone/>
             </a:pPr>
             <a:r>
-              <a:rPr lang="en-US" sz="1400" b="1" dirty="0">
+              <a:rPr lang="en-US" sz="1350" dirty="0">
                 <a:solidFill>
                   <a:srgbClr val="14232B"/>
                 </a:solidFill>
@@ -9929,33 +10262,15 @@
                 <a:ea typeface="Calibri" pitchFamily="34" charset="-122"/>
                 <a:cs typeface="Calibri" pitchFamily="34" charset="-120"/>
               </a:rPr>
-              <a:t>More durable CDR per tonne
-</a:t>
-            </a:r>
-            <a:pPr indent="0" marL="0">
-              <a:lnSpc>
-                <a:spcPct val="102000"/>
-              </a:lnSpc>
-              <a:buNone/>
-            </a:pPr>
-            <a:r>
-              <a:rPr lang="en-US" sz="1250" dirty="0">
-                <a:solidFill>
-                  <a:srgbClr val="3C4B52"/>
-                </a:solidFill>
-                <a:latin typeface="Calibri" pitchFamily="34" charset="0"/>
-                <a:ea typeface="Calibri" pitchFamily="34" charset="-122"/>
-                <a:cs typeface="Calibri" pitchFamily="34" charset="-120"/>
-              </a:rPr>
-              <a:t>Raising verified removal per tonne of rock cuts MAC directly. Kinetic saturation is second-order here.</a:t>
-            </a:r>
-            <a:endParaRPr lang="en-US" sz="1400" dirty="0"/>
-          </a:p>
-        </p:txBody>
-      </p:sp>
-      <p:sp>
-        <p:nvSpPr>
-          <p:cNvPr id="17" name="Text 14"/>
+              <a:t> — the largest and least-resolved lever, and the clear field-calibration priority.</a:t>
+            </a:r>
+            <a:endParaRPr lang="en-US" sz="1350" dirty="0"/>
+          </a:p>
+        </p:txBody>
+      </p:sp>
+      <p:sp>
+        <p:nvSpPr>
+          <p:cNvPr id="10" name="Text 7"/>
           <p:cNvSpPr/>
           <p:nvPr/>
         </p:nvSpPr>
@@ -10008,7 +10323,7 @@
       </p:sp>
       <p:sp>
         <p:nvSpPr>
-          <p:cNvPr id="18" name="Text 15"/>
+          <p:cNvPr id="11" name="Text 8"/>
           <p:cNvSpPr/>
           <p:nvPr/>
         </p:nvSpPr>
@@ -10104,13 +10419,13 @@
             <a:r>
               <a:rPr lang="en-US" sz="1200" b="1" spc="200" kern="0" dirty="0">
                 <a:solidFill>
-                  <a:srgbClr val="0F6E63"/>
-                </a:solidFill>
-                <a:latin typeface="Calibri" pitchFamily="34" charset="0"/>
-                <a:ea typeface="Calibri" pitchFamily="34" charset="-122"/>
-                <a:cs typeface="Calibri" pitchFamily="34" charset="-120"/>
-              </a:rPr>
-              <a:t>RESULTS · OPTIMAL APPLICATION RATES</a:t>
+                  <a:srgbClr val="1C6BA0"/>
+                </a:solidFill>
+                <a:latin typeface="Calibri" pitchFamily="34" charset="0"/>
+                <a:ea typeface="Calibri" pitchFamily="34" charset="-122"/>
+                <a:cs typeface="Calibri" pitchFamily="34" charset="-120"/>
+              </a:rPr>
+              <a:t>RESULTS · THREE LEVERS</a:t>
             </a:r>
             <a:endParaRPr lang="en-US" sz="1200" dirty="0"/>
           </a:p>
@@ -10149,7 +10464,7 @@
                 <a:ea typeface="Cambria" pitchFamily="34" charset="-122"/>
                 <a:cs typeface="Cambria" pitchFamily="34" charset="-120"/>
               </a:rPr>
-              <a:t>Each objective has an interior optimum</a:t>
+              <a:t>What shifts the public envelope outward</a:t>
             </a:r>
             <a:endParaRPr lang="en-US" sz="2900" dirty="0"/>
           </a:p>
@@ -10157,7 +10472,7 @@
       </p:sp>
       <p:pic>
         <p:nvPicPr>
-          <p:cNvPr id="4" name="Image 0" descr="img/optrate_panel.png">    </p:cNvPr>
+          <p:cNvPr id="4" name="Image 0" descr="img/public_area_vs_price.png">    </p:cNvPr>
           <p:cNvPicPr>
             <a:picLocks noChangeAspect="1"/>
           </p:cNvPicPr>
@@ -10170,8 +10485,8 @@
         </p:blipFill>
         <p:spPr>
           <a:xfrm>
-            <a:off x="502920" y="1508760"/>
-            <a:ext cx="11155680" cy="3657600"/>
+            <a:off x="6675120" y="1737360"/>
+            <a:ext cx="5029200" cy="3566160"/>
           </a:xfrm>
           <a:prstGeom prst="rect">
             <a:avLst/>
@@ -10180,14 +10495,107 @@
       </p:pic>
       <p:sp>
         <p:nvSpPr>
-          <p:cNvPr id="5" name="Text 2"/>
-          <p:cNvSpPr/>
-          <p:nvPr/>
-        </p:nvSpPr>
-        <p:spPr>
-          <a:xfrm>
-            <a:off x="502920" y="5303520"/>
-            <a:ext cx="11155680" cy="1097280"/>
+          <p:cNvPr id="5" name="Shape 2"/>
+          <p:cNvSpPr/>
+          <p:nvPr/>
+        </p:nvSpPr>
+        <p:spPr>
+          <a:xfrm>
+            <a:off x="502920" y="1600200"/>
+            <a:ext cx="5760720" cy="1371600"/>
+          </a:xfrm>
+          <a:prstGeom prst="roundRect">
+            <a:avLst>
+              <a:gd name="adj" fmla="val 5333"/>
+            </a:avLst>
+          </a:prstGeom>
+          <a:solidFill>
+            <a:srgbClr val="EFF4F8"/>
+          </a:solidFill>
+          <a:ln w="12700">
+            <a:solidFill>
+              <a:srgbClr val="D5DDDE"/>
+            </a:solidFill>
+            <a:prstDash val="solid"/>
+          </a:ln>
+          <a:effectLst>
+            <a:outerShdw sx="100000" sy="100000" kx="0" ky="0" algn="bl" rotWithShape="0" blurRad="88900" dist="38100" dir="5400000">
+              <a:srgbClr val="000000">
+                <a:alpha val="13000"/>
+              </a:srgbClr>
+            </a:outerShdw>
+          </a:effectLst>
+        </p:spPr>
+      </p:sp>
+      <p:sp>
+        <p:nvSpPr>
+          <p:cNvPr id="6" name="Shape 3"/>
+          <p:cNvSpPr/>
+          <p:nvPr/>
+        </p:nvSpPr>
+        <p:spPr>
+          <a:xfrm>
+            <a:off x="685800" y="2011680"/>
+            <a:ext cx="548640" cy="548640"/>
+          </a:xfrm>
+          <a:prstGeom prst="ellipse">
+            <a:avLst/>
+          </a:prstGeom>
+          <a:solidFill>
+            <a:srgbClr val="1C6BA0"/>
+          </a:solidFill>
+          <a:ln/>
+        </p:spPr>
+      </p:sp>
+      <p:sp>
+        <p:nvSpPr>
+          <p:cNvPr id="7" name="Text 4"/>
+          <p:cNvSpPr/>
+          <p:nvPr/>
+        </p:nvSpPr>
+        <p:spPr>
+          <a:xfrm>
+            <a:off x="685800" y="2011680"/>
+            <a:ext cx="548640" cy="548640"/>
+          </a:xfrm>
+          <a:prstGeom prst="rect">
+            <a:avLst/>
+          </a:prstGeom>
+          <a:noFill/>
+          <a:ln/>
+        </p:spPr>
+        <p:txBody>
+          <a:bodyPr wrap="square" lIns="0" tIns="0" rIns="0" bIns="0" rtlCol="0" anchor="ctr"/>
+          <a:lstStyle/>
+          <a:p>
+            <a:pPr algn="ctr" indent="0" marL="0">
+              <a:buNone/>
+            </a:pPr>
+            <a:r>
+              <a:rPr lang="en-US" sz="2000" b="1" dirty="0">
+                <a:solidFill>
+                  <a:srgbClr val="FFFFFF"/>
+                </a:solidFill>
+                <a:latin typeface="Cambria" pitchFamily="34" charset="0"/>
+                <a:ea typeface="Cambria" pitchFamily="34" charset="-122"/>
+                <a:cs typeface="Cambria" pitchFamily="34" charset="-120"/>
+              </a:rPr>
+              <a:t>1</a:t>
+            </a:r>
+            <a:endParaRPr lang="en-US" sz="2000" dirty="0"/>
+          </a:p>
+        </p:txBody>
+      </p:sp>
+      <p:sp>
+        <p:nvSpPr>
+          <p:cNvPr id="8" name="Text 5"/>
+          <p:cNvSpPr/>
+          <p:nvPr/>
+        </p:nvSpPr>
+        <p:spPr>
+          <a:xfrm>
+            <a:off x="1417320" y="1737360"/>
+            <a:ext cx="4709160" cy="1097280"/>
           </a:xfrm>
           <a:prstGeom prst="rect">
             <a:avLst/>
@@ -10201,12 +10609,12 @@
           <a:p>
             <a:pPr indent="0" marL="0">
               <a:lnSpc>
-                <a:spcPct val="105000"/>
+                <a:spcPct val="102000"/>
               </a:lnSpc>
               <a:buNone/>
             </a:pPr>
             <a:r>
-              <a:rPr lang="en-US" sz="1400" dirty="0">
+              <a:rPr lang="en-US" sz="1400" b="1" dirty="0">
                 <a:solidFill>
                   <a:srgbClr val="14232B"/>
                 </a:solidFill>
@@ -10214,15 +10622,151 @@
                 <a:ea typeface="Calibri" pitchFamily="34" charset="-122"/>
                 <a:cs typeface="Calibri" pitchFamily="34" charset="-120"/>
               </a:rPr>
-              <a:t>With both refinements, each per-pixel objective is concave — so a pixel-specific </a:t>
+              <a:t>Higher VCM price (p)
+</a:t>
             </a:r>
             <a:pPr indent="0" marL="0">
               <a:lnSpc>
-                <a:spcPct val="105000"/>
+                <a:spcPct val="102000"/>
               </a:lnSpc>
               <a:buNone/>
             </a:pPr>
             <a:r>
+              <a:rPr lang="en-US" sz="1250" dirty="0">
+                <a:solidFill>
+                  <a:srgbClr val="3C4B52"/>
+                </a:solidFill>
+                <a:latin typeface="Calibri" pitchFamily="34" charset="0"/>
+                <a:ea typeface="Calibri" pitchFamily="34" charset="-122"/>
+                <a:cs typeface="Calibri" pitchFamily="34" charset="-120"/>
+              </a:rPr>
+              <a:t>Public area climbs from 2% of treated cropland at $100 to ~50% at $500. The most direct lever.</a:t>
+            </a:r>
+            <a:endParaRPr lang="en-US" sz="1400" dirty="0"/>
+          </a:p>
+        </p:txBody>
+      </p:sp>
+      <p:sp>
+        <p:nvSpPr>
+          <p:cNvPr id="9" name="Shape 6"/>
+          <p:cNvSpPr/>
+          <p:nvPr/>
+        </p:nvSpPr>
+        <p:spPr>
+          <a:xfrm>
+            <a:off x="502920" y="3081528"/>
+            <a:ext cx="5760720" cy="1371600"/>
+          </a:xfrm>
+          <a:prstGeom prst="roundRect">
+            <a:avLst>
+              <a:gd name="adj" fmla="val 5333"/>
+            </a:avLst>
+          </a:prstGeom>
+          <a:solidFill>
+            <a:srgbClr val="EFF4F8"/>
+          </a:solidFill>
+          <a:ln w="12700">
+            <a:solidFill>
+              <a:srgbClr val="D5DDDE"/>
+            </a:solidFill>
+            <a:prstDash val="solid"/>
+          </a:ln>
+          <a:effectLst>
+            <a:outerShdw sx="100000" sy="100000" kx="0" ky="0" algn="bl" rotWithShape="0" blurRad="88900" dist="38100" dir="5400000">
+              <a:srgbClr val="000000">
+                <a:alpha val="13000"/>
+              </a:srgbClr>
+            </a:outerShdw>
+          </a:effectLst>
+        </p:spPr>
+      </p:sp>
+      <p:sp>
+        <p:nvSpPr>
+          <p:cNvPr id="10" name="Shape 7"/>
+          <p:cNvSpPr/>
+          <p:nvPr/>
+        </p:nvSpPr>
+        <p:spPr>
+          <a:xfrm>
+            <a:off x="685800" y="3493008"/>
+            <a:ext cx="548640" cy="548640"/>
+          </a:xfrm>
+          <a:prstGeom prst="ellipse">
+            <a:avLst/>
+          </a:prstGeom>
+          <a:solidFill>
+            <a:srgbClr val="1C6BA0"/>
+          </a:solidFill>
+          <a:ln/>
+        </p:spPr>
+      </p:sp>
+      <p:sp>
+        <p:nvSpPr>
+          <p:cNvPr id="11" name="Text 8"/>
+          <p:cNvSpPr/>
+          <p:nvPr/>
+        </p:nvSpPr>
+        <p:spPr>
+          <a:xfrm>
+            <a:off x="685800" y="3493008"/>
+            <a:ext cx="548640" cy="548640"/>
+          </a:xfrm>
+          <a:prstGeom prst="rect">
+            <a:avLst/>
+          </a:prstGeom>
+          <a:noFill/>
+          <a:ln/>
+        </p:spPr>
+        <p:txBody>
+          <a:bodyPr wrap="square" lIns="0" tIns="0" rIns="0" bIns="0" rtlCol="0" anchor="ctr"/>
+          <a:lstStyle/>
+          <a:p>
+            <a:pPr algn="ctr" indent="0" marL="0">
+              <a:buNone/>
+            </a:pPr>
+            <a:r>
+              <a:rPr lang="en-US" sz="2000" b="1" dirty="0">
+                <a:solidFill>
+                  <a:srgbClr val="FFFFFF"/>
+                </a:solidFill>
+                <a:latin typeface="Cambria" pitchFamily="34" charset="0"/>
+                <a:ea typeface="Cambria" pitchFamily="34" charset="-122"/>
+                <a:cs typeface="Cambria" pitchFamily="34" charset="-120"/>
+              </a:rPr>
+              <a:t>2</a:t>
+            </a:r>
+            <a:endParaRPr lang="en-US" sz="2000" dirty="0"/>
+          </a:p>
+        </p:txBody>
+      </p:sp>
+      <p:sp>
+        <p:nvSpPr>
+          <p:cNvPr id="12" name="Text 9"/>
+          <p:cNvSpPr/>
+          <p:nvPr/>
+        </p:nvSpPr>
+        <p:spPr>
+          <a:xfrm>
+            <a:off x="1417320" y="3218688"/>
+            <a:ext cx="4709160" cy="1097280"/>
+          </a:xfrm>
+          <a:prstGeom prst="rect">
+            <a:avLst/>
+          </a:prstGeom>
+          <a:noFill/>
+          <a:ln/>
+        </p:spPr>
+        <p:txBody>
+          <a:bodyPr wrap="square" lIns="0" tIns="0" rIns="0" bIns="0" rtlCol="0" anchor="t"/>
+          <a:lstStyle/>
+          <a:p>
+            <a:pPr indent="0" marL="0">
+              <a:lnSpc>
+                <a:spcPct val="102000"/>
+              </a:lnSpc>
+              <a:buNone/>
+            </a:pPr>
+            <a:r>
               <a:rPr lang="en-US" sz="1400" b="1" dirty="0">
                 <a:solidFill>
                   <a:srgbClr val="14232B"/>
@@ -10231,16 +10775,152 @@
                 <a:ea typeface="Calibri" pitchFamily="34" charset="-122"/>
                 <a:cs typeface="Calibri" pitchFamily="34" charset="-120"/>
               </a:rPr>
-              <a:t>optimal rate</a:t>
+              <a:t>Lower delivered cost (C)
+</a:t>
             </a:r>
             <a:pPr indent="0" marL="0">
               <a:lnSpc>
-                <a:spcPct val="105000"/>
+                <a:spcPct val="102000"/>
               </a:lnSpc>
               <a:buNone/>
             </a:pPr>
             <a:r>
-              <a:rPr lang="en-US" sz="1400" dirty="0">
+              <a:rPr lang="en-US" sz="1250" dirty="0">
+                <a:solidFill>
+                  <a:srgbClr val="3C4B52"/>
+                </a:solidFill>
+                <a:latin typeface="Calibri" pitchFamily="34" charset="0"/>
+                <a:ea typeface="Calibri" pitchFamily="34" charset="-122"/>
+                <a:cs typeface="Calibri" pitchFamily="34" charset="-120"/>
+              </a:rPr>
+              <a:t>Transport-cost reductions (e.g. solar haulage) lower MAC pixel-by-pixel — see Assumption 1.</a:t>
+            </a:r>
+            <a:endParaRPr lang="en-US" sz="1400" dirty="0"/>
+          </a:p>
+        </p:txBody>
+      </p:sp>
+      <p:sp>
+        <p:nvSpPr>
+          <p:cNvPr id="13" name="Shape 10"/>
+          <p:cNvSpPr/>
+          <p:nvPr/>
+        </p:nvSpPr>
+        <p:spPr>
+          <a:xfrm>
+            <a:off x="502920" y="4562856"/>
+            <a:ext cx="5760720" cy="1371600"/>
+          </a:xfrm>
+          <a:prstGeom prst="roundRect">
+            <a:avLst>
+              <a:gd name="adj" fmla="val 5333"/>
+            </a:avLst>
+          </a:prstGeom>
+          <a:solidFill>
+            <a:srgbClr val="EFF4F8"/>
+          </a:solidFill>
+          <a:ln w="12700">
+            <a:solidFill>
+              <a:srgbClr val="D5DDDE"/>
+            </a:solidFill>
+            <a:prstDash val="solid"/>
+          </a:ln>
+          <a:effectLst>
+            <a:outerShdw sx="100000" sy="100000" kx="0" ky="0" algn="bl" rotWithShape="0" blurRad="88900" dist="38100" dir="5400000">
+              <a:srgbClr val="000000">
+                <a:alpha val="13000"/>
+              </a:srgbClr>
+            </a:outerShdw>
+          </a:effectLst>
+        </p:spPr>
+      </p:sp>
+      <p:sp>
+        <p:nvSpPr>
+          <p:cNvPr id="14" name="Shape 11"/>
+          <p:cNvSpPr/>
+          <p:nvPr/>
+        </p:nvSpPr>
+        <p:spPr>
+          <a:xfrm>
+            <a:off x="685800" y="4974336"/>
+            <a:ext cx="548640" cy="548640"/>
+          </a:xfrm>
+          <a:prstGeom prst="ellipse">
+            <a:avLst/>
+          </a:prstGeom>
+          <a:solidFill>
+            <a:srgbClr val="1C6BA0"/>
+          </a:solidFill>
+          <a:ln/>
+        </p:spPr>
+      </p:sp>
+      <p:sp>
+        <p:nvSpPr>
+          <p:cNvPr id="15" name="Text 12"/>
+          <p:cNvSpPr/>
+          <p:nvPr/>
+        </p:nvSpPr>
+        <p:spPr>
+          <a:xfrm>
+            <a:off x="685800" y="4974336"/>
+            <a:ext cx="548640" cy="548640"/>
+          </a:xfrm>
+          <a:prstGeom prst="rect">
+            <a:avLst/>
+          </a:prstGeom>
+          <a:noFill/>
+          <a:ln/>
+        </p:spPr>
+        <p:txBody>
+          <a:bodyPr wrap="square" lIns="0" tIns="0" rIns="0" bIns="0" rtlCol="0" anchor="ctr"/>
+          <a:lstStyle/>
+          <a:p>
+            <a:pPr algn="ctr" indent="0" marL="0">
+              <a:buNone/>
+            </a:pPr>
+            <a:r>
+              <a:rPr lang="en-US" sz="2000" b="1" dirty="0">
+                <a:solidFill>
+                  <a:srgbClr val="FFFFFF"/>
+                </a:solidFill>
+                <a:latin typeface="Cambria" pitchFamily="34" charset="0"/>
+                <a:ea typeface="Cambria" pitchFamily="34" charset="-122"/>
+                <a:cs typeface="Cambria" pitchFamily="34" charset="-120"/>
+              </a:rPr>
+              <a:t>3</a:t>
+            </a:r>
+            <a:endParaRPr lang="en-US" sz="2000" dirty="0"/>
+          </a:p>
+        </p:txBody>
+      </p:sp>
+      <p:sp>
+        <p:nvSpPr>
+          <p:cNvPr id="16" name="Text 13"/>
+          <p:cNvSpPr/>
+          <p:nvPr/>
+        </p:nvSpPr>
+        <p:spPr>
+          <a:xfrm>
+            <a:off x="1417320" y="4700016"/>
+            <a:ext cx="4709160" cy="1097280"/>
+          </a:xfrm>
+          <a:prstGeom prst="rect">
+            <a:avLst/>
+          </a:prstGeom>
+          <a:noFill/>
+          <a:ln/>
+        </p:spPr>
+        <p:txBody>
+          <a:bodyPr wrap="square" lIns="0" tIns="0" rIns="0" bIns="0" rtlCol="0" anchor="t"/>
+          <a:lstStyle/>
+          <a:p>
+            <a:pPr indent="0" marL="0">
+              <a:lnSpc>
+                <a:spcPct val="102000"/>
+              </a:lnSpc>
+              <a:buNone/>
+            </a:pPr>
+            <a:r>
+              <a:rPr lang="en-US" sz="1400" b="1" dirty="0">
                 <a:solidFill>
                   <a:srgbClr val="14232B"/>
                 </a:solidFill>
@@ -10248,7 +10928,25 @@
                 <a:ea typeface="Calibri" pitchFamily="34" charset="-122"/>
                 <a:cs typeface="Calibri" pitchFamily="34" charset="-120"/>
               </a:rPr>
-              <a:t> exists for the private, public, and combined margins. The combined optimum is moderate (typically well below blanket-high uniform doses): enough over-application to earn extra carbon, but not so much that over-liming and saturation erode the return.</a:t>
+              <a:t>More durable CDR per tonne
+</a:t>
+            </a:r>
+            <a:pPr indent="0" marL="0">
+              <a:lnSpc>
+                <a:spcPct val="102000"/>
+              </a:lnSpc>
+              <a:buNone/>
+            </a:pPr>
+            <a:r>
+              <a:rPr lang="en-US" sz="1250" dirty="0">
+                <a:solidFill>
+                  <a:srgbClr val="3C4B52"/>
+                </a:solidFill>
+                <a:latin typeface="Calibri" pitchFamily="34" charset="0"/>
+                <a:ea typeface="Calibri" pitchFamily="34" charset="-122"/>
+                <a:cs typeface="Calibri" pitchFamily="34" charset="-120"/>
+              </a:rPr>
+              <a:t>Raising verified removal per tonne of rock cuts MAC directly. Kinetic saturation is second-order here.</a:t>
             </a:r>
             <a:endParaRPr lang="en-US" sz="1400" dirty="0"/>
           </a:p>
@@ -10256,7 +10954,7 @@
       </p:sp>
       <p:sp>
         <p:nvSpPr>
-          <p:cNvPr id="6" name="Text 3"/>
+          <p:cNvPr id="17" name="Text 14"/>
           <p:cNvSpPr/>
           <p:nvPr/>
         </p:nvSpPr>
@@ -10309,7 +11007,7 @@
       </p:sp>
       <p:sp>
         <p:nvSpPr>
-          <p:cNvPr id="7" name="Text 4"/>
+          <p:cNvPr id="18" name="Text 15"/>
           <p:cNvSpPr/>
           <p:nvPr/>
         </p:nvSpPr>
@@ -10411,6 +11109,307 @@
                 <a:ea typeface="Calibri" pitchFamily="34" charset="-122"/>
                 <a:cs typeface="Calibri" pitchFamily="34" charset="-120"/>
               </a:rPr>
+              <a:t>RESULTS · OPTIMAL APPLICATION RATES</a:t>
+            </a:r>
+            <a:endParaRPr lang="en-US" sz="1200" dirty="0"/>
+          </a:p>
+        </p:txBody>
+      </p:sp>
+      <p:sp>
+        <p:nvSpPr>
+          <p:cNvPr id="3" name="Text 1"/>
+          <p:cNvSpPr/>
+          <p:nvPr/>
+        </p:nvSpPr>
+        <p:spPr>
+          <a:xfrm>
+            <a:off x="502920" y="566928"/>
+            <a:ext cx="11155680" cy="685800"/>
+          </a:xfrm>
+          <a:prstGeom prst="rect">
+            <a:avLst/>
+          </a:prstGeom>
+          <a:noFill/>
+          <a:ln/>
+        </p:spPr>
+        <p:txBody>
+          <a:bodyPr wrap="square" lIns="0" tIns="0" rIns="0" bIns="0" rtlCol="0" anchor="ctr"/>
+          <a:lstStyle/>
+          <a:p>
+            <a:pPr indent="0" marL="0">
+              <a:buNone/>
+            </a:pPr>
+            <a:r>
+              <a:rPr lang="en-US" sz="2900" b="1" dirty="0">
+                <a:solidFill>
+                  <a:srgbClr val="14232B"/>
+                </a:solidFill>
+                <a:latin typeface="Cambria" pitchFamily="34" charset="0"/>
+                <a:ea typeface="Cambria" pitchFamily="34" charset="-122"/>
+                <a:cs typeface="Cambria" pitchFamily="34" charset="-120"/>
+              </a:rPr>
+              <a:t>Each objective has an interior optimum</a:t>
+            </a:r>
+            <a:endParaRPr lang="en-US" sz="2900" dirty="0"/>
+          </a:p>
+        </p:txBody>
+      </p:sp>
+      <p:pic>
+        <p:nvPicPr>
+          <p:cNvPr id="4" name="Image 0" descr="img/optrate_panel.png">    </p:cNvPr>
+          <p:cNvPicPr>
+            <a:picLocks noChangeAspect="1"/>
+          </p:cNvPicPr>
+          <p:nvPr/>
+        </p:nvPicPr>
+        <p:blipFill>
+          <a:blip r:embed="rId1"/>
+          <a:srcRect l="0" r="0" t="0" b="0"/>
+          <a:stretch/>
+        </p:blipFill>
+        <p:spPr>
+          <a:xfrm>
+            <a:off x="502920" y="1508760"/>
+            <a:ext cx="11155680" cy="3657600"/>
+          </a:xfrm>
+          <a:prstGeom prst="rect">
+            <a:avLst/>
+          </a:prstGeom>
+        </p:spPr>
+      </p:pic>
+      <p:sp>
+        <p:nvSpPr>
+          <p:cNvPr id="5" name="Text 2"/>
+          <p:cNvSpPr/>
+          <p:nvPr/>
+        </p:nvSpPr>
+        <p:spPr>
+          <a:xfrm>
+            <a:off x="502920" y="5303520"/>
+            <a:ext cx="11155680" cy="1097280"/>
+          </a:xfrm>
+          <a:prstGeom prst="rect">
+            <a:avLst/>
+          </a:prstGeom>
+          <a:noFill/>
+          <a:ln/>
+        </p:spPr>
+        <p:txBody>
+          <a:bodyPr wrap="square" lIns="0" tIns="0" rIns="0" bIns="0" rtlCol="0" anchor="t"/>
+          <a:lstStyle/>
+          <a:p>
+            <a:pPr indent="0" marL="0">
+              <a:lnSpc>
+                <a:spcPct val="105000"/>
+              </a:lnSpc>
+              <a:buNone/>
+            </a:pPr>
+            <a:r>
+              <a:rPr lang="en-US" sz="1400" dirty="0">
+                <a:solidFill>
+                  <a:srgbClr val="14232B"/>
+                </a:solidFill>
+                <a:latin typeface="Calibri" pitchFamily="34" charset="0"/>
+                <a:ea typeface="Calibri" pitchFamily="34" charset="-122"/>
+                <a:cs typeface="Calibri" pitchFamily="34" charset="-120"/>
+              </a:rPr>
+              <a:t>With both refinements, each per-pixel objective is concave — so a pixel-specific </a:t>
+            </a:r>
+            <a:pPr indent="0" marL="0">
+              <a:lnSpc>
+                <a:spcPct val="105000"/>
+              </a:lnSpc>
+              <a:buNone/>
+            </a:pPr>
+            <a:r>
+              <a:rPr lang="en-US" sz="1400" b="1" dirty="0">
+                <a:solidFill>
+                  <a:srgbClr val="14232B"/>
+                </a:solidFill>
+                <a:latin typeface="Calibri" pitchFamily="34" charset="0"/>
+                <a:ea typeface="Calibri" pitchFamily="34" charset="-122"/>
+                <a:cs typeface="Calibri" pitchFamily="34" charset="-120"/>
+              </a:rPr>
+              <a:t>optimal rate</a:t>
+            </a:r>
+            <a:pPr indent="0" marL="0">
+              <a:lnSpc>
+                <a:spcPct val="105000"/>
+              </a:lnSpc>
+              <a:buNone/>
+            </a:pPr>
+            <a:r>
+              <a:rPr lang="en-US" sz="1400" dirty="0">
+                <a:solidFill>
+                  <a:srgbClr val="14232B"/>
+                </a:solidFill>
+                <a:latin typeface="Calibri" pitchFamily="34" charset="0"/>
+                <a:ea typeface="Calibri" pitchFamily="34" charset="-122"/>
+                <a:cs typeface="Calibri" pitchFamily="34" charset="-120"/>
+              </a:rPr>
+              <a:t> exists for the private, public, and combined margins. The combined optimum is moderate (typically well below blanket-high uniform doses): enough over-application to earn extra carbon, but not so much that over-liming and saturation erode the return.</a:t>
+            </a:r>
+            <a:endParaRPr lang="en-US" sz="1400" dirty="0"/>
+          </a:p>
+        </p:txBody>
+      </p:sp>
+      <p:sp>
+        <p:nvSpPr>
+          <p:cNvPr id="6" name="Text 3"/>
+          <p:cNvSpPr/>
+          <p:nvPr/>
+        </p:nvSpPr>
+        <p:spPr>
+          <a:xfrm>
+            <a:off x="502920" y="6473952"/>
+            <a:ext cx="9601200" cy="274320"/>
+          </a:xfrm>
+          <a:prstGeom prst="rect">
+            <a:avLst/>
+          </a:prstGeom>
+          <a:noFill/>
+          <a:ln/>
+        </p:spPr>
+        <p:txBody>
+          <a:bodyPr wrap="square" lIns="0" tIns="0" rIns="0" bIns="0" rtlCol="0" anchor="ctr"/>
+          <a:lstStyle/>
+          <a:p>
+            <a:pPr algn="l" indent="0" marL="0">
+              <a:buNone/>
+            </a:pPr>
+            <a:r>
+              <a:rPr lang="en-US" sz="900" dirty="0">
+                <a:solidFill>
+                  <a:srgbClr val="5B6B73"/>
+                </a:solidFill>
+                <a:latin typeface="Calibri" pitchFamily="34" charset="0"/>
+                <a:ea typeface="Calibri" pitchFamily="34" charset="-122"/>
+                <a:cs typeface="Calibri" pitchFamily="34" charset="-120"/>
+              </a:rPr>
+              <a:t>Enhanced Rock Weathering — public &amp; private returns in SSA</a:t>
+            </a:r>
+            <a:pPr algn="l" indent="0" marL="0">
+              <a:buNone/>
+            </a:pPr>
+            <a:r>
+              <a:rPr lang="en-US" sz="900" dirty="0">
+                <a:solidFill>
+                  <a:srgbClr val="5B6B73"/>
+                </a:solidFill>
+                <a:latin typeface="Calibri" pitchFamily="34" charset="0"/>
+                <a:ea typeface="Calibri" pitchFamily="34" charset="-122"/>
+                <a:cs typeface="Calibri" pitchFamily="34" charset="-120"/>
+              </a:rPr>
+              <a:t>   ·   Gebrekidan &amp; Chamberlin (2026)</a:t>
+            </a:r>
+            <a:endParaRPr lang="en-US" sz="900" dirty="0"/>
+          </a:p>
+        </p:txBody>
+      </p:sp>
+      <p:sp>
+        <p:nvSpPr>
+          <p:cNvPr id="7" name="Text 4"/>
+          <p:cNvSpPr/>
+          <p:nvPr/>
+        </p:nvSpPr>
+        <p:spPr>
+          <a:xfrm>
+            <a:off x="11274552" y="6473952"/>
+            <a:ext cx="457200" cy="274320"/>
+          </a:xfrm>
+          <a:prstGeom prst="rect">
+            <a:avLst/>
+          </a:prstGeom>
+          <a:noFill/>
+          <a:ln/>
+        </p:spPr>
+        <p:txBody>
+          <a:bodyPr wrap="square" lIns="0" tIns="0" rIns="0" bIns="0" rtlCol="0" anchor="ctr"/>
+          <a:lstStyle/>
+          <a:p>
+            <a:pPr algn="r" indent="0" marL="0">
+              <a:buNone/>
+            </a:pPr>
+            <a:r>
+              <a:rPr lang="en-US" sz="900" dirty="0">
+                <a:solidFill>
+                  <a:srgbClr val="5B6B73"/>
+                </a:solidFill>
+                <a:latin typeface="Calibri" pitchFamily="34" charset="0"/>
+                <a:ea typeface="Calibri" pitchFamily="34" charset="-122"/>
+                <a:cs typeface="Calibri" pitchFamily="34" charset="-120"/>
+              </a:rPr>
+              <a:t>22</a:t>
+            </a:r>
+            <a:endParaRPr lang="en-US" sz="900" dirty="0"/>
+          </a:p>
+        </p:txBody>
+      </p:sp>
+    </p:spTree>
+  </p:cSld>
+  <p:clrMapOvr>
+    <a:masterClrMapping/>
+  </p:clrMapOvr>
+</p:sld>
+</file>
+
+<file path=ppt/slides/slide23.xml><?xml version="1.0" encoding="utf-8"?>
+<p:sld xmlns:a="http://schemas.openxmlformats.org/drawingml/2006/main" xmlns:r="http://schemas.openxmlformats.org/officeDocument/2006/relationships" xmlns:p="http://schemas.openxmlformats.org/presentationml/2006/main">
+  <p:cSld name="Slide 23">
+    <p:bg>
+      <p:bgPr>
+        <a:solidFill>
+          <a:srgbClr val="FFFFFF"/>
+        </a:solidFill>
+      </p:bgPr>
+    </p:bg>
+    <p:spTree>
+      <p:nvGrpSpPr>
+        <p:cNvPr id="1" name=""/>
+        <p:cNvGrpSpPr/>
+        <p:nvPr/>
+      </p:nvGrpSpPr>
+      <p:grpSpPr>
+        <a:xfrm>
+          <a:off x="0" y="0"/>
+          <a:ext cx="0" cy="0"/>
+          <a:chOff x="0" y="0"/>
+          <a:chExt cx="0" cy="0"/>
+        </a:xfrm>
+      </p:grpSpPr>
+      <p:sp>
+        <p:nvSpPr>
+          <p:cNvPr id="2" name="Text 0"/>
+          <p:cNvSpPr/>
+          <p:nvPr/>
+        </p:nvSpPr>
+        <p:spPr>
+          <a:xfrm>
+            <a:off x="502920" y="310896"/>
+            <a:ext cx="10058400" cy="274320"/>
+          </a:xfrm>
+          <a:prstGeom prst="rect">
+            <a:avLst/>
+          </a:prstGeom>
+          <a:noFill/>
+          <a:ln/>
+        </p:spPr>
+        <p:txBody>
+          <a:bodyPr wrap="square" lIns="0" tIns="0" rIns="0" bIns="0" rtlCol="0" anchor="ctr"/>
+          <a:lstStyle/>
+          <a:p>
+            <a:pPr indent="0" marL="0">
+              <a:buNone/>
+            </a:pPr>
+            <a:r>
+              <a:rPr lang="en-US" sz="1200" b="1" spc="200" kern="0" dirty="0">
+                <a:solidFill>
+                  <a:srgbClr val="0F6E63"/>
+                </a:solidFill>
+                <a:latin typeface="Calibri" pitchFamily="34" charset="0"/>
+                <a:ea typeface="Calibri" pitchFamily="34" charset="-122"/>
+                <a:cs typeface="Calibri" pitchFamily="34" charset="-120"/>
+              </a:rPr>
               <a:t>RESULTS · ROBUST CORE</a:t>
             </a:r>
             <a:endParaRPr lang="en-US" sz="1200" dirty="0"/>
@@ -10979,7 +11978,7 @@
                 <a:ea typeface="Calibri" pitchFamily="34" charset="-122"/>
                 <a:cs typeface="Calibri" pitchFamily="34" charset="-120"/>
               </a:rPr>
-              <a:t>22</a:t>
+              <a:t>23</a:t>
             </a:r>
             <a:endParaRPr lang="en-US" sz="900" dirty="0"/>
           </a:p>
@@ -10993,9 +11992,9 @@
 </p:sld>
 </file>
 
-<file path=ppt/slides/slide23.xml><?xml version="1.0" encoding="utf-8"?>
+<file path=ppt/slides/slide24.xml><?xml version="1.0" encoding="utf-8"?>
 <p:sld xmlns:a="http://schemas.openxmlformats.org/drawingml/2006/main" xmlns:r="http://schemas.openxmlformats.org/officeDocument/2006/relationships" xmlns:p="http://schemas.openxmlformats.org/presentationml/2006/main">
-  <p:cSld name="Slide 23">
+  <p:cSld name="Slide 24">
     <p:bg>
       <p:bgPr>
         <a:solidFill>
@@ -11579,9 +12578,9 @@
 </p:sld>
 </file>
 
-<file path=ppt/slides/slide24.xml><?xml version="1.0" encoding="utf-8"?>
+<file path=ppt/slides/slide25.xml><?xml version="1.0" encoding="utf-8"?>
 <p:sld xmlns:a="http://schemas.openxmlformats.org/drawingml/2006/main" xmlns:r="http://schemas.openxmlformats.org/officeDocument/2006/relationships" xmlns:p="http://schemas.openxmlformats.org/presentationml/2006/main">
-  <p:cSld name="Slide 24">
+  <p:cSld name="Slide 25">
     <p:bg>
       <p:bgPr>
         <a:solidFill>
@@ -12409,7 +13408,7 @@
                 <a:ea typeface="Calibri" pitchFamily="34" charset="-122"/>
                 <a:cs typeface="Calibri" pitchFamily="34" charset="-120"/>
               </a:rPr>
-              <a:t>24</a:t>
+              <a:t>25</a:t>
             </a:r>
             <a:endParaRPr lang="en-US" sz="900" dirty="0"/>
           </a:p>

--- a/paper/ERW_public_private_returns_walkthrough.pptx
+++ b/paper/ERW_public_private_returns_walkthrough.pptx
@@ -17016,7 +17016,7 @@
       </p:sp>
       <p:pic>
         <p:nvPicPr>
-          <p:cNvPr id="4" name="Image 0" descr="img/delivered_cost_saving_solar25.png">    </p:cNvPr>
+          <p:cNvPr id="4" name="Image 0" descr="img/delivered_cost_map.png">    </p:cNvPr>
           <p:cNvPicPr>
             <a:picLocks noChangeAspect="1"/>
           </p:cNvPicPr>
@@ -17029,8 +17029,8 @@
         </p:blipFill>
         <p:spPr>
           <a:xfrm>
-            <a:off x="6400800" y="1508760"/>
-            <a:ext cx="5394960" cy="4297680"/>
+            <a:off x="6446520" y="1417320"/>
+            <a:ext cx="5349240" cy="4343400"/>
           </a:xfrm>
           <a:prstGeom prst="rect">
             <a:avLst/>
@@ -17039,7 +17039,49 @@
       </p:pic>
       <p:sp>
         <p:nvSpPr>
-          <p:cNvPr id="5" name="Shape 2"/>
+          <p:cNvPr id="5" name="Text 2"/>
+          <p:cNvSpPr/>
+          <p:nvPr/>
+        </p:nvSpPr>
+        <p:spPr>
+          <a:xfrm>
+            <a:off x="6446520" y="5760720"/>
+            <a:ext cx="5349240" cy="566928"/>
+          </a:xfrm>
+          <a:prstGeom prst="rect">
+            <a:avLst/>
+          </a:prstGeom>
+          <a:noFill/>
+          <a:ln/>
+        </p:spPr>
+        <p:txBody>
+          <a:bodyPr wrap="square" lIns="0" tIns="0" rIns="0" bIns="0" rtlCol="0" anchor="ctr"/>
+          <a:lstStyle/>
+          <a:p>
+            <a:pPr indent="0" marL="0">
+              <a:lnSpc>
+                <a:spcPct val="100000"/>
+              </a:lnSpc>
+              <a:buNone/>
+            </a:pPr>
+            <a:r>
+              <a:rPr lang="en-US" sz="1050" i="1" dirty="0">
+                <a:solidFill>
+                  <a:srgbClr val="5B6B73"/>
+                </a:solidFill>
+                <a:latin typeface="Calibri" pitchFamily="34" charset="0"/>
+                <a:ea typeface="Calibri" pitchFamily="34" charset="-122"/>
+                <a:cs typeface="Calibri" pitchFamily="34" charset="-120"/>
+              </a:rPr>
+              <a:t>Delivered cost surface, cumulative haul from nearest basalt source. Pale = near a source; dark red = at the ~1000 km haul ceiling. About two-thirds of SSA cropland is delivery-cost-bound.</a:t>
+            </a:r>
+            <a:endParaRPr lang="en-US" sz="1050" dirty="0"/>
+          </a:p>
+        </p:txBody>
+      </p:sp>
+      <p:sp>
+        <p:nvSpPr>
+          <p:cNvPr id="6" name="Shape 3"/>
           <p:cNvSpPr/>
           <p:nvPr/>
         </p:nvSpPr>
@@ -17073,7 +17115,7 @@
       </p:sp>
       <p:sp>
         <p:nvSpPr>
-          <p:cNvPr id="6" name="Text 3"/>
+          <p:cNvPr id="7" name="Text 4"/>
           <p:cNvSpPr/>
           <p:nvPr/>
         </p:nvSpPr>
@@ -17133,7 +17175,7 @@
       </p:sp>
       <p:sp>
         <p:nvSpPr>
-          <p:cNvPr id="7" name="Shape 4"/>
+          <p:cNvPr id="8" name="Shape 5"/>
           <p:cNvSpPr/>
           <p:nvPr/>
         </p:nvSpPr>
@@ -17167,7 +17209,7 @@
       </p:sp>
       <p:sp>
         <p:nvSpPr>
-          <p:cNvPr id="8" name="Text 5"/>
+          <p:cNvPr id="9" name="Text 6"/>
           <p:cNvSpPr/>
           <p:nvPr/>
         </p:nvSpPr>
@@ -17227,7 +17269,7 @@
       </p:sp>
       <p:sp>
         <p:nvSpPr>
-          <p:cNvPr id="9" name="Shape 6"/>
+          <p:cNvPr id="10" name="Shape 7"/>
           <p:cNvSpPr/>
           <p:nvPr/>
         </p:nvSpPr>
@@ -17261,7 +17303,7 @@
       </p:sp>
       <p:sp>
         <p:nvSpPr>
-          <p:cNvPr id="10" name="Text 7"/>
+          <p:cNvPr id="11" name="Text 8"/>
           <p:cNvSpPr/>
           <p:nvPr/>
         </p:nvSpPr>
@@ -17321,7 +17363,7 @@
       </p:sp>
       <p:sp>
         <p:nvSpPr>
-          <p:cNvPr id="11" name="Shape 8"/>
+          <p:cNvPr id="12" name="Shape 9"/>
           <p:cNvSpPr/>
           <p:nvPr/>
         </p:nvSpPr>
@@ -17355,7 +17397,7 @@
       </p:sp>
       <p:sp>
         <p:nvSpPr>
-          <p:cNvPr id="12" name="Text 9"/>
+          <p:cNvPr id="13" name="Text 10"/>
           <p:cNvSpPr/>
           <p:nvPr/>
         </p:nvSpPr>
@@ -17415,7 +17457,7 @@
       </p:sp>
       <p:sp>
         <p:nvSpPr>
-          <p:cNvPr id="13" name="Text 10"/>
+          <p:cNvPr id="14" name="Text 11"/>
           <p:cNvSpPr/>
           <p:nvPr/>
         </p:nvSpPr>
@@ -17468,7 +17510,7 @@
       </p:sp>
       <p:sp>
         <p:nvSpPr>
-          <p:cNvPr id="14" name="Text 11"/>
+          <p:cNvPr id="15" name="Text 12"/>
           <p:cNvSpPr/>
           <p:nvPr/>
         </p:nvSpPr>

--- a/paper/ERW_public_private_returns_walkthrough.pptx
+++ b/paper/ERW_public_private_returns_walkthrough.pptx
@@ -3512,7 +3512,7 @@
                 </a:solidFill>
                 <a:latin typeface="Avenir Next"/>
               </a:rPr>
-              <a:t>durable CDR = max( gross − F·S , 0 )</a:t>
+              <a:t>durable CDR = max( gross - F·S , 0 )</a:t>
             </a:r>
           </a:p>
           <a:p>
@@ -6261,7 +6261,7 @@
                 </a:solidFill>
                 <a:latin typeface="Avenir Next"/>
               </a:rPr>
-              <a:t>R_agro − C &gt; 0</a:t>
+              <a:t>R_agro - C &gt; 0</a:t>
             </a:r>
           </a:p>
         </p:txBody>
@@ -6387,7 +6387,7 @@
                 </a:solidFill>
                 <a:latin typeface="Avenir Next"/>
               </a:rPr>
-              <a:t>R_CDR − C &gt; 0</a:t>
+              <a:t>R_CDR - C &gt; 0</a:t>
             </a:r>
           </a:p>
         </p:txBody>
@@ -9015,7 +9015,7 @@
                 </a:solidFill>
                 <a:latin typeface="Avenir Next"/>
               </a:rPr>
-              <a:t>MAC = delivered cost per tonne of rock ÷ durable CDR per tonne. The public envelope is exactly the land where MAC &lt; (p − m).</a:t>
+              <a:t>MAC = delivered cost per tonne of rock ÷ durable CDR per tonne. The public envelope is exactly the land where MAC &lt; (p - m).</a:t>
             </a:r>
           </a:p>
           <a:p>
@@ -9372,7 +9372,7 @@
                 </a:solidFill>
                 <a:latin typeface="Avenir Next"/>
               </a:rPr>
-              <a:t>1 · The price–cost ratio (p − m)/c</a:t>
+              <a:t>1 · The price–cost ratio (p - m)/c</a:t>
             </a:r>
           </a:p>
           <a:p>
@@ -12605,7 +12605,7 @@
                 </a:solidFill>
                 <a:latin typeface="Avenir Next"/>
               </a:rPr>
-              <a:t>  −  C</a:t>
+              <a:t>  -  C</a:t>
             </a:r>
           </a:p>
           <a:p>
@@ -12621,7 +12621,7 @@
                 </a:solidFill>
                 <a:latin typeface="Avenir Next"/>
               </a:rPr>
-              <a:t>gross margin = private agronomic return + public carbon return − full delivered cost</a:t>
+              <a:t>gross margin = private agronomic return + public carbon return - full delivered cost</a:t>
             </a:r>
           </a:p>
         </p:txBody>
@@ -14532,7 +14532,7 @@
                 </a:solidFill>
                 <a:latin typeface="Avenir Next"/>
               </a:rPr>
-              <a:t>Electrified / solar-assisted haulage cuts the variable transport term: −25% transport widens the private envelope 4.31 → 5.12 Mha, the public one only 1.95 → 2.07.</a:t>
+              <a:t>Electrified / solar-assisted haulage cuts the variable transport term: -25% transport widens the private envelope 4.31 → 5.12 Mha, the public one only 1.95 → 2.07.</a:t>
             </a:r>
           </a:p>
         </p:txBody>
@@ -16243,7 +16243,7 @@
                 </a:solidFill>
                 <a:latin typeface="Avenir Next"/>
               </a:rPr>
-              <a:t>  =  durable CDR × ( p − m )</a:t>
+              <a:t>  =  durable CDR × ( p - m )</a:t>
             </a:r>
           </a:p>
           <a:p>
@@ -16316,7 +16316,7 @@
                 </a:solidFill>
                 <a:latin typeface="Avenir Next"/>
               </a:rPr>
-              <a:t> — a conservative floor: 2024–25 durable-CDR transactions cluster at $250–450/tCO₂ (CDR.fyi). Price, MRV and delivered cost move the public envelope only through the single ratio (p − m)/c.</a:t>
+              <a:t> — a conservative floor: 2024–25 durable-CDR transactions cluster at $250–450/tCO₂ (CDR.fyi). Price, MRV and delivered cost move the public envelope only through the single ratio (p - m)/c.</a:t>
             </a:r>
           </a:p>
           <a:p>
